--- a/pptx/Lecture7.pptx
+++ b/pptx/Lecture7.pptx
@@ -5,7 +5,7 @@
     <p:sldMasterId id="2147483648" r:id="rId1"/>
   </p:sldMasterIdLst>
   <p:notesMasterIdLst>
-    <p:notesMasterId r:id="rId35"/>
+    <p:notesMasterId r:id="rId39"/>
   </p:notesMasterIdLst>
   <p:sldIdLst>
     <p:sldId id="256" r:id="rId2"/>
@@ -32,15 +32,19 @@
     <p:sldId id="363" r:id="rId23"/>
     <p:sldId id="364" r:id="rId24"/>
     <p:sldId id="365" r:id="rId25"/>
-    <p:sldId id="366" r:id="rId26"/>
-    <p:sldId id="368" r:id="rId27"/>
-    <p:sldId id="321" r:id="rId28"/>
-    <p:sldId id="367" r:id="rId29"/>
-    <p:sldId id="370" r:id="rId30"/>
-    <p:sldId id="329" r:id="rId31"/>
-    <p:sldId id="353" r:id="rId32"/>
-    <p:sldId id="301" r:id="rId33"/>
-    <p:sldId id="369" r:id="rId34"/>
+    <p:sldId id="352" r:id="rId26"/>
+    <p:sldId id="320" r:id="rId27"/>
+    <p:sldId id="370" r:id="rId28"/>
+    <p:sldId id="321" r:id="rId29"/>
+    <p:sldId id="329" r:id="rId30"/>
+    <p:sldId id="353" r:id="rId31"/>
+    <p:sldId id="330" r:id="rId32"/>
+    <p:sldId id="331" r:id="rId33"/>
+    <p:sldId id="334" r:id="rId34"/>
+    <p:sldId id="332" r:id="rId35"/>
+    <p:sldId id="333" r:id="rId36"/>
+    <p:sldId id="366" r:id="rId37"/>
+    <p:sldId id="369" r:id="rId38"/>
   </p:sldIdLst>
   <p:sldSz cx="12192000" cy="6858000"/>
   <p:notesSz cx="6858000" cy="9144000"/>
@@ -487,7 +491,7 @@
           <a:p>
             <a:fld id="{4995A223-E7C9-A243-9A70-FE01E1A1DD65}" type="datetimeFigureOut">
               <a:rPr lang="en-US" smtClean="0"/>
-              <a:t>9/21/26</a:t>
+              <a:t>9/22/2026</a:t>
             </a:fld>
             <a:endParaRPr lang="en-US"/>
           </a:p>
@@ -856,6 +860,98 @@
 </p:notes>
 </file>
 
+<file path=ppt/notesSlides/notesSlide10.xml><?xml version="1.0" encoding="utf-8"?>
+<p:notes xmlns:a="http://schemas.openxmlformats.org/drawingml/2006/main" xmlns:r="http://schemas.openxmlformats.org/officeDocument/2006/relationships" xmlns:p="http://schemas.openxmlformats.org/presentationml/2006/main">
+  <p:cSld>
+    <p:spTree>
+      <p:nvGrpSpPr>
+        <p:cNvPr id="1" name=""/>
+        <p:cNvGrpSpPr/>
+        <p:nvPr/>
+      </p:nvGrpSpPr>
+      <p:grpSpPr>
+        <a:xfrm>
+          <a:off x="0" y="0"/>
+          <a:ext cx="0" cy="0"/>
+          <a:chOff x="0" y="0"/>
+          <a:chExt cx="0" cy="0"/>
+        </a:xfrm>
+      </p:grpSpPr>
+      <p:sp>
+        <p:nvSpPr>
+          <p:cNvPr id="2" name="Slide Image Placeholder 1"/>
+          <p:cNvSpPr>
+            <a:spLocks noGrp="1" noRot="1" noChangeAspect="1"/>
+          </p:cNvSpPr>
+          <p:nvPr>
+            <p:ph type="sldImg"/>
+          </p:nvPr>
+        </p:nvSpPr>
+        <p:spPr/>
+      </p:sp>
+      <p:sp>
+        <p:nvSpPr>
+          <p:cNvPr id="3" name="Notes Placeholder 2"/>
+          <p:cNvSpPr>
+            <a:spLocks noGrp="1"/>
+          </p:cNvSpPr>
+          <p:nvPr>
+            <p:ph type="body" idx="1"/>
+          </p:nvPr>
+        </p:nvSpPr>
+        <p:spPr/>
+        <p:txBody>
+          <a:bodyPr/>
+          <a:lstStyle/>
+          <a:p>
+            <a:r>
+              <a:rPr lang="en-GB" b="1" dirty="0"/>
+              <a:t>Chart types section</a:t>
+            </a:r>
+            <a:r>
+              <a:rPr lang="en-GB" dirty="0"/>
+              <a:t> → 10-15 slides (show the chart type + sports application for each)</a:t>
+            </a:r>
+            <a:endParaRPr lang="en-US" dirty="0"/>
+          </a:p>
+        </p:txBody>
+      </p:sp>
+      <p:sp>
+        <p:nvSpPr>
+          <p:cNvPr id="4" name="Slide Number Placeholder 3"/>
+          <p:cNvSpPr>
+            <a:spLocks noGrp="1"/>
+          </p:cNvSpPr>
+          <p:nvPr>
+            <p:ph type="sldNum" sz="quarter" idx="5"/>
+          </p:nvPr>
+        </p:nvSpPr>
+        <p:spPr/>
+        <p:txBody>
+          <a:bodyPr/>
+          <a:lstStyle/>
+          <a:p>
+            <a:fld id="{1560C251-82B7-4253-A774-38D73C276BCE}" type="slidenum">
+              <a:rPr lang="en-US" smtClean="0"/>
+              <a:t>28</a:t>
+            </a:fld>
+            <a:endParaRPr lang="en-US" dirty="0"/>
+          </a:p>
+        </p:txBody>
+      </p:sp>
+    </p:spTree>
+    <p:extLst>
+      <p:ext uri="{BB962C8B-B14F-4D97-AF65-F5344CB8AC3E}">
+        <p14:creationId xmlns:p14="http://schemas.microsoft.com/office/powerpoint/2010/main" val="1001914172"/>
+      </p:ext>
+    </p:extLst>
+  </p:cSld>
+  <p:clrMapOvr>
+    <a:masterClrMapping/>
+  </p:clrMapOvr>
+</p:notes>
+</file>
+
 <file path=ppt/notesSlides/notesSlide2.xml><?xml version="1.0" encoding="utf-8"?>
 <p:notes xmlns:a="http://schemas.openxmlformats.org/drawingml/2006/main" xmlns:r="http://schemas.openxmlformats.org/officeDocument/2006/relationships" xmlns:p="http://schemas.openxmlformats.org/presentationml/2006/main">
   <p:cSld>
@@ -1803,13 +1899,50 @@
           <a:lstStyle/>
           <a:p>
             <a:r>
-              <a:rPr lang="en-GB" b="1" dirty="0"/>
-              <a:t>Chart types section</a:t>
-            </a:r>
-            <a:r>
-              <a:rPr lang="en-GB" dirty="0"/>
-              <a:t> → 10-15 slides (show the chart type + sports application for each)</a:t>
-            </a:r>
+              <a:rPr lang="en-US" dirty="0"/>
+              <a:t>assigns a run value to each offensive event based on how much that event typically increases run scoring.</a:t>
+            </a:r>
+          </a:p>
+          <a:p>
+            <a:r>
+              <a:rPr lang="en-US" dirty="0"/>
+              <a:t>For example (approximate values):</a:t>
+            </a:r>
+          </a:p>
+          <a:p>
+            <a:r>
+              <a:rPr lang="en-US" dirty="0"/>
+              <a:t>Walk ≈ 0.7 runs</a:t>
+            </a:r>
+          </a:p>
+          <a:p>
+            <a:r>
+              <a:rPr lang="en-US" dirty="0"/>
+              <a:t>Single ≈ 0.9 runs</a:t>
+            </a:r>
+          </a:p>
+          <a:p>
+            <a:r>
+              <a:rPr lang="en-US" dirty="0"/>
+              <a:t>Double ≈ 1.2 runs</a:t>
+            </a:r>
+          </a:p>
+          <a:p>
+            <a:r>
+              <a:rPr lang="en-US" dirty="0"/>
+              <a:t>Triple ≈ 1.6 runs</a:t>
+            </a:r>
+          </a:p>
+          <a:p>
+            <a:r>
+              <a:rPr lang="en-US" dirty="0"/>
+              <a:t>Home run ≈ 2.0 runs</a:t>
+            </a:r>
+          </a:p>
+          <a:p>
+            <a:endParaRPr lang="en-US" dirty="0"/>
+          </a:p>
+          <a:p>
             <a:endParaRPr lang="en-US" dirty="0"/>
           </a:p>
         </p:txBody>
@@ -1831,7 +1964,7 @@
           <a:p>
             <a:fld id="{1560C251-82B7-4253-A774-38D73C276BCE}" type="slidenum">
               <a:rPr lang="en-US" smtClean="0"/>
-              <a:t>27</a:t>
+              <a:t>25</a:t>
             </a:fld>
             <a:endParaRPr lang="en-US" dirty="0"/>
           </a:p>
@@ -1840,7 +1973,133 @@
     </p:spTree>
     <p:extLst>
       <p:ext uri="{BB962C8B-B14F-4D97-AF65-F5344CB8AC3E}">
-        <p14:creationId xmlns:p14="http://schemas.microsoft.com/office/powerpoint/2010/main" val="1001914172"/>
+        <p14:creationId xmlns:p14="http://schemas.microsoft.com/office/powerpoint/2010/main" val="336918175"/>
+      </p:ext>
+    </p:extLst>
+  </p:cSld>
+  <p:clrMapOvr>
+    <a:masterClrMapping/>
+  </p:clrMapOvr>
+</p:notes>
+</file>
+
+<file path=ppt/notesSlides/notesSlide9.xml><?xml version="1.0" encoding="utf-8"?>
+<p:notes xmlns:a="http://schemas.openxmlformats.org/drawingml/2006/main" xmlns:r="http://schemas.openxmlformats.org/officeDocument/2006/relationships" xmlns:p="http://schemas.openxmlformats.org/presentationml/2006/main">
+  <p:cSld>
+    <p:spTree>
+      <p:nvGrpSpPr>
+        <p:cNvPr id="1" name=""/>
+        <p:cNvGrpSpPr/>
+        <p:nvPr/>
+      </p:nvGrpSpPr>
+      <p:grpSpPr>
+        <a:xfrm>
+          <a:off x="0" y="0"/>
+          <a:ext cx="0" cy="0"/>
+          <a:chOff x="0" y="0"/>
+          <a:chExt cx="0" cy="0"/>
+        </a:xfrm>
+      </p:grpSpPr>
+      <p:sp>
+        <p:nvSpPr>
+          <p:cNvPr id="2" name="Slide Image Placeholder 1"/>
+          <p:cNvSpPr>
+            <a:spLocks noGrp="1" noRot="1" noChangeAspect="1"/>
+          </p:cNvSpPr>
+          <p:nvPr>
+            <p:ph type="sldImg"/>
+          </p:nvPr>
+        </p:nvSpPr>
+        <p:spPr/>
+      </p:sp>
+      <p:sp>
+        <p:nvSpPr>
+          <p:cNvPr id="3" name="Notes Placeholder 2"/>
+          <p:cNvSpPr>
+            <a:spLocks noGrp="1"/>
+          </p:cNvSpPr>
+          <p:nvPr>
+            <p:ph type="body" idx="1"/>
+          </p:nvPr>
+        </p:nvSpPr>
+        <p:spPr/>
+        <p:txBody>
+          <a:bodyPr/>
+          <a:lstStyle/>
+          <a:p>
+            <a:r>
+              <a:rPr lang="en-US" dirty="0"/>
+              <a:t>assigns a run value to each offensive event based on how much that event typically increases run scoring.</a:t>
+            </a:r>
+          </a:p>
+          <a:p>
+            <a:r>
+              <a:rPr lang="en-US" dirty="0"/>
+              <a:t>For example (approximate values):</a:t>
+            </a:r>
+          </a:p>
+          <a:p>
+            <a:r>
+              <a:rPr lang="en-US" dirty="0"/>
+              <a:t>Walk ≈ 0.7 runs</a:t>
+            </a:r>
+          </a:p>
+          <a:p>
+            <a:r>
+              <a:rPr lang="en-US" dirty="0"/>
+              <a:t>Single ≈ 0.9 runs</a:t>
+            </a:r>
+          </a:p>
+          <a:p>
+            <a:r>
+              <a:rPr lang="en-US" dirty="0"/>
+              <a:t>Double ≈ 1.2 runs</a:t>
+            </a:r>
+          </a:p>
+          <a:p>
+            <a:r>
+              <a:rPr lang="en-US" dirty="0"/>
+              <a:t>Triple ≈ 1.6 runs</a:t>
+            </a:r>
+          </a:p>
+          <a:p>
+            <a:r>
+              <a:rPr lang="en-US" dirty="0"/>
+              <a:t>Home run ≈ 2.0 runs</a:t>
+            </a:r>
+          </a:p>
+          <a:p>
+            <a:endParaRPr lang="en-US" dirty="0"/>
+          </a:p>
+        </p:txBody>
+      </p:sp>
+      <p:sp>
+        <p:nvSpPr>
+          <p:cNvPr id="4" name="Slide Number Placeholder 3"/>
+          <p:cNvSpPr>
+            <a:spLocks noGrp="1"/>
+          </p:cNvSpPr>
+          <p:nvPr>
+            <p:ph type="sldNum" sz="quarter" idx="5"/>
+          </p:nvPr>
+        </p:nvSpPr>
+        <p:spPr/>
+        <p:txBody>
+          <a:bodyPr/>
+          <a:lstStyle/>
+          <a:p>
+            <a:fld id="{1560C251-82B7-4253-A774-38D73C276BCE}" type="slidenum">
+              <a:rPr lang="en-US" smtClean="0"/>
+              <a:t>26</a:t>
+            </a:fld>
+            <a:endParaRPr lang="en-US" dirty="0"/>
+          </a:p>
+        </p:txBody>
+      </p:sp>
+    </p:spTree>
+    <p:extLst>
+      <p:ext uri="{BB962C8B-B14F-4D97-AF65-F5344CB8AC3E}">
+        <p14:creationId xmlns:p14="http://schemas.microsoft.com/office/powerpoint/2010/main" val="3363809347"/>
       </p:ext>
     </p:extLst>
   </p:cSld>
@@ -2007,7 +2266,7 @@
           <a:p>
             <a:fld id="{1BF61C71-767E-B84C-BFB3-7B18856D27F4}" type="datetimeFigureOut">
               <a:rPr lang="en-US" smtClean="0"/>
-              <a:t>9/21/26</a:t>
+              <a:t>9/22/2026</a:t>
             </a:fld>
             <a:endParaRPr lang="en-US"/>
           </a:p>
@@ -2215,7 +2474,7 @@
           <a:p>
             <a:fld id="{1BF61C71-767E-B84C-BFB3-7B18856D27F4}" type="datetimeFigureOut">
               <a:rPr lang="en-US" smtClean="0"/>
-              <a:t>9/21/26</a:t>
+              <a:t>9/22/2026</a:t>
             </a:fld>
             <a:endParaRPr lang="en-US"/>
           </a:p>
@@ -2433,7 +2692,7 @@
           <a:p>
             <a:fld id="{1BF61C71-767E-B84C-BFB3-7B18856D27F4}" type="datetimeFigureOut">
               <a:rPr lang="en-US" smtClean="0"/>
-              <a:t>9/21/26</a:t>
+              <a:t>9/22/2026</a:t>
             </a:fld>
             <a:endParaRPr lang="en-US"/>
           </a:p>
@@ -2641,7 +2900,7 @@
           <a:p>
             <a:fld id="{1BF61C71-767E-B84C-BFB3-7B18856D27F4}" type="datetimeFigureOut">
               <a:rPr lang="en-US" smtClean="0"/>
-              <a:t>9/21/26</a:t>
+              <a:t>9/22/2026</a:t>
             </a:fld>
             <a:endParaRPr lang="en-US"/>
           </a:p>
@@ -2925,7 +3184,7 @@
           <a:p>
             <a:fld id="{1BF61C71-767E-B84C-BFB3-7B18856D27F4}" type="datetimeFigureOut">
               <a:rPr lang="en-US" smtClean="0"/>
-              <a:t>9/21/26</a:t>
+              <a:t>9/22/2026</a:t>
             </a:fld>
             <a:endParaRPr lang="en-US"/>
           </a:p>
@@ -3201,7 +3460,7 @@
           <a:p>
             <a:fld id="{1BF61C71-767E-B84C-BFB3-7B18856D27F4}" type="datetimeFigureOut">
               <a:rPr lang="en-US" smtClean="0"/>
-              <a:t>9/21/26</a:t>
+              <a:t>9/22/2026</a:t>
             </a:fld>
             <a:endParaRPr lang="en-US"/>
           </a:p>
@@ -3624,7 +3883,7 @@
           <a:p>
             <a:fld id="{1BF61C71-767E-B84C-BFB3-7B18856D27F4}" type="datetimeFigureOut">
               <a:rPr lang="en-US" smtClean="0"/>
-              <a:t>9/21/26</a:t>
+              <a:t>9/22/2026</a:t>
             </a:fld>
             <a:endParaRPr lang="en-US"/>
           </a:p>
@@ -3774,7 +4033,7 @@
           <a:p>
             <a:fld id="{1BF61C71-767E-B84C-BFB3-7B18856D27F4}" type="datetimeFigureOut">
               <a:rPr lang="en-US" smtClean="0"/>
-              <a:t>9/21/26</a:t>
+              <a:t>9/22/2026</a:t>
             </a:fld>
             <a:endParaRPr lang="en-US"/>
           </a:p>
@@ -3895,7 +4154,7 @@
           <a:p>
             <a:fld id="{1BF61C71-767E-B84C-BFB3-7B18856D27F4}" type="datetimeFigureOut">
               <a:rPr lang="en-US" smtClean="0"/>
-              <a:t>9/21/26</a:t>
+              <a:t>9/22/2026</a:t>
             </a:fld>
             <a:endParaRPr lang="en-US"/>
           </a:p>
@@ -4216,7 +4475,7 @@
           <a:p>
             <a:fld id="{1BF61C71-767E-B84C-BFB3-7B18856D27F4}" type="datetimeFigureOut">
               <a:rPr lang="en-US" smtClean="0"/>
-              <a:t>9/21/26</a:t>
+              <a:t>9/22/2026</a:t>
             </a:fld>
             <a:endParaRPr lang="en-US"/>
           </a:p>
@@ -4513,7 +4772,7 @@
           <a:p>
             <a:fld id="{1BF61C71-767E-B84C-BFB3-7B18856D27F4}" type="datetimeFigureOut">
               <a:rPr lang="en-US" smtClean="0"/>
-              <a:t>9/21/26</a:t>
+              <a:t>9/22/2026</a:t>
             </a:fld>
             <a:endParaRPr lang="en-US"/>
           </a:p>
@@ -4767,7 +5026,7 @@
           <a:p>
             <a:fld id="{1BF61C71-767E-B84C-BFB3-7B18856D27F4}" type="datetimeFigureOut">
               <a:rPr lang="en-US" smtClean="0"/>
-              <a:t>9/21/26</a:t>
+              <a:t>9/22/2026</a:t>
             </a:fld>
             <a:endParaRPr lang="en-US"/>
           </a:p>
@@ -11950,7 +12209,7 @@
           <p:nvPr>
             <p:extLst>
               <p:ext uri="{D42A27DB-BD31-4B8C-83A1-F6EECF244321}">
-                <p14:modId xmlns:p14="http://schemas.microsoft.com/office/powerpoint/2010/main" val="2816378735"/>
+                <p14:modId xmlns:p14="http://schemas.microsoft.com/office/powerpoint/2010/main" val="3672336811"/>
               </p:ext>
             </p:extLst>
           </p:nvPr>
@@ -12046,8 +12305,16 @@
                         <a:buNone/>
                       </a:pPr>
                       <a:r>
-                        <a:rPr lang="en-GB"/>
-                        <a:t>Position, length, size, color intensity</a:t>
+                        <a:rPr lang="en-GB" dirty="0"/>
+                        <a:t>Length, size, </a:t>
+                      </a:r>
+                      <a:r>
+                        <a:rPr lang="en-GB" dirty="0" err="1"/>
+                        <a:t>color</a:t>
+                      </a:r>
+                      <a:r>
+                        <a:rPr lang="en-GB" dirty="0"/>
+                        <a:t> intensity</a:t>
                       </a:r>
                     </a:p>
                   </a:txBody>
@@ -12085,8 +12352,12 @@
                         <a:buNone/>
                       </a:pPr>
                       <a:r>
-                        <a:rPr lang="en-GB"/>
-                        <a:t>Position, color hue, shape</a:t>
+                        <a:rPr lang="en-GB" dirty="0" err="1"/>
+                        <a:t>Color</a:t>
+                      </a:r>
+                      <a:r>
+                        <a:rPr lang="en-GB" dirty="0"/>
+                        <a:t> hue, shape</a:t>
                       </a:r>
                     </a:p>
                   </a:txBody>
@@ -12124,16 +12395,12 @@
                         <a:buNone/>
                       </a:pPr>
                       <a:r>
+                        <a:rPr lang="en-GB" dirty="0" err="1"/>
+                        <a:t>Color</a:t>
+                      </a:r>
+                      <a:r>
                         <a:rPr lang="en-GB" dirty="0"/>
-                        <a:t>Position, light-to-dark </a:t>
-                      </a:r>
-                      <a:r>
-                        <a:rPr lang="en-GB" dirty="0" err="1"/>
-                        <a:t>color</a:t>
-                      </a:r>
-                      <a:r>
-                        <a:rPr lang="en-GB" dirty="0"/>
-                        <a:t>, size</a:t>
+                        <a:t> intensity, size</a:t>
                       </a:r>
                     </a:p>
                   </a:txBody>
@@ -12167,213 +12434,10 @@
   <p:cSld>
     <p:spTree>
       <p:nvGrpSpPr>
-        <p:cNvPr id="1" name=""/>
-        <p:cNvGrpSpPr/>
-        <p:nvPr/>
-      </p:nvGrpSpPr>
-      <p:grpSpPr>
-        <a:xfrm>
-          <a:off x="0" y="0"/>
-          <a:ext cx="0" cy="0"/>
-          <a:chOff x="0" y="0"/>
-          <a:chExt cx="0" cy="0"/>
-        </a:xfrm>
-      </p:grpSpPr>
-      <p:sp>
-        <p:nvSpPr>
-          <p:cNvPr id="2" name="Title 1">
-            <a:extLst>
-              <a:ext uri="{FF2B5EF4-FFF2-40B4-BE49-F238E27FC236}">
-                <a16:creationId xmlns:a16="http://schemas.microsoft.com/office/drawing/2014/main" id="{DFC11479-4465-E501-306F-6DE88AC41277}"/>
-              </a:ext>
-            </a:extLst>
-          </p:cNvPr>
-          <p:cNvSpPr>
-            <a:spLocks noGrp="1"/>
-          </p:cNvSpPr>
-          <p:nvPr>
-            <p:ph type="title"/>
-          </p:nvPr>
-        </p:nvSpPr>
-        <p:spPr/>
-        <p:txBody>
-          <a:bodyPr/>
-          <a:lstStyle/>
-          <a:p>
-            <a:r>
-              <a:rPr lang="en-US" dirty="0"/>
-              <a:t>Bad choices</a:t>
-            </a:r>
-          </a:p>
-        </p:txBody>
-      </p:sp>
-      <p:sp>
-        <p:nvSpPr>
-          <p:cNvPr id="3" name="Content Placeholder 2">
-            <a:extLst>
-              <a:ext uri="{FF2B5EF4-FFF2-40B4-BE49-F238E27FC236}">
-                <a16:creationId xmlns:a16="http://schemas.microsoft.com/office/drawing/2014/main" id="{71AAC521-CE38-4A1D-9175-A63CF81329F8}"/>
-              </a:ext>
-            </a:extLst>
-          </p:cNvPr>
-          <p:cNvSpPr>
-            <a:spLocks noGrp="1"/>
-          </p:cNvSpPr>
-          <p:nvPr>
-            <p:ph idx="1"/>
-          </p:nvPr>
-        </p:nvSpPr>
-        <p:spPr/>
-        <p:txBody>
-          <a:bodyPr/>
-          <a:lstStyle/>
-          <a:p>
-            <a:endParaRPr lang="en-US"/>
-          </a:p>
-        </p:txBody>
-      </p:sp>
-      <p:pic>
-        <p:nvPicPr>
-          <p:cNvPr id="4" name="Picture 3">
-            <a:extLst>
-              <a:ext uri="{FF2B5EF4-FFF2-40B4-BE49-F238E27FC236}">
-                <a16:creationId xmlns:a16="http://schemas.microsoft.com/office/drawing/2014/main" id="{F2B421D9-8E71-DC15-61CB-D81A16C98A8E}"/>
-              </a:ext>
-            </a:extLst>
-          </p:cNvPr>
-          <p:cNvPicPr>
-            <a:picLocks noChangeAspect="1"/>
-          </p:cNvPicPr>
-          <p:nvPr/>
-        </p:nvPicPr>
-        <p:blipFill>
-          <a:blip r:embed="rId2"/>
-          <a:stretch>
-            <a:fillRect/>
-          </a:stretch>
-        </p:blipFill>
-        <p:spPr>
-          <a:xfrm>
-            <a:off x="7525770" y="1463539"/>
-            <a:ext cx="2692288" cy="2247652"/>
-          </a:xfrm>
-          <a:prstGeom prst="rect">
-            <a:avLst/>
-          </a:prstGeom>
-        </p:spPr>
-      </p:pic>
-      <p:pic>
-        <p:nvPicPr>
-          <p:cNvPr id="5" name="Picture 4">
-            <a:extLst>
-              <a:ext uri="{FF2B5EF4-FFF2-40B4-BE49-F238E27FC236}">
-                <a16:creationId xmlns:a16="http://schemas.microsoft.com/office/drawing/2014/main" id="{6B2D9648-23E3-1761-DBB6-2C273BF309B5}"/>
-              </a:ext>
-            </a:extLst>
-          </p:cNvPr>
-          <p:cNvPicPr>
-            <a:picLocks noChangeAspect="1"/>
-          </p:cNvPicPr>
-          <p:nvPr/>
-        </p:nvPicPr>
-        <p:blipFill>
-          <a:blip r:embed="rId3"/>
-          <a:stretch>
-            <a:fillRect/>
-          </a:stretch>
-        </p:blipFill>
-        <p:spPr>
-          <a:xfrm>
-            <a:off x="1580849" y="1441937"/>
-            <a:ext cx="3491783" cy="2433376"/>
-          </a:xfrm>
-          <a:prstGeom prst="rect">
-            <a:avLst/>
-          </a:prstGeom>
-        </p:spPr>
-      </p:pic>
-      <p:pic>
-        <p:nvPicPr>
-          <p:cNvPr id="6" name="Picture 5">
-            <a:extLst>
-              <a:ext uri="{FF2B5EF4-FFF2-40B4-BE49-F238E27FC236}">
-                <a16:creationId xmlns:a16="http://schemas.microsoft.com/office/drawing/2014/main" id="{3334F3AA-C8D6-4C78-EF7B-B4BB0741B44A}"/>
-              </a:ext>
-            </a:extLst>
-          </p:cNvPr>
-          <p:cNvPicPr>
-            <a:picLocks noChangeAspect="1"/>
-          </p:cNvPicPr>
-          <p:nvPr/>
-        </p:nvPicPr>
-        <p:blipFill>
-          <a:blip r:embed="rId4"/>
-          <a:stretch>
-            <a:fillRect/>
-          </a:stretch>
-        </p:blipFill>
-        <p:spPr>
-          <a:xfrm>
-            <a:off x="1562478" y="4039435"/>
-            <a:ext cx="3510154" cy="2369263"/>
-          </a:xfrm>
-          <a:prstGeom prst="rect">
-            <a:avLst/>
-          </a:prstGeom>
-        </p:spPr>
-      </p:pic>
-      <p:pic>
-        <p:nvPicPr>
-          <p:cNvPr id="7" name="Picture 6">
-            <a:extLst>
-              <a:ext uri="{FF2B5EF4-FFF2-40B4-BE49-F238E27FC236}">
-                <a16:creationId xmlns:a16="http://schemas.microsoft.com/office/drawing/2014/main" id="{23B7E74D-9ACB-909D-FE77-20B13180FD01}"/>
-              </a:ext>
-            </a:extLst>
-          </p:cNvPr>
-          <p:cNvPicPr>
-            <a:picLocks noChangeAspect="1"/>
-          </p:cNvPicPr>
-          <p:nvPr/>
-        </p:nvPicPr>
-        <p:blipFill>
-          <a:blip r:embed="rId5"/>
-          <a:stretch>
-            <a:fillRect/>
-          </a:stretch>
-        </p:blipFill>
-        <p:spPr>
-          <a:xfrm>
-            <a:off x="7119369" y="3875313"/>
-            <a:ext cx="3383231" cy="2533385"/>
-          </a:xfrm>
-          <a:prstGeom prst="rect">
-            <a:avLst/>
-          </a:prstGeom>
-        </p:spPr>
-      </p:pic>
-    </p:spTree>
-    <p:extLst>
-      <p:ext uri="{BB962C8B-B14F-4D97-AF65-F5344CB8AC3E}">
-        <p14:creationId xmlns:p14="http://schemas.microsoft.com/office/powerpoint/2010/main" val="2735004089"/>
-      </p:ext>
-    </p:extLst>
-  </p:cSld>
-  <p:clrMapOvr>
-    <a:masterClrMapping/>
-  </p:clrMapOvr>
-</p:sld>
-</file>
-
-<file path=ppt/slides/slide26.xml><?xml version="1.0" encoding="utf-8"?>
-<p:sld xmlns:a="http://schemas.openxmlformats.org/drawingml/2006/main" xmlns:r="http://schemas.openxmlformats.org/officeDocument/2006/relationships" xmlns:p="http://schemas.openxmlformats.org/presentationml/2006/main">
-  <p:cSld>
-    <p:spTree>
-      <p:nvGrpSpPr>
         <p:cNvPr id="1" name="">
           <a:extLst>
             <a:ext uri="{FF2B5EF4-FFF2-40B4-BE49-F238E27FC236}">
-              <a16:creationId xmlns:a16="http://schemas.microsoft.com/office/drawing/2014/main" id="{A385B668-44E6-CCA2-D004-D84DFE686305}"/>
+              <a16:creationId xmlns:a16="http://schemas.microsoft.com/office/drawing/2014/main" id="{876A0C08-6C02-1672-FDAA-4E1C959BDBD2}"/>
             </a:ext>
           </a:extLst>
         </p:cNvPr>
@@ -12393,7 +12457,7 @@
           <p:cNvPr id="2" name="Title 1">
             <a:extLst>
               <a:ext uri="{FF2B5EF4-FFF2-40B4-BE49-F238E27FC236}">
-                <a16:creationId xmlns:a16="http://schemas.microsoft.com/office/drawing/2014/main" id="{205D2105-05E0-2CA7-C439-E22F8FA67533}"/>
+                <a16:creationId xmlns:a16="http://schemas.microsoft.com/office/drawing/2014/main" id="{77DA64DC-63E6-A64C-31D8-D66A8312B396}"/>
               </a:ext>
             </a:extLst>
           </p:cNvPr>
@@ -12411,7 +12475,7 @@
           <a:p>
             <a:r>
               <a:rPr lang="en-GB" dirty="0"/>
-              <a:t>Visualizing distributions</a:t>
+              <a:t>Identifying visual attributes</a:t>
             </a:r>
             <a:endParaRPr lang="en-US" dirty="0"/>
           </a:p>
@@ -12419,10 +12483,10 @@
       </p:sp>
       <p:sp>
         <p:nvSpPr>
-          <p:cNvPr id="3" name="Text Placeholder 2">
-            <a:extLst>
-              <a:ext uri="{FF2B5EF4-FFF2-40B4-BE49-F238E27FC236}">
-                <a16:creationId xmlns:a16="http://schemas.microsoft.com/office/drawing/2014/main" id="{93D8A03B-7D07-41D4-4E33-03C0ED8CB5E4}"/>
+          <p:cNvPr id="3" name="Content Placeholder 2">
+            <a:extLst>
+              <a:ext uri="{FF2B5EF4-FFF2-40B4-BE49-F238E27FC236}">
+                <a16:creationId xmlns:a16="http://schemas.microsoft.com/office/drawing/2014/main" id="{CB255FAE-4678-CBBA-B153-B85E053CA3FF}"/>
               </a:ext>
             </a:extLst>
           </p:cNvPr>
@@ -12430,7 +12494,40 @@
             <a:spLocks noGrp="1"/>
           </p:cNvSpPr>
           <p:nvPr>
-            <p:ph type="body" idx="1"/>
+            <p:ph idx="1"/>
+          </p:nvPr>
+        </p:nvSpPr>
+        <p:spPr>
+          <a:xfrm>
+            <a:off x="4634344" y="1922798"/>
+            <a:ext cx="6719455" cy="4254165"/>
+          </a:xfrm>
+        </p:spPr>
+        <p:txBody>
+          <a:bodyPr/>
+          <a:lstStyle/>
+          <a:p>
+            <a:r>
+              <a:rPr lang="en-US" dirty="0"/>
+              <a:t>What visual attributes are used here?</a:t>
+            </a:r>
+          </a:p>
+        </p:txBody>
+      </p:sp>
+      <p:sp>
+        <p:nvSpPr>
+          <p:cNvPr id="4" name="Slide Number Placeholder 3">
+            <a:extLst>
+              <a:ext uri="{FF2B5EF4-FFF2-40B4-BE49-F238E27FC236}">
+                <a16:creationId xmlns:a16="http://schemas.microsoft.com/office/drawing/2014/main" id="{AF3BE06A-0992-1D36-A956-E82AC5C3B527}"/>
+              </a:ext>
+            </a:extLst>
+          </p:cNvPr>
+          <p:cNvSpPr>
+            <a:spLocks noGrp="1"/>
+          </p:cNvSpPr>
+          <p:nvPr>
+            <p:ph type="sldNum" sz="quarter" idx="12"/>
           </p:nvPr>
         </p:nvSpPr>
         <p:spPr/>
@@ -12438,14 +12535,96 @@
           <a:bodyPr/>
           <a:lstStyle/>
           <a:p>
-            <a:endParaRPr lang="en-US"/>
+            <a:fld id="{45C00377-489B-40EC-B059-26BDDD2E89B9}" type="slidenum">
+              <a:rPr lang="en-US" smtClean="0"/>
+              <a:pPr/>
+              <a:t>25</a:t>
+            </a:fld>
+            <a:endParaRPr lang="en-US" dirty="0"/>
           </a:p>
         </p:txBody>
       </p:sp>
+      <p:pic>
+        <p:nvPicPr>
+          <p:cNvPr id="5" name="Picture 4">
+            <a:extLst>
+              <a:ext uri="{FF2B5EF4-FFF2-40B4-BE49-F238E27FC236}">
+                <a16:creationId xmlns:a16="http://schemas.microsoft.com/office/drawing/2014/main" id="{D2AE6D5B-AC01-85BF-188E-2DD0876C1B4A}"/>
+              </a:ext>
+            </a:extLst>
+          </p:cNvPr>
+          <p:cNvPicPr>
+            <a:picLocks noChangeAspect="1"/>
+          </p:cNvPicPr>
+          <p:nvPr/>
+        </p:nvPicPr>
+        <p:blipFill>
+          <a:blip r:embed="rId3"/>
+          <a:stretch>
+            <a:fillRect/>
+          </a:stretch>
+        </p:blipFill>
+        <p:spPr>
+          <a:xfrm>
+            <a:off x="838200" y="1279758"/>
+            <a:ext cx="3235036" cy="5095183"/>
+          </a:xfrm>
+          <a:prstGeom prst="rect">
+            <a:avLst/>
+          </a:prstGeom>
+        </p:spPr>
+      </p:pic>
+      <p:pic>
+        <p:nvPicPr>
+          <p:cNvPr id="7" name="Picture 2" descr="Why Visual Analytics? - Tableau">
+            <a:extLst>
+              <a:ext uri="{FF2B5EF4-FFF2-40B4-BE49-F238E27FC236}">
+                <a16:creationId xmlns:a16="http://schemas.microsoft.com/office/drawing/2014/main" id="{572807D2-7E02-18DC-6F4D-373E7919E6FC}"/>
+              </a:ext>
+            </a:extLst>
+          </p:cNvPr>
+          <p:cNvPicPr>
+            <a:picLocks noChangeAspect="1" noChangeArrowheads="1"/>
+          </p:cNvPicPr>
+          <p:nvPr/>
+        </p:nvPicPr>
+        <p:blipFill>
+          <a:blip r:embed="rId4">
+            <a:extLst>
+              <a:ext uri="{28A0092B-C50C-407E-A947-70E740481C1C}">
+                <a14:useLocalDpi xmlns:a14="http://schemas.microsoft.com/office/drawing/2010/main" val="0"/>
+              </a:ext>
+            </a:extLst>
+          </a:blip>
+          <a:srcRect/>
+          <a:stretch>
+            <a:fillRect/>
+          </a:stretch>
+        </p:blipFill>
+        <p:spPr bwMode="auto">
+          <a:xfrm>
+            <a:off x="4921134" y="2602235"/>
+            <a:ext cx="6094005" cy="3325346"/>
+          </a:xfrm>
+          <a:prstGeom prst="rect">
+            <a:avLst/>
+          </a:prstGeom>
+          <a:noFill/>
+          <a:extLst>
+            <a:ext uri="{909E8E84-426E-40DD-AFC4-6F175D3DCCD1}">
+              <a14:hiddenFill xmlns:a14="http://schemas.microsoft.com/office/drawing/2010/main">
+                <a:solidFill>
+                  <a:srgbClr val="FFFFFF"/>
+                </a:solidFill>
+              </a14:hiddenFill>
+            </a:ext>
+          </a:extLst>
+        </p:spPr>
+      </p:pic>
     </p:spTree>
     <p:extLst>
       <p:ext uri="{BB962C8B-B14F-4D97-AF65-F5344CB8AC3E}">
-        <p14:creationId xmlns:p14="http://schemas.microsoft.com/office/powerpoint/2010/main" val="1772391298"/>
+        <p14:creationId xmlns:p14="http://schemas.microsoft.com/office/powerpoint/2010/main" val="1072785675"/>
       </p:ext>
     </p:extLst>
   </p:cSld>
@@ -12455,7 +12634,7 @@
 </p:sld>
 </file>
 
-<file path=ppt/slides/slide27.xml><?xml version="1.0" encoding="utf-8"?>
+<file path=ppt/slides/slide26.xml><?xml version="1.0" encoding="utf-8"?>
 <p:sld xmlns:a="http://schemas.openxmlformats.org/drawingml/2006/main" xmlns:r="http://schemas.openxmlformats.org/officeDocument/2006/relationships" xmlns:p="http://schemas.openxmlformats.org/presentationml/2006/main">
   <p:cSld>
     <p:spTree>
@@ -12477,6 +12656,269 @@
           <p:cNvPr id="2" name="Title 1">
             <a:extLst>
               <a:ext uri="{FF2B5EF4-FFF2-40B4-BE49-F238E27FC236}">
+                <a16:creationId xmlns:a16="http://schemas.microsoft.com/office/drawing/2014/main" id="{34D94633-5383-CCBB-A1A2-E921427ADEA0}"/>
+              </a:ext>
+            </a:extLst>
+          </p:cNvPr>
+          <p:cNvSpPr>
+            <a:spLocks noGrp="1"/>
+          </p:cNvSpPr>
+          <p:nvPr>
+            <p:ph type="title"/>
+          </p:nvPr>
+        </p:nvSpPr>
+        <p:spPr/>
+        <p:txBody>
+          <a:bodyPr/>
+          <a:lstStyle/>
+          <a:p>
+            <a:r>
+              <a:rPr lang="en-GB" dirty="0"/>
+              <a:t>Identifying visual attributes</a:t>
+            </a:r>
+            <a:endParaRPr lang="en-US" dirty="0"/>
+          </a:p>
+        </p:txBody>
+      </p:sp>
+      <p:sp>
+        <p:nvSpPr>
+          <p:cNvPr id="3" name="Content Placeholder 2">
+            <a:extLst>
+              <a:ext uri="{FF2B5EF4-FFF2-40B4-BE49-F238E27FC236}">
+                <a16:creationId xmlns:a16="http://schemas.microsoft.com/office/drawing/2014/main" id="{6C5D990F-3D56-10A6-A402-3040694A4BE9}"/>
+              </a:ext>
+            </a:extLst>
+          </p:cNvPr>
+          <p:cNvSpPr>
+            <a:spLocks noGrp="1"/>
+          </p:cNvSpPr>
+          <p:nvPr>
+            <p:ph idx="1"/>
+          </p:nvPr>
+        </p:nvSpPr>
+        <p:spPr>
+          <a:xfrm>
+            <a:off x="4297680" y="1922798"/>
+            <a:ext cx="7056120" cy="4254165"/>
+          </a:xfrm>
+        </p:spPr>
+        <p:txBody>
+          <a:bodyPr/>
+          <a:lstStyle/>
+          <a:p>
+            <a:r>
+              <a:rPr lang="en-US" dirty="0"/>
+              <a:t>Pre-attentive attributes</a:t>
+            </a:r>
+          </a:p>
+          <a:p>
+            <a:pPr lvl="1"/>
+            <a:r>
+              <a:rPr lang="en-US" dirty="0"/>
+              <a:t>Position (x, y coordinates) </a:t>
+            </a:r>
+          </a:p>
+          <a:p>
+            <a:pPr lvl="1"/>
+            <a:r>
+              <a:rPr lang="en-US" dirty="0"/>
+              <a:t>Color intensity (scoring value via linear weights)</a:t>
+            </a:r>
+          </a:p>
+          <a:p>
+            <a:pPr lvl="1"/>
+            <a:r>
+              <a:rPr lang="en-US" dirty="0"/>
+              <a:t>Enclosure (batted ball type)</a:t>
+            </a:r>
+          </a:p>
+        </p:txBody>
+      </p:sp>
+      <p:sp>
+        <p:nvSpPr>
+          <p:cNvPr id="4" name="Slide Number Placeholder 3">
+            <a:extLst>
+              <a:ext uri="{FF2B5EF4-FFF2-40B4-BE49-F238E27FC236}">
+                <a16:creationId xmlns:a16="http://schemas.microsoft.com/office/drawing/2014/main" id="{DF42B69C-B368-AED0-2A0A-A37C3D62CF8D}"/>
+              </a:ext>
+            </a:extLst>
+          </p:cNvPr>
+          <p:cNvSpPr>
+            <a:spLocks noGrp="1"/>
+          </p:cNvSpPr>
+          <p:nvPr>
+            <p:ph type="sldNum" sz="quarter" idx="12"/>
+          </p:nvPr>
+        </p:nvSpPr>
+        <p:spPr/>
+        <p:txBody>
+          <a:bodyPr/>
+          <a:lstStyle/>
+          <a:p>
+            <a:fld id="{45C00377-489B-40EC-B059-26BDDD2E89B9}" type="slidenum">
+              <a:rPr lang="en-US" smtClean="0"/>
+              <a:pPr/>
+              <a:t>26</a:t>
+            </a:fld>
+            <a:endParaRPr lang="en-US" dirty="0"/>
+          </a:p>
+        </p:txBody>
+      </p:sp>
+      <p:pic>
+        <p:nvPicPr>
+          <p:cNvPr id="5" name="Picture 4">
+            <a:extLst>
+              <a:ext uri="{FF2B5EF4-FFF2-40B4-BE49-F238E27FC236}">
+                <a16:creationId xmlns:a16="http://schemas.microsoft.com/office/drawing/2014/main" id="{56F8C240-20B6-3F06-3813-697702E10E51}"/>
+              </a:ext>
+            </a:extLst>
+          </p:cNvPr>
+          <p:cNvPicPr>
+            <a:picLocks noChangeAspect="1"/>
+          </p:cNvPicPr>
+          <p:nvPr/>
+        </p:nvPicPr>
+        <p:blipFill>
+          <a:blip r:embed="rId3"/>
+          <a:stretch>
+            <a:fillRect/>
+          </a:stretch>
+        </p:blipFill>
+        <p:spPr>
+          <a:xfrm>
+            <a:off x="1296307" y="1922798"/>
+            <a:ext cx="2600476" cy="4095750"/>
+          </a:xfrm>
+          <a:prstGeom prst="rect">
+            <a:avLst/>
+          </a:prstGeom>
+        </p:spPr>
+      </p:pic>
+    </p:spTree>
+    <p:extLst>
+      <p:ext uri="{BB962C8B-B14F-4D97-AF65-F5344CB8AC3E}">
+        <p14:creationId xmlns:p14="http://schemas.microsoft.com/office/powerpoint/2010/main" val="4209891247"/>
+      </p:ext>
+    </p:extLst>
+  </p:cSld>
+  <p:clrMapOvr>
+    <a:masterClrMapping/>
+  </p:clrMapOvr>
+</p:sld>
+</file>
+
+<file path=ppt/slides/slide27.xml><?xml version="1.0" encoding="utf-8"?>
+<p:sld xmlns:a="http://schemas.openxmlformats.org/drawingml/2006/main" xmlns:r="http://schemas.openxmlformats.org/officeDocument/2006/relationships" xmlns:p="http://schemas.openxmlformats.org/presentationml/2006/main">
+  <p:cSld>
+    <p:spTree>
+      <p:nvGrpSpPr>
+        <p:cNvPr id="1" name="">
+          <a:extLst>
+            <a:ext uri="{FF2B5EF4-FFF2-40B4-BE49-F238E27FC236}">
+              <a16:creationId xmlns:a16="http://schemas.microsoft.com/office/drawing/2014/main" id="{2B6C1092-BF0C-5C73-4BBD-CAA64E01A6ED}"/>
+            </a:ext>
+          </a:extLst>
+        </p:cNvPr>
+        <p:cNvGrpSpPr/>
+        <p:nvPr/>
+      </p:nvGrpSpPr>
+      <p:grpSpPr>
+        <a:xfrm>
+          <a:off x="0" y="0"/>
+          <a:ext cx="0" cy="0"/>
+          <a:chOff x="0" y="0"/>
+          <a:chExt cx="0" cy="0"/>
+        </a:xfrm>
+      </p:grpSpPr>
+      <p:sp>
+        <p:nvSpPr>
+          <p:cNvPr id="2" name="Title 1">
+            <a:extLst>
+              <a:ext uri="{FF2B5EF4-FFF2-40B4-BE49-F238E27FC236}">
+                <a16:creationId xmlns:a16="http://schemas.microsoft.com/office/drawing/2014/main" id="{B89907FC-D3C0-4BE9-FB2E-E4963311E5A8}"/>
+              </a:ext>
+            </a:extLst>
+          </p:cNvPr>
+          <p:cNvSpPr>
+            <a:spLocks noGrp="1"/>
+          </p:cNvSpPr>
+          <p:nvPr>
+            <p:ph type="title"/>
+          </p:nvPr>
+        </p:nvSpPr>
+        <p:spPr/>
+        <p:txBody>
+          <a:bodyPr/>
+          <a:lstStyle/>
+          <a:p>
+            <a:r>
+              <a:rPr lang="en-GB" dirty="0"/>
+              <a:t>Choosing the Right Chart Type </a:t>
+            </a:r>
+            <a:endParaRPr lang="en-US" dirty="0"/>
+          </a:p>
+        </p:txBody>
+      </p:sp>
+      <p:sp>
+        <p:nvSpPr>
+          <p:cNvPr id="3" name="Text Placeholder 2">
+            <a:extLst>
+              <a:ext uri="{FF2B5EF4-FFF2-40B4-BE49-F238E27FC236}">
+                <a16:creationId xmlns:a16="http://schemas.microsoft.com/office/drawing/2014/main" id="{85F6A9F1-E557-7839-3680-88CD80787474}"/>
+              </a:ext>
+            </a:extLst>
+          </p:cNvPr>
+          <p:cNvSpPr>
+            <a:spLocks noGrp="1"/>
+          </p:cNvSpPr>
+          <p:nvPr>
+            <p:ph type="body" idx="1"/>
+          </p:nvPr>
+        </p:nvSpPr>
+        <p:spPr/>
+        <p:txBody>
+          <a:bodyPr/>
+          <a:lstStyle/>
+          <a:p>
+            <a:endParaRPr lang="en-US"/>
+          </a:p>
+        </p:txBody>
+      </p:sp>
+    </p:spTree>
+    <p:extLst>
+      <p:ext uri="{BB962C8B-B14F-4D97-AF65-F5344CB8AC3E}">
+        <p14:creationId xmlns:p14="http://schemas.microsoft.com/office/powerpoint/2010/main" val="2856163796"/>
+      </p:ext>
+    </p:extLst>
+  </p:cSld>
+  <p:clrMapOvr>
+    <a:masterClrMapping/>
+  </p:clrMapOvr>
+</p:sld>
+</file>
+
+<file path=ppt/slides/slide28.xml><?xml version="1.0" encoding="utf-8"?>
+<p:sld xmlns:a="http://schemas.openxmlformats.org/drawingml/2006/main" xmlns:r="http://schemas.openxmlformats.org/officeDocument/2006/relationships" xmlns:p="http://schemas.openxmlformats.org/presentationml/2006/main">
+  <p:cSld>
+    <p:spTree>
+      <p:nvGrpSpPr>
+        <p:cNvPr id="1" name=""/>
+        <p:cNvGrpSpPr/>
+        <p:nvPr/>
+      </p:nvGrpSpPr>
+      <p:grpSpPr>
+        <a:xfrm>
+          <a:off x="0" y="0"/>
+          <a:ext cx="0" cy="0"/>
+          <a:chOff x="0" y="0"/>
+          <a:chExt cx="0" cy="0"/>
+        </a:xfrm>
+      </p:grpSpPr>
+      <p:sp>
+        <p:nvSpPr>
+          <p:cNvPr id="2" name="Title 1">
+            <a:extLst>
+              <a:ext uri="{FF2B5EF4-FFF2-40B4-BE49-F238E27FC236}">
                 <a16:creationId xmlns:a16="http://schemas.microsoft.com/office/drawing/2014/main" id="{3B5CDF8D-2B58-8625-9E7E-B65ADFDB0392}"/>
               </a:ext>
             </a:extLst>
@@ -12561,7 +13003,7 @@
             <a:fld id="{45C00377-489B-40EC-B059-26BDDD2E89B9}" type="slidenum">
               <a:rPr lang="en-US" smtClean="0"/>
               <a:pPr/>
-              <a:t>27</a:t>
+              <a:t>28</a:t>
             </a:fld>
             <a:endParaRPr lang="en-US" dirty="0"/>
           </a:p>
@@ -12813,165 +13255,6 @@
 </p:sld>
 </file>
 
-<file path=ppt/slides/slide28.xml><?xml version="1.0" encoding="utf-8"?>
-<p:sld xmlns:a="http://schemas.openxmlformats.org/drawingml/2006/main" xmlns:r="http://schemas.openxmlformats.org/officeDocument/2006/relationships" xmlns:p="http://schemas.openxmlformats.org/presentationml/2006/main">
-  <p:cSld>
-    <p:spTree>
-      <p:nvGrpSpPr>
-        <p:cNvPr id="1" name=""/>
-        <p:cNvGrpSpPr/>
-        <p:nvPr/>
-      </p:nvGrpSpPr>
-      <p:grpSpPr>
-        <a:xfrm>
-          <a:off x="0" y="0"/>
-          <a:ext cx="0" cy="0"/>
-          <a:chOff x="0" y="0"/>
-          <a:chExt cx="0" cy="0"/>
-        </a:xfrm>
-      </p:grpSpPr>
-      <p:sp>
-        <p:nvSpPr>
-          <p:cNvPr id="2" name="Title 1">
-            <a:extLst>
-              <a:ext uri="{FF2B5EF4-FFF2-40B4-BE49-F238E27FC236}">
-                <a16:creationId xmlns:a16="http://schemas.microsoft.com/office/drawing/2014/main" id="{E7ED64BD-13B9-6822-2102-120F8EA410CC}"/>
-              </a:ext>
-            </a:extLst>
-          </p:cNvPr>
-          <p:cNvSpPr>
-            <a:spLocks noGrp="1"/>
-          </p:cNvSpPr>
-          <p:nvPr>
-            <p:ph type="title"/>
-          </p:nvPr>
-        </p:nvSpPr>
-        <p:spPr/>
-        <p:txBody>
-          <a:bodyPr/>
-          <a:lstStyle/>
-          <a:p>
-            <a:r>
-              <a:rPr lang="en-GB" dirty="0"/>
-              <a:t>What is a distribution?</a:t>
-            </a:r>
-            <a:endParaRPr lang="en-US" dirty="0"/>
-          </a:p>
-        </p:txBody>
-      </p:sp>
-      <p:sp>
-        <p:nvSpPr>
-          <p:cNvPr id="3" name="Content Placeholder 2">
-            <a:extLst>
-              <a:ext uri="{FF2B5EF4-FFF2-40B4-BE49-F238E27FC236}">
-                <a16:creationId xmlns:a16="http://schemas.microsoft.com/office/drawing/2014/main" id="{8867425F-F04E-9B5E-DEAE-E94F7D591423}"/>
-              </a:ext>
-            </a:extLst>
-          </p:cNvPr>
-          <p:cNvSpPr>
-            <a:spLocks noGrp="1"/>
-          </p:cNvSpPr>
-          <p:nvPr>
-            <p:ph idx="1"/>
-          </p:nvPr>
-        </p:nvSpPr>
-        <p:spPr/>
-        <p:txBody>
-          <a:bodyPr/>
-          <a:lstStyle/>
-          <a:p>
-            <a:r>
-              <a:rPr lang="en-GB" dirty="0"/>
-              <a:t>A distribution describes:</a:t>
-            </a:r>
-          </a:p>
-          <a:p>
-            <a:pPr lvl="1"/>
-            <a:r>
-              <a:rPr lang="en-GB" dirty="0"/>
-              <a:t>Where values are concentrated </a:t>
-            </a:r>
-          </a:p>
-          <a:p>
-            <a:pPr lvl="1"/>
-            <a:r>
-              <a:rPr lang="en-GB" dirty="0"/>
-              <a:t>Variance of data</a:t>
-            </a:r>
-          </a:p>
-          <a:p>
-            <a:pPr lvl="1"/>
-            <a:r>
-              <a:rPr lang="en-GB" dirty="0"/>
-              <a:t>Whether unusual values are present</a:t>
-            </a:r>
-          </a:p>
-          <a:p>
-            <a:pPr lvl="1"/>
-            <a:r>
-              <a:rPr lang="en-GB" dirty="0"/>
-              <a:t>Where data point exists relative to others</a:t>
-            </a:r>
-          </a:p>
-          <a:p>
-            <a:pPr lvl="1"/>
-            <a:endParaRPr lang="en-GB" dirty="0"/>
-          </a:p>
-        </p:txBody>
-      </p:sp>
-      <p:sp>
-        <p:nvSpPr>
-          <p:cNvPr id="5" name="TextBox 4">
-            <a:extLst>
-              <a:ext uri="{FF2B5EF4-FFF2-40B4-BE49-F238E27FC236}">
-                <a16:creationId xmlns:a16="http://schemas.microsoft.com/office/drawing/2014/main" id="{4C97B836-AB88-354D-A279-4605644CE7DF}"/>
-              </a:ext>
-            </a:extLst>
-          </p:cNvPr>
-          <p:cNvSpPr txBox="1"/>
-          <p:nvPr/>
-        </p:nvSpPr>
-        <p:spPr>
-          <a:xfrm>
-            <a:off x="1504122" y="3997476"/>
-            <a:ext cx="9183756" cy="461665"/>
-          </a:xfrm>
-          <a:prstGeom prst="rect">
-            <a:avLst/>
-          </a:prstGeom>
-          <a:noFill/>
-        </p:spPr>
-        <p:txBody>
-          <a:bodyPr wrap="square">
-            <a:spAutoFit/>
-          </a:bodyPr>
-          <a:lstStyle/>
-          <a:p>
-            <a:pPr lvl="1"/>
-            <a:r>
-              <a:rPr lang="en-GB" sz="2400" dirty="0">
-                <a:solidFill>
-                  <a:srgbClr val="FF0000"/>
-                </a:solidFill>
-              </a:rPr>
-              <a:t>distribution requires multiple observations of the same variable.</a:t>
-            </a:r>
-          </a:p>
-        </p:txBody>
-      </p:sp>
-    </p:spTree>
-    <p:extLst>
-      <p:ext uri="{BB962C8B-B14F-4D97-AF65-F5344CB8AC3E}">
-        <p14:creationId xmlns:p14="http://schemas.microsoft.com/office/powerpoint/2010/main" val="2089856807"/>
-      </p:ext>
-    </p:extLst>
-  </p:cSld>
-  <p:clrMapOvr>
-    <a:masterClrMapping/>
-  </p:clrMapOvr>
-</p:sld>
-</file>
-
 <file path=ppt/slides/slide29.xml><?xml version="1.0" encoding="utf-8"?>
 <p:sld xmlns:a="http://schemas.openxmlformats.org/drawingml/2006/main" xmlns:r="http://schemas.openxmlformats.org/officeDocument/2006/relationships" xmlns:p="http://schemas.openxmlformats.org/presentationml/2006/main">
   <p:cSld>
@@ -12994,7 +13277,7 @@
           <p:cNvPr id="2" name="Title 1">
             <a:extLst>
               <a:ext uri="{FF2B5EF4-FFF2-40B4-BE49-F238E27FC236}">
-                <a16:creationId xmlns:a16="http://schemas.microsoft.com/office/drawing/2014/main" id="{3719B466-0475-4BA9-3BA6-00B622E77C4D}"/>
+                <a16:creationId xmlns:a16="http://schemas.microsoft.com/office/drawing/2014/main" id="{285F1593-F2E7-A0A0-4235-5DCA483B9338}"/>
               </a:ext>
             </a:extLst>
           </p:cNvPr>
@@ -13011,10 +13294,9 @@
           <a:lstStyle/>
           <a:p>
             <a:r>
-              <a:rPr lang="en-GB" dirty="0"/>
-              <a:t>How should we encode a distribution?</a:t>
-            </a:r>
-            <a:endParaRPr lang="en-US" dirty="0"/>
+              <a:rPr lang="en-US" dirty="0"/>
+              <a:t>distribution</a:t>
+            </a:r>
           </a:p>
         </p:txBody>
       </p:sp>
@@ -13023,7 +13305,7 @@
           <p:cNvPr id="3" name="Content Placeholder 2">
             <a:extLst>
               <a:ext uri="{FF2B5EF4-FFF2-40B4-BE49-F238E27FC236}">
-                <a16:creationId xmlns:a16="http://schemas.microsoft.com/office/drawing/2014/main" id="{839B0716-E3F0-1D50-1B05-379D00608674}"/>
+                <a16:creationId xmlns:a16="http://schemas.microsoft.com/office/drawing/2014/main" id="{4BC7D4B5-3BEA-A604-109D-2E41CFA31900}"/>
               </a:ext>
             </a:extLst>
           </p:cNvPr>
@@ -13039,42 +13321,27 @@
           <a:bodyPr/>
           <a:lstStyle/>
           <a:p>
-            <a:pPr lvl="0"/>
-            <a:r>
-              <a:rPr lang="en-GB" dirty="0"/>
-              <a:t>Position represents the measured value. </a:t>
-            </a:r>
-          </a:p>
-          <a:p>
-            <a:pPr lvl="0"/>
-            <a:r>
-              <a:rPr lang="en-GB" dirty="0"/>
-              <a:t>Height or area can represent frequency. </a:t>
-            </a:r>
-          </a:p>
-          <a:p>
-            <a:pPr lvl="0"/>
-            <a:r>
-              <a:rPr lang="en-GB" dirty="0" err="1"/>
-              <a:t>Color</a:t>
-            </a:r>
-            <a:r>
-              <a:rPr lang="en-GB" dirty="0"/>
-              <a:t> can distinguish groups. </a:t>
-            </a:r>
-          </a:p>
-          <a:p>
-            <a:pPr lvl="0"/>
-            <a:r>
-              <a:rPr lang="en-GB" dirty="0"/>
-              <a:t>Individual points can represent observations. </a:t>
-            </a:r>
-          </a:p>
-          <a:p>
-            <a:pPr lvl="0"/>
-            <a:r>
-              <a:rPr lang="en-GB" dirty="0"/>
-              <a:t>Reference lines can identify averages or thresholds.</a:t>
+            <a:r>
+              <a:rPr lang="en-US" dirty="0"/>
+              <a:t>Histograms: Player height distribution, shot distance distribution</a:t>
+            </a:r>
+          </a:p>
+          <a:p>
+            <a:r>
+              <a:rPr lang="en-US" dirty="0"/>
+              <a:t>Density plots: Smoothed shooting ranges</a:t>
+            </a:r>
+          </a:p>
+          <a:p>
+            <a:r>
+              <a:rPr lang="en-US" dirty="0"/>
+              <a:t>Box plots: Comparing stat distributions across positions or teams</a:t>
+            </a:r>
+          </a:p>
+          <a:p>
+            <a:r>
+              <a:rPr lang="en-US" dirty="0"/>
+              <a:t>Violin plots: Showing full distribution shape (sprint speeds by position)</a:t>
             </a:r>
           </a:p>
           <a:p>
@@ -13082,10 +13349,101 @@
           </a:p>
         </p:txBody>
       </p:sp>
+      <p:sp>
+        <p:nvSpPr>
+          <p:cNvPr id="4" name="Slide Number Placeholder 3">
+            <a:extLst>
+              <a:ext uri="{FF2B5EF4-FFF2-40B4-BE49-F238E27FC236}">
+                <a16:creationId xmlns:a16="http://schemas.microsoft.com/office/drawing/2014/main" id="{6F748B8C-B129-4165-BA11-6AF432CA74FF}"/>
+              </a:ext>
+            </a:extLst>
+          </p:cNvPr>
+          <p:cNvSpPr>
+            <a:spLocks noGrp="1"/>
+          </p:cNvSpPr>
+          <p:nvPr>
+            <p:ph type="sldNum" sz="quarter" idx="12"/>
+          </p:nvPr>
+        </p:nvSpPr>
+        <p:spPr/>
+        <p:txBody>
+          <a:bodyPr/>
+          <a:lstStyle/>
+          <a:p>
+            <a:fld id="{45C00377-489B-40EC-B059-26BDDD2E89B9}" type="slidenum">
+              <a:rPr lang="en-US" smtClean="0"/>
+              <a:pPr/>
+              <a:t>29</a:t>
+            </a:fld>
+            <a:endParaRPr lang="en-US" dirty="0"/>
+          </a:p>
+        </p:txBody>
+      </p:sp>
+      <p:pic>
+        <p:nvPicPr>
+          <p:cNvPr id="6" name="Picture 5">
+            <a:extLst>
+              <a:ext uri="{FF2B5EF4-FFF2-40B4-BE49-F238E27FC236}">
+                <a16:creationId xmlns:a16="http://schemas.microsoft.com/office/drawing/2014/main" id="{33DBAAD0-EAB3-75AD-D9CF-FA8A4201EAD5}"/>
+              </a:ext>
+            </a:extLst>
+          </p:cNvPr>
+          <p:cNvPicPr>
+            <a:picLocks noChangeAspect="1"/>
+          </p:cNvPicPr>
+          <p:nvPr/>
+        </p:nvPicPr>
+        <p:blipFill>
+          <a:blip r:embed="rId2"/>
+          <a:srcRect t="17477"/>
+          <a:stretch>
+            <a:fillRect/>
+          </a:stretch>
+        </p:blipFill>
+        <p:spPr>
+          <a:xfrm>
+            <a:off x="3591348" y="4732191"/>
+            <a:ext cx="1190791" cy="1147763"/>
+          </a:xfrm>
+          <a:prstGeom prst="rect">
+            <a:avLst/>
+          </a:prstGeom>
+        </p:spPr>
+      </p:pic>
+      <p:pic>
+        <p:nvPicPr>
+          <p:cNvPr id="8" name="Picture 7">
+            <a:extLst>
+              <a:ext uri="{FF2B5EF4-FFF2-40B4-BE49-F238E27FC236}">
+                <a16:creationId xmlns:a16="http://schemas.microsoft.com/office/drawing/2014/main" id="{2604EB65-D7BB-8ECF-7D60-829A955DF303}"/>
+              </a:ext>
+            </a:extLst>
+          </p:cNvPr>
+          <p:cNvPicPr>
+            <a:picLocks noChangeAspect="1"/>
+          </p:cNvPicPr>
+          <p:nvPr/>
+        </p:nvPicPr>
+        <p:blipFill>
+          <a:blip r:embed="rId3"/>
+          <a:stretch>
+            <a:fillRect/>
+          </a:stretch>
+        </p:blipFill>
+        <p:spPr>
+          <a:xfrm>
+            <a:off x="6723551" y="4922196"/>
+            <a:ext cx="1152686" cy="1105054"/>
+          </a:xfrm>
+          <a:prstGeom prst="rect">
+            <a:avLst/>
+          </a:prstGeom>
+        </p:spPr>
+      </p:pic>
     </p:spTree>
     <p:extLst>
       <p:ext uri="{BB962C8B-B14F-4D97-AF65-F5344CB8AC3E}">
-        <p14:creationId xmlns:p14="http://schemas.microsoft.com/office/powerpoint/2010/main" val="352407663"/>
+        <p14:creationId xmlns:p14="http://schemas.microsoft.com/office/powerpoint/2010/main" val="4293139581"/>
       </p:ext>
     </p:extLst>
   </p:cSld>
@@ -13254,198 +13612,6 @@
   <p:cSld>
     <p:spTree>
       <p:nvGrpSpPr>
-        <p:cNvPr id="1" name=""/>
-        <p:cNvGrpSpPr/>
-        <p:nvPr/>
-      </p:nvGrpSpPr>
-      <p:grpSpPr>
-        <a:xfrm>
-          <a:off x="0" y="0"/>
-          <a:ext cx="0" cy="0"/>
-          <a:chOff x="0" y="0"/>
-          <a:chExt cx="0" cy="0"/>
-        </a:xfrm>
-      </p:grpSpPr>
-      <p:sp>
-        <p:nvSpPr>
-          <p:cNvPr id="2" name="Title 1">
-            <a:extLst>
-              <a:ext uri="{FF2B5EF4-FFF2-40B4-BE49-F238E27FC236}">
-                <a16:creationId xmlns:a16="http://schemas.microsoft.com/office/drawing/2014/main" id="{285F1593-F2E7-A0A0-4235-5DCA483B9338}"/>
-              </a:ext>
-            </a:extLst>
-          </p:cNvPr>
-          <p:cNvSpPr>
-            <a:spLocks noGrp="1"/>
-          </p:cNvSpPr>
-          <p:nvPr>
-            <p:ph type="title"/>
-          </p:nvPr>
-        </p:nvSpPr>
-        <p:spPr/>
-        <p:txBody>
-          <a:bodyPr/>
-          <a:lstStyle/>
-          <a:p>
-            <a:r>
-              <a:rPr lang="en-US" dirty="0"/>
-              <a:t>distribution</a:t>
-            </a:r>
-          </a:p>
-        </p:txBody>
-      </p:sp>
-      <p:sp>
-        <p:nvSpPr>
-          <p:cNvPr id="3" name="Content Placeholder 2">
-            <a:extLst>
-              <a:ext uri="{FF2B5EF4-FFF2-40B4-BE49-F238E27FC236}">
-                <a16:creationId xmlns:a16="http://schemas.microsoft.com/office/drawing/2014/main" id="{4BC7D4B5-3BEA-A604-109D-2E41CFA31900}"/>
-              </a:ext>
-            </a:extLst>
-          </p:cNvPr>
-          <p:cNvSpPr>
-            <a:spLocks noGrp="1"/>
-          </p:cNvSpPr>
-          <p:nvPr>
-            <p:ph idx="1"/>
-          </p:nvPr>
-        </p:nvSpPr>
-        <p:spPr/>
-        <p:txBody>
-          <a:bodyPr/>
-          <a:lstStyle/>
-          <a:p>
-            <a:r>
-              <a:rPr lang="en-US" dirty="0"/>
-              <a:t>Histograms: Player height distribution, shot distance distribution</a:t>
-            </a:r>
-          </a:p>
-          <a:p>
-            <a:r>
-              <a:rPr lang="en-US" dirty="0"/>
-              <a:t>Box plots: Comparing stat distributions across positions or teams</a:t>
-            </a:r>
-          </a:p>
-          <a:p>
-            <a:r>
-              <a:rPr lang="en-US" dirty="0"/>
-              <a:t>Violin plots: Showing full distribution shape (sprint speeds by position)</a:t>
-            </a:r>
-          </a:p>
-          <a:p>
-            <a:endParaRPr lang="en-US" dirty="0"/>
-          </a:p>
-        </p:txBody>
-      </p:sp>
-      <p:sp>
-        <p:nvSpPr>
-          <p:cNvPr id="4" name="Slide Number Placeholder 3">
-            <a:extLst>
-              <a:ext uri="{FF2B5EF4-FFF2-40B4-BE49-F238E27FC236}">
-                <a16:creationId xmlns:a16="http://schemas.microsoft.com/office/drawing/2014/main" id="{6F748B8C-B129-4165-BA11-6AF432CA74FF}"/>
-              </a:ext>
-            </a:extLst>
-          </p:cNvPr>
-          <p:cNvSpPr>
-            <a:spLocks noGrp="1"/>
-          </p:cNvSpPr>
-          <p:nvPr>
-            <p:ph type="sldNum" sz="quarter" idx="12"/>
-          </p:nvPr>
-        </p:nvSpPr>
-        <p:spPr/>
-        <p:txBody>
-          <a:bodyPr/>
-          <a:lstStyle/>
-          <a:p>
-            <a:fld id="{45C00377-489B-40EC-B059-26BDDD2E89B9}" type="slidenum">
-              <a:rPr lang="en-US" smtClean="0"/>
-              <a:pPr/>
-              <a:t>30</a:t>
-            </a:fld>
-            <a:endParaRPr lang="en-US" dirty="0"/>
-          </a:p>
-        </p:txBody>
-      </p:sp>
-      <p:pic>
-        <p:nvPicPr>
-          <p:cNvPr id="6" name="Picture 5">
-            <a:extLst>
-              <a:ext uri="{FF2B5EF4-FFF2-40B4-BE49-F238E27FC236}">
-                <a16:creationId xmlns:a16="http://schemas.microsoft.com/office/drawing/2014/main" id="{33DBAAD0-EAB3-75AD-D9CF-FA8A4201EAD5}"/>
-              </a:ext>
-            </a:extLst>
-          </p:cNvPr>
-          <p:cNvPicPr>
-            <a:picLocks noChangeAspect="1"/>
-          </p:cNvPicPr>
-          <p:nvPr/>
-        </p:nvPicPr>
-        <p:blipFill>
-          <a:blip r:embed="rId2"/>
-          <a:srcRect t="17477"/>
-          <a:stretch>
-            <a:fillRect/>
-          </a:stretch>
-        </p:blipFill>
-        <p:spPr>
-          <a:xfrm>
-            <a:off x="3591348" y="4732191"/>
-            <a:ext cx="1190791" cy="1147763"/>
-          </a:xfrm>
-          <a:prstGeom prst="rect">
-            <a:avLst/>
-          </a:prstGeom>
-        </p:spPr>
-      </p:pic>
-      <p:pic>
-        <p:nvPicPr>
-          <p:cNvPr id="8" name="Picture 7">
-            <a:extLst>
-              <a:ext uri="{FF2B5EF4-FFF2-40B4-BE49-F238E27FC236}">
-                <a16:creationId xmlns:a16="http://schemas.microsoft.com/office/drawing/2014/main" id="{2604EB65-D7BB-8ECF-7D60-829A955DF303}"/>
-              </a:ext>
-            </a:extLst>
-          </p:cNvPr>
-          <p:cNvPicPr>
-            <a:picLocks noChangeAspect="1"/>
-          </p:cNvPicPr>
-          <p:nvPr/>
-        </p:nvPicPr>
-        <p:blipFill>
-          <a:blip r:embed="rId3"/>
-          <a:stretch>
-            <a:fillRect/>
-          </a:stretch>
-        </p:blipFill>
-        <p:spPr>
-          <a:xfrm>
-            <a:off x="6723551" y="4922196"/>
-            <a:ext cx="1152686" cy="1105054"/>
-          </a:xfrm>
-          <a:prstGeom prst="rect">
-            <a:avLst/>
-          </a:prstGeom>
-        </p:spPr>
-      </p:pic>
-    </p:spTree>
-    <p:extLst>
-      <p:ext uri="{BB962C8B-B14F-4D97-AF65-F5344CB8AC3E}">
-        <p14:creationId xmlns:p14="http://schemas.microsoft.com/office/powerpoint/2010/main" val="4293139581"/>
-      </p:ext>
-    </p:extLst>
-  </p:cSld>
-  <p:clrMapOvr>
-    <a:masterClrMapping/>
-  </p:clrMapOvr>
-</p:sld>
-</file>
-
-<file path=ppt/slides/slide31.xml><?xml version="1.0" encoding="utf-8"?>
-<p:sld xmlns:a="http://schemas.openxmlformats.org/drawingml/2006/main" xmlns:r="http://schemas.openxmlformats.org/officeDocument/2006/relationships" xmlns:p="http://schemas.openxmlformats.org/presentationml/2006/main">
-  <p:cSld>
-    <p:spTree>
-      <p:nvGrpSpPr>
         <p:cNvPr id="1" name="">
           <a:extLst>
             <a:ext uri="{FF2B5EF4-FFF2-40B4-BE49-F238E27FC236}">
@@ -13515,8 +13681,29 @@
           <a:p>
             <a:r>
               <a:rPr lang="en-US" dirty="0"/>
-              <a:t>Violin plots: Showing full distribution shape</a:t>
-            </a:r>
+              <a:t>Histograms: Player height distribution, shot distance distribution</a:t>
+            </a:r>
+          </a:p>
+          <a:p>
+            <a:r>
+              <a:rPr lang="en-US" dirty="0"/>
+              <a:t>Density plots: Smoothed shooting ranges</a:t>
+            </a:r>
+          </a:p>
+          <a:p>
+            <a:r>
+              <a:rPr lang="en-US" dirty="0"/>
+              <a:t>Box plots: Comparing stat distributions across positions or teams</a:t>
+            </a:r>
+          </a:p>
+          <a:p>
+            <a:r>
+              <a:rPr lang="en-US" dirty="0"/>
+              <a:t>Violin plots: Showing full distribution shape (sprint speeds by position)</a:t>
+            </a:r>
+          </a:p>
+          <a:p>
+            <a:endParaRPr lang="en-US" dirty="0"/>
           </a:p>
         </p:txBody>
       </p:sp>
@@ -13544,7 +13731,7 @@
             <a:fld id="{45C00377-489B-40EC-B059-26BDDD2E89B9}" type="slidenum">
               <a:rPr lang="en-US" smtClean="0"/>
               <a:pPr/>
-              <a:t>31</a:t>
+              <a:t>30</a:t>
             </a:fld>
             <a:endParaRPr lang="en-US" dirty="0"/>
           </a:p>
@@ -13572,8 +13759,8 @@
         </p:blipFill>
         <p:spPr>
           <a:xfrm>
-            <a:off x="1151226" y="2085942"/>
-            <a:ext cx="9889548" cy="3447015"/>
+            <a:off x="3756139" y="4545840"/>
+            <a:ext cx="4679721" cy="1631123"/>
           </a:xfrm>
           <a:prstGeom prst="rect">
             <a:avLst/>
@@ -13584,6 +13771,235 @@
     <p:extLst>
       <p:ext uri="{BB962C8B-B14F-4D97-AF65-F5344CB8AC3E}">
         <p14:creationId xmlns:p14="http://schemas.microsoft.com/office/powerpoint/2010/main" val="1117615053"/>
+      </p:ext>
+    </p:extLst>
+  </p:cSld>
+  <p:clrMapOvr>
+    <a:masterClrMapping/>
+  </p:clrMapOvr>
+</p:sld>
+</file>
+
+<file path=ppt/slides/slide31.xml><?xml version="1.0" encoding="utf-8"?>
+<p:sld xmlns:a="http://schemas.openxmlformats.org/drawingml/2006/main" xmlns:r="http://schemas.openxmlformats.org/officeDocument/2006/relationships" xmlns:p="http://schemas.openxmlformats.org/presentationml/2006/main">
+  <p:cSld>
+    <p:spTree>
+      <p:nvGrpSpPr>
+        <p:cNvPr id="1" name=""/>
+        <p:cNvGrpSpPr/>
+        <p:nvPr/>
+      </p:nvGrpSpPr>
+      <p:grpSpPr>
+        <a:xfrm>
+          <a:off x="0" y="0"/>
+          <a:ext cx="0" cy="0"/>
+          <a:chOff x="0" y="0"/>
+          <a:chExt cx="0" cy="0"/>
+        </a:xfrm>
+      </p:grpSpPr>
+      <p:sp>
+        <p:nvSpPr>
+          <p:cNvPr id="2" name="Title 1">
+            <a:extLst>
+              <a:ext uri="{FF2B5EF4-FFF2-40B4-BE49-F238E27FC236}">
+                <a16:creationId xmlns:a16="http://schemas.microsoft.com/office/drawing/2014/main" id="{22E57BA0-78E2-3F36-B68F-77FFEAAD4AA5}"/>
+              </a:ext>
+            </a:extLst>
+          </p:cNvPr>
+          <p:cNvSpPr>
+            <a:spLocks noGrp="1"/>
+          </p:cNvSpPr>
+          <p:nvPr>
+            <p:ph type="title"/>
+          </p:nvPr>
+        </p:nvSpPr>
+        <p:spPr/>
+        <p:txBody>
+          <a:bodyPr>
+            <a:normAutofit/>
+          </a:bodyPr>
+          <a:lstStyle/>
+          <a:p>
+            <a:r>
+              <a:rPr lang="en-US" dirty="0"/>
+              <a:t>Comparisons (rank)</a:t>
+            </a:r>
+          </a:p>
+        </p:txBody>
+      </p:sp>
+      <p:sp>
+        <p:nvSpPr>
+          <p:cNvPr id="3" name="Content Placeholder 2">
+            <a:extLst>
+              <a:ext uri="{FF2B5EF4-FFF2-40B4-BE49-F238E27FC236}">
+                <a16:creationId xmlns:a16="http://schemas.microsoft.com/office/drawing/2014/main" id="{F0D4F734-6154-A9C8-A362-34EB9DF03C1D}"/>
+              </a:ext>
+            </a:extLst>
+          </p:cNvPr>
+          <p:cNvSpPr>
+            <a:spLocks noGrp="1"/>
+          </p:cNvSpPr>
+          <p:nvPr>
+            <p:ph idx="1"/>
+          </p:nvPr>
+        </p:nvSpPr>
+        <p:spPr/>
+        <p:txBody>
+          <a:bodyPr/>
+          <a:lstStyle/>
+          <a:p>
+            <a:r>
+              <a:rPr lang="en-US" dirty="0"/>
+              <a:t>Bar charts: Simple stat comparisons (points per game by player)</a:t>
+            </a:r>
+          </a:p>
+          <a:p>
+            <a:r>
+              <a:rPr lang="en-US" dirty="0"/>
+              <a:t>Grouped/stacked bars: Multi-category comparisons (shooting % by zone)</a:t>
+            </a:r>
+          </a:p>
+          <a:p>
+            <a:r>
+              <a:rPr lang="en-US" dirty="0"/>
+              <a:t>Dot plots: Clean alternative to bars, especially for rankings</a:t>
+            </a:r>
+          </a:p>
+          <a:p>
+            <a:r>
+              <a:rPr lang="en-US" dirty="0"/>
+              <a:t>Radar/spider charts: Multi-dimensional player comparisons (use cautiously!)</a:t>
+            </a:r>
+          </a:p>
+          <a:p>
+            <a:endParaRPr lang="en-US" dirty="0"/>
+          </a:p>
+        </p:txBody>
+      </p:sp>
+      <p:sp>
+        <p:nvSpPr>
+          <p:cNvPr id="4" name="Slide Number Placeholder 3">
+            <a:extLst>
+              <a:ext uri="{FF2B5EF4-FFF2-40B4-BE49-F238E27FC236}">
+                <a16:creationId xmlns:a16="http://schemas.microsoft.com/office/drawing/2014/main" id="{E2910D20-7BB4-8BCC-314D-CF805A8463C6}"/>
+              </a:ext>
+            </a:extLst>
+          </p:cNvPr>
+          <p:cNvSpPr>
+            <a:spLocks noGrp="1"/>
+          </p:cNvSpPr>
+          <p:nvPr>
+            <p:ph type="sldNum" sz="quarter" idx="12"/>
+          </p:nvPr>
+        </p:nvSpPr>
+        <p:spPr/>
+        <p:txBody>
+          <a:bodyPr/>
+          <a:lstStyle/>
+          <a:p>
+            <a:fld id="{45C00377-489B-40EC-B059-26BDDD2E89B9}" type="slidenum">
+              <a:rPr lang="en-US" smtClean="0"/>
+              <a:pPr/>
+              <a:t>31</a:t>
+            </a:fld>
+            <a:endParaRPr lang="en-US" dirty="0"/>
+          </a:p>
+        </p:txBody>
+      </p:sp>
+      <p:pic>
+        <p:nvPicPr>
+          <p:cNvPr id="6" name="Picture 5">
+            <a:extLst>
+              <a:ext uri="{FF2B5EF4-FFF2-40B4-BE49-F238E27FC236}">
+                <a16:creationId xmlns:a16="http://schemas.microsoft.com/office/drawing/2014/main" id="{CAD81678-C0F1-63E8-65AF-98C56EAB86E9}"/>
+              </a:ext>
+            </a:extLst>
+          </p:cNvPr>
+          <p:cNvPicPr>
+            <a:picLocks noChangeAspect="1"/>
+          </p:cNvPicPr>
+          <p:nvPr/>
+        </p:nvPicPr>
+        <p:blipFill>
+          <a:blip r:embed="rId2"/>
+          <a:stretch>
+            <a:fillRect/>
+          </a:stretch>
+        </p:blipFill>
+        <p:spPr>
+          <a:xfrm>
+            <a:off x="2976161" y="5033803"/>
+            <a:ext cx="1200318" cy="1143160"/>
+          </a:xfrm>
+          <a:prstGeom prst="rect">
+            <a:avLst/>
+          </a:prstGeom>
+        </p:spPr>
+      </p:pic>
+      <p:pic>
+        <p:nvPicPr>
+          <p:cNvPr id="8" name="Picture 7">
+            <a:extLst>
+              <a:ext uri="{FF2B5EF4-FFF2-40B4-BE49-F238E27FC236}">
+                <a16:creationId xmlns:a16="http://schemas.microsoft.com/office/drawing/2014/main" id="{D60DA242-D6F9-4C30-13D7-8348F4760F5E}"/>
+              </a:ext>
+            </a:extLst>
+          </p:cNvPr>
+          <p:cNvPicPr>
+            <a:picLocks noChangeAspect="1"/>
+          </p:cNvPicPr>
+          <p:nvPr/>
+        </p:nvPicPr>
+        <p:blipFill>
+          <a:blip r:embed="rId3"/>
+          <a:stretch>
+            <a:fillRect/>
+          </a:stretch>
+        </p:blipFill>
+        <p:spPr>
+          <a:xfrm>
+            <a:off x="5423454" y="4988083"/>
+            <a:ext cx="1162212" cy="1105054"/>
+          </a:xfrm>
+          <a:prstGeom prst="rect">
+            <a:avLst/>
+          </a:prstGeom>
+        </p:spPr>
+      </p:pic>
+      <p:pic>
+        <p:nvPicPr>
+          <p:cNvPr id="10" name="Picture 9">
+            <a:extLst>
+              <a:ext uri="{FF2B5EF4-FFF2-40B4-BE49-F238E27FC236}">
+                <a16:creationId xmlns:a16="http://schemas.microsoft.com/office/drawing/2014/main" id="{5EB175A5-9673-0A59-A229-9DF3A738048B}"/>
+              </a:ext>
+            </a:extLst>
+          </p:cNvPr>
+          <p:cNvPicPr>
+            <a:picLocks noChangeAspect="1"/>
+          </p:cNvPicPr>
+          <p:nvPr/>
+        </p:nvPicPr>
+        <p:blipFill>
+          <a:blip r:embed="rId4"/>
+          <a:stretch>
+            <a:fillRect/>
+          </a:stretch>
+        </p:blipFill>
+        <p:spPr>
+          <a:xfrm>
+            <a:off x="8398153" y="4959504"/>
+            <a:ext cx="1143160" cy="1133633"/>
+          </a:xfrm>
+          <a:prstGeom prst="rect">
+            <a:avLst/>
+          </a:prstGeom>
+        </p:spPr>
+      </p:pic>
+    </p:spTree>
+    <p:extLst>
+      <p:ext uri="{BB962C8B-B14F-4D97-AF65-F5344CB8AC3E}">
+        <p14:creationId xmlns:p14="http://schemas.microsoft.com/office/powerpoint/2010/main" val="2454783734"/>
       </p:ext>
     </p:extLst>
   </p:cSld>
@@ -13615,7 +14031,202 @@
           <p:cNvPr id="2" name="Title 1">
             <a:extLst>
               <a:ext uri="{FF2B5EF4-FFF2-40B4-BE49-F238E27FC236}">
-                <a16:creationId xmlns:a16="http://schemas.microsoft.com/office/drawing/2014/main" id="{FBFD6EB5-FEC2-47DE-01A3-F0E170543F3C}"/>
+                <a16:creationId xmlns:a16="http://schemas.microsoft.com/office/drawing/2014/main" id="{4013BC37-5B5E-79EE-8A29-38BC58CF756A}"/>
+              </a:ext>
+            </a:extLst>
+          </p:cNvPr>
+          <p:cNvSpPr>
+            <a:spLocks noGrp="1"/>
+          </p:cNvSpPr>
+          <p:nvPr>
+            <p:ph type="title"/>
+          </p:nvPr>
+        </p:nvSpPr>
+        <p:spPr/>
+        <p:txBody>
+          <a:bodyPr/>
+          <a:lstStyle/>
+          <a:p>
+            <a:r>
+              <a:rPr lang="en-US" dirty="0"/>
+              <a:t>Relationships</a:t>
+            </a:r>
+          </a:p>
+        </p:txBody>
+      </p:sp>
+      <p:sp>
+        <p:nvSpPr>
+          <p:cNvPr id="3" name="Content Placeholder 2">
+            <a:extLst>
+              <a:ext uri="{FF2B5EF4-FFF2-40B4-BE49-F238E27FC236}">
+                <a16:creationId xmlns:a16="http://schemas.microsoft.com/office/drawing/2014/main" id="{A3DF0359-11C9-47B0-F490-B0B74F7AB7F9}"/>
+              </a:ext>
+            </a:extLst>
+          </p:cNvPr>
+          <p:cNvSpPr>
+            <a:spLocks noGrp="1"/>
+          </p:cNvSpPr>
+          <p:nvPr>
+            <p:ph idx="1"/>
+          </p:nvPr>
+        </p:nvSpPr>
+        <p:spPr/>
+        <p:txBody>
+          <a:bodyPr/>
+          <a:lstStyle/>
+          <a:p>
+            <a:r>
+              <a:rPr lang="en-US" dirty="0"/>
+              <a:t>Scatter plots: Exploring correlations (height vs. rebounding)</a:t>
+            </a:r>
+          </a:p>
+          <a:p>
+            <a:r>
+              <a:rPr lang="en-US" dirty="0"/>
+              <a:t>Correlation matrices: Multiple pairwise correlation</a:t>
+            </a:r>
+          </a:p>
+          <a:p>
+            <a:r>
+              <a:rPr lang="en-US" dirty="0" err="1"/>
+              <a:t>Hexbin</a:t>
+            </a:r>
+            <a:r>
+              <a:rPr lang="en-US" dirty="0"/>
+              <a:t> plots: scatter plots with aggregation (shot charts)</a:t>
+            </a:r>
+          </a:p>
+          <a:p>
+            <a:endParaRPr lang="en-US" dirty="0"/>
+          </a:p>
+        </p:txBody>
+      </p:sp>
+      <p:sp>
+        <p:nvSpPr>
+          <p:cNvPr id="4" name="Slide Number Placeholder 3">
+            <a:extLst>
+              <a:ext uri="{FF2B5EF4-FFF2-40B4-BE49-F238E27FC236}">
+                <a16:creationId xmlns:a16="http://schemas.microsoft.com/office/drawing/2014/main" id="{79314446-E47F-0111-7142-2A51636E37A1}"/>
+              </a:ext>
+            </a:extLst>
+          </p:cNvPr>
+          <p:cNvSpPr>
+            <a:spLocks noGrp="1"/>
+          </p:cNvSpPr>
+          <p:nvPr>
+            <p:ph type="sldNum" sz="quarter" idx="12"/>
+          </p:nvPr>
+        </p:nvSpPr>
+        <p:spPr/>
+        <p:txBody>
+          <a:bodyPr/>
+          <a:lstStyle/>
+          <a:p>
+            <a:fld id="{45C00377-489B-40EC-B059-26BDDD2E89B9}" type="slidenum">
+              <a:rPr lang="en-US" smtClean="0"/>
+              <a:pPr/>
+              <a:t>32</a:t>
+            </a:fld>
+            <a:endParaRPr lang="en-US" dirty="0"/>
+          </a:p>
+        </p:txBody>
+      </p:sp>
+      <p:pic>
+        <p:nvPicPr>
+          <p:cNvPr id="6" name="Picture 5">
+            <a:extLst>
+              <a:ext uri="{FF2B5EF4-FFF2-40B4-BE49-F238E27FC236}">
+                <a16:creationId xmlns:a16="http://schemas.microsoft.com/office/drawing/2014/main" id="{B916F363-37A5-B7AB-C478-A7D8C244EF93}"/>
+              </a:ext>
+            </a:extLst>
+          </p:cNvPr>
+          <p:cNvPicPr>
+            <a:picLocks noChangeAspect="1"/>
+          </p:cNvPicPr>
+          <p:nvPr/>
+        </p:nvPicPr>
+        <p:blipFill>
+          <a:blip r:embed="rId2"/>
+          <a:stretch>
+            <a:fillRect/>
+          </a:stretch>
+        </p:blipFill>
+        <p:spPr>
+          <a:xfrm>
+            <a:off x="3195879" y="4823622"/>
+            <a:ext cx="1086002" cy="1114581"/>
+          </a:xfrm>
+          <a:prstGeom prst="rect">
+            <a:avLst/>
+          </a:prstGeom>
+        </p:spPr>
+      </p:pic>
+      <p:pic>
+        <p:nvPicPr>
+          <p:cNvPr id="8" name="Picture 7">
+            <a:extLst>
+              <a:ext uri="{FF2B5EF4-FFF2-40B4-BE49-F238E27FC236}">
+                <a16:creationId xmlns:a16="http://schemas.microsoft.com/office/drawing/2014/main" id="{55CA5EA7-974A-D1DA-43C5-B2F7166BC794}"/>
+              </a:ext>
+            </a:extLst>
+          </p:cNvPr>
+          <p:cNvPicPr>
+            <a:picLocks noChangeAspect="1"/>
+          </p:cNvPicPr>
+          <p:nvPr/>
+        </p:nvPicPr>
+        <p:blipFill>
+          <a:blip r:embed="rId3"/>
+          <a:stretch>
+            <a:fillRect/>
+          </a:stretch>
+        </p:blipFill>
+        <p:spPr>
+          <a:xfrm>
+            <a:off x="6881097" y="4814096"/>
+            <a:ext cx="1152686" cy="1124107"/>
+          </a:xfrm>
+          <a:prstGeom prst="rect">
+            <a:avLst/>
+          </a:prstGeom>
+        </p:spPr>
+      </p:pic>
+    </p:spTree>
+    <p:extLst>
+      <p:ext uri="{BB962C8B-B14F-4D97-AF65-F5344CB8AC3E}">
+        <p14:creationId xmlns:p14="http://schemas.microsoft.com/office/powerpoint/2010/main" val="608507110"/>
+      </p:ext>
+    </p:extLst>
+  </p:cSld>
+  <p:clrMapOvr>
+    <a:masterClrMapping/>
+  </p:clrMapOvr>
+</p:sld>
+</file>
+
+<file path=ppt/slides/slide33.xml><?xml version="1.0" encoding="utf-8"?>
+<p:sld xmlns:a="http://schemas.openxmlformats.org/drawingml/2006/main" xmlns:r="http://schemas.openxmlformats.org/officeDocument/2006/relationships" xmlns:p="http://schemas.openxmlformats.org/presentationml/2006/main">
+  <p:cSld>
+    <p:spTree>
+      <p:nvGrpSpPr>
+        <p:cNvPr id="1" name=""/>
+        <p:cNvGrpSpPr/>
+        <p:nvPr/>
+      </p:nvGrpSpPr>
+      <p:grpSpPr>
+        <a:xfrm>
+          <a:off x="0" y="0"/>
+          <a:ext cx="0" cy="0"/>
+          <a:chOff x="0" y="0"/>
+          <a:chExt cx="0" cy="0"/>
+        </a:xfrm>
+      </p:grpSpPr>
+      <p:sp>
+        <p:nvSpPr>
+          <p:cNvPr id="2" name="Title 1">
+            <a:extLst>
+              <a:ext uri="{FF2B5EF4-FFF2-40B4-BE49-F238E27FC236}">
+                <a16:creationId xmlns:a16="http://schemas.microsoft.com/office/drawing/2014/main" id="{181BD59E-A5C2-40A2-C9F7-71E7A43142D1}"/>
               </a:ext>
             </a:extLst>
           </p:cNvPr>
@@ -13634,10 +14245,9 @@
           <a:lstStyle/>
           <a:p>
             <a:r>
-              <a:rPr lang="en-GB"/>
-              <a:t>Summary &amp; Looking Ahead</a:t>
-            </a:r>
-            <a:endParaRPr lang="en-US"/>
+              <a:rPr lang="en-US" dirty="0"/>
+              <a:t>Part-to-whole</a:t>
+            </a:r>
           </a:p>
         </p:txBody>
       </p:sp>
@@ -13646,7 +14256,7 @@
           <p:cNvPr id="3" name="Content Placeholder 2">
             <a:extLst>
               <a:ext uri="{FF2B5EF4-FFF2-40B4-BE49-F238E27FC236}">
-                <a16:creationId xmlns:a16="http://schemas.microsoft.com/office/drawing/2014/main" id="{B7781857-C6C4-CF29-7D9F-C7FCD74ECA0D}"/>
+                <a16:creationId xmlns:a16="http://schemas.microsoft.com/office/drawing/2014/main" id="{493A25C8-6278-66C0-8EAC-58A49D918EC1}"/>
               </a:ext>
             </a:extLst>
           </p:cNvPr>
@@ -13659,41 +14269,122 @@
         </p:nvSpPr>
         <p:spPr/>
         <p:txBody>
-          <a:bodyPr vert="horz" lIns="91440" tIns="45720" rIns="91440" bIns="45720" rtlCol="0" anchor="t">
-            <a:normAutofit/>
-          </a:bodyPr>
+          <a:bodyPr/>
           <a:lstStyle/>
           <a:p>
-            <a:pPr marL="0" indent="0">
-              <a:buNone/>
-            </a:pPr>
-            <a:endParaRPr lang="en-US" dirty="0"/>
-          </a:p>
-          <a:p>
             <a:r>
               <a:rPr lang="en-US" dirty="0"/>
-              <a:t>Next: </a:t>
-            </a:r>
-            <a:r>
-              <a:rPr lang="en-GB" dirty="0"/>
-              <a:t>Measures of </a:t>
-            </a:r>
-            <a:r>
-              <a:rPr lang="en-GB" dirty="0" err="1"/>
-              <a:t>center</a:t>
-            </a:r>
-            <a:r>
-              <a:rPr lang="en-GB" dirty="0"/>
-              <a:t>, spread, and distributions.</a:t>
-            </a:r>
-            <a:endParaRPr lang="en-US" dirty="0"/>
+              <a:t>Stacked bars: Composition of team offense (3PT vs. 2PT vs. FT)</a:t>
+            </a:r>
+          </a:p>
+          <a:p>
+            <a:r>
+              <a:rPr lang="en-US" dirty="0"/>
+              <a:t>Tree maps: Allocating playing time or usage</a:t>
+            </a:r>
+          </a:p>
+          <a:p>
+            <a:r>
+              <a:rPr lang="en-US" dirty="0"/>
+              <a:t>Pie charts: use cautiously</a:t>
+            </a:r>
           </a:p>
         </p:txBody>
       </p:sp>
+      <p:sp>
+        <p:nvSpPr>
+          <p:cNvPr id="4" name="Slide Number Placeholder 3">
+            <a:extLst>
+              <a:ext uri="{FF2B5EF4-FFF2-40B4-BE49-F238E27FC236}">
+                <a16:creationId xmlns:a16="http://schemas.microsoft.com/office/drawing/2014/main" id="{CF174C96-0ECF-F7B9-773A-D409FC351F67}"/>
+              </a:ext>
+            </a:extLst>
+          </p:cNvPr>
+          <p:cNvSpPr>
+            <a:spLocks noGrp="1"/>
+          </p:cNvSpPr>
+          <p:nvPr>
+            <p:ph type="sldNum" sz="quarter" idx="12"/>
+          </p:nvPr>
+        </p:nvSpPr>
+        <p:spPr/>
+        <p:txBody>
+          <a:bodyPr/>
+          <a:lstStyle/>
+          <a:p>
+            <a:fld id="{45C00377-489B-40EC-B059-26BDDD2E89B9}" type="slidenum">
+              <a:rPr lang="en-US" smtClean="0"/>
+              <a:pPr/>
+              <a:t>33</a:t>
+            </a:fld>
+            <a:endParaRPr lang="en-US" dirty="0"/>
+          </a:p>
+        </p:txBody>
+      </p:sp>
+      <p:pic>
+        <p:nvPicPr>
+          <p:cNvPr id="5" name="Picture 4">
+            <a:extLst>
+              <a:ext uri="{FF2B5EF4-FFF2-40B4-BE49-F238E27FC236}">
+                <a16:creationId xmlns:a16="http://schemas.microsoft.com/office/drawing/2014/main" id="{893999F2-3185-6899-67FA-BC71144ED44D}"/>
+              </a:ext>
+            </a:extLst>
+          </p:cNvPr>
+          <p:cNvPicPr>
+            <a:picLocks noChangeAspect="1"/>
+          </p:cNvPicPr>
+          <p:nvPr/>
+        </p:nvPicPr>
+        <p:blipFill>
+          <a:blip r:embed="rId2"/>
+          <a:stretch>
+            <a:fillRect/>
+          </a:stretch>
+        </p:blipFill>
+        <p:spPr>
+          <a:xfrm>
+            <a:off x="3705073" y="4324366"/>
+            <a:ext cx="1162212" cy="1105054"/>
+          </a:xfrm>
+          <a:prstGeom prst="rect">
+            <a:avLst/>
+          </a:prstGeom>
+        </p:spPr>
+      </p:pic>
+      <p:pic>
+        <p:nvPicPr>
+          <p:cNvPr id="7" name="Picture 6">
+            <a:extLst>
+              <a:ext uri="{FF2B5EF4-FFF2-40B4-BE49-F238E27FC236}">
+                <a16:creationId xmlns:a16="http://schemas.microsoft.com/office/drawing/2014/main" id="{3F7368AA-0850-42AA-F1C0-3EE8BB3CA88E}"/>
+              </a:ext>
+            </a:extLst>
+          </p:cNvPr>
+          <p:cNvPicPr>
+            <a:picLocks noChangeAspect="1"/>
+          </p:cNvPicPr>
+          <p:nvPr/>
+        </p:nvPicPr>
+        <p:blipFill>
+          <a:blip r:embed="rId3"/>
+          <a:stretch>
+            <a:fillRect/>
+          </a:stretch>
+        </p:blipFill>
+        <p:spPr>
+          <a:xfrm>
+            <a:off x="7138762" y="4267208"/>
+            <a:ext cx="1190791" cy="1162212"/>
+          </a:xfrm>
+          <a:prstGeom prst="rect">
+            <a:avLst/>
+          </a:prstGeom>
+        </p:spPr>
+      </p:pic>
     </p:spTree>
     <p:extLst>
       <p:ext uri="{BB962C8B-B14F-4D97-AF65-F5344CB8AC3E}">
-        <p14:creationId xmlns:p14="http://schemas.microsoft.com/office/powerpoint/2010/main" val="2206692154"/>
+        <p14:creationId xmlns:p14="http://schemas.microsoft.com/office/powerpoint/2010/main" val="4126343463"/>
       </p:ext>
     </p:extLst>
   </p:cSld>
@@ -13703,7 +14394,648 @@
 </p:sld>
 </file>
 
-<file path=ppt/slides/slide33.xml><?xml version="1.0" encoding="utf-8"?>
+<file path=ppt/slides/slide34.xml><?xml version="1.0" encoding="utf-8"?>
+<p:sld xmlns:a="http://schemas.openxmlformats.org/drawingml/2006/main" xmlns:r="http://schemas.openxmlformats.org/officeDocument/2006/relationships" xmlns:p="http://schemas.openxmlformats.org/presentationml/2006/main">
+  <p:cSld>
+    <p:spTree>
+      <p:nvGrpSpPr>
+        <p:cNvPr id="1" name=""/>
+        <p:cNvGrpSpPr/>
+        <p:nvPr/>
+      </p:nvGrpSpPr>
+      <p:grpSpPr>
+        <a:xfrm>
+          <a:off x="0" y="0"/>
+          <a:ext cx="0" cy="0"/>
+          <a:chOff x="0" y="0"/>
+          <a:chExt cx="0" cy="0"/>
+        </a:xfrm>
+      </p:grpSpPr>
+      <p:sp>
+        <p:nvSpPr>
+          <p:cNvPr id="2" name="Title 1">
+            <a:extLst>
+              <a:ext uri="{FF2B5EF4-FFF2-40B4-BE49-F238E27FC236}">
+                <a16:creationId xmlns:a16="http://schemas.microsoft.com/office/drawing/2014/main" id="{4A2080A0-119A-029C-E094-BDC0A5823392}"/>
+              </a:ext>
+            </a:extLst>
+          </p:cNvPr>
+          <p:cNvSpPr>
+            <a:spLocks noGrp="1"/>
+          </p:cNvSpPr>
+          <p:nvPr>
+            <p:ph type="title"/>
+          </p:nvPr>
+        </p:nvSpPr>
+        <p:spPr/>
+        <p:txBody>
+          <a:bodyPr>
+            <a:normAutofit/>
+          </a:bodyPr>
+          <a:lstStyle/>
+          <a:p>
+            <a:r>
+              <a:rPr lang="en-US" dirty="0"/>
+              <a:t>Time series</a:t>
+            </a:r>
+          </a:p>
+        </p:txBody>
+      </p:sp>
+      <p:sp>
+        <p:nvSpPr>
+          <p:cNvPr id="3" name="Content Placeholder 2">
+            <a:extLst>
+              <a:ext uri="{FF2B5EF4-FFF2-40B4-BE49-F238E27FC236}">
+                <a16:creationId xmlns:a16="http://schemas.microsoft.com/office/drawing/2014/main" id="{FDD91642-91F6-BA8F-B509-CEBCDF5AD953}"/>
+              </a:ext>
+            </a:extLst>
+          </p:cNvPr>
+          <p:cNvSpPr>
+            <a:spLocks noGrp="1"/>
+          </p:cNvSpPr>
+          <p:nvPr>
+            <p:ph idx="1"/>
+          </p:nvPr>
+        </p:nvSpPr>
+        <p:spPr/>
+        <p:txBody>
+          <a:bodyPr/>
+          <a:lstStyle/>
+          <a:p>
+            <a:r>
+              <a:rPr lang="en-US" dirty="0"/>
+              <a:t>Line charts: Performance over season, in-game momentum</a:t>
+            </a:r>
+          </a:p>
+          <a:p>
+            <a:r>
+              <a:rPr lang="en-US" dirty="0"/>
+              <a:t>Area charts: Cumulative stats over time</a:t>
+            </a:r>
+          </a:p>
+        </p:txBody>
+      </p:sp>
+      <p:sp>
+        <p:nvSpPr>
+          <p:cNvPr id="4" name="Slide Number Placeholder 3">
+            <a:extLst>
+              <a:ext uri="{FF2B5EF4-FFF2-40B4-BE49-F238E27FC236}">
+                <a16:creationId xmlns:a16="http://schemas.microsoft.com/office/drawing/2014/main" id="{9ABB9AAD-2CD6-09AE-9FF8-BD548FEC7802}"/>
+              </a:ext>
+            </a:extLst>
+          </p:cNvPr>
+          <p:cNvSpPr>
+            <a:spLocks noGrp="1"/>
+          </p:cNvSpPr>
+          <p:nvPr>
+            <p:ph type="sldNum" sz="quarter" idx="12"/>
+          </p:nvPr>
+        </p:nvSpPr>
+        <p:spPr/>
+        <p:txBody>
+          <a:bodyPr/>
+          <a:lstStyle/>
+          <a:p>
+            <a:fld id="{45C00377-489B-40EC-B059-26BDDD2E89B9}" type="slidenum">
+              <a:rPr lang="en-US" smtClean="0"/>
+              <a:pPr/>
+              <a:t>34</a:t>
+            </a:fld>
+            <a:endParaRPr lang="en-US" dirty="0"/>
+          </a:p>
+        </p:txBody>
+      </p:sp>
+      <p:pic>
+        <p:nvPicPr>
+          <p:cNvPr id="10" name="Picture 9">
+            <a:extLst>
+              <a:ext uri="{FF2B5EF4-FFF2-40B4-BE49-F238E27FC236}">
+                <a16:creationId xmlns:a16="http://schemas.microsoft.com/office/drawing/2014/main" id="{D1BF2DCB-CE0F-C097-09B5-DEE49F006A22}"/>
+              </a:ext>
+            </a:extLst>
+          </p:cNvPr>
+          <p:cNvPicPr>
+            <a:picLocks noChangeAspect="1"/>
+          </p:cNvPicPr>
+          <p:nvPr/>
+        </p:nvPicPr>
+        <p:blipFill>
+          <a:blip r:embed="rId2"/>
+          <a:stretch>
+            <a:fillRect/>
+          </a:stretch>
+        </p:blipFill>
+        <p:spPr>
+          <a:xfrm>
+            <a:off x="6482294" y="4590750"/>
+            <a:ext cx="2416458" cy="1310128"/>
+          </a:xfrm>
+          <a:prstGeom prst="rect">
+            <a:avLst/>
+          </a:prstGeom>
+        </p:spPr>
+      </p:pic>
+      <p:pic>
+        <p:nvPicPr>
+          <p:cNvPr id="12" name="Picture 11">
+            <a:extLst>
+              <a:ext uri="{FF2B5EF4-FFF2-40B4-BE49-F238E27FC236}">
+                <a16:creationId xmlns:a16="http://schemas.microsoft.com/office/drawing/2014/main" id="{DD78A14F-66FC-9220-D2E9-295543ED9EA4}"/>
+              </a:ext>
+            </a:extLst>
+          </p:cNvPr>
+          <p:cNvPicPr>
+            <a:picLocks noChangeAspect="1"/>
+          </p:cNvPicPr>
+          <p:nvPr/>
+        </p:nvPicPr>
+        <p:blipFill>
+          <a:blip r:embed="rId3"/>
+          <a:stretch>
+            <a:fillRect/>
+          </a:stretch>
+        </p:blipFill>
+        <p:spPr>
+          <a:xfrm>
+            <a:off x="2771503" y="4692649"/>
+            <a:ext cx="2416458" cy="1208229"/>
+          </a:xfrm>
+          <a:prstGeom prst="rect">
+            <a:avLst/>
+          </a:prstGeom>
+        </p:spPr>
+      </p:pic>
+    </p:spTree>
+    <p:extLst>
+      <p:ext uri="{BB962C8B-B14F-4D97-AF65-F5344CB8AC3E}">
+        <p14:creationId xmlns:p14="http://schemas.microsoft.com/office/powerpoint/2010/main" val="945909743"/>
+      </p:ext>
+    </p:extLst>
+  </p:cSld>
+  <p:clrMapOvr>
+    <a:masterClrMapping/>
+  </p:clrMapOvr>
+</p:sld>
+</file>
+
+<file path=ppt/slides/slide35.xml><?xml version="1.0" encoding="utf-8"?>
+<p:sld xmlns:a="http://schemas.openxmlformats.org/drawingml/2006/main" xmlns:r="http://schemas.openxmlformats.org/officeDocument/2006/relationships" xmlns:p="http://schemas.openxmlformats.org/presentationml/2006/main">
+  <p:cSld>
+    <p:spTree>
+      <p:nvGrpSpPr>
+        <p:cNvPr id="1" name=""/>
+        <p:cNvGrpSpPr/>
+        <p:nvPr/>
+      </p:nvGrpSpPr>
+      <p:grpSpPr>
+        <a:xfrm>
+          <a:off x="0" y="0"/>
+          <a:ext cx="0" cy="0"/>
+          <a:chOff x="0" y="0"/>
+          <a:chExt cx="0" cy="0"/>
+        </a:xfrm>
+      </p:grpSpPr>
+      <p:sp>
+        <p:nvSpPr>
+          <p:cNvPr id="2" name="Title 1">
+            <a:extLst>
+              <a:ext uri="{FF2B5EF4-FFF2-40B4-BE49-F238E27FC236}">
+                <a16:creationId xmlns:a16="http://schemas.microsoft.com/office/drawing/2014/main" id="{AA1D2F4B-C143-AA1B-2824-EC8B168807AC}"/>
+              </a:ext>
+            </a:extLst>
+          </p:cNvPr>
+          <p:cNvSpPr>
+            <a:spLocks noGrp="1"/>
+          </p:cNvSpPr>
+          <p:nvPr>
+            <p:ph type="title"/>
+          </p:nvPr>
+        </p:nvSpPr>
+        <p:spPr/>
+        <p:txBody>
+          <a:bodyPr>
+            <a:normAutofit/>
+          </a:bodyPr>
+          <a:lstStyle/>
+          <a:p>
+            <a:r>
+              <a:rPr lang="en-US" dirty="0"/>
+              <a:t>Spatial/Location data</a:t>
+            </a:r>
+          </a:p>
+        </p:txBody>
+      </p:sp>
+      <p:sp>
+        <p:nvSpPr>
+          <p:cNvPr id="3" name="Content Placeholder 2">
+            <a:extLst>
+              <a:ext uri="{FF2B5EF4-FFF2-40B4-BE49-F238E27FC236}">
+                <a16:creationId xmlns:a16="http://schemas.microsoft.com/office/drawing/2014/main" id="{1E6DC2B6-AA5B-2DF6-88F0-12D21D9C9695}"/>
+              </a:ext>
+            </a:extLst>
+          </p:cNvPr>
+          <p:cNvSpPr>
+            <a:spLocks noGrp="1"/>
+          </p:cNvSpPr>
+          <p:nvPr>
+            <p:ph idx="1"/>
+          </p:nvPr>
+        </p:nvSpPr>
+        <p:spPr/>
+        <p:txBody>
+          <a:bodyPr/>
+          <a:lstStyle/>
+          <a:p>
+            <a:r>
+              <a:rPr lang="en-US" dirty="0"/>
+              <a:t>Heat maps: Player positioning, shot locations</a:t>
+            </a:r>
+          </a:p>
+          <a:p>
+            <a:r>
+              <a:rPr lang="en-US" dirty="0"/>
+              <a:t>Contour plots: Density of activity on field/court</a:t>
+            </a:r>
+          </a:p>
+          <a:p>
+            <a:r>
+              <a:rPr lang="en-US" dirty="0"/>
+              <a:t>Field/court overlays: Context matters in sports</a:t>
+            </a:r>
+          </a:p>
+        </p:txBody>
+      </p:sp>
+      <p:sp>
+        <p:nvSpPr>
+          <p:cNvPr id="4" name="Slide Number Placeholder 3">
+            <a:extLst>
+              <a:ext uri="{FF2B5EF4-FFF2-40B4-BE49-F238E27FC236}">
+                <a16:creationId xmlns:a16="http://schemas.microsoft.com/office/drawing/2014/main" id="{44B8106C-0BCD-3CCE-0C04-6738F0845329}"/>
+              </a:ext>
+            </a:extLst>
+          </p:cNvPr>
+          <p:cNvSpPr>
+            <a:spLocks noGrp="1"/>
+          </p:cNvSpPr>
+          <p:nvPr>
+            <p:ph type="sldNum" sz="quarter" idx="12"/>
+          </p:nvPr>
+        </p:nvSpPr>
+        <p:spPr/>
+        <p:txBody>
+          <a:bodyPr/>
+          <a:lstStyle/>
+          <a:p>
+            <a:fld id="{45C00377-489B-40EC-B059-26BDDD2E89B9}" type="slidenum">
+              <a:rPr lang="en-US" smtClean="0"/>
+              <a:pPr/>
+              <a:t>35</a:t>
+            </a:fld>
+            <a:endParaRPr lang="en-US" dirty="0"/>
+          </a:p>
+        </p:txBody>
+      </p:sp>
+      <p:pic>
+        <p:nvPicPr>
+          <p:cNvPr id="6" name="Picture 5">
+            <a:extLst>
+              <a:ext uri="{FF2B5EF4-FFF2-40B4-BE49-F238E27FC236}">
+                <a16:creationId xmlns:a16="http://schemas.microsoft.com/office/drawing/2014/main" id="{ED288282-CC0B-EA10-4AD3-B3C3A2051F4C}"/>
+              </a:ext>
+            </a:extLst>
+          </p:cNvPr>
+          <p:cNvPicPr>
+            <a:picLocks noChangeAspect="1"/>
+          </p:cNvPicPr>
+          <p:nvPr/>
+        </p:nvPicPr>
+        <p:blipFill>
+          <a:blip r:embed="rId2"/>
+          <a:stretch>
+            <a:fillRect/>
+          </a:stretch>
+        </p:blipFill>
+        <p:spPr>
+          <a:xfrm>
+            <a:off x="1433056" y="4170865"/>
+            <a:ext cx="2000529" cy="2095792"/>
+          </a:xfrm>
+          <a:prstGeom prst="rect">
+            <a:avLst/>
+          </a:prstGeom>
+        </p:spPr>
+      </p:pic>
+      <p:pic>
+        <p:nvPicPr>
+          <p:cNvPr id="6146" name="Picture 2" descr="Solved: Searching for visualization Soccer heatmap - Microsoft Fabric  Community">
+            <a:extLst>
+              <a:ext uri="{FF2B5EF4-FFF2-40B4-BE49-F238E27FC236}">
+                <a16:creationId xmlns:a16="http://schemas.microsoft.com/office/drawing/2014/main" id="{D1E82D65-4E46-FAFD-C075-2E4DB03DADEB}"/>
+              </a:ext>
+            </a:extLst>
+          </p:cNvPr>
+          <p:cNvPicPr>
+            <a:picLocks noChangeAspect="1" noChangeArrowheads="1"/>
+          </p:cNvPicPr>
+          <p:nvPr/>
+        </p:nvPicPr>
+        <p:blipFill>
+          <a:blip r:embed="rId3">
+            <a:extLst>
+              <a:ext uri="{28A0092B-C50C-407E-A947-70E740481C1C}">
+                <a14:useLocalDpi xmlns:a14="http://schemas.microsoft.com/office/drawing/2010/main" val="0"/>
+              </a:ext>
+            </a:extLst>
+          </a:blip>
+          <a:srcRect/>
+          <a:stretch>
+            <a:fillRect/>
+          </a:stretch>
+        </p:blipFill>
+        <p:spPr bwMode="auto">
+          <a:xfrm>
+            <a:off x="8091944" y="4451204"/>
+            <a:ext cx="2667000" cy="1714500"/>
+          </a:xfrm>
+          <a:prstGeom prst="rect">
+            <a:avLst/>
+          </a:prstGeom>
+          <a:noFill/>
+          <a:extLst>
+            <a:ext uri="{909E8E84-426E-40DD-AFC4-6F175D3DCCD1}">
+              <a14:hiddenFill xmlns:a14="http://schemas.microsoft.com/office/drawing/2010/main">
+                <a:solidFill>
+                  <a:srgbClr val="FFFFFF"/>
+                </a:solidFill>
+              </a14:hiddenFill>
+            </a:ext>
+          </a:extLst>
+        </p:spPr>
+      </p:pic>
+      <p:pic>
+        <p:nvPicPr>
+          <p:cNvPr id="6148" name="Picture 4" descr="10 Shocking Stats from the Seahawks' Thrilling NFC Championship Victory">
+            <a:extLst>
+              <a:ext uri="{FF2B5EF4-FFF2-40B4-BE49-F238E27FC236}">
+                <a16:creationId xmlns:a16="http://schemas.microsoft.com/office/drawing/2014/main" id="{D09B586E-4E31-DF7B-EA62-E0EFE7976010}"/>
+              </a:ext>
+            </a:extLst>
+          </p:cNvPr>
+          <p:cNvPicPr>
+            <a:picLocks noChangeAspect="1" noChangeArrowheads="1"/>
+          </p:cNvPicPr>
+          <p:nvPr/>
+        </p:nvPicPr>
+        <p:blipFill>
+          <a:blip r:embed="rId4">
+            <a:extLst>
+              <a:ext uri="{28A0092B-C50C-407E-A947-70E740481C1C}">
+                <a14:useLocalDpi xmlns:a14="http://schemas.microsoft.com/office/drawing/2010/main" val="0"/>
+              </a:ext>
+            </a:extLst>
+          </a:blip>
+          <a:srcRect/>
+          <a:stretch>
+            <a:fillRect/>
+          </a:stretch>
+        </p:blipFill>
+        <p:spPr bwMode="auto">
+          <a:xfrm>
+            <a:off x="4465320" y="4377770"/>
+            <a:ext cx="2766060" cy="1844040"/>
+          </a:xfrm>
+          <a:prstGeom prst="rect">
+            <a:avLst/>
+          </a:prstGeom>
+          <a:noFill/>
+          <a:extLst>
+            <a:ext uri="{909E8E84-426E-40DD-AFC4-6F175D3DCCD1}">
+              <a14:hiddenFill xmlns:a14="http://schemas.microsoft.com/office/drawing/2010/main">
+                <a:solidFill>
+                  <a:srgbClr val="FFFFFF"/>
+                </a:solidFill>
+              </a14:hiddenFill>
+            </a:ext>
+          </a:extLst>
+        </p:spPr>
+      </p:pic>
+    </p:spTree>
+    <p:extLst>
+      <p:ext uri="{BB962C8B-B14F-4D97-AF65-F5344CB8AC3E}">
+        <p14:creationId xmlns:p14="http://schemas.microsoft.com/office/powerpoint/2010/main" val="3360124950"/>
+      </p:ext>
+    </p:extLst>
+  </p:cSld>
+  <p:clrMapOvr>
+    <a:masterClrMapping/>
+  </p:clrMapOvr>
+</p:sld>
+</file>
+
+<file path=ppt/slides/slide36.xml><?xml version="1.0" encoding="utf-8"?>
+<p:sld xmlns:a="http://schemas.openxmlformats.org/drawingml/2006/main" xmlns:r="http://schemas.openxmlformats.org/officeDocument/2006/relationships" xmlns:p="http://schemas.openxmlformats.org/presentationml/2006/main">
+  <p:cSld>
+    <p:spTree>
+      <p:nvGrpSpPr>
+        <p:cNvPr id="1" name=""/>
+        <p:cNvGrpSpPr/>
+        <p:nvPr/>
+      </p:nvGrpSpPr>
+      <p:grpSpPr>
+        <a:xfrm>
+          <a:off x="0" y="0"/>
+          <a:ext cx="0" cy="0"/>
+          <a:chOff x="0" y="0"/>
+          <a:chExt cx="0" cy="0"/>
+        </a:xfrm>
+      </p:grpSpPr>
+      <p:sp>
+        <p:nvSpPr>
+          <p:cNvPr id="2" name="Title 1">
+            <a:extLst>
+              <a:ext uri="{FF2B5EF4-FFF2-40B4-BE49-F238E27FC236}">
+                <a16:creationId xmlns:a16="http://schemas.microsoft.com/office/drawing/2014/main" id="{DFC11479-4465-E501-306F-6DE88AC41277}"/>
+              </a:ext>
+            </a:extLst>
+          </p:cNvPr>
+          <p:cNvSpPr>
+            <a:spLocks noGrp="1"/>
+          </p:cNvSpPr>
+          <p:nvPr>
+            <p:ph type="title"/>
+          </p:nvPr>
+        </p:nvSpPr>
+        <p:spPr/>
+        <p:txBody>
+          <a:bodyPr/>
+          <a:lstStyle/>
+          <a:p>
+            <a:r>
+              <a:rPr lang="en-US" dirty="0"/>
+              <a:t>Bad choices</a:t>
+            </a:r>
+          </a:p>
+        </p:txBody>
+      </p:sp>
+      <p:sp>
+        <p:nvSpPr>
+          <p:cNvPr id="3" name="Content Placeholder 2">
+            <a:extLst>
+              <a:ext uri="{FF2B5EF4-FFF2-40B4-BE49-F238E27FC236}">
+                <a16:creationId xmlns:a16="http://schemas.microsoft.com/office/drawing/2014/main" id="{71AAC521-CE38-4A1D-9175-A63CF81329F8}"/>
+              </a:ext>
+            </a:extLst>
+          </p:cNvPr>
+          <p:cNvSpPr>
+            <a:spLocks noGrp="1"/>
+          </p:cNvSpPr>
+          <p:nvPr>
+            <p:ph idx="1"/>
+          </p:nvPr>
+        </p:nvSpPr>
+        <p:spPr/>
+        <p:txBody>
+          <a:bodyPr/>
+          <a:lstStyle/>
+          <a:p>
+            <a:endParaRPr lang="en-US"/>
+          </a:p>
+        </p:txBody>
+      </p:sp>
+      <p:pic>
+        <p:nvPicPr>
+          <p:cNvPr id="4" name="Picture 3">
+            <a:extLst>
+              <a:ext uri="{FF2B5EF4-FFF2-40B4-BE49-F238E27FC236}">
+                <a16:creationId xmlns:a16="http://schemas.microsoft.com/office/drawing/2014/main" id="{F2B421D9-8E71-DC15-61CB-D81A16C98A8E}"/>
+              </a:ext>
+            </a:extLst>
+          </p:cNvPr>
+          <p:cNvPicPr>
+            <a:picLocks noChangeAspect="1"/>
+          </p:cNvPicPr>
+          <p:nvPr/>
+        </p:nvPicPr>
+        <p:blipFill>
+          <a:blip r:embed="rId2"/>
+          <a:stretch>
+            <a:fillRect/>
+          </a:stretch>
+        </p:blipFill>
+        <p:spPr>
+          <a:xfrm>
+            <a:off x="7525770" y="1463539"/>
+            <a:ext cx="2692288" cy="2247652"/>
+          </a:xfrm>
+          <a:prstGeom prst="rect">
+            <a:avLst/>
+          </a:prstGeom>
+        </p:spPr>
+      </p:pic>
+      <p:pic>
+        <p:nvPicPr>
+          <p:cNvPr id="5" name="Picture 4">
+            <a:extLst>
+              <a:ext uri="{FF2B5EF4-FFF2-40B4-BE49-F238E27FC236}">
+                <a16:creationId xmlns:a16="http://schemas.microsoft.com/office/drawing/2014/main" id="{6B2D9648-23E3-1761-DBB6-2C273BF309B5}"/>
+              </a:ext>
+            </a:extLst>
+          </p:cNvPr>
+          <p:cNvPicPr>
+            <a:picLocks noChangeAspect="1"/>
+          </p:cNvPicPr>
+          <p:nvPr/>
+        </p:nvPicPr>
+        <p:blipFill>
+          <a:blip r:embed="rId3"/>
+          <a:stretch>
+            <a:fillRect/>
+          </a:stretch>
+        </p:blipFill>
+        <p:spPr>
+          <a:xfrm>
+            <a:off x="1580849" y="1441937"/>
+            <a:ext cx="3491783" cy="2433376"/>
+          </a:xfrm>
+          <a:prstGeom prst="rect">
+            <a:avLst/>
+          </a:prstGeom>
+        </p:spPr>
+      </p:pic>
+      <p:pic>
+        <p:nvPicPr>
+          <p:cNvPr id="6" name="Picture 5">
+            <a:extLst>
+              <a:ext uri="{FF2B5EF4-FFF2-40B4-BE49-F238E27FC236}">
+                <a16:creationId xmlns:a16="http://schemas.microsoft.com/office/drawing/2014/main" id="{3334F3AA-C8D6-4C78-EF7B-B4BB0741B44A}"/>
+              </a:ext>
+            </a:extLst>
+          </p:cNvPr>
+          <p:cNvPicPr>
+            <a:picLocks noChangeAspect="1"/>
+          </p:cNvPicPr>
+          <p:nvPr/>
+        </p:nvPicPr>
+        <p:blipFill>
+          <a:blip r:embed="rId4"/>
+          <a:stretch>
+            <a:fillRect/>
+          </a:stretch>
+        </p:blipFill>
+        <p:spPr>
+          <a:xfrm>
+            <a:off x="1562478" y="4039435"/>
+            <a:ext cx="3510154" cy="2369263"/>
+          </a:xfrm>
+          <a:prstGeom prst="rect">
+            <a:avLst/>
+          </a:prstGeom>
+        </p:spPr>
+      </p:pic>
+      <p:pic>
+        <p:nvPicPr>
+          <p:cNvPr id="7" name="Picture 6">
+            <a:extLst>
+              <a:ext uri="{FF2B5EF4-FFF2-40B4-BE49-F238E27FC236}">
+                <a16:creationId xmlns:a16="http://schemas.microsoft.com/office/drawing/2014/main" id="{23B7E74D-9ACB-909D-FE77-20B13180FD01}"/>
+              </a:ext>
+            </a:extLst>
+          </p:cNvPr>
+          <p:cNvPicPr>
+            <a:picLocks noChangeAspect="1"/>
+          </p:cNvPicPr>
+          <p:nvPr/>
+        </p:nvPicPr>
+        <p:blipFill>
+          <a:blip r:embed="rId5"/>
+          <a:stretch>
+            <a:fillRect/>
+          </a:stretch>
+        </p:blipFill>
+        <p:spPr>
+          <a:xfrm>
+            <a:off x="7119369" y="3875313"/>
+            <a:ext cx="3383231" cy="2533385"/>
+          </a:xfrm>
+          <a:prstGeom prst="rect">
+            <a:avLst/>
+          </a:prstGeom>
+        </p:spPr>
+      </p:pic>
+    </p:spTree>
+    <p:extLst>
+      <p:ext uri="{BB962C8B-B14F-4D97-AF65-F5344CB8AC3E}">
+        <p14:creationId xmlns:p14="http://schemas.microsoft.com/office/powerpoint/2010/main" val="2735004089"/>
+      </p:ext>
+    </p:extLst>
+  </p:cSld>
+  <p:clrMapOvr>
+    <a:masterClrMapping/>
+  </p:clrMapOvr>
+</p:sld>
+</file>
+
+<file path=ppt/slides/slide37.xml><?xml version="1.0" encoding="utf-8"?>
 <p:sld xmlns:a="http://schemas.openxmlformats.org/drawingml/2006/main" xmlns:r="http://schemas.openxmlformats.org/officeDocument/2006/relationships" xmlns:p="http://schemas.openxmlformats.org/presentationml/2006/main" show="0">
   <p:cSld>
     <p:spTree>

--- a/pptx/Lecture7.pptx
+++ b/pptx/Lecture7.pptx
@@ -36,13 +36,13 @@
     <p:sldId id="320" r:id="rId27"/>
     <p:sldId id="370" r:id="rId28"/>
     <p:sldId id="321" r:id="rId29"/>
-    <p:sldId id="329" r:id="rId30"/>
-    <p:sldId id="353" r:id="rId31"/>
-    <p:sldId id="330" r:id="rId32"/>
-    <p:sldId id="331" r:id="rId33"/>
-    <p:sldId id="334" r:id="rId34"/>
-    <p:sldId id="332" r:id="rId35"/>
-    <p:sldId id="333" r:id="rId36"/>
+    <p:sldId id="330" r:id="rId30"/>
+    <p:sldId id="329" r:id="rId31"/>
+    <p:sldId id="331" r:id="rId32"/>
+    <p:sldId id="334" r:id="rId33"/>
+    <p:sldId id="332" r:id="rId34"/>
+    <p:sldId id="333" r:id="rId35"/>
+    <p:sldId id="353" r:id="rId36"/>
     <p:sldId id="366" r:id="rId37"/>
     <p:sldId id="369" r:id="rId38"/>
   </p:sldIdLst>
@@ -952,6 +952,105 @@
 </p:notes>
 </file>
 
+<file path=ppt/notesSlides/notesSlide11.xml><?xml version="1.0" encoding="utf-8"?>
+<p:notes xmlns:a="http://schemas.openxmlformats.org/drawingml/2006/main" xmlns:r="http://schemas.openxmlformats.org/officeDocument/2006/relationships" xmlns:p="http://schemas.openxmlformats.org/presentationml/2006/main">
+  <p:cSld>
+    <p:spTree>
+      <p:nvGrpSpPr>
+        <p:cNvPr id="1" name=""/>
+        <p:cNvGrpSpPr/>
+        <p:nvPr/>
+      </p:nvGrpSpPr>
+      <p:grpSpPr>
+        <a:xfrm>
+          <a:off x="0" y="0"/>
+          <a:ext cx="0" cy="0"/>
+          <a:chOff x="0" y="0"/>
+          <a:chExt cx="0" cy="0"/>
+        </a:xfrm>
+      </p:grpSpPr>
+      <p:sp>
+        <p:nvSpPr>
+          <p:cNvPr id="2" name="Slide Image Placeholder 1"/>
+          <p:cNvSpPr>
+            <a:spLocks noGrp="1" noRot="1" noChangeAspect="1"/>
+          </p:cNvSpPr>
+          <p:nvPr>
+            <p:ph type="sldImg"/>
+          </p:nvPr>
+        </p:nvSpPr>
+        <p:spPr/>
+      </p:sp>
+      <p:sp>
+        <p:nvSpPr>
+          <p:cNvPr id="3" name="Notes Placeholder 2"/>
+          <p:cNvSpPr>
+            <a:spLocks noGrp="1"/>
+          </p:cNvSpPr>
+          <p:nvPr>
+            <p:ph type="body" idx="1"/>
+          </p:nvPr>
+        </p:nvSpPr>
+        <p:spPr/>
+        <p:txBody>
+          <a:bodyPr/>
+          <a:lstStyle/>
+          <a:p>
+            <a:r>
+              <a:rPr lang="en-US" dirty="0"/>
+              <a:t>Distribution of rim shot making</a:t>
+            </a:r>
+          </a:p>
+          <a:p>
+            <a:r>
+              <a:rPr lang="en-US" dirty="0"/>
+              <a:t>Steph curry within that distribution</a:t>
+            </a:r>
+          </a:p>
+          <a:p>
+            <a:r>
+              <a:rPr lang="en-US" dirty="0"/>
+              <a:t>Steph curry over the past decade</a:t>
+            </a:r>
+          </a:p>
+        </p:txBody>
+      </p:sp>
+      <p:sp>
+        <p:nvSpPr>
+          <p:cNvPr id="4" name="Slide Number Placeholder 3"/>
+          <p:cNvSpPr>
+            <a:spLocks noGrp="1"/>
+          </p:cNvSpPr>
+          <p:nvPr>
+            <p:ph type="sldNum" sz="quarter" idx="5"/>
+          </p:nvPr>
+        </p:nvSpPr>
+        <p:spPr/>
+        <p:txBody>
+          <a:bodyPr/>
+          <a:lstStyle/>
+          <a:p>
+            <a:fld id="{117D17FD-8842-8E4F-8C3E-EC8B634B2D5A}" type="slidenum">
+              <a:rPr lang="en-US" smtClean="0"/>
+              <a:t>35</a:t>
+            </a:fld>
+            <a:endParaRPr lang="en-US"/>
+          </a:p>
+        </p:txBody>
+      </p:sp>
+    </p:spTree>
+    <p:extLst>
+      <p:ext uri="{BB962C8B-B14F-4D97-AF65-F5344CB8AC3E}">
+        <p14:creationId xmlns:p14="http://schemas.microsoft.com/office/powerpoint/2010/main" val="3451276224"/>
+      </p:ext>
+    </p:extLst>
+  </p:cSld>
+  <p:clrMapOvr>
+    <a:masterClrMapping/>
+  </p:clrMapOvr>
+</p:notes>
+</file>
+
 <file path=ppt/notesSlides/notesSlide2.xml><?xml version="1.0" encoding="utf-8"?>
 <p:notes xmlns:a="http://schemas.openxmlformats.org/drawingml/2006/main" xmlns:r="http://schemas.openxmlformats.org/officeDocument/2006/relationships" xmlns:p="http://schemas.openxmlformats.org/presentationml/2006/main">
   <p:cSld>
@@ -13277,7 +13376,7 @@
           <p:cNvPr id="2" name="Title 1">
             <a:extLst>
               <a:ext uri="{FF2B5EF4-FFF2-40B4-BE49-F238E27FC236}">
-                <a16:creationId xmlns:a16="http://schemas.microsoft.com/office/drawing/2014/main" id="{285F1593-F2E7-A0A0-4235-5DCA483B9338}"/>
+                <a16:creationId xmlns:a16="http://schemas.microsoft.com/office/drawing/2014/main" id="{22E57BA0-78E2-3F36-B68F-77FFEAAD4AA5}"/>
               </a:ext>
             </a:extLst>
           </p:cNvPr>
@@ -13290,12 +13389,14 @@
         </p:nvSpPr>
         <p:spPr/>
         <p:txBody>
-          <a:bodyPr/>
+          <a:bodyPr>
+            <a:normAutofit/>
+          </a:bodyPr>
           <a:lstStyle/>
           <a:p>
             <a:r>
               <a:rPr lang="en-US" dirty="0"/>
-              <a:t>distribution</a:t>
+              <a:t>Comparisons (rank)</a:t>
             </a:r>
           </a:p>
         </p:txBody>
@@ -13305,7 +13406,7 @@
           <p:cNvPr id="3" name="Content Placeholder 2">
             <a:extLst>
               <a:ext uri="{FF2B5EF4-FFF2-40B4-BE49-F238E27FC236}">
-                <a16:creationId xmlns:a16="http://schemas.microsoft.com/office/drawing/2014/main" id="{4BC7D4B5-3BEA-A604-109D-2E41CFA31900}"/>
+                <a16:creationId xmlns:a16="http://schemas.microsoft.com/office/drawing/2014/main" id="{F0D4F734-6154-A9C8-A362-34EB9DF03C1D}"/>
               </a:ext>
             </a:extLst>
           </p:cNvPr>
@@ -13323,25 +13424,25 @@
           <a:p>
             <a:r>
               <a:rPr lang="en-US" dirty="0"/>
-              <a:t>Histograms: Player height distribution, shot distance distribution</a:t>
+              <a:t>Bar charts: Simple stat comparisons (points per game by player)</a:t>
             </a:r>
           </a:p>
           <a:p>
             <a:r>
               <a:rPr lang="en-US" dirty="0"/>
-              <a:t>Density plots: Smoothed shooting ranges</a:t>
+              <a:t>Grouped/stacked bars: Multi-category comparisons (shooting % by zone)</a:t>
             </a:r>
           </a:p>
           <a:p>
             <a:r>
               <a:rPr lang="en-US" dirty="0"/>
-              <a:t>Box plots: Comparing stat distributions across positions or teams</a:t>
+              <a:t>Dot plots: Clean alternative to bars, especially for rankings</a:t>
             </a:r>
           </a:p>
           <a:p>
             <a:r>
               <a:rPr lang="en-US" dirty="0"/>
-              <a:t>Violin plots: Showing full distribution shape (sprint speeds by position)</a:t>
+              <a:t>Radar/spider charts: Multi-dimensional player comparisons (use cautiously!)</a:t>
             </a:r>
           </a:p>
           <a:p>
@@ -13354,7 +13455,7 @@
           <p:cNvPr id="4" name="Slide Number Placeholder 3">
             <a:extLst>
               <a:ext uri="{FF2B5EF4-FFF2-40B4-BE49-F238E27FC236}">
-                <a16:creationId xmlns:a16="http://schemas.microsoft.com/office/drawing/2014/main" id="{6F748B8C-B129-4165-BA11-6AF432CA74FF}"/>
+                <a16:creationId xmlns:a16="http://schemas.microsoft.com/office/drawing/2014/main" id="{E2910D20-7BB4-8BCC-314D-CF805A8463C6}"/>
               </a:ext>
             </a:extLst>
           </p:cNvPr>
@@ -13384,7 +13485,7 @@
           <p:cNvPr id="6" name="Picture 5">
             <a:extLst>
               <a:ext uri="{FF2B5EF4-FFF2-40B4-BE49-F238E27FC236}">
-                <a16:creationId xmlns:a16="http://schemas.microsoft.com/office/drawing/2014/main" id="{33DBAAD0-EAB3-75AD-D9CF-FA8A4201EAD5}"/>
+                <a16:creationId xmlns:a16="http://schemas.microsoft.com/office/drawing/2014/main" id="{CAD81678-C0F1-63E8-65AF-98C56EAB86E9}"/>
               </a:ext>
             </a:extLst>
           </p:cNvPr>
@@ -13395,15 +13496,14 @@
         </p:nvPicPr>
         <p:blipFill>
           <a:blip r:embed="rId2"/>
-          <a:srcRect t="17477"/>
           <a:stretch>
             <a:fillRect/>
           </a:stretch>
         </p:blipFill>
         <p:spPr>
           <a:xfrm>
-            <a:off x="3591348" y="4732191"/>
-            <a:ext cx="1190791" cy="1147763"/>
+            <a:off x="2976161" y="5033803"/>
+            <a:ext cx="1200318" cy="1143160"/>
           </a:xfrm>
           <a:prstGeom prst="rect">
             <a:avLst/>
@@ -13415,7 +13515,7 @@
           <p:cNvPr id="8" name="Picture 7">
             <a:extLst>
               <a:ext uri="{FF2B5EF4-FFF2-40B4-BE49-F238E27FC236}">
-                <a16:creationId xmlns:a16="http://schemas.microsoft.com/office/drawing/2014/main" id="{2604EB65-D7BB-8ECF-7D60-829A955DF303}"/>
+                <a16:creationId xmlns:a16="http://schemas.microsoft.com/office/drawing/2014/main" id="{D60DA242-D6F9-4C30-13D7-8348F4760F5E}"/>
               </a:ext>
             </a:extLst>
           </p:cNvPr>
@@ -13432,8 +13532,38 @@
         </p:blipFill>
         <p:spPr>
           <a:xfrm>
-            <a:off x="6723551" y="4922196"/>
-            <a:ext cx="1152686" cy="1105054"/>
+            <a:off x="5423454" y="4988083"/>
+            <a:ext cx="1162212" cy="1105054"/>
+          </a:xfrm>
+          <a:prstGeom prst="rect">
+            <a:avLst/>
+          </a:prstGeom>
+        </p:spPr>
+      </p:pic>
+      <p:pic>
+        <p:nvPicPr>
+          <p:cNvPr id="10" name="Picture 9">
+            <a:extLst>
+              <a:ext uri="{FF2B5EF4-FFF2-40B4-BE49-F238E27FC236}">
+                <a16:creationId xmlns:a16="http://schemas.microsoft.com/office/drawing/2014/main" id="{5EB175A5-9673-0A59-A229-9DF3A738048B}"/>
+              </a:ext>
+            </a:extLst>
+          </p:cNvPr>
+          <p:cNvPicPr>
+            <a:picLocks noChangeAspect="1"/>
+          </p:cNvPicPr>
+          <p:nvPr/>
+        </p:nvPicPr>
+        <p:blipFill>
+          <a:blip r:embed="rId4"/>
+          <a:stretch>
+            <a:fillRect/>
+          </a:stretch>
+        </p:blipFill>
+        <p:spPr>
+          <a:xfrm>
+            <a:off x="8398153" y="4959504"/>
+            <a:ext cx="1143160" cy="1133633"/>
           </a:xfrm>
           <a:prstGeom prst="rect">
             <a:avLst/>
@@ -13443,7 +13573,7 @@
     </p:spTree>
     <p:extLst>
       <p:ext uri="{BB962C8B-B14F-4D97-AF65-F5344CB8AC3E}">
-        <p14:creationId xmlns:p14="http://schemas.microsoft.com/office/powerpoint/2010/main" val="4293139581"/>
+        <p14:creationId xmlns:p14="http://schemas.microsoft.com/office/powerpoint/2010/main" val="2454783734"/>
       </p:ext>
     </p:extLst>
   </p:cSld>
@@ -13612,13 +13742,7 @@
   <p:cSld>
     <p:spTree>
       <p:nvGrpSpPr>
-        <p:cNvPr id="1" name="">
-          <a:extLst>
-            <a:ext uri="{FF2B5EF4-FFF2-40B4-BE49-F238E27FC236}">
-              <a16:creationId xmlns:a16="http://schemas.microsoft.com/office/drawing/2014/main" id="{F90AE914-6399-D19B-BAF0-C90A269BB88D}"/>
-            </a:ext>
-          </a:extLst>
-        </p:cNvPr>
+        <p:cNvPr id="1" name=""/>
         <p:cNvGrpSpPr/>
         <p:nvPr/>
       </p:nvGrpSpPr>
@@ -13635,7 +13759,7 @@
           <p:cNvPr id="2" name="Title 1">
             <a:extLst>
               <a:ext uri="{FF2B5EF4-FFF2-40B4-BE49-F238E27FC236}">
-                <a16:creationId xmlns:a16="http://schemas.microsoft.com/office/drawing/2014/main" id="{40A51137-DFF6-0E27-4C23-A158DEA8C312}"/>
+                <a16:creationId xmlns:a16="http://schemas.microsoft.com/office/drawing/2014/main" id="{285F1593-F2E7-A0A0-4235-5DCA483B9338}"/>
               </a:ext>
             </a:extLst>
           </p:cNvPr>
@@ -13653,7 +13777,7 @@
           <a:p>
             <a:r>
               <a:rPr lang="en-US" dirty="0"/>
-              <a:t>distribution</a:t>
+              <a:t>Distribution</a:t>
             </a:r>
           </a:p>
         </p:txBody>
@@ -13663,7 +13787,7 @@
           <p:cNvPr id="3" name="Content Placeholder 2">
             <a:extLst>
               <a:ext uri="{FF2B5EF4-FFF2-40B4-BE49-F238E27FC236}">
-                <a16:creationId xmlns:a16="http://schemas.microsoft.com/office/drawing/2014/main" id="{6BE3D9AA-549F-606F-B3F5-5C861CA7E41A}"/>
+                <a16:creationId xmlns:a16="http://schemas.microsoft.com/office/drawing/2014/main" id="{4BC7D4B5-3BEA-A604-109D-2E41CFA31900}"/>
               </a:ext>
             </a:extLst>
           </p:cNvPr>
@@ -13712,7 +13836,7 @@
           <p:cNvPr id="4" name="Slide Number Placeholder 3">
             <a:extLst>
               <a:ext uri="{FF2B5EF4-FFF2-40B4-BE49-F238E27FC236}">
-                <a16:creationId xmlns:a16="http://schemas.microsoft.com/office/drawing/2014/main" id="{C9CC9DD0-0ABD-BF1F-BB74-52877A4D11A5}"/>
+                <a16:creationId xmlns:a16="http://schemas.microsoft.com/office/drawing/2014/main" id="{6F748B8C-B129-4165-BA11-6AF432CA74FF}"/>
               </a:ext>
             </a:extLst>
           </p:cNvPr>
@@ -13739,10 +13863,10 @@
       </p:sp>
       <p:pic>
         <p:nvPicPr>
-          <p:cNvPr id="10" name="Picture 9">
-            <a:extLst>
-              <a:ext uri="{FF2B5EF4-FFF2-40B4-BE49-F238E27FC236}">
-                <a16:creationId xmlns:a16="http://schemas.microsoft.com/office/drawing/2014/main" id="{620DB94C-EC6F-313A-E8E9-313248E52B2D}"/>
+          <p:cNvPr id="6" name="Picture 5">
+            <a:extLst>
+              <a:ext uri="{FF2B5EF4-FFF2-40B4-BE49-F238E27FC236}">
+                <a16:creationId xmlns:a16="http://schemas.microsoft.com/office/drawing/2014/main" id="{33DBAAD0-EAB3-75AD-D9CF-FA8A4201EAD5}"/>
               </a:ext>
             </a:extLst>
           </p:cNvPr>
@@ -13753,14 +13877,45 @@
         </p:nvPicPr>
         <p:blipFill>
           <a:blip r:embed="rId2"/>
+          <a:srcRect t="17477"/>
           <a:stretch>
             <a:fillRect/>
           </a:stretch>
         </p:blipFill>
         <p:spPr>
           <a:xfrm>
-            <a:off x="3756139" y="4545840"/>
-            <a:ext cx="4679721" cy="1631123"/>
+            <a:off x="3591348" y="4732191"/>
+            <a:ext cx="1190791" cy="1147763"/>
+          </a:xfrm>
+          <a:prstGeom prst="rect">
+            <a:avLst/>
+          </a:prstGeom>
+        </p:spPr>
+      </p:pic>
+      <p:pic>
+        <p:nvPicPr>
+          <p:cNvPr id="8" name="Picture 7">
+            <a:extLst>
+              <a:ext uri="{FF2B5EF4-FFF2-40B4-BE49-F238E27FC236}">
+                <a16:creationId xmlns:a16="http://schemas.microsoft.com/office/drawing/2014/main" id="{2604EB65-D7BB-8ECF-7D60-829A955DF303}"/>
+              </a:ext>
+            </a:extLst>
+          </p:cNvPr>
+          <p:cNvPicPr>
+            <a:picLocks noChangeAspect="1"/>
+          </p:cNvPicPr>
+          <p:nvPr/>
+        </p:nvPicPr>
+        <p:blipFill>
+          <a:blip r:embed="rId3"/>
+          <a:stretch>
+            <a:fillRect/>
+          </a:stretch>
+        </p:blipFill>
+        <p:spPr>
+          <a:xfrm>
+            <a:off x="6723551" y="4922196"/>
+            <a:ext cx="1152686" cy="1105054"/>
           </a:xfrm>
           <a:prstGeom prst="rect">
             <a:avLst/>
@@ -13770,7 +13925,7 @@
     </p:spTree>
     <p:extLst>
       <p:ext uri="{BB962C8B-B14F-4D97-AF65-F5344CB8AC3E}">
-        <p14:creationId xmlns:p14="http://schemas.microsoft.com/office/powerpoint/2010/main" val="1117615053"/>
+        <p14:creationId xmlns:p14="http://schemas.microsoft.com/office/powerpoint/2010/main" val="4293139581"/>
       </p:ext>
     </p:extLst>
   </p:cSld>
@@ -13802,7 +13957,7 @@
           <p:cNvPr id="2" name="Title 1">
             <a:extLst>
               <a:ext uri="{FF2B5EF4-FFF2-40B4-BE49-F238E27FC236}">
-                <a16:creationId xmlns:a16="http://schemas.microsoft.com/office/drawing/2014/main" id="{22E57BA0-78E2-3F36-B68F-77FFEAAD4AA5}"/>
+                <a16:creationId xmlns:a16="http://schemas.microsoft.com/office/drawing/2014/main" id="{4013BC37-5B5E-79EE-8A29-38BC58CF756A}"/>
               </a:ext>
             </a:extLst>
           </p:cNvPr>
@@ -13815,14 +13970,12 @@
         </p:nvSpPr>
         <p:spPr/>
         <p:txBody>
-          <a:bodyPr>
-            <a:normAutofit/>
-          </a:bodyPr>
+          <a:bodyPr/>
           <a:lstStyle/>
           <a:p>
             <a:r>
               <a:rPr lang="en-US" dirty="0"/>
-              <a:t>Comparisons (rank)</a:t>
+              <a:t>Relationships</a:t>
             </a:r>
           </a:p>
         </p:txBody>
@@ -13832,7 +13985,7 @@
           <p:cNvPr id="3" name="Content Placeholder 2">
             <a:extLst>
               <a:ext uri="{FF2B5EF4-FFF2-40B4-BE49-F238E27FC236}">
-                <a16:creationId xmlns:a16="http://schemas.microsoft.com/office/drawing/2014/main" id="{F0D4F734-6154-A9C8-A362-34EB9DF03C1D}"/>
+                <a16:creationId xmlns:a16="http://schemas.microsoft.com/office/drawing/2014/main" id="{A3DF0359-11C9-47B0-F490-B0B74F7AB7F9}"/>
               </a:ext>
             </a:extLst>
           </p:cNvPr>
@@ -13850,25 +14003,23 @@
           <a:p>
             <a:r>
               <a:rPr lang="en-US" dirty="0"/>
-              <a:t>Bar charts: Simple stat comparisons (points per game by player)</a:t>
+              <a:t>Scatter plots: Exploring correlations (height vs. rebounding)</a:t>
             </a:r>
           </a:p>
           <a:p>
             <a:r>
               <a:rPr lang="en-US" dirty="0"/>
-              <a:t>Grouped/stacked bars: Multi-category comparisons (shooting % by zone)</a:t>
-            </a:r>
-          </a:p>
-          <a:p>
+              <a:t>Correlation matrices: Multiple pairwise correlation</a:t>
+            </a:r>
+          </a:p>
+          <a:p>
+            <a:r>
+              <a:rPr lang="en-US" dirty="0" err="1"/>
+              <a:t>Hexbin</a:t>
+            </a:r>
             <a:r>
               <a:rPr lang="en-US" dirty="0"/>
-              <a:t>Dot plots: Clean alternative to bars, especially for rankings</a:t>
-            </a:r>
-          </a:p>
-          <a:p>
-            <a:r>
-              <a:rPr lang="en-US" dirty="0"/>
-              <a:t>Radar/spider charts: Multi-dimensional player comparisons (use cautiously!)</a:t>
+              <a:t> plots: scatter plots with aggregation (shot charts)</a:t>
             </a:r>
           </a:p>
           <a:p>
@@ -13881,7 +14032,7 @@
           <p:cNvPr id="4" name="Slide Number Placeholder 3">
             <a:extLst>
               <a:ext uri="{FF2B5EF4-FFF2-40B4-BE49-F238E27FC236}">
-                <a16:creationId xmlns:a16="http://schemas.microsoft.com/office/drawing/2014/main" id="{E2910D20-7BB4-8BCC-314D-CF805A8463C6}"/>
+                <a16:creationId xmlns:a16="http://schemas.microsoft.com/office/drawing/2014/main" id="{79314446-E47F-0111-7142-2A51636E37A1}"/>
               </a:ext>
             </a:extLst>
           </p:cNvPr>
@@ -13901,231 +14052,6 @@
               <a:rPr lang="en-US" smtClean="0"/>
               <a:pPr/>
               <a:t>31</a:t>
-            </a:fld>
-            <a:endParaRPr lang="en-US" dirty="0"/>
-          </a:p>
-        </p:txBody>
-      </p:sp>
-      <p:pic>
-        <p:nvPicPr>
-          <p:cNvPr id="6" name="Picture 5">
-            <a:extLst>
-              <a:ext uri="{FF2B5EF4-FFF2-40B4-BE49-F238E27FC236}">
-                <a16:creationId xmlns:a16="http://schemas.microsoft.com/office/drawing/2014/main" id="{CAD81678-C0F1-63E8-65AF-98C56EAB86E9}"/>
-              </a:ext>
-            </a:extLst>
-          </p:cNvPr>
-          <p:cNvPicPr>
-            <a:picLocks noChangeAspect="1"/>
-          </p:cNvPicPr>
-          <p:nvPr/>
-        </p:nvPicPr>
-        <p:blipFill>
-          <a:blip r:embed="rId2"/>
-          <a:stretch>
-            <a:fillRect/>
-          </a:stretch>
-        </p:blipFill>
-        <p:spPr>
-          <a:xfrm>
-            <a:off x="2976161" y="5033803"/>
-            <a:ext cx="1200318" cy="1143160"/>
-          </a:xfrm>
-          <a:prstGeom prst="rect">
-            <a:avLst/>
-          </a:prstGeom>
-        </p:spPr>
-      </p:pic>
-      <p:pic>
-        <p:nvPicPr>
-          <p:cNvPr id="8" name="Picture 7">
-            <a:extLst>
-              <a:ext uri="{FF2B5EF4-FFF2-40B4-BE49-F238E27FC236}">
-                <a16:creationId xmlns:a16="http://schemas.microsoft.com/office/drawing/2014/main" id="{D60DA242-D6F9-4C30-13D7-8348F4760F5E}"/>
-              </a:ext>
-            </a:extLst>
-          </p:cNvPr>
-          <p:cNvPicPr>
-            <a:picLocks noChangeAspect="1"/>
-          </p:cNvPicPr>
-          <p:nvPr/>
-        </p:nvPicPr>
-        <p:blipFill>
-          <a:blip r:embed="rId3"/>
-          <a:stretch>
-            <a:fillRect/>
-          </a:stretch>
-        </p:blipFill>
-        <p:spPr>
-          <a:xfrm>
-            <a:off x="5423454" y="4988083"/>
-            <a:ext cx="1162212" cy="1105054"/>
-          </a:xfrm>
-          <a:prstGeom prst="rect">
-            <a:avLst/>
-          </a:prstGeom>
-        </p:spPr>
-      </p:pic>
-      <p:pic>
-        <p:nvPicPr>
-          <p:cNvPr id="10" name="Picture 9">
-            <a:extLst>
-              <a:ext uri="{FF2B5EF4-FFF2-40B4-BE49-F238E27FC236}">
-                <a16:creationId xmlns:a16="http://schemas.microsoft.com/office/drawing/2014/main" id="{5EB175A5-9673-0A59-A229-9DF3A738048B}"/>
-              </a:ext>
-            </a:extLst>
-          </p:cNvPr>
-          <p:cNvPicPr>
-            <a:picLocks noChangeAspect="1"/>
-          </p:cNvPicPr>
-          <p:nvPr/>
-        </p:nvPicPr>
-        <p:blipFill>
-          <a:blip r:embed="rId4"/>
-          <a:stretch>
-            <a:fillRect/>
-          </a:stretch>
-        </p:blipFill>
-        <p:spPr>
-          <a:xfrm>
-            <a:off x="8398153" y="4959504"/>
-            <a:ext cx="1143160" cy="1133633"/>
-          </a:xfrm>
-          <a:prstGeom prst="rect">
-            <a:avLst/>
-          </a:prstGeom>
-        </p:spPr>
-      </p:pic>
-    </p:spTree>
-    <p:extLst>
-      <p:ext uri="{BB962C8B-B14F-4D97-AF65-F5344CB8AC3E}">
-        <p14:creationId xmlns:p14="http://schemas.microsoft.com/office/powerpoint/2010/main" val="2454783734"/>
-      </p:ext>
-    </p:extLst>
-  </p:cSld>
-  <p:clrMapOvr>
-    <a:masterClrMapping/>
-  </p:clrMapOvr>
-</p:sld>
-</file>
-
-<file path=ppt/slides/slide32.xml><?xml version="1.0" encoding="utf-8"?>
-<p:sld xmlns:a="http://schemas.openxmlformats.org/drawingml/2006/main" xmlns:r="http://schemas.openxmlformats.org/officeDocument/2006/relationships" xmlns:p="http://schemas.openxmlformats.org/presentationml/2006/main">
-  <p:cSld>
-    <p:spTree>
-      <p:nvGrpSpPr>
-        <p:cNvPr id="1" name=""/>
-        <p:cNvGrpSpPr/>
-        <p:nvPr/>
-      </p:nvGrpSpPr>
-      <p:grpSpPr>
-        <a:xfrm>
-          <a:off x="0" y="0"/>
-          <a:ext cx="0" cy="0"/>
-          <a:chOff x="0" y="0"/>
-          <a:chExt cx="0" cy="0"/>
-        </a:xfrm>
-      </p:grpSpPr>
-      <p:sp>
-        <p:nvSpPr>
-          <p:cNvPr id="2" name="Title 1">
-            <a:extLst>
-              <a:ext uri="{FF2B5EF4-FFF2-40B4-BE49-F238E27FC236}">
-                <a16:creationId xmlns:a16="http://schemas.microsoft.com/office/drawing/2014/main" id="{4013BC37-5B5E-79EE-8A29-38BC58CF756A}"/>
-              </a:ext>
-            </a:extLst>
-          </p:cNvPr>
-          <p:cNvSpPr>
-            <a:spLocks noGrp="1"/>
-          </p:cNvSpPr>
-          <p:nvPr>
-            <p:ph type="title"/>
-          </p:nvPr>
-        </p:nvSpPr>
-        <p:spPr/>
-        <p:txBody>
-          <a:bodyPr/>
-          <a:lstStyle/>
-          <a:p>
-            <a:r>
-              <a:rPr lang="en-US" dirty="0"/>
-              <a:t>Relationships</a:t>
-            </a:r>
-          </a:p>
-        </p:txBody>
-      </p:sp>
-      <p:sp>
-        <p:nvSpPr>
-          <p:cNvPr id="3" name="Content Placeholder 2">
-            <a:extLst>
-              <a:ext uri="{FF2B5EF4-FFF2-40B4-BE49-F238E27FC236}">
-                <a16:creationId xmlns:a16="http://schemas.microsoft.com/office/drawing/2014/main" id="{A3DF0359-11C9-47B0-F490-B0B74F7AB7F9}"/>
-              </a:ext>
-            </a:extLst>
-          </p:cNvPr>
-          <p:cNvSpPr>
-            <a:spLocks noGrp="1"/>
-          </p:cNvSpPr>
-          <p:nvPr>
-            <p:ph idx="1"/>
-          </p:nvPr>
-        </p:nvSpPr>
-        <p:spPr/>
-        <p:txBody>
-          <a:bodyPr/>
-          <a:lstStyle/>
-          <a:p>
-            <a:r>
-              <a:rPr lang="en-US" dirty="0"/>
-              <a:t>Scatter plots: Exploring correlations (height vs. rebounding)</a:t>
-            </a:r>
-          </a:p>
-          <a:p>
-            <a:r>
-              <a:rPr lang="en-US" dirty="0"/>
-              <a:t>Correlation matrices: Multiple pairwise correlation</a:t>
-            </a:r>
-          </a:p>
-          <a:p>
-            <a:r>
-              <a:rPr lang="en-US" dirty="0" err="1"/>
-              <a:t>Hexbin</a:t>
-            </a:r>
-            <a:r>
-              <a:rPr lang="en-US" dirty="0"/>
-              <a:t> plots: scatter plots with aggregation (shot charts)</a:t>
-            </a:r>
-          </a:p>
-          <a:p>
-            <a:endParaRPr lang="en-US" dirty="0"/>
-          </a:p>
-        </p:txBody>
-      </p:sp>
-      <p:sp>
-        <p:nvSpPr>
-          <p:cNvPr id="4" name="Slide Number Placeholder 3">
-            <a:extLst>
-              <a:ext uri="{FF2B5EF4-FFF2-40B4-BE49-F238E27FC236}">
-                <a16:creationId xmlns:a16="http://schemas.microsoft.com/office/drawing/2014/main" id="{79314446-E47F-0111-7142-2A51636E37A1}"/>
-              </a:ext>
-            </a:extLst>
-          </p:cNvPr>
-          <p:cNvSpPr>
-            <a:spLocks noGrp="1"/>
-          </p:cNvSpPr>
-          <p:nvPr>
-            <p:ph type="sldNum" sz="quarter" idx="12"/>
-          </p:nvPr>
-        </p:nvSpPr>
-        <p:spPr/>
-        <p:txBody>
-          <a:bodyPr/>
-          <a:lstStyle/>
-          <a:p>
-            <a:fld id="{45C00377-489B-40EC-B059-26BDDD2E89B9}" type="slidenum">
-              <a:rPr lang="en-US" smtClean="0"/>
-              <a:pPr/>
-              <a:t>32</a:t>
             </a:fld>
             <a:endParaRPr lang="en-US" dirty="0"/>
           </a:p>
@@ -14204,7 +14130,7 @@
 </p:sld>
 </file>
 
-<file path=ppt/slides/slide33.xml><?xml version="1.0" encoding="utf-8"?>
+<file path=ppt/slides/slide32.xml><?xml version="1.0" encoding="utf-8"?>
 <p:sld xmlns:a="http://schemas.openxmlformats.org/drawingml/2006/main" xmlns:r="http://schemas.openxmlformats.org/officeDocument/2006/relationships" xmlns:p="http://schemas.openxmlformats.org/presentationml/2006/main">
   <p:cSld>
     <p:spTree>
@@ -14315,7 +14241,7 @@
             <a:fld id="{45C00377-489B-40EC-B059-26BDDD2E89B9}" type="slidenum">
               <a:rPr lang="en-US" smtClean="0"/>
               <a:pPr/>
-              <a:t>33</a:t>
+              <a:t>32</a:t>
             </a:fld>
             <a:endParaRPr lang="en-US" dirty="0"/>
           </a:p>
@@ -14394,7 +14320,7 @@
 </p:sld>
 </file>
 
-<file path=ppt/slides/slide34.xml><?xml version="1.0" encoding="utf-8"?>
+<file path=ppt/slides/slide33.xml><?xml version="1.0" encoding="utf-8"?>
 <p:sld xmlns:a="http://schemas.openxmlformats.org/drawingml/2006/main" xmlns:r="http://schemas.openxmlformats.org/officeDocument/2006/relationships" xmlns:p="http://schemas.openxmlformats.org/presentationml/2006/main">
   <p:cSld>
     <p:spTree>
@@ -14499,7 +14425,7 @@
             <a:fld id="{45C00377-489B-40EC-B059-26BDDD2E89B9}" type="slidenum">
               <a:rPr lang="en-US" smtClean="0"/>
               <a:pPr/>
-              <a:t>34</a:t>
+              <a:t>33</a:t>
             </a:fld>
             <a:endParaRPr lang="en-US" dirty="0"/>
           </a:p>
@@ -14578,7 +14504,7 @@
 </p:sld>
 </file>
 
-<file path=ppt/slides/slide35.xml><?xml version="1.0" encoding="utf-8"?>
+<file path=ppt/slides/slide34.xml><?xml version="1.0" encoding="utf-8"?>
 <p:sld xmlns:a="http://schemas.openxmlformats.org/drawingml/2006/main" xmlns:r="http://schemas.openxmlformats.org/officeDocument/2006/relationships" xmlns:p="http://schemas.openxmlformats.org/presentationml/2006/main">
   <p:cSld>
     <p:spTree>
@@ -14689,7 +14615,7 @@
             <a:fld id="{45C00377-489B-40EC-B059-26BDDD2E89B9}" type="slidenum">
               <a:rPr lang="en-US" smtClean="0"/>
               <a:pPr/>
-              <a:t>35</a:t>
+              <a:t>34</a:t>
             </a:fld>
             <a:endParaRPr lang="en-US" dirty="0"/>
           </a:p>
@@ -14823,6 +14749,155 @@
     <p:extLst>
       <p:ext uri="{BB962C8B-B14F-4D97-AF65-F5344CB8AC3E}">
         <p14:creationId xmlns:p14="http://schemas.microsoft.com/office/powerpoint/2010/main" val="3360124950"/>
+      </p:ext>
+    </p:extLst>
+  </p:cSld>
+  <p:clrMapOvr>
+    <a:masterClrMapping/>
+  </p:clrMapOvr>
+</p:sld>
+</file>
+
+<file path=ppt/slides/slide35.xml><?xml version="1.0" encoding="utf-8"?>
+<p:sld xmlns:a="http://schemas.openxmlformats.org/drawingml/2006/main" xmlns:r="http://schemas.openxmlformats.org/officeDocument/2006/relationships" xmlns:p="http://schemas.openxmlformats.org/presentationml/2006/main">
+  <p:cSld>
+    <p:spTree>
+      <p:nvGrpSpPr>
+        <p:cNvPr id="1" name="">
+          <a:extLst>
+            <a:ext uri="{FF2B5EF4-FFF2-40B4-BE49-F238E27FC236}">
+              <a16:creationId xmlns:a16="http://schemas.microsoft.com/office/drawing/2014/main" id="{F90AE914-6399-D19B-BAF0-C90A269BB88D}"/>
+            </a:ext>
+          </a:extLst>
+        </p:cNvPr>
+        <p:cNvGrpSpPr/>
+        <p:nvPr/>
+      </p:nvGrpSpPr>
+      <p:grpSpPr>
+        <a:xfrm>
+          <a:off x="0" y="0"/>
+          <a:ext cx="0" cy="0"/>
+          <a:chOff x="0" y="0"/>
+          <a:chExt cx="0" cy="0"/>
+        </a:xfrm>
+      </p:grpSpPr>
+      <p:sp>
+        <p:nvSpPr>
+          <p:cNvPr id="2" name="Title 1">
+            <a:extLst>
+              <a:ext uri="{FF2B5EF4-FFF2-40B4-BE49-F238E27FC236}">
+                <a16:creationId xmlns:a16="http://schemas.microsoft.com/office/drawing/2014/main" id="{40A51137-DFF6-0E27-4C23-A158DEA8C312}"/>
+              </a:ext>
+            </a:extLst>
+          </p:cNvPr>
+          <p:cNvSpPr>
+            <a:spLocks noGrp="1"/>
+          </p:cNvSpPr>
+          <p:nvPr>
+            <p:ph type="title"/>
+          </p:nvPr>
+        </p:nvSpPr>
+        <p:spPr/>
+        <p:txBody>
+          <a:bodyPr/>
+          <a:lstStyle/>
+          <a:p>
+            <a:r>
+              <a:rPr lang="en-US" dirty="0"/>
+              <a:t>What does this chart communicate?</a:t>
+            </a:r>
+          </a:p>
+        </p:txBody>
+      </p:sp>
+      <p:sp>
+        <p:nvSpPr>
+          <p:cNvPr id="3" name="Content Placeholder 2">
+            <a:extLst>
+              <a:ext uri="{FF2B5EF4-FFF2-40B4-BE49-F238E27FC236}">
+                <a16:creationId xmlns:a16="http://schemas.microsoft.com/office/drawing/2014/main" id="{6BE3D9AA-549F-606F-B3F5-5C861CA7E41A}"/>
+              </a:ext>
+            </a:extLst>
+          </p:cNvPr>
+          <p:cNvSpPr>
+            <a:spLocks noGrp="1"/>
+          </p:cNvSpPr>
+          <p:nvPr>
+            <p:ph idx="1"/>
+          </p:nvPr>
+        </p:nvSpPr>
+        <p:spPr/>
+        <p:txBody>
+          <a:bodyPr/>
+          <a:lstStyle/>
+          <a:p>
+            <a:endParaRPr lang="en-US" dirty="0"/>
+          </a:p>
+        </p:txBody>
+      </p:sp>
+      <p:sp>
+        <p:nvSpPr>
+          <p:cNvPr id="4" name="Slide Number Placeholder 3">
+            <a:extLst>
+              <a:ext uri="{FF2B5EF4-FFF2-40B4-BE49-F238E27FC236}">
+                <a16:creationId xmlns:a16="http://schemas.microsoft.com/office/drawing/2014/main" id="{C9CC9DD0-0ABD-BF1F-BB74-52877A4D11A5}"/>
+              </a:ext>
+            </a:extLst>
+          </p:cNvPr>
+          <p:cNvSpPr>
+            <a:spLocks noGrp="1"/>
+          </p:cNvSpPr>
+          <p:nvPr>
+            <p:ph type="sldNum" sz="quarter" idx="12"/>
+          </p:nvPr>
+        </p:nvSpPr>
+        <p:spPr/>
+        <p:txBody>
+          <a:bodyPr/>
+          <a:lstStyle/>
+          <a:p>
+            <a:fld id="{45C00377-489B-40EC-B059-26BDDD2E89B9}" type="slidenum">
+              <a:rPr lang="en-US" smtClean="0"/>
+              <a:pPr/>
+              <a:t>35</a:t>
+            </a:fld>
+            <a:endParaRPr lang="en-US" dirty="0"/>
+          </a:p>
+        </p:txBody>
+      </p:sp>
+      <p:pic>
+        <p:nvPicPr>
+          <p:cNvPr id="10" name="Picture 9">
+            <a:extLst>
+              <a:ext uri="{FF2B5EF4-FFF2-40B4-BE49-F238E27FC236}">
+                <a16:creationId xmlns:a16="http://schemas.microsoft.com/office/drawing/2014/main" id="{620DB94C-EC6F-313A-E8E9-313248E52B2D}"/>
+              </a:ext>
+            </a:extLst>
+          </p:cNvPr>
+          <p:cNvPicPr>
+            <a:picLocks noChangeAspect="1"/>
+          </p:cNvPicPr>
+          <p:nvPr/>
+        </p:nvPicPr>
+        <p:blipFill>
+          <a:blip r:embed="rId3"/>
+          <a:stretch>
+            <a:fillRect/>
+          </a:stretch>
+        </p:blipFill>
+        <p:spPr>
+          <a:xfrm>
+            <a:off x="1333318" y="2095984"/>
+            <a:ext cx="9525363" cy="3320078"/>
+          </a:xfrm>
+          <a:prstGeom prst="rect">
+            <a:avLst/>
+          </a:prstGeom>
+        </p:spPr>
+      </p:pic>
+    </p:spTree>
+    <p:extLst>
+      <p:ext uri="{BB962C8B-B14F-4D97-AF65-F5344CB8AC3E}">
+        <p14:creationId xmlns:p14="http://schemas.microsoft.com/office/powerpoint/2010/main" val="1117615053"/>
       </p:ext>
     </p:extLst>
   </p:cSld>

--- a/pptx/Lecture7.pptx
+++ b/pptx/Lecture7.pptx
@@ -5,46 +5,48 @@
     <p:sldMasterId id="2147483648" r:id="rId1"/>
   </p:sldMasterIdLst>
   <p:notesMasterIdLst>
-    <p:notesMasterId r:id="rId39"/>
+    <p:notesMasterId r:id="rId41"/>
   </p:notesMasterIdLst>
   <p:sldIdLst>
     <p:sldId id="256" r:id="rId2"/>
     <p:sldId id="309" r:id="rId3"/>
     <p:sldId id="310" r:id="rId4"/>
-    <p:sldId id="308" r:id="rId5"/>
-    <p:sldId id="336" r:id="rId6"/>
-    <p:sldId id="317" r:id="rId7"/>
-    <p:sldId id="338" r:id="rId8"/>
-    <p:sldId id="339" r:id="rId9"/>
-    <p:sldId id="337" r:id="rId10"/>
-    <p:sldId id="355" r:id="rId11"/>
-    <p:sldId id="350" r:id="rId12"/>
-    <p:sldId id="340" r:id="rId13"/>
-    <p:sldId id="356" r:id="rId14"/>
-    <p:sldId id="362" r:id="rId15"/>
-    <p:sldId id="357" r:id="rId16"/>
-    <p:sldId id="295" r:id="rId17"/>
-    <p:sldId id="343" r:id="rId18"/>
-    <p:sldId id="358" r:id="rId19"/>
-    <p:sldId id="359" r:id="rId20"/>
-    <p:sldId id="360" r:id="rId21"/>
-    <p:sldId id="361" r:id="rId22"/>
-    <p:sldId id="363" r:id="rId23"/>
-    <p:sldId id="364" r:id="rId24"/>
-    <p:sldId id="365" r:id="rId25"/>
-    <p:sldId id="352" r:id="rId26"/>
-    <p:sldId id="320" r:id="rId27"/>
-    <p:sldId id="370" r:id="rId28"/>
-    <p:sldId id="321" r:id="rId29"/>
-    <p:sldId id="330" r:id="rId30"/>
-    <p:sldId id="329" r:id="rId31"/>
-    <p:sldId id="331" r:id="rId32"/>
-    <p:sldId id="334" r:id="rId33"/>
-    <p:sldId id="332" r:id="rId34"/>
-    <p:sldId id="333" r:id="rId35"/>
-    <p:sldId id="353" r:id="rId36"/>
-    <p:sldId id="366" r:id="rId37"/>
-    <p:sldId id="369" r:id="rId38"/>
+    <p:sldId id="372" r:id="rId5"/>
+    <p:sldId id="308" r:id="rId6"/>
+    <p:sldId id="336" r:id="rId7"/>
+    <p:sldId id="317" r:id="rId8"/>
+    <p:sldId id="338" r:id="rId9"/>
+    <p:sldId id="339" r:id="rId10"/>
+    <p:sldId id="337" r:id="rId11"/>
+    <p:sldId id="355" r:id="rId12"/>
+    <p:sldId id="350" r:id="rId13"/>
+    <p:sldId id="340" r:id="rId14"/>
+    <p:sldId id="371" r:id="rId15"/>
+    <p:sldId id="356" r:id="rId16"/>
+    <p:sldId id="362" r:id="rId17"/>
+    <p:sldId id="357" r:id="rId18"/>
+    <p:sldId id="295" r:id="rId19"/>
+    <p:sldId id="343" r:id="rId20"/>
+    <p:sldId id="358" r:id="rId21"/>
+    <p:sldId id="359" r:id="rId22"/>
+    <p:sldId id="360" r:id="rId23"/>
+    <p:sldId id="361" r:id="rId24"/>
+    <p:sldId id="363" r:id="rId25"/>
+    <p:sldId id="364" r:id="rId26"/>
+    <p:sldId id="365" r:id="rId27"/>
+    <p:sldId id="352" r:id="rId28"/>
+    <p:sldId id="320" r:id="rId29"/>
+    <p:sldId id="370" r:id="rId30"/>
+    <p:sldId id="321" r:id="rId31"/>
+    <p:sldId id="330" r:id="rId32"/>
+    <p:sldId id="329" r:id="rId33"/>
+    <p:sldId id="331" r:id="rId34"/>
+    <p:sldId id="332" r:id="rId35"/>
+    <p:sldId id="334" r:id="rId36"/>
+    <p:sldId id="333" r:id="rId37"/>
+    <p:sldId id="353" r:id="rId38"/>
+    <p:sldId id="366" r:id="rId39"/>
+    <p:sldId id="369" r:id="rId40"/>
   </p:sldIdLst>
   <p:sldSz cx="12192000" cy="6858000"/>
   <p:notesSz cx="6858000" cy="9144000"/>
@@ -491,7 +493,7 @@
           <a:p>
             <a:fld id="{4995A223-E7C9-A243-9A70-FE01E1A1DD65}" type="datetimeFigureOut">
               <a:rPr lang="en-US" smtClean="0"/>
-              <a:t>9/22/2026</a:t>
+              <a:t>9/22/26</a:t>
             </a:fld>
             <a:endParaRPr lang="en-US"/>
           </a:p>
@@ -905,13 +907,50 @@
           <a:lstStyle/>
           <a:p>
             <a:r>
-              <a:rPr lang="en-GB" b="1" dirty="0"/>
-              <a:t>Chart types section</a:t>
-            </a:r>
-            <a:r>
-              <a:rPr lang="en-GB" dirty="0"/>
-              <a:t> → 10-15 slides (show the chart type + sports application for each)</a:t>
-            </a:r>
+              <a:rPr lang="en-US" dirty="0"/>
+              <a:t>assigns a run value to each offensive event based on how much that event typically increases run scoring.</a:t>
+            </a:r>
+          </a:p>
+          <a:p>
+            <a:r>
+              <a:rPr lang="en-US" dirty="0"/>
+              <a:t>For example (approximate values):</a:t>
+            </a:r>
+          </a:p>
+          <a:p>
+            <a:r>
+              <a:rPr lang="en-US" dirty="0"/>
+              <a:t>Walk ≈ 0.7 runs</a:t>
+            </a:r>
+          </a:p>
+          <a:p>
+            <a:r>
+              <a:rPr lang="en-US" dirty="0"/>
+              <a:t>Single ≈ 0.9 runs</a:t>
+            </a:r>
+          </a:p>
+          <a:p>
+            <a:r>
+              <a:rPr lang="en-US" dirty="0"/>
+              <a:t>Double ≈ 1.2 runs</a:t>
+            </a:r>
+          </a:p>
+          <a:p>
+            <a:r>
+              <a:rPr lang="en-US" dirty="0"/>
+              <a:t>Triple ≈ 1.6 runs</a:t>
+            </a:r>
+          </a:p>
+          <a:p>
+            <a:r>
+              <a:rPr lang="en-US" dirty="0"/>
+              <a:t>Home run ≈ 2.0 runs</a:t>
+            </a:r>
+          </a:p>
+          <a:p>
+            <a:endParaRPr lang="en-US" dirty="0"/>
+          </a:p>
+          <a:p>
             <a:endParaRPr lang="en-US" dirty="0"/>
           </a:p>
         </p:txBody>
@@ -933,7 +972,7 @@
           <a:p>
             <a:fld id="{1560C251-82B7-4253-A774-38D73C276BCE}" type="slidenum">
               <a:rPr lang="en-US" smtClean="0"/>
-              <a:t>28</a:t>
+              <a:t>27</a:t>
             </a:fld>
             <a:endParaRPr lang="en-US" dirty="0"/>
           </a:p>
@@ -942,7 +981,7 @@
     </p:spTree>
     <p:extLst>
       <p:ext uri="{BB962C8B-B14F-4D97-AF65-F5344CB8AC3E}">
-        <p14:creationId xmlns:p14="http://schemas.microsoft.com/office/powerpoint/2010/main" val="1001914172"/>
+        <p14:creationId xmlns:p14="http://schemas.microsoft.com/office/powerpoint/2010/main" val="336918175"/>
       </p:ext>
     </p:extLst>
   </p:cSld>
@@ -998,20 +1037,47 @@
           <a:p>
             <a:r>
               <a:rPr lang="en-US" dirty="0"/>
-              <a:t>Distribution of rim shot making</a:t>
+              <a:t>assigns a run value to each offensive event based on how much that event typically increases run scoring.</a:t>
             </a:r>
           </a:p>
           <a:p>
             <a:r>
               <a:rPr lang="en-US" dirty="0"/>
-              <a:t>Steph curry within that distribution</a:t>
+              <a:t>For example (approximate values):</a:t>
             </a:r>
           </a:p>
           <a:p>
             <a:r>
               <a:rPr lang="en-US" dirty="0"/>
-              <a:t>Steph curry over the past decade</a:t>
-            </a:r>
+              <a:t>Walk ≈ 0.7 runs</a:t>
+            </a:r>
+          </a:p>
+          <a:p>
+            <a:r>
+              <a:rPr lang="en-US" dirty="0"/>
+              <a:t>Single ≈ 0.9 runs</a:t>
+            </a:r>
+          </a:p>
+          <a:p>
+            <a:r>
+              <a:rPr lang="en-US" dirty="0"/>
+              <a:t>Double ≈ 1.2 runs</a:t>
+            </a:r>
+          </a:p>
+          <a:p>
+            <a:r>
+              <a:rPr lang="en-US" dirty="0"/>
+              <a:t>Triple ≈ 1.6 runs</a:t>
+            </a:r>
+          </a:p>
+          <a:p>
+            <a:r>
+              <a:rPr lang="en-US" dirty="0"/>
+              <a:t>Home run ≈ 2.0 runs</a:t>
+            </a:r>
+          </a:p>
+          <a:p>
+            <a:endParaRPr lang="en-US" dirty="0"/>
           </a:p>
         </p:txBody>
       </p:sp>
@@ -1030,9 +1096,200 @@
           <a:bodyPr/>
           <a:lstStyle/>
           <a:p>
+            <a:fld id="{1560C251-82B7-4253-A774-38D73C276BCE}" type="slidenum">
+              <a:rPr lang="en-US" smtClean="0"/>
+              <a:t>28</a:t>
+            </a:fld>
+            <a:endParaRPr lang="en-US" dirty="0"/>
+          </a:p>
+        </p:txBody>
+      </p:sp>
+    </p:spTree>
+    <p:extLst>
+      <p:ext uri="{BB962C8B-B14F-4D97-AF65-F5344CB8AC3E}">
+        <p14:creationId xmlns:p14="http://schemas.microsoft.com/office/powerpoint/2010/main" val="3363809347"/>
+      </p:ext>
+    </p:extLst>
+  </p:cSld>
+  <p:clrMapOvr>
+    <a:masterClrMapping/>
+  </p:clrMapOvr>
+</p:notes>
+</file>
+
+<file path=ppt/notesSlides/notesSlide12.xml><?xml version="1.0" encoding="utf-8"?>
+<p:notes xmlns:a="http://schemas.openxmlformats.org/drawingml/2006/main" xmlns:r="http://schemas.openxmlformats.org/officeDocument/2006/relationships" xmlns:p="http://schemas.openxmlformats.org/presentationml/2006/main">
+  <p:cSld>
+    <p:spTree>
+      <p:nvGrpSpPr>
+        <p:cNvPr id="1" name=""/>
+        <p:cNvGrpSpPr/>
+        <p:nvPr/>
+      </p:nvGrpSpPr>
+      <p:grpSpPr>
+        <a:xfrm>
+          <a:off x="0" y="0"/>
+          <a:ext cx="0" cy="0"/>
+          <a:chOff x="0" y="0"/>
+          <a:chExt cx="0" cy="0"/>
+        </a:xfrm>
+      </p:grpSpPr>
+      <p:sp>
+        <p:nvSpPr>
+          <p:cNvPr id="2" name="Slide Image Placeholder 1"/>
+          <p:cNvSpPr>
+            <a:spLocks noGrp="1" noRot="1" noChangeAspect="1"/>
+          </p:cNvSpPr>
+          <p:nvPr>
+            <p:ph type="sldImg"/>
+          </p:nvPr>
+        </p:nvSpPr>
+        <p:spPr/>
+      </p:sp>
+      <p:sp>
+        <p:nvSpPr>
+          <p:cNvPr id="3" name="Notes Placeholder 2"/>
+          <p:cNvSpPr>
+            <a:spLocks noGrp="1"/>
+          </p:cNvSpPr>
+          <p:nvPr>
+            <p:ph type="body" idx="1"/>
+          </p:nvPr>
+        </p:nvSpPr>
+        <p:spPr/>
+        <p:txBody>
+          <a:bodyPr/>
+          <a:lstStyle/>
+          <a:p>
+            <a:r>
+              <a:rPr lang="en-GB" b="1" dirty="0"/>
+              <a:t>Chart types section</a:t>
+            </a:r>
+            <a:r>
+              <a:rPr lang="en-GB" dirty="0"/>
+              <a:t> → 10-15 slides (show the chart type + sports application for each)</a:t>
+            </a:r>
+            <a:endParaRPr lang="en-US" dirty="0"/>
+          </a:p>
+        </p:txBody>
+      </p:sp>
+      <p:sp>
+        <p:nvSpPr>
+          <p:cNvPr id="4" name="Slide Number Placeholder 3"/>
+          <p:cNvSpPr>
+            <a:spLocks noGrp="1"/>
+          </p:cNvSpPr>
+          <p:nvPr>
+            <p:ph type="sldNum" sz="quarter" idx="5"/>
+          </p:nvPr>
+        </p:nvSpPr>
+        <p:spPr/>
+        <p:txBody>
+          <a:bodyPr/>
+          <a:lstStyle/>
+          <a:p>
+            <a:fld id="{1560C251-82B7-4253-A774-38D73C276BCE}" type="slidenum">
+              <a:rPr lang="en-US" smtClean="0"/>
+              <a:t>30</a:t>
+            </a:fld>
+            <a:endParaRPr lang="en-US" dirty="0"/>
+          </a:p>
+        </p:txBody>
+      </p:sp>
+    </p:spTree>
+    <p:extLst>
+      <p:ext uri="{BB962C8B-B14F-4D97-AF65-F5344CB8AC3E}">
+        <p14:creationId xmlns:p14="http://schemas.microsoft.com/office/powerpoint/2010/main" val="1001914172"/>
+      </p:ext>
+    </p:extLst>
+  </p:cSld>
+  <p:clrMapOvr>
+    <a:masterClrMapping/>
+  </p:clrMapOvr>
+</p:notes>
+</file>
+
+<file path=ppt/notesSlides/notesSlide13.xml><?xml version="1.0" encoding="utf-8"?>
+<p:notes xmlns:a="http://schemas.openxmlformats.org/drawingml/2006/main" xmlns:r="http://schemas.openxmlformats.org/officeDocument/2006/relationships" xmlns:p="http://schemas.openxmlformats.org/presentationml/2006/main">
+  <p:cSld>
+    <p:spTree>
+      <p:nvGrpSpPr>
+        <p:cNvPr id="1" name=""/>
+        <p:cNvGrpSpPr/>
+        <p:nvPr/>
+      </p:nvGrpSpPr>
+      <p:grpSpPr>
+        <a:xfrm>
+          <a:off x="0" y="0"/>
+          <a:ext cx="0" cy="0"/>
+          <a:chOff x="0" y="0"/>
+          <a:chExt cx="0" cy="0"/>
+        </a:xfrm>
+      </p:grpSpPr>
+      <p:sp>
+        <p:nvSpPr>
+          <p:cNvPr id="2" name="Slide Image Placeholder 1"/>
+          <p:cNvSpPr>
+            <a:spLocks noGrp="1" noRot="1" noChangeAspect="1"/>
+          </p:cNvSpPr>
+          <p:nvPr>
+            <p:ph type="sldImg"/>
+          </p:nvPr>
+        </p:nvSpPr>
+        <p:spPr/>
+      </p:sp>
+      <p:sp>
+        <p:nvSpPr>
+          <p:cNvPr id="3" name="Notes Placeholder 2"/>
+          <p:cNvSpPr>
+            <a:spLocks noGrp="1"/>
+          </p:cNvSpPr>
+          <p:nvPr>
+            <p:ph type="body" idx="1"/>
+          </p:nvPr>
+        </p:nvSpPr>
+        <p:spPr/>
+        <p:txBody>
+          <a:bodyPr/>
+          <a:lstStyle/>
+          <a:p>
+            <a:r>
+              <a:rPr lang="en-US" dirty="0"/>
+              <a:t>Distribution of rim shot making</a:t>
+            </a:r>
+          </a:p>
+          <a:p>
+            <a:r>
+              <a:rPr lang="en-US" dirty="0"/>
+              <a:t>Steph curry within that distribution</a:t>
+            </a:r>
+          </a:p>
+          <a:p>
+            <a:r>
+              <a:rPr lang="en-US" dirty="0"/>
+              <a:t>Steph curry over the past decade</a:t>
+            </a:r>
+          </a:p>
+        </p:txBody>
+      </p:sp>
+      <p:sp>
+        <p:nvSpPr>
+          <p:cNvPr id="4" name="Slide Number Placeholder 3"/>
+          <p:cNvSpPr>
+            <a:spLocks noGrp="1"/>
+          </p:cNvSpPr>
+          <p:nvPr>
+            <p:ph type="sldNum" sz="quarter" idx="5"/>
+          </p:nvPr>
+        </p:nvSpPr>
+        <p:spPr/>
+        <p:txBody>
+          <a:bodyPr/>
+          <a:lstStyle/>
+          <a:p>
             <a:fld id="{117D17FD-8842-8E4F-8C3E-EC8B634B2D5A}" type="slidenum">
               <a:rPr lang="en-US" smtClean="0"/>
-              <a:t>35</a:t>
+              <a:t>37</a:t>
             </a:fld>
             <a:endParaRPr lang="en-US"/>
           </a:p>
@@ -1096,20 +1353,9 @@
           <a:lstStyle/>
           <a:p>
             <a:r>
-              <a:rPr lang="en-US" dirty="0"/>
-              <a:t>Sports data visualization is described as an increasingly important research direction </a:t>
-            </a:r>
-          </a:p>
-          <a:p>
-            <a:pPr defTabSz="933237">
-              <a:defRPr/>
-            </a:pPr>
-            <a:r>
-              <a:rPr lang="en-US" dirty="0"/>
-              <a:t>Visual processing happens faster than numerical processing—critical for time-sensitive sports decisions</a:t>
-            </a:r>
-          </a:p>
-          <a:p>
+              <a:rPr lang="en-GB" dirty="0"/>
+              <a:t>Did it help you understand something? or because it simply looked interesting?</a:t>
+            </a:r>
             <a:endParaRPr lang="en-US" dirty="0"/>
           </a:p>
         </p:txBody>
@@ -1129,18 +1375,18 @@
           <a:bodyPr/>
           <a:lstStyle/>
           <a:p>
-            <a:fld id="{1560C251-82B7-4253-A774-38D73C276BCE}" type="slidenum">
+            <a:fld id="{117D17FD-8842-8E4F-8C3E-EC8B634B2D5A}" type="slidenum">
               <a:rPr lang="en-US" smtClean="0"/>
-              <a:t>5</a:t>
+              <a:t>4</a:t>
             </a:fld>
-            <a:endParaRPr lang="en-US" dirty="0"/>
+            <a:endParaRPr lang="en-US"/>
           </a:p>
         </p:txBody>
       </p:sp>
     </p:spTree>
     <p:extLst>
       <p:ext uri="{BB962C8B-B14F-4D97-AF65-F5344CB8AC3E}">
-        <p14:creationId xmlns:p14="http://schemas.microsoft.com/office/powerpoint/2010/main" val="2292072176"/>
+        <p14:creationId xmlns:p14="http://schemas.microsoft.com/office/powerpoint/2010/main" val="1324970198"/>
       </p:ext>
     </p:extLst>
   </p:cSld>
@@ -1196,8 +1442,20 @@
           <a:p>
             <a:r>
               <a:rPr lang="en-US" dirty="0"/>
-              <a:t>Who played the most minutes?</a:t>
-            </a:r>
+              <a:t>Sports data visualization is described as an increasingly important research direction </a:t>
+            </a:r>
+          </a:p>
+          <a:p>
+            <a:pPr defTabSz="933237">
+              <a:defRPr/>
+            </a:pPr>
+            <a:r>
+              <a:rPr lang="en-US" dirty="0"/>
+              <a:t>Visual processing happens faster than numerical processing—critical for time-sensitive sports decisions</a:t>
+            </a:r>
+          </a:p>
+          <a:p>
+            <a:endParaRPr lang="en-US" dirty="0"/>
           </a:p>
         </p:txBody>
       </p:sp>
@@ -1227,6 +1485,93 @@
     </p:spTree>
     <p:extLst>
       <p:ext uri="{BB962C8B-B14F-4D97-AF65-F5344CB8AC3E}">
+        <p14:creationId xmlns:p14="http://schemas.microsoft.com/office/powerpoint/2010/main" val="2292072176"/>
+      </p:ext>
+    </p:extLst>
+  </p:cSld>
+  <p:clrMapOvr>
+    <a:masterClrMapping/>
+  </p:clrMapOvr>
+</p:notes>
+</file>
+
+<file path=ppt/notesSlides/notesSlide4.xml><?xml version="1.0" encoding="utf-8"?>
+<p:notes xmlns:a="http://schemas.openxmlformats.org/drawingml/2006/main" xmlns:r="http://schemas.openxmlformats.org/officeDocument/2006/relationships" xmlns:p="http://schemas.openxmlformats.org/presentationml/2006/main">
+  <p:cSld>
+    <p:spTree>
+      <p:nvGrpSpPr>
+        <p:cNvPr id="1" name=""/>
+        <p:cNvGrpSpPr/>
+        <p:nvPr/>
+      </p:nvGrpSpPr>
+      <p:grpSpPr>
+        <a:xfrm>
+          <a:off x="0" y="0"/>
+          <a:ext cx="0" cy="0"/>
+          <a:chOff x="0" y="0"/>
+          <a:chExt cx="0" cy="0"/>
+        </a:xfrm>
+      </p:grpSpPr>
+      <p:sp>
+        <p:nvSpPr>
+          <p:cNvPr id="2" name="Slide Image Placeholder 1"/>
+          <p:cNvSpPr>
+            <a:spLocks noGrp="1" noRot="1" noChangeAspect="1"/>
+          </p:cNvSpPr>
+          <p:nvPr>
+            <p:ph type="sldImg"/>
+          </p:nvPr>
+        </p:nvSpPr>
+        <p:spPr/>
+      </p:sp>
+      <p:sp>
+        <p:nvSpPr>
+          <p:cNvPr id="3" name="Notes Placeholder 2"/>
+          <p:cNvSpPr>
+            <a:spLocks noGrp="1"/>
+          </p:cNvSpPr>
+          <p:nvPr>
+            <p:ph type="body" idx="1"/>
+          </p:nvPr>
+        </p:nvSpPr>
+        <p:spPr/>
+        <p:txBody>
+          <a:bodyPr/>
+          <a:lstStyle/>
+          <a:p>
+            <a:r>
+              <a:rPr lang="en-US" dirty="0"/>
+              <a:t>Who played the most minutes?</a:t>
+            </a:r>
+          </a:p>
+        </p:txBody>
+      </p:sp>
+      <p:sp>
+        <p:nvSpPr>
+          <p:cNvPr id="4" name="Slide Number Placeholder 3"/>
+          <p:cNvSpPr>
+            <a:spLocks noGrp="1"/>
+          </p:cNvSpPr>
+          <p:nvPr>
+            <p:ph type="sldNum" sz="quarter" idx="5"/>
+          </p:nvPr>
+        </p:nvSpPr>
+        <p:spPr/>
+        <p:txBody>
+          <a:bodyPr/>
+          <a:lstStyle/>
+          <a:p>
+            <a:fld id="{1560C251-82B7-4253-A774-38D73C276BCE}" type="slidenum">
+              <a:rPr lang="en-US" smtClean="0"/>
+              <a:t>7</a:t>
+            </a:fld>
+            <a:endParaRPr lang="en-US" dirty="0"/>
+          </a:p>
+        </p:txBody>
+      </p:sp>
+    </p:spTree>
+    <p:extLst>
+      <p:ext uri="{BB962C8B-B14F-4D97-AF65-F5344CB8AC3E}">
         <p14:creationId xmlns:p14="http://schemas.microsoft.com/office/powerpoint/2010/main" val="350496961"/>
       </p:ext>
     </p:extLst>
@@ -1237,7 +1582,7 @@
 </p:notes>
 </file>
 
-<file path=ppt/notesSlides/notesSlide4.xml><?xml version="1.0" encoding="utf-8"?>
+<file path=ppt/notesSlides/notesSlide5.xml><?xml version="1.0" encoding="utf-8"?>
 <p:notes xmlns:a="http://schemas.openxmlformats.org/drawingml/2006/main" xmlns:r="http://schemas.openxmlformats.org/officeDocument/2006/relationships" xmlns:p="http://schemas.openxmlformats.org/presentationml/2006/main">
   <p:cSld>
     <p:spTree>
@@ -1341,7 +1686,7 @@
           <a:p>
             <a:fld id="{1560C251-82B7-4253-A774-38D73C276BCE}" type="slidenum">
               <a:rPr lang="en-US" smtClean="0"/>
-              <a:t>10</a:t>
+              <a:t>11</a:t>
             </a:fld>
             <a:endParaRPr lang="en-US" dirty="0"/>
           </a:p>
@@ -1360,7 +1705,7 @@
 </p:notes>
 </file>
 
-<file path=ppt/notesSlides/notesSlide5.xml><?xml version="1.0" encoding="utf-8"?>
+<file path=ppt/notesSlides/notesSlide6.xml><?xml version="1.0" encoding="utf-8"?>
 <p:notes xmlns:a="http://schemas.openxmlformats.org/drawingml/2006/main" xmlns:r="http://schemas.openxmlformats.org/officeDocument/2006/relationships" xmlns:p="http://schemas.openxmlformats.org/presentationml/2006/main">
   <p:cSld>
     <p:spTree>
@@ -1452,7 +1797,7 @@
           <a:p>
             <a:fld id="{1560C251-82B7-4253-A774-38D73C276BCE}" type="slidenum">
               <a:rPr lang="en-US" smtClean="0"/>
-              <a:t>11</a:t>
+              <a:t>12</a:t>
             </a:fld>
             <a:endParaRPr lang="en-US" dirty="0"/>
           </a:p>
@@ -1471,7 +1816,7 @@
 </p:notes>
 </file>
 
-<file path=ppt/notesSlides/notesSlide6.xml><?xml version="1.0" encoding="utf-8"?>
+<file path=ppt/notesSlides/notesSlide7.xml><?xml version="1.0" encoding="utf-8"?>
 <p:notes xmlns:a="http://schemas.openxmlformats.org/drawingml/2006/main" xmlns:r="http://schemas.openxmlformats.org/officeDocument/2006/relationships" xmlns:p="http://schemas.openxmlformats.org/presentationml/2006/main">
   <p:cSld>
     <p:spTree>
@@ -1515,151 +1860,6 @@
           <a:bodyPr/>
           <a:lstStyle/>
           <a:p>
-            <a:r>
-              <a:rPr lang="en-US" dirty="0"/>
-              <a:t>Visual properties your brain processes in &lt;200-250 milliseconds You see them </a:t>
-            </a:r>
-            <a:r>
-              <a:rPr lang="en-US" i="1" dirty="0"/>
-              <a:t>instantly</a:t>
-            </a:r>
-            <a:r>
-              <a:rPr lang="en-US" dirty="0"/>
-              <a:t> without conscious effort </a:t>
-            </a:r>
-          </a:p>
-          <a:p>
-            <a:r>
-              <a:rPr lang="en-US" dirty="0"/>
-              <a:t>Happens before you "think" about what you're looking at </a:t>
-            </a:r>
-          </a:p>
-          <a:p>
-            <a:r>
-              <a:rPr lang="en-US" dirty="0"/>
-              <a:t>Critical for dashboards, in-game analytics, quick decision-making</a:t>
-            </a:r>
-          </a:p>
-          <a:p>
-            <a:endParaRPr lang="en-US" dirty="0"/>
-          </a:p>
-          <a:p>
-            <a:r>
-              <a:rPr lang="en-US" dirty="0"/>
-              <a:t>Spatial: </a:t>
-            </a:r>
-          </a:p>
-          <a:p>
-            <a:pPr marL="174982" indent="-174982">
-              <a:buFontTx/>
-              <a:buChar char="-"/>
-            </a:pPr>
-            <a:r>
-              <a:rPr lang="en-US" dirty="0"/>
-              <a:t>length, </a:t>
-            </a:r>
-          </a:p>
-          <a:p>
-            <a:pPr marL="174982" indent="-174982">
-              <a:buFontTx/>
-              <a:buChar char="-"/>
-            </a:pPr>
-            <a:r>
-              <a:rPr lang="en-US" dirty="0"/>
-              <a:t>width, </a:t>
-            </a:r>
-          </a:p>
-          <a:p>
-            <a:pPr marL="174982" indent="-174982">
-              <a:buFontTx/>
-              <a:buChar char="-"/>
-            </a:pPr>
-            <a:r>
-              <a:rPr lang="en-US" dirty="0"/>
-              <a:t>orientation, </a:t>
-            </a:r>
-          </a:p>
-          <a:p>
-            <a:pPr marL="174982" indent="-174982" defTabSz="933237">
-              <a:buFontTx/>
-              <a:buChar char="-"/>
-              <a:defRPr/>
-            </a:pPr>
-            <a:r>
-              <a:rPr lang="en-US" dirty="0"/>
-              <a:t>enclosure</a:t>
-            </a:r>
-          </a:p>
-          <a:p>
-            <a:pPr marL="174982" indent="-174982">
-              <a:buFontTx/>
-              <a:buChar char="-"/>
-            </a:pPr>
-            <a:r>
-              <a:rPr lang="en-US" dirty="0"/>
-              <a:t>position, </a:t>
-            </a:r>
-          </a:p>
-          <a:p>
-            <a:pPr marL="174982" indent="-174982">
-              <a:buFontTx/>
-              <a:buChar char="-"/>
-            </a:pPr>
-            <a:r>
-              <a:rPr lang="en-US" dirty="0"/>
-              <a:t>grouping, </a:t>
-            </a:r>
-          </a:p>
-          <a:p>
-            <a:r>
-              <a:rPr lang="en-US" dirty="0"/>
-              <a:t>Size </a:t>
-            </a:r>
-          </a:p>
-          <a:p>
-            <a:r>
-              <a:rPr lang="en-US" dirty="0"/>
-              <a:t>Shape</a:t>
-            </a:r>
-          </a:p>
-          <a:p>
-            <a:pPr defTabSz="933237">
-              <a:defRPr/>
-            </a:pPr>
-            <a:r>
-              <a:rPr lang="en-US" dirty="0"/>
-              <a:t>Color: </a:t>
-            </a:r>
-          </a:p>
-          <a:p>
-            <a:pPr marL="174982" indent="-174982" defTabSz="933237">
-              <a:buFontTx/>
-              <a:buChar char="-"/>
-              <a:defRPr/>
-            </a:pPr>
-            <a:r>
-              <a:rPr lang="en-US" dirty="0"/>
-              <a:t>hue</a:t>
-            </a:r>
-          </a:p>
-          <a:p>
-            <a:pPr marL="174982" indent="-174982" defTabSz="933237">
-              <a:buFontTx/>
-              <a:buChar char="-"/>
-              <a:defRPr/>
-            </a:pPr>
-            <a:r>
-              <a:rPr lang="en-US" dirty="0"/>
-              <a:t>intensity</a:t>
-            </a:r>
-          </a:p>
-          <a:p>
-            <a:r>
-              <a:rPr lang="en-US" dirty="0"/>
-              <a:t>Motion </a:t>
-            </a:r>
-          </a:p>
-          <a:p>
             <a:endParaRPr lang="en-US" dirty="0"/>
           </a:p>
         </p:txBody>
@@ -1679,9 +1879,238 @@
           <a:bodyPr/>
           <a:lstStyle/>
           <a:p>
+            <a:fld id="{117D17FD-8842-8E4F-8C3E-EC8B634B2D5A}" type="slidenum">
+              <a:rPr lang="en-US" smtClean="0"/>
+              <a:t>17</a:t>
+            </a:fld>
+            <a:endParaRPr lang="en-US"/>
+          </a:p>
+        </p:txBody>
+      </p:sp>
+    </p:spTree>
+    <p:extLst>
+      <p:ext uri="{BB962C8B-B14F-4D97-AF65-F5344CB8AC3E}">
+        <p14:creationId xmlns:p14="http://schemas.microsoft.com/office/powerpoint/2010/main" val="3907880386"/>
+      </p:ext>
+    </p:extLst>
+  </p:cSld>
+  <p:clrMapOvr>
+    <a:masterClrMapping/>
+  </p:clrMapOvr>
+</p:notes>
+</file>
+
+<file path=ppt/notesSlides/notesSlide8.xml><?xml version="1.0" encoding="utf-8"?>
+<p:notes xmlns:a="http://schemas.openxmlformats.org/drawingml/2006/main" xmlns:r="http://schemas.openxmlformats.org/officeDocument/2006/relationships" xmlns:p="http://schemas.openxmlformats.org/presentationml/2006/main">
+  <p:cSld>
+    <p:spTree>
+      <p:nvGrpSpPr>
+        <p:cNvPr id="1" name=""/>
+        <p:cNvGrpSpPr/>
+        <p:nvPr/>
+      </p:nvGrpSpPr>
+      <p:grpSpPr>
+        <a:xfrm>
+          <a:off x="0" y="0"/>
+          <a:ext cx="0" cy="0"/>
+          <a:chOff x="0" y="0"/>
+          <a:chExt cx="0" cy="0"/>
+        </a:xfrm>
+      </p:grpSpPr>
+      <p:sp>
+        <p:nvSpPr>
+          <p:cNvPr id="2" name="Slide Image Placeholder 1"/>
+          <p:cNvSpPr>
+            <a:spLocks noGrp="1" noRot="1" noChangeAspect="1"/>
+          </p:cNvSpPr>
+          <p:nvPr>
+            <p:ph type="sldImg"/>
+          </p:nvPr>
+        </p:nvSpPr>
+        <p:spPr/>
+      </p:sp>
+      <p:sp>
+        <p:nvSpPr>
+          <p:cNvPr id="3" name="Notes Placeholder 2"/>
+          <p:cNvSpPr>
+            <a:spLocks noGrp="1"/>
+          </p:cNvSpPr>
+          <p:nvPr>
+            <p:ph type="body" idx="1"/>
+          </p:nvPr>
+        </p:nvSpPr>
+        <p:spPr/>
+        <p:txBody>
+          <a:bodyPr/>
+          <a:lstStyle/>
+          <a:p>
+            <a:r>
+              <a:rPr lang="en-US" dirty="0"/>
+              <a:t>Visual properties your brain processes in &lt;200-250 milliseconds You see them </a:t>
+            </a:r>
+            <a:r>
+              <a:rPr lang="en-US" i="1" dirty="0"/>
+              <a:t>instantly</a:t>
+            </a:r>
+            <a:r>
+              <a:rPr lang="en-US" dirty="0"/>
+              <a:t> without conscious effort </a:t>
+            </a:r>
+          </a:p>
+          <a:p>
+            <a:r>
+              <a:rPr lang="en-US" dirty="0"/>
+              <a:t>Happens before you "think" about what you're looking at </a:t>
+            </a:r>
+          </a:p>
+          <a:p>
+            <a:r>
+              <a:rPr lang="en-US" dirty="0"/>
+              <a:t>Critical for dashboards, in-game analytics, quick decision-making</a:t>
+            </a:r>
+          </a:p>
+          <a:p>
+            <a:endParaRPr lang="en-US" dirty="0"/>
+          </a:p>
+          <a:p>
+            <a:r>
+              <a:rPr lang="en-US" dirty="0"/>
+              <a:t>Spatial: </a:t>
+            </a:r>
+          </a:p>
+          <a:p>
+            <a:pPr marL="174982" indent="-174982">
+              <a:buFontTx/>
+              <a:buChar char="-"/>
+            </a:pPr>
+            <a:r>
+              <a:rPr lang="en-US" dirty="0"/>
+              <a:t>length, </a:t>
+            </a:r>
+          </a:p>
+          <a:p>
+            <a:pPr marL="174982" indent="-174982">
+              <a:buFontTx/>
+              <a:buChar char="-"/>
+            </a:pPr>
+            <a:r>
+              <a:rPr lang="en-US" dirty="0"/>
+              <a:t>width, </a:t>
+            </a:r>
+          </a:p>
+          <a:p>
+            <a:pPr marL="174982" indent="-174982">
+              <a:buFontTx/>
+              <a:buChar char="-"/>
+            </a:pPr>
+            <a:r>
+              <a:rPr lang="en-US" dirty="0"/>
+              <a:t>orientation, </a:t>
+            </a:r>
+          </a:p>
+          <a:p>
+            <a:pPr marL="174982" indent="-174982" defTabSz="933237">
+              <a:buFontTx/>
+              <a:buChar char="-"/>
+              <a:defRPr/>
+            </a:pPr>
+            <a:r>
+              <a:rPr lang="en-US" dirty="0"/>
+              <a:t>enclosure</a:t>
+            </a:r>
+          </a:p>
+          <a:p>
+            <a:pPr marL="174982" indent="-174982">
+              <a:buFontTx/>
+              <a:buChar char="-"/>
+            </a:pPr>
+            <a:r>
+              <a:rPr lang="en-US" dirty="0"/>
+              <a:t>position, </a:t>
+            </a:r>
+          </a:p>
+          <a:p>
+            <a:pPr marL="174982" indent="-174982">
+              <a:buFontTx/>
+              <a:buChar char="-"/>
+            </a:pPr>
+            <a:r>
+              <a:rPr lang="en-US" dirty="0"/>
+              <a:t>grouping, </a:t>
+            </a:r>
+          </a:p>
+          <a:p>
+            <a:r>
+              <a:rPr lang="en-US" dirty="0"/>
+              <a:t>Size </a:t>
+            </a:r>
+          </a:p>
+          <a:p>
+            <a:r>
+              <a:rPr lang="en-US" dirty="0"/>
+              <a:t>Shape</a:t>
+            </a:r>
+          </a:p>
+          <a:p>
+            <a:pPr defTabSz="933237">
+              <a:defRPr/>
+            </a:pPr>
+            <a:r>
+              <a:rPr lang="en-US" dirty="0"/>
+              <a:t>Color: </a:t>
+            </a:r>
+          </a:p>
+          <a:p>
+            <a:pPr marL="174982" indent="-174982" defTabSz="933237">
+              <a:buFontTx/>
+              <a:buChar char="-"/>
+              <a:defRPr/>
+            </a:pPr>
+            <a:r>
+              <a:rPr lang="en-US" dirty="0"/>
+              <a:t>hue</a:t>
+            </a:r>
+          </a:p>
+          <a:p>
+            <a:pPr marL="174982" indent="-174982" defTabSz="933237">
+              <a:buFontTx/>
+              <a:buChar char="-"/>
+              <a:defRPr/>
+            </a:pPr>
+            <a:r>
+              <a:rPr lang="en-US" dirty="0"/>
+              <a:t>intensity</a:t>
+            </a:r>
+          </a:p>
+          <a:p>
+            <a:r>
+              <a:rPr lang="en-US" dirty="0"/>
+              <a:t>Motion </a:t>
+            </a:r>
+          </a:p>
+          <a:p>
+            <a:endParaRPr lang="en-US" dirty="0"/>
+          </a:p>
+        </p:txBody>
+      </p:sp>
+      <p:sp>
+        <p:nvSpPr>
+          <p:cNvPr id="4" name="Slide Number Placeholder 3"/>
+          <p:cNvSpPr>
+            <a:spLocks noGrp="1"/>
+          </p:cNvSpPr>
+          <p:nvPr>
+            <p:ph type="sldNum" sz="quarter" idx="5"/>
+          </p:nvPr>
+        </p:nvSpPr>
+        <p:spPr/>
+        <p:txBody>
+          <a:bodyPr/>
+          <a:lstStyle/>
+          <a:p>
             <a:fld id="{1560C251-82B7-4253-A774-38D73C276BCE}" type="slidenum">
               <a:rPr lang="en-US" smtClean="0"/>
-              <a:t>16</a:t>
+              <a:t>18</a:t>
             </a:fld>
             <a:endParaRPr lang="en-US" dirty="0"/>
           </a:p>
@@ -1700,7 +2129,7 @@
 </p:notes>
 </file>
 
-<file path=ppt/notesSlides/notesSlide7.xml><?xml version="1.0" encoding="utf-8"?>
+<file path=ppt/notesSlides/notesSlide9.xml><?xml version="1.0" encoding="utf-8"?>
 <p:notes xmlns:a="http://schemas.openxmlformats.org/drawingml/2006/main" xmlns:r="http://schemas.openxmlformats.org/officeDocument/2006/relationships" xmlns:p="http://schemas.openxmlformats.org/presentationml/2006/main">
   <p:cSld>
     <p:spTree>
@@ -1934,7 +2363,7 @@
           <a:p>
             <a:fld id="{1560C251-82B7-4253-A774-38D73C276BCE}" type="slidenum">
               <a:rPr lang="en-US" smtClean="0"/>
-              <a:t>17</a:t>
+              <a:t>19</a:t>
             </a:fld>
             <a:endParaRPr lang="en-US" dirty="0"/>
           </a:p>
@@ -1944,261 +2373,6 @@
     <p:extLst>
       <p:ext uri="{BB962C8B-B14F-4D97-AF65-F5344CB8AC3E}">
         <p14:creationId xmlns:p14="http://schemas.microsoft.com/office/powerpoint/2010/main" val="1410306373"/>
-      </p:ext>
-    </p:extLst>
-  </p:cSld>
-  <p:clrMapOvr>
-    <a:masterClrMapping/>
-  </p:clrMapOvr>
-</p:notes>
-</file>
-
-<file path=ppt/notesSlides/notesSlide8.xml><?xml version="1.0" encoding="utf-8"?>
-<p:notes xmlns:a="http://schemas.openxmlformats.org/drawingml/2006/main" xmlns:r="http://schemas.openxmlformats.org/officeDocument/2006/relationships" xmlns:p="http://schemas.openxmlformats.org/presentationml/2006/main">
-  <p:cSld>
-    <p:spTree>
-      <p:nvGrpSpPr>
-        <p:cNvPr id="1" name=""/>
-        <p:cNvGrpSpPr/>
-        <p:nvPr/>
-      </p:nvGrpSpPr>
-      <p:grpSpPr>
-        <a:xfrm>
-          <a:off x="0" y="0"/>
-          <a:ext cx="0" cy="0"/>
-          <a:chOff x="0" y="0"/>
-          <a:chExt cx="0" cy="0"/>
-        </a:xfrm>
-      </p:grpSpPr>
-      <p:sp>
-        <p:nvSpPr>
-          <p:cNvPr id="2" name="Slide Image Placeholder 1"/>
-          <p:cNvSpPr>
-            <a:spLocks noGrp="1" noRot="1" noChangeAspect="1"/>
-          </p:cNvSpPr>
-          <p:nvPr>
-            <p:ph type="sldImg"/>
-          </p:nvPr>
-        </p:nvSpPr>
-        <p:spPr/>
-      </p:sp>
-      <p:sp>
-        <p:nvSpPr>
-          <p:cNvPr id="3" name="Notes Placeholder 2"/>
-          <p:cNvSpPr>
-            <a:spLocks noGrp="1"/>
-          </p:cNvSpPr>
-          <p:nvPr>
-            <p:ph type="body" idx="1"/>
-          </p:nvPr>
-        </p:nvSpPr>
-        <p:spPr/>
-        <p:txBody>
-          <a:bodyPr/>
-          <a:lstStyle/>
-          <a:p>
-            <a:r>
-              <a:rPr lang="en-US" dirty="0"/>
-              <a:t>assigns a run value to each offensive event based on how much that event typically increases run scoring.</a:t>
-            </a:r>
-          </a:p>
-          <a:p>
-            <a:r>
-              <a:rPr lang="en-US" dirty="0"/>
-              <a:t>For example (approximate values):</a:t>
-            </a:r>
-          </a:p>
-          <a:p>
-            <a:r>
-              <a:rPr lang="en-US" dirty="0"/>
-              <a:t>Walk ≈ 0.7 runs</a:t>
-            </a:r>
-          </a:p>
-          <a:p>
-            <a:r>
-              <a:rPr lang="en-US" dirty="0"/>
-              <a:t>Single ≈ 0.9 runs</a:t>
-            </a:r>
-          </a:p>
-          <a:p>
-            <a:r>
-              <a:rPr lang="en-US" dirty="0"/>
-              <a:t>Double ≈ 1.2 runs</a:t>
-            </a:r>
-          </a:p>
-          <a:p>
-            <a:r>
-              <a:rPr lang="en-US" dirty="0"/>
-              <a:t>Triple ≈ 1.6 runs</a:t>
-            </a:r>
-          </a:p>
-          <a:p>
-            <a:r>
-              <a:rPr lang="en-US" dirty="0"/>
-              <a:t>Home run ≈ 2.0 runs</a:t>
-            </a:r>
-          </a:p>
-          <a:p>
-            <a:endParaRPr lang="en-US" dirty="0"/>
-          </a:p>
-          <a:p>
-            <a:endParaRPr lang="en-US" dirty="0"/>
-          </a:p>
-        </p:txBody>
-      </p:sp>
-      <p:sp>
-        <p:nvSpPr>
-          <p:cNvPr id="4" name="Slide Number Placeholder 3"/>
-          <p:cNvSpPr>
-            <a:spLocks noGrp="1"/>
-          </p:cNvSpPr>
-          <p:nvPr>
-            <p:ph type="sldNum" sz="quarter" idx="5"/>
-          </p:nvPr>
-        </p:nvSpPr>
-        <p:spPr/>
-        <p:txBody>
-          <a:bodyPr/>
-          <a:lstStyle/>
-          <a:p>
-            <a:fld id="{1560C251-82B7-4253-A774-38D73C276BCE}" type="slidenum">
-              <a:rPr lang="en-US" smtClean="0"/>
-              <a:t>25</a:t>
-            </a:fld>
-            <a:endParaRPr lang="en-US" dirty="0"/>
-          </a:p>
-        </p:txBody>
-      </p:sp>
-    </p:spTree>
-    <p:extLst>
-      <p:ext uri="{BB962C8B-B14F-4D97-AF65-F5344CB8AC3E}">
-        <p14:creationId xmlns:p14="http://schemas.microsoft.com/office/powerpoint/2010/main" val="336918175"/>
-      </p:ext>
-    </p:extLst>
-  </p:cSld>
-  <p:clrMapOvr>
-    <a:masterClrMapping/>
-  </p:clrMapOvr>
-</p:notes>
-</file>
-
-<file path=ppt/notesSlides/notesSlide9.xml><?xml version="1.0" encoding="utf-8"?>
-<p:notes xmlns:a="http://schemas.openxmlformats.org/drawingml/2006/main" xmlns:r="http://schemas.openxmlformats.org/officeDocument/2006/relationships" xmlns:p="http://schemas.openxmlformats.org/presentationml/2006/main">
-  <p:cSld>
-    <p:spTree>
-      <p:nvGrpSpPr>
-        <p:cNvPr id="1" name=""/>
-        <p:cNvGrpSpPr/>
-        <p:nvPr/>
-      </p:nvGrpSpPr>
-      <p:grpSpPr>
-        <a:xfrm>
-          <a:off x="0" y="0"/>
-          <a:ext cx="0" cy="0"/>
-          <a:chOff x="0" y="0"/>
-          <a:chExt cx="0" cy="0"/>
-        </a:xfrm>
-      </p:grpSpPr>
-      <p:sp>
-        <p:nvSpPr>
-          <p:cNvPr id="2" name="Slide Image Placeholder 1"/>
-          <p:cNvSpPr>
-            <a:spLocks noGrp="1" noRot="1" noChangeAspect="1"/>
-          </p:cNvSpPr>
-          <p:nvPr>
-            <p:ph type="sldImg"/>
-          </p:nvPr>
-        </p:nvSpPr>
-        <p:spPr/>
-      </p:sp>
-      <p:sp>
-        <p:nvSpPr>
-          <p:cNvPr id="3" name="Notes Placeholder 2"/>
-          <p:cNvSpPr>
-            <a:spLocks noGrp="1"/>
-          </p:cNvSpPr>
-          <p:nvPr>
-            <p:ph type="body" idx="1"/>
-          </p:nvPr>
-        </p:nvSpPr>
-        <p:spPr/>
-        <p:txBody>
-          <a:bodyPr/>
-          <a:lstStyle/>
-          <a:p>
-            <a:r>
-              <a:rPr lang="en-US" dirty="0"/>
-              <a:t>assigns a run value to each offensive event based on how much that event typically increases run scoring.</a:t>
-            </a:r>
-          </a:p>
-          <a:p>
-            <a:r>
-              <a:rPr lang="en-US" dirty="0"/>
-              <a:t>For example (approximate values):</a:t>
-            </a:r>
-          </a:p>
-          <a:p>
-            <a:r>
-              <a:rPr lang="en-US" dirty="0"/>
-              <a:t>Walk ≈ 0.7 runs</a:t>
-            </a:r>
-          </a:p>
-          <a:p>
-            <a:r>
-              <a:rPr lang="en-US" dirty="0"/>
-              <a:t>Single ≈ 0.9 runs</a:t>
-            </a:r>
-          </a:p>
-          <a:p>
-            <a:r>
-              <a:rPr lang="en-US" dirty="0"/>
-              <a:t>Double ≈ 1.2 runs</a:t>
-            </a:r>
-          </a:p>
-          <a:p>
-            <a:r>
-              <a:rPr lang="en-US" dirty="0"/>
-              <a:t>Triple ≈ 1.6 runs</a:t>
-            </a:r>
-          </a:p>
-          <a:p>
-            <a:r>
-              <a:rPr lang="en-US" dirty="0"/>
-              <a:t>Home run ≈ 2.0 runs</a:t>
-            </a:r>
-          </a:p>
-          <a:p>
-            <a:endParaRPr lang="en-US" dirty="0"/>
-          </a:p>
-        </p:txBody>
-      </p:sp>
-      <p:sp>
-        <p:nvSpPr>
-          <p:cNvPr id="4" name="Slide Number Placeholder 3"/>
-          <p:cNvSpPr>
-            <a:spLocks noGrp="1"/>
-          </p:cNvSpPr>
-          <p:nvPr>
-            <p:ph type="sldNum" sz="quarter" idx="5"/>
-          </p:nvPr>
-        </p:nvSpPr>
-        <p:spPr/>
-        <p:txBody>
-          <a:bodyPr/>
-          <a:lstStyle/>
-          <a:p>
-            <a:fld id="{1560C251-82B7-4253-A774-38D73C276BCE}" type="slidenum">
-              <a:rPr lang="en-US" smtClean="0"/>
-              <a:t>26</a:t>
-            </a:fld>
-            <a:endParaRPr lang="en-US" dirty="0"/>
-          </a:p>
-        </p:txBody>
-      </p:sp>
-    </p:spTree>
-    <p:extLst>
-      <p:ext uri="{BB962C8B-B14F-4D97-AF65-F5344CB8AC3E}">
-        <p14:creationId xmlns:p14="http://schemas.microsoft.com/office/powerpoint/2010/main" val="3363809347"/>
       </p:ext>
     </p:extLst>
   </p:cSld>
@@ -2365,7 +2539,7 @@
           <a:p>
             <a:fld id="{1BF61C71-767E-B84C-BFB3-7B18856D27F4}" type="datetimeFigureOut">
               <a:rPr lang="en-US" smtClean="0"/>
-              <a:t>9/22/2026</a:t>
+              <a:t>9/22/26</a:t>
             </a:fld>
             <a:endParaRPr lang="en-US"/>
           </a:p>
@@ -2573,7 +2747,7 @@
           <a:p>
             <a:fld id="{1BF61C71-767E-B84C-BFB3-7B18856D27F4}" type="datetimeFigureOut">
               <a:rPr lang="en-US" smtClean="0"/>
-              <a:t>9/22/2026</a:t>
+              <a:t>9/22/26</a:t>
             </a:fld>
             <a:endParaRPr lang="en-US"/>
           </a:p>
@@ -2791,7 +2965,7 @@
           <a:p>
             <a:fld id="{1BF61C71-767E-B84C-BFB3-7B18856D27F4}" type="datetimeFigureOut">
               <a:rPr lang="en-US" smtClean="0"/>
-              <a:t>9/22/2026</a:t>
+              <a:t>9/22/26</a:t>
             </a:fld>
             <a:endParaRPr lang="en-US"/>
           </a:p>
@@ -2999,7 +3173,7 @@
           <a:p>
             <a:fld id="{1BF61C71-767E-B84C-BFB3-7B18856D27F4}" type="datetimeFigureOut">
               <a:rPr lang="en-US" smtClean="0"/>
-              <a:t>9/22/2026</a:t>
+              <a:t>9/22/26</a:t>
             </a:fld>
             <a:endParaRPr lang="en-US"/>
           </a:p>
@@ -3283,7 +3457,7 @@
           <a:p>
             <a:fld id="{1BF61C71-767E-B84C-BFB3-7B18856D27F4}" type="datetimeFigureOut">
               <a:rPr lang="en-US" smtClean="0"/>
-              <a:t>9/22/2026</a:t>
+              <a:t>9/22/26</a:t>
             </a:fld>
             <a:endParaRPr lang="en-US"/>
           </a:p>
@@ -3559,7 +3733,7 @@
           <a:p>
             <a:fld id="{1BF61C71-767E-B84C-BFB3-7B18856D27F4}" type="datetimeFigureOut">
               <a:rPr lang="en-US" smtClean="0"/>
-              <a:t>9/22/2026</a:t>
+              <a:t>9/22/26</a:t>
             </a:fld>
             <a:endParaRPr lang="en-US"/>
           </a:p>
@@ -3982,7 +4156,7 @@
           <a:p>
             <a:fld id="{1BF61C71-767E-B84C-BFB3-7B18856D27F4}" type="datetimeFigureOut">
               <a:rPr lang="en-US" smtClean="0"/>
-              <a:t>9/22/2026</a:t>
+              <a:t>9/22/26</a:t>
             </a:fld>
             <a:endParaRPr lang="en-US"/>
           </a:p>
@@ -4132,7 +4306,7 @@
           <a:p>
             <a:fld id="{1BF61C71-767E-B84C-BFB3-7B18856D27F4}" type="datetimeFigureOut">
               <a:rPr lang="en-US" smtClean="0"/>
-              <a:t>9/22/2026</a:t>
+              <a:t>9/22/26</a:t>
             </a:fld>
             <a:endParaRPr lang="en-US"/>
           </a:p>
@@ -4253,7 +4427,7 @@
           <a:p>
             <a:fld id="{1BF61C71-767E-B84C-BFB3-7B18856D27F4}" type="datetimeFigureOut">
               <a:rPr lang="en-US" smtClean="0"/>
-              <a:t>9/22/2026</a:t>
+              <a:t>9/22/26</a:t>
             </a:fld>
             <a:endParaRPr lang="en-US"/>
           </a:p>
@@ -4574,7 +4748,7 @@
           <a:p>
             <a:fld id="{1BF61C71-767E-B84C-BFB3-7B18856D27F4}" type="datetimeFigureOut">
               <a:rPr lang="en-US" smtClean="0"/>
-              <a:t>9/22/2026</a:t>
+              <a:t>9/22/26</a:t>
             </a:fld>
             <a:endParaRPr lang="en-US"/>
           </a:p>
@@ -4871,7 +5045,7 @@
           <a:p>
             <a:fld id="{1BF61C71-767E-B84C-BFB3-7B18856D27F4}" type="datetimeFigureOut">
               <a:rPr lang="en-US" smtClean="0"/>
-              <a:t>9/22/2026</a:t>
+              <a:t>9/22/26</a:t>
             </a:fld>
             <a:endParaRPr lang="en-US"/>
           </a:p>
@@ -5125,7 +5299,7 @@
           <a:p>
             <a:fld id="{1BF61C71-767E-B84C-BFB3-7B18856D27F4}" type="datetimeFigureOut">
               <a:rPr lang="en-US" smtClean="0"/>
-              <a:t>9/22/2026</a:t>
+              <a:t>9/22/26</a:t>
             </a:fld>
             <a:endParaRPr lang="en-US"/>
           </a:p>
@@ -5636,6 +5810,133 @@
         <p:cNvPr id="1" name="">
           <a:extLst>
             <a:ext uri="{FF2B5EF4-FFF2-40B4-BE49-F238E27FC236}">
+              <a16:creationId xmlns:a16="http://schemas.microsoft.com/office/drawing/2014/main" id="{8A004D83-43AE-8A70-7AB1-4981C0033EED}"/>
+            </a:ext>
+          </a:extLst>
+        </p:cNvPr>
+        <p:cNvGrpSpPr/>
+        <p:nvPr/>
+      </p:nvGrpSpPr>
+      <p:grpSpPr>
+        <a:xfrm>
+          <a:off x="0" y="0"/>
+          <a:ext cx="0" cy="0"/>
+          <a:chOff x="0" y="0"/>
+          <a:chExt cx="0" cy="0"/>
+        </a:xfrm>
+      </p:grpSpPr>
+      <p:sp>
+        <p:nvSpPr>
+          <p:cNvPr id="2" name="Title 1">
+            <a:extLst>
+              <a:ext uri="{FF2B5EF4-FFF2-40B4-BE49-F238E27FC236}">
+                <a16:creationId xmlns:a16="http://schemas.microsoft.com/office/drawing/2014/main" id="{5AC369D3-5EB4-695B-FE4E-1FD62462DFE7}"/>
+              </a:ext>
+            </a:extLst>
+          </p:cNvPr>
+          <p:cNvSpPr>
+            <a:spLocks noGrp="1"/>
+          </p:cNvSpPr>
+          <p:nvPr>
+            <p:ph type="title"/>
+          </p:nvPr>
+        </p:nvSpPr>
+        <p:spPr/>
+        <p:txBody>
+          <a:bodyPr/>
+          <a:lstStyle/>
+          <a:p>
+            <a:r>
+              <a:rPr lang="en-GB" dirty="0"/>
+              <a:t>Visual representation of values</a:t>
+            </a:r>
+            <a:endParaRPr lang="en-US" dirty="0"/>
+          </a:p>
+        </p:txBody>
+      </p:sp>
+      <p:sp>
+        <p:nvSpPr>
+          <p:cNvPr id="4" name="Slide Number Placeholder 3">
+            <a:extLst>
+              <a:ext uri="{FF2B5EF4-FFF2-40B4-BE49-F238E27FC236}">
+                <a16:creationId xmlns:a16="http://schemas.microsoft.com/office/drawing/2014/main" id="{32670A0F-282D-98B9-95C5-5B1C40F3FAC5}"/>
+              </a:ext>
+            </a:extLst>
+          </p:cNvPr>
+          <p:cNvSpPr>
+            <a:spLocks noGrp="1"/>
+          </p:cNvSpPr>
+          <p:nvPr>
+            <p:ph type="sldNum" sz="quarter" idx="12"/>
+          </p:nvPr>
+        </p:nvSpPr>
+        <p:spPr/>
+        <p:txBody>
+          <a:bodyPr/>
+          <a:lstStyle/>
+          <a:p>
+            <a:fld id="{45C00377-489B-40EC-B059-26BDDD2E89B9}" type="slidenum">
+              <a:rPr lang="en-US" smtClean="0"/>
+              <a:pPr/>
+              <a:t>10</a:t>
+            </a:fld>
+            <a:endParaRPr lang="en-US" dirty="0"/>
+          </a:p>
+        </p:txBody>
+      </p:sp>
+      <p:pic>
+        <p:nvPicPr>
+          <p:cNvPr id="6" name="Content Placeholder 5">
+            <a:extLst>
+              <a:ext uri="{FF2B5EF4-FFF2-40B4-BE49-F238E27FC236}">
+                <a16:creationId xmlns:a16="http://schemas.microsoft.com/office/drawing/2014/main" id="{18066627-6F26-2DD0-1358-0F2D745E7CFE}"/>
+              </a:ext>
+            </a:extLst>
+          </p:cNvPr>
+          <p:cNvPicPr>
+            <a:picLocks noGrp="1" noChangeAspect="1"/>
+          </p:cNvPicPr>
+          <p:nvPr>
+            <p:ph idx="1"/>
+          </p:nvPr>
+        </p:nvPicPr>
+        <p:blipFill>
+          <a:blip r:embed="rId2"/>
+          <a:stretch>
+            <a:fillRect/>
+          </a:stretch>
+        </p:blipFill>
+        <p:spPr>
+          <a:xfrm>
+            <a:off x="3171685" y="1789378"/>
+            <a:ext cx="5848630" cy="4254500"/>
+          </a:xfrm>
+          <a:prstGeom prst="rect">
+            <a:avLst/>
+          </a:prstGeom>
+        </p:spPr>
+      </p:pic>
+    </p:spTree>
+    <p:extLst>
+      <p:ext uri="{BB962C8B-B14F-4D97-AF65-F5344CB8AC3E}">
+        <p14:creationId xmlns:p14="http://schemas.microsoft.com/office/powerpoint/2010/main" val="1087993033"/>
+      </p:ext>
+    </p:extLst>
+  </p:cSld>
+  <p:clrMapOvr>
+    <a:masterClrMapping/>
+  </p:clrMapOvr>
+</p:sld>
+</file>
+
+<file path=ppt/slides/slide11.xml><?xml version="1.0" encoding="utf-8"?>
+<p:sld xmlns:a="http://schemas.openxmlformats.org/drawingml/2006/main" xmlns:r="http://schemas.openxmlformats.org/officeDocument/2006/relationships" xmlns:p="http://schemas.openxmlformats.org/presentationml/2006/main">
+  <p:cSld>
+    <p:spTree>
+      <p:nvGrpSpPr>
+        <p:cNvPr id="1" name="">
+          <a:extLst>
+            <a:ext uri="{FF2B5EF4-FFF2-40B4-BE49-F238E27FC236}">
               <a16:creationId xmlns:a16="http://schemas.microsoft.com/office/drawing/2014/main" id="{0AC712C4-A607-4CAA-0668-48FCCB8BBA30}"/>
             </a:ext>
           </a:extLst>
@@ -5745,7 +6046,7 @@
             <a:fld id="{45C00377-489B-40EC-B059-26BDDD2E89B9}" type="slidenum">
               <a:rPr lang="en-US" smtClean="0"/>
               <a:pPr/>
-              <a:t>10</a:t>
+              <a:t>11</a:t>
             </a:fld>
             <a:endParaRPr lang="en-US" dirty="0"/>
           </a:p>
@@ -5764,7 +6065,7 @@
 </p:sld>
 </file>
 
-<file path=ppt/slides/slide11.xml><?xml version="1.0" encoding="utf-8"?>
+<file path=ppt/slides/slide12.xml><?xml version="1.0" encoding="utf-8"?>
 <p:sld xmlns:a="http://schemas.openxmlformats.org/drawingml/2006/main" xmlns:r="http://schemas.openxmlformats.org/officeDocument/2006/relationships" xmlns:p="http://schemas.openxmlformats.org/presentationml/2006/main">
   <p:cSld>
     <p:spTree>
@@ -5840,7 +6141,7 @@
             <a:fld id="{45C00377-489B-40EC-B059-26BDDD2E89B9}" type="slidenum">
               <a:rPr lang="en-US" smtClean="0"/>
               <a:pPr/>
-              <a:t>11</a:t>
+              <a:t>12</a:t>
             </a:fld>
             <a:endParaRPr lang="en-US" dirty="0"/>
           </a:p>
@@ -9915,7 +10216,7 @@
 </p:sld>
 </file>
 
-<file path=ppt/slides/slide12.xml><?xml version="1.0" encoding="utf-8"?>
+<file path=ppt/slides/slide13.xml><?xml version="1.0" encoding="utf-8"?>
 <p:sld xmlns:a="http://schemas.openxmlformats.org/drawingml/2006/main" xmlns:r="http://schemas.openxmlformats.org/officeDocument/2006/relationships" xmlns:p="http://schemas.openxmlformats.org/presentationml/2006/main">
   <p:cSld>
     <p:spTree>
@@ -9938,38 +10239,6 @@
           <a:chExt cx="0" cy="0"/>
         </a:xfrm>
       </p:grpSpPr>
-      <p:pic>
-        <p:nvPicPr>
-          <p:cNvPr id="9" name="Content Placeholder 8">
-            <a:extLst>
-              <a:ext uri="{FF2B5EF4-FFF2-40B4-BE49-F238E27FC236}">
-                <a16:creationId xmlns:a16="http://schemas.microsoft.com/office/drawing/2014/main" id="{B1C56B7B-6433-9A30-6D1D-211979BD0DB0}"/>
-              </a:ext>
-            </a:extLst>
-          </p:cNvPr>
-          <p:cNvPicPr>
-            <a:picLocks noGrp="1" noChangeAspect="1"/>
-          </p:cNvPicPr>
-          <p:nvPr>
-            <p:ph idx="1"/>
-          </p:nvPr>
-        </p:nvPicPr>
-        <p:blipFill>
-          <a:blip r:embed="rId2"/>
-          <a:stretch>
-            <a:fillRect/>
-          </a:stretch>
-        </p:blipFill>
-        <p:spPr>
-          <a:xfrm>
-            <a:off x="986547" y="1922463"/>
-            <a:ext cx="5848630" cy="4254500"/>
-          </a:xfrm>
-          <a:prstGeom prst="rect">
-            <a:avLst/>
-          </a:prstGeom>
-        </p:spPr>
-      </p:pic>
       <p:sp>
         <p:nvSpPr>
           <p:cNvPr id="2" name="Title 1">
@@ -10027,7 +10296,168 @@
             <a:fld id="{45C00377-489B-40EC-B059-26BDDD2E89B9}" type="slidenum">
               <a:rPr lang="en-US" smtClean="0"/>
               <a:pPr/>
-              <a:t>12</a:t>
+              <a:t>13</a:t>
+            </a:fld>
+            <a:endParaRPr lang="en-US" dirty="0"/>
+          </a:p>
+        </p:txBody>
+      </p:sp>
+      <p:pic>
+        <p:nvPicPr>
+          <p:cNvPr id="11" name="Picture 10">
+            <a:extLst>
+              <a:ext uri="{FF2B5EF4-FFF2-40B4-BE49-F238E27FC236}">
+                <a16:creationId xmlns:a16="http://schemas.microsoft.com/office/drawing/2014/main" id="{C527EB85-F203-84B8-030E-B6D43D966AFB}"/>
+              </a:ext>
+            </a:extLst>
+          </p:cNvPr>
+          <p:cNvPicPr>
+            <a:picLocks noChangeAspect="1"/>
+          </p:cNvPicPr>
+          <p:nvPr/>
+        </p:nvPicPr>
+        <p:blipFill>
+          <a:blip r:embed="rId2"/>
+          <a:stretch>
+            <a:fillRect/>
+          </a:stretch>
+        </p:blipFill>
+        <p:spPr>
+          <a:xfrm>
+            <a:off x="5296857" y="1703598"/>
+            <a:ext cx="1598286" cy="4226970"/>
+          </a:xfrm>
+          <a:prstGeom prst="rect">
+            <a:avLst/>
+          </a:prstGeom>
+        </p:spPr>
+      </p:pic>
+    </p:spTree>
+    <p:extLst>
+      <p:ext uri="{BB962C8B-B14F-4D97-AF65-F5344CB8AC3E}">
+        <p14:creationId xmlns:p14="http://schemas.microsoft.com/office/powerpoint/2010/main" val="897555825"/>
+      </p:ext>
+    </p:extLst>
+  </p:cSld>
+  <p:clrMapOvr>
+    <a:masterClrMapping/>
+  </p:clrMapOvr>
+</p:sld>
+</file>
+
+<file path=ppt/slides/slide14.xml><?xml version="1.0" encoding="utf-8"?>
+<p:sld xmlns:a="http://schemas.openxmlformats.org/drawingml/2006/main" xmlns:r="http://schemas.openxmlformats.org/officeDocument/2006/relationships" xmlns:p="http://schemas.openxmlformats.org/presentationml/2006/main">
+  <p:cSld>
+    <p:spTree>
+      <p:nvGrpSpPr>
+        <p:cNvPr id="1" name="">
+          <a:extLst>
+            <a:ext uri="{FF2B5EF4-FFF2-40B4-BE49-F238E27FC236}">
+              <a16:creationId xmlns:a16="http://schemas.microsoft.com/office/drawing/2014/main" id="{1ED7B86E-9B60-7831-9890-B7E0E8E841AF}"/>
+            </a:ext>
+          </a:extLst>
+        </p:cNvPr>
+        <p:cNvGrpSpPr/>
+        <p:nvPr/>
+      </p:nvGrpSpPr>
+      <p:grpSpPr>
+        <a:xfrm>
+          <a:off x="0" y="0"/>
+          <a:ext cx="0" cy="0"/>
+          <a:chOff x="0" y="0"/>
+          <a:chExt cx="0" cy="0"/>
+        </a:xfrm>
+      </p:grpSpPr>
+      <p:pic>
+        <p:nvPicPr>
+          <p:cNvPr id="9" name="Content Placeholder 8">
+            <a:extLst>
+              <a:ext uri="{FF2B5EF4-FFF2-40B4-BE49-F238E27FC236}">
+                <a16:creationId xmlns:a16="http://schemas.microsoft.com/office/drawing/2014/main" id="{952AEE1E-A619-B692-8CBB-282918C6722F}"/>
+              </a:ext>
+            </a:extLst>
+          </p:cNvPr>
+          <p:cNvPicPr>
+            <a:picLocks noGrp="1" noChangeAspect="1"/>
+          </p:cNvPicPr>
+          <p:nvPr>
+            <p:ph idx="1"/>
+          </p:nvPr>
+        </p:nvPicPr>
+        <p:blipFill>
+          <a:blip r:embed="rId2"/>
+          <a:stretch>
+            <a:fillRect/>
+          </a:stretch>
+        </p:blipFill>
+        <p:spPr>
+          <a:xfrm>
+            <a:off x="3171685" y="1689833"/>
+            <a:ext cx="5848630" cy="4254500"/>
+          </a:xfrm>
+          <a:prstGeom prst="rect">
+            <a:avLst/>
+          </a:prstGeom>
+        </p:spPr>
+      </p:pic>
+      <p:sp>
+        <p:nvSpPr>
+          <p:cNvPr id="2" name="Title 1">
+            <a:extLst>
+              <a:ext uri="{FF2B5EF4-FFF2-40B4-BE49-F238E27FC236}">
+                <a16:creationId xmlns:a16="http://schemas.microsoft.com/office/drawing/2014/main" id="{F0A89F2C-51E1-759D-DAA5-AB8C46B49384}"/>
+              </a:ext>
+            </a:extLst>
+          </p:cNvPr>
+          <p:cNvSpPr>
+            <a:spLocks noGrp="1"/>
+          </p:cNvSpPr>
+          <p:nvPr>
+            <p:ph type="title"/>
+          </p:nvPr>
+        </p:nvSpPr>
+        <p:spPr/>
+        <p:txBody>
+          <a:bodyPr/>
+          <a:lstStyle/>
+          <a:p>
+            <a:r>
+              <a:rPr lang="en-GB" dirty="0" err="1"/>
+              <a:t>Color</a:t>
+            </a:r>
+            <a:r>
+              <a:rPr lang="en-GB" dirty="0"/>
+              <a:t>, order, graphs</a:t>
+            </a:r>
+            <a:endParaRPr lang="en-US" dirty="0"/>
+          </a:p>
+        </p:txBody>
+      </p:sp>
+      <p:sp>
+        <p:nvSpPr>
+          <p:cNvPr id="4" name="Slide Number Placeholder 3">
+            <a:extLst>
+              <a:ext uri="{FF2B5EF4-FFF2-40B4-BE49-F238E27FC236}">
+                <a16:creationId xmlns:a16="http://schemas.microsoft.com/office/drawing/2014/main" id="{0FB578BB-5F6E-7489-894A-C5D65AD6D6F0}"/>
+              </a:ext>
+            </a:extLst>
+          </p:cNvPr>
+          <p:cNvSpPr>
+            <a:spLocks noGrp="1"/>
+          </p:cNvSpPr>
+          <p:nvPr>
+            <p:ph type="sldNum" sz="quarter" idx="12"/>
+          </p:nvPr>
+        </p:nvSpPr>
+        <p:spPr/>
+        <p:txBody>
+          <a:bodyPr/>
+          <a:lstStyle/>
+          <a:p>
+            <a:fld id="{45C00377-489B-40EC-B059-26BDDD2E89B9}" type="slidenum">
+              <a:rPr lang="en-US" smtClean="0"/>
+              <a:pPr/>
+              <a:t>14</a:t>
             </a:fld>
             <a:endParaRPr lang="en-US" dirty="0"/>
           </a:p>
@@ -10038,7 +10468,7 @@
           <p:cNvPr id="5" name="Straight Connector 4">
             <a:extLst>
               <a:ext uri="{FF2B5EF4-FFF2-40B4-BE49-F238E27FC236}">
-                <a16:creationId xmlns:a16="http://schemas.microsoft.com/office/drawing/2014/main" id="{4D43DCF6-3734-96E0-CACA-3CEE69BDA05C}"/>
+                <a16:creationId xmlns:a16="http://schemas.microsoft.com/office/drawing/2014/main" id="{1268F0E2-61BC-9B07-F4D2-8482CD3A9DFB}"/>
               </a:ext>
             </a:extLst>
           </p:cNvPr>
@@ -10047,7 +10477,7 @@
         </p:nvCxnSpPr>
         <p:spPr>
           <a:xfrm flipV="1">
-            <a:off x="4185182" y="2174240"/>
+            <a:off x="6370320" y="1941610"/>
             <a:ext cx="0" cy="3657600"/>
           </a:xfrm>
           <a:prstGeom prst="line">
@@ -10075,40 +10505,10 @@
           </a:fontRef>
         </p:style>
       </p:cxnSp>
-      <p:pic>
-        <p:nvPicPr>
-          <p:cNvPr id="11" name="Picture 10">
-            <a:extLst>
-              <a:ext uri="{FF2B5EF4-FFF2-40B4-BE49-F238E27FC236}">
-                <a16:creationId xmlns:a16="http://schemas.microsoft.com/office/drawing/2014/main" id="{C527EB85-F203-84B8-030E-B6D43D966AFB}"/>
-              </a:ext>
-            </a:extLst>
-          </p:cNvPr>
-          <p:cNvPicPr>
-            <a:picLocks noChangeAspect="1"/>
-          </p:cNvPicPr>
-          <p:nvPr/>
-        </p:nvPicPr>
-        <p:blipFill>
-          <a:blip r:embed="rId3"/>
-          <a:stretch>
-            <a:fillRect/>
-          </a:stretch>
-        </p:blipFill>
-        <p:spPr>
-          <a:xfrm>
-            <a:off x="8435526" y="1949993"/>
-            <a:ext cx="1598286" cy="4226970"/>
-          </a:xfrm>
-          <a:prstGeom prst="rect">
-            <a:avLst/>
-          </a:prstGeom>
-        </p:spPr>
-      </p:pic>
     </p:spTree>
     <p:extLst>
       <p:ext uri="{BB962C8B-B14F-4D97-AF65-F5344CB8AC3E}">
-        <p14:creationId xmlns:p14="http://schemas.microsoft.com/office/powerpoint/2010/main" val="897555825"/>
+        <p14:creationId xmlns:p14="http://schemas.microsoft.com/office/powerpoint/2010/main" val="1532635263"/>
       </p:ext>
     </p:extLst>
   </p:cSld>
@@ -10118,7 +10518,7 @@
 </p:sld>
 </file>
 
-<file path=ppt/slides/slide13.xml><?xml version="1.0" encoding="utf-8"?>
+<file path=ppt/slides/slide15.xml><?xml version="1.0" encoding="utf-8"?>
 <p:sld xmlns:a="http://schemas.openxmlformats.org/drawingml/2006/main" xmlns:r="http://schemas.openxmlformats.org/officeDocument/2006/relationships" xmlns:p="http://schemas.openxmlformats.org/presentationml/2006/main">
   <p:cSld>
     <p:spTree>
@@ -10245,6 +10645,122 @@
           </a:p>
         </p:txBody>
       </p:sp>
+      <p:sp>
+        <p:nvSpPr>
+          <p:cNvPr id="4" name="Rectangle 3">
+            <a:extLst>
+              <a:ext uri="{FF2B5EF4-FFF2-40B4-BE49-F238E27FC236}">
+                <a16:creationId xmlns:a16="http://schemas.microsoft.com/office/drawing/2014/main" id="{4723001F-5551-0D70-75E4-D6305D7C92A3}"/>
+              </a:ext>
+            </a:extLst>
+          </p:cNvPr>
+          <p:cNvSpPr/>
+          <p:nvPr/>
+        </p:nvSpPr>
+        <p:spPr>
+          <a:xfrm>
+            <a:off x="838200" y="2329070"/>
+            <a:ext cx="7248939" cy="2199860"/>
+          </a:xfrm>
+          <a:prstGeom prst="rect">
+            <a:avLst/>
+          </a:prstGeom>
+          <a:noFill/>
+          <a:ln w="38100">
+            <a:solidFill>
+              <a:srgbClr val="FF0000"/>
+            </a:solidFill>
+          </a:ln>
+        </p:spPr>
+        <p:style>
+          <a:lnRef idx="2">
+            <a:schemeClr val="accent1">
+              <a:shade val="15000"/>
+            </a:schemeClr>
+          </a:lnRef>
+          <a:fillRef idx="1">
+            <a:schemeClr val="accent1"/>
+          </a:fillRef>
+          <a:effectRef idx="0">
+            <a:schemeClr val="accent1"/>
+          </a:effectRef>
+          <a:fontRef idx="minor">
+            <a:schemeClr val="lt1"/>
+          </a:fontRef>
+        </p:style>
+        <p:txBody>
+          <a:bodyPr rtlCol="0" anchor="ctr"/>
+          <a:lstStyle/>
+          <a:p>
+            <a:pPr algn="ctr"/>
+            <a:endParaRPr lang="en-US"/>
+          </a:p>
+        </p:txBody>
+      </p:sp>
+      <p:sp>
+        <p:nvSpPr>
+          <p:cNvPr id="5" name="U-turn Arrow 4">
+            <a:extLst>
+              <a:ext uri="{FF2B5EF4-FFF2-40B4-BE49-F238E27FC236}">
+                <a16:creationId xmlns:a16="http://schemas.microsoft.com/office/drawing/2014/main" id="{156F3E56-B2C8-7FB2-5B78-9F20AF7ED535}"/>
+              </a:ext>
+            </a:extLst>
+          </p:cNvPr>
+          <p:cNvSpPr/>
+          <p:nvPr/>
+        </p:nvSpPr>
+        <p:spPr>
+          <a:xfrm rot="5400000">
+            <a:off x="8146271" y="3618345"/>
+            <a:ext cx="2029899" cy="1651210"/>
+          </a:xfrm>
+          <a:prstGeom prst="uturnArrow">
+            <a:avLst>
+              <a:gd name="adj1" fmla="val 19803"/>
+              <a:gd name="adj2" fmla="val 25000"/>
+              <a:gd name="adj3" fmla="val 29816"/>
+              <a:gd name="adj4" fmla="val 43750"/>
+              <a:gd name="adj5" fmla="val 58146"/>
+            </a:avLst>
+          </a:prstGeom>
+          <a:solidFill>
+            <a:srgbClr val="FF0000"/>
+          </a:solidFill>
+          <a:ln>
+            <a:solidFill>
+              <a:srgbClr val="FF0000"/>
+            </a:solidFill>
+          </a:ln>
+        </p:spPr>
+        <p:style>
+          <a:lnRef idx="2">
+            <a:schemeClr val="accent1">
+              <a:shade val="15000"/>
+            </a:schemeClr>
+          </a:lnRef>
+          <a:fillRef idx="1">
+            <a:schemeClr val="accent1"/>
+          </a:fillRef>
+          <a:effectRef idx="0">
+            <a:schemeClr val="accent1"/>
+          </a:effectRef>
+          <a:fontRef idx="minor">
+            <a:schemeClr val="lt1"/>
+          </a:fontRef>
+        </p:style>
+        <p:txBody>
+          <a:bodyPr rtlCol="0" anchor="ctr"/>
+          <a:lstStyle/>
+          <a:p>
+            <a:pPr algn="ctr"/>
+            <a:endParaRPr lang="en-US">
+              <a:solidFill>
+                <a:schemeClr val="tx1"/>
+              </a:solidFill>
+            </a:endParaRPr>
+          </a:p>
+        </p:txBody>
+      </p:sp>
     </p:spTree>
     <p:extLst>
       <p:ext uri="{BB962C8B-B14F-4D97-AF65-F5344CB8AC3E}">
@@ -10255,10 +10771,393 @@
   <p:clrMapOvr>
     <a:masterClrMapping/>
   </p:clrMapOvr>
+  <p:timing>
+    <p:tnLst>
+      <p:par>
+        <p:cTn id="1" dur="indefinite" restart="never" nodeType="tmRoot">
+          <p:childTnLst>
+            <p:seq concurrent="1" nextAc="seek">
+              <p:cTn id="2" dur="indefinite" nodeType="mainSeq">
+                <p:childTnLst>
+                  <p:par>
+                    <p:cTn id="3" fill="hold">
+                      <p:stCondLst>
+                        <p:cond delay="indefinite"/>
+                      </p:stCondLst>
+                      <p:childTnLst>
+                        <p:par>
+                          <p:cTn id="4" fill="hold">
+                            <p:stCondLst>
+                              <p:cond delay="0"/>
+                            </p:stCondLst>
+                            <p:childTnLst>
+                              <p:par>
+                                <p:cTn id="5" presetID="1" presetClass="entr" presetSubtype="0" fill="hold" grpId="0" nodeType="clickEffect">
+                                  <p:stCondLst>
+                                    <p:cond delay="0"/>
+                                  </p:stCondLst>
+                                  <p:childTnLst>
+                                    <p:set>
+                                      <p:cBhvr>
+                                        <p:cTn id="6" dur="1" fill="hold">
+                                          <p:stCondLst>
+                                            <p:cond delay="0"/>
+                                          </p:stCondLst>
+                                        </p:cTn>
+                                        <p:tgtEl>
+                                          <p:spTgt spid="3">
+                                            <p:txEl>
+                                              <p:pRg st="0" end="0"/>
+                                            </p:txEl>
+                                          </p:spTgt>
+                                        </p:tgtEl>
+                                        <p:attrNameLst>
+                                          <p:attrName>style.visibility</p:attrName>
+                                        </p:attrNameLst>
+                                      </p:cBhvr>
+                                      <p:to>
+                                        <p:strVal val="visible"/>
+                                      </p:to>
+                                    </p:set>
+                                  </p:childTnLst>
+                                </p:cTn>
+                              </p:par>
+                            </p:childTnLst>
+                          </p:cTn>
+                        </p:par>
+                      </p:childTnLst>
+                    </p:cTn>
+                  </p:par>
+                  <p:par>
+                    <p:cTn id="7" fill="hold">
+                      <p:stCondLst>
+                        <p:cond delay="indefinite"/>
+                      </p:stCondLst>
+                      <p:childTnLst>
+                        <p:par>
+                          <p:cTn id="8" fill="hold">
+                            <p:stCondLst>
+                              <p:cond delay="0"/>
+                            </p:stCondLst>
+                            <p:childTnLst>
+                              <p:par>
+                                <p:cTn id="9" presetID="1" presetClass="entr" presetSubtype="0" fill="hold" grpId="0" nodeType="clickEffect">
+                                  <p:stCondLst>
+                                    <p:cond delay="0"/>
+                                  </p:stCondLst>
+                                  <p:childTnLst>
+                                    <p:set>
+                                      <p:cBhvr>
+                                        <p:cTn id="10" dur="1" fill="hold">
+                                          <p:stCondLst>
+                                            <p:cond delay="0"/>
+                                          </p:stCondLst>
+                                        </p:cTn>
+                                        <p:tgtEl>
+                                          <p:spTgt spid="3">
+                                            <p:txEl>
+                                              <p:pRg st="1" end="1"/>
+                                            </p:txEl>
+                                          </p:spTgt>
+                                        </p:tgtEl>
+                                        <p:attrNameLst>
+                                          <p:attrName>style.visibility</p:attrName>
+                                        </p:attrNameLst>
+                                      </p:cBhvr>
+                                      <p:to>
+                                        <p:strVal val="visible"/>
+                                      </p:to>
+                                    </p:set>
+                                  </p:childTnLst>
+                                </p:cTn>
+                              </p:par>
+                            </p:childTnLst>
+                          </p:cTn>
+                        </p:par>
+                      </p:childTnLst>
+                    </p:cTn>
+                  </p:par>
+                  <p:par>
+                    <p:cTn id="11" fill="hold">
+                      <p:stCondLst>
+                        <p:cond delay="indefinite"/>
+                      </p:stCondLst>
+                      <p:childTnLst>
+                        <p:par>
+                          <p:cTn id="12" fill="hold">
+                            <p:stCondLst>
+                              <p:cond delay="0"/>
+                            </p:stCondLst>
+                            <p:childTnLst>
+                              <p:par>
+                                <p:cTn id="13" presetID="1" presetClass="entr" presetSubtype="0" fill="hold" grpId="0" nodeType="clickEffect">
+                                  <p:stCondLst>
+                                    <p:cond delay="0"/>
+                                  </p:stCondLst>
+                                  <p:childTnLst>
+                                    <p:set>
+                                      <p:cBhvr>
+                                        <p:cTn id="14" dur="1" fill="hold">
+                                          <p:stCondLst>
+                                            <p:cond delay="0"/>
+                                          </p:stCondLst>
+                                        </p:cTn>
+                                        <p:tgtEl>
+                                          <p:spTgt spid="3">
+                                            <p:txEl>
+                                              <p:pRg st="2" end="2"/>
+                                            </p:txEl>
+                                          </p:spTgt>
+                                        </p:tgtEl>
+                                        <p:attrNameLst>
+                                          <p:attrName>style.visibility</p:attrName>
+                                        </p:attrNameLst>
+                                      </p:cBhvr>
+                                      <p:to>
+                                        <p:strVal val="visible"/>
+                                      </p:to>
+                                    </p:set>
+                                  </p:childTnLst>
+                                </p:cTn>
+                              </p:par>
+                            </p:childTnLst>
+                          </p:cTn>
+                        </p:par>
+                      </p:childTnLst>
+                    </p:cTn>
+                  </p:par>
+                  <p:par>
+                    <p:cTn id="15" fill="hold">
+                      <p:stCondLst>
+                        <p:cond delay="indefinite"/>
+                      </p:stCondLst>
+                      <p:childTnLst>
+                        <p:par>
+                          <p:cTn id="16" fill="hold">
+                            <p:stCondLst>
+                              <p:cond delay="0"/>
+                            </p:stCondLst>
+                            <p:childTnLst>
+                              <p:par>
+                                <p:cTn id="17" presetID="1" presetClass="entr" presetSubtype="0" fill="hold" grpId="0" nodeType="clickEffect">
+                                  <p:stCondLst>
+                                    <p:cond delay="0"/>
+                                  </p:stCondLst>
+                                  <p:childTnLst>
+                                    <p:set>
+                                      <p:cBhvr>
+                                        <p:cTn id="18" dur="1" fill="hold">
+                                          <p:stCondLst>
+                                            <p:cond delay="0"/>
+                                          </p:stCondLst>
+                                        </p:cTn>
+                                        <p:tgtEl>
+                                          <p:spTgt spid="3">
+                                            <p:txEl>
+                                              <p:pRg st="3" end="3"/>
+                                            </p:txEl>
+                                          </p:spTgt>
+                                        </p:tgtEl>
+                                        <p:attrNameLst>
+                                          <p:attrName>style.visibility</p:attrName>
+                                        </p:attrNameLst>
+                                      </p:cBhvr>
+                                      <p:to>
+                                        <p:strVal val="visible"/>
+                                      </p:to>
+                                    </p:set>
+                                  </p:childTnLst>
+                                </p:cTn>
+                              </p:par>
+                            </p:childTnLst>
+                          </p:cTn>
+                        </p:par>
+                      </p:childTnLst>
+                    </p:cTn>
+                  </p:par>
+                  <p:par>
+                    <p:cTn id="19" fill="hold">
+                      <p:stCondLst>
+                        <p:cond delay="indefinite"/>
+                      </p:stCondLst>
+                      <p:childTnLst>
+                        <p:par>
+                          <p:cTn id="20" fill="hold">
+                            <p:stCondLst>
+                              <p:cond delay="0"/>
+                            </p:stCondLst>
+                            <p:childTnLst>
+                              <p:par>
+                                <p:cTn id="21" presetID="1" presetClass="entr" presetSubtype="0" fill="hold" grpId="0" nodeType="clickEffect">
+                                  <p:stCondLst>
+                                    <p:cond delay="0"/>
+                                  </p:stCondLst>
+                                  <p:childTnLst>
+                                    <p:set>
+                                      <p:cBhvr>
+                                        <p:cTn id="22" dur="1" fill="hold">
+                                          <p:stCondLst>
+                                            <p:cond delay="0"/>
+                                          </p:stCondLst>
+                                        </p:cTn>
+                                        <p:tgtEl>
+                                          <p:spTgt spid="3">
+                                            <p:txEl>
+                                              <p:pRg st="4" end="4"/>
+                                            </p:txEl>
+                                          </p:spTgt>
+                                        </p:tgtEl>
+                                        <p:attrNameLst>
+                                          <p:attrName>style.visibility</p:attrName>
+                                        </p:attrNameLst>
+                                      </p:cBhvr>
+                                      <p:to>
+                                        <p:strVal val="visible"/>
+                                      </p:to>
+                                    </p:set>
+                                  </p:childTnLst>
+                                </p:cTn>
+                              </p:par>
+                            </p:childTnLst>
+                          </p:cTn>
+                        </p:par>
+                      </p:childTnLst>
+                    </p:cTn>
+                  </p:par>
+                  <p:par>
+                    <p:cTn id="23" fill="hold">
+                      <p:stCondLst>
+                        <p:cond delay="indefinite"/>
+                      </p:stCondLst>
+                      <p:childTnLst>
+                        <p:par>
+                          <p:cTn id="24" fill="hold">
+                            <p:stCondLst>
+                              <p:cond delay="0"/>
+                            </p:stCondLst>
+                            <p:childTnLst>
+                              <p:par>
+                                <p:cTn id="25" presetID="1" presetClass="entr" presetSubtype="0" fill="hold" grpId="0" nodeType="clickEffect">
+                                  <p:stCondLst>
+                                    <p:cond delay="0"/>
+                                  </p:stCondLst>
+                                  <p:childTnLst>
+                                    <p:set>
+                                      <p:cBhvr>
+                                        <p:cTn id="26" dur="1" fill="hold">
+                                          <p:stCondLst>
+                                            <p:cond delay="0"/>
+                                          </p:stCondLst>
+                                        </p:cTn>
+                                        <p:tgtEl>
+                                          <p:spTgt spid="3">
+                                            <p:txEl>
+                                              <p:pRg st="6" end="6"/>
+                                            </p:txEl>
+                                          </p:spTgt>
+                                        </p:tgtEl>
+                                        <p:attrNameLst>
+                                          <p:attrName>style.visibility</p:attrName>
+                                        </p:attrNameLst>
+                                      </p:cBhvr>
+                                      <p:to>
+                                        <p:strVal val="visible"/>
+                                      </p:to>
+                                    </p:set>
+                                  </p:childTnLst>
+                                </p:cTn>
+                              </p:par>
+                              <p:par>
+                                <p:cTn id="27" presetID="1" presetClass="entr" presetSubtype="0" fill="hold" grpId="0" nodeType="withEffect">
+                                  <p:stCondLst>
+                                    <p:cond delay="0"/>
+                                  </p:stCondLst>
+                                  <p:childTnLst>
+                                    <p:set>
+                                      <p:cBhvr>
+                                        <p:cTn id="28" dur="1" fill="hold">
+                                          <p:stCondLst>
+                                            <p:cond delay="0"/>
+                                          </p:stCondLst>
+                                        </p:cTn>
+                                        <p:tgtEl>
+                                          <p:spTgt spid="4"/>
+                                        </p:tgtEl>
+                                        <p:attrNameLst>
+                                          <p:attrName>style.visibility</p:attrName>
+                                        </p:attrNameLst>
+                                      </p:cBhvr>
+                                      <p:to>
+                                        <p:strVal val="visible"/>
+                                      </p:to>
+                                    </p:set>
+                                  </p:childTnLst>
+                                </p:cTn>
+                              </p:par>
+                              <p:par>
+                                <p:cTn id="29" presetID="1" presetClass="entr" presetSubtype="0" fill="hold" grpId="0" nodeType="withEffect">
+                                  <p:stCondLst>
+                                    <p:cond delay="0"/>
+                                  </p:stCondLst>
+                                  <p:childTnLst>
+                                    <p:set>
+                                      <p:cBhvr>
+                                        <p:cTn id="30" dur="1" fill="hold">
+                                          <p:stCondLst>
+                                            <p:cond delay="0"/>
+                                          </p:stCondLst>
+                                        </p:cTn>
+                                        <p:tgtEl>
+                                          <p:spTgt spid="5"/>
+                                        </p:tgtEl>
+                                        <p:attrNameLst>
+                                          <p:attrName>style.visibility</p:attrName>
+                                        </p:attrNameLst>
+                                      </p:cBhvr>
+                                      <p:to>
+                                        <p:strVal val="visible"/>
+                                      </p:to>
+                                    </p:set>
+                                  </p:childTnLst>
+                                </p:cTn>
+                              </p:par>
+                            </p:childTnLst>
+                          </p:cTn>
+                        </p:par>
+                      </p:childTnLst>
+                    </p:cTn>
+                  </p:par>
+                </p:childTnLst>
+              </p:cTn>
+              <p:prevCondLst>
+                <p:cond evt="onPrev" delay="0">
+                  <p:tgtEl>
+                    <p:sldTgt/>
+                  </p:tgtEl>
+                </p:cond>
+              </p:prevCondLst>
+              <p:nextCondLst>
+                <p:cond evt="onNext" delay="0">
+                  <p:tgtEl>
+                    <p:sldTgt/>
+                  </p:tgtEl>
+                </p:cond>
+              </p:nextCondLst>
+            </p:seq>
+          </p:childTnLst>
+        </p:cTn>
+      </p:par>
+    </p:tnLst>
+    <p:bldLst>
+      <p:bldP spid="3" grpId="0" uiExpand="1" build="p"/>
+      <p:bldP spid="4" grpId="0" animBg="1"/>
+      <p:bldP spid="5" grpId="0" animBg="1"/>
+    </p:bldLst>
+  </p:timing>
 </p:sld>
 </file>
 
-<file path=ppt/slides/slide14.xml><?xml version="1.0" encoding="utf-8"?>
+<file path=ppt/slides/slide16.xml><?xml version="1.0" encoding="utf-8"?>
 <p:sld xmlns:a="http://schemas.openxmlformats.org/drawingml/2006/main" xmlns:r="http://schemas.openxmlformats.org/officeDocument/2006/relationships" xmlns:p="http://schemas.openxmlformats.org/presentationml/2006/main">
   <p:cSld>
     <p:spTree>
@@ -10348,7 +11247,7 @@
 </p:sld>
 </file>
 
-<file path=ppt/slides/slide15.xml><?xml version="1.0" encoding="utf-8"?>
+<file path=ppt/slides/slide17.xml><?xml version="1.0" encoding="utf-8"?>
 <p:sld xmlns:a="http://schemas.openxmlformats.org/drawingml/2006/main" xmlns:r="http://schemas.openxmlformats.org/officeDocument/2006/relationships" xmlns:p="http://schemas.openxmlformats.org/presentationml/2006/main">
   <p:cSld>
     <p:spTree>
@@ -10465,8 +11364,8 @@
           <a:lstStyle/>
           <a:p>
             <a:pPr marL="342900" lvl="0" indent="-342900">
-              <a:buFont typeface="Arial" panose="020B0604020202020204" pitchFamily="34" charset="0"/>
-              <a:buChar char="•"/>
+              <a:buFont typeface="Wingdings" pitchFamily="2" charset="2"/>
+              <a:buChar char="Ø"/>
             </a:pPr>
             <a:r>
               <a:rPr lang="en-GB" dirty="0"/>
@@ -10475,8 +11374,8 @@
           </a:p>
           <a:p>
             <a:pPr marL="342900" lvl="0" indent="-342900">
-              <a:buFont typeface="Arial" panose="020B0604020202020204" pitchFamily="34" charset="0"/>
-              <a:buChar char="•"/>
+              <a:buFont typeface="Wingdings" pitchFamily="2" charset="2"/>
+              <a:buChar char="Ø"/>
             </a:pPr>
             <a:r>
               <a:rPr lang="en-GB" dirty="0"/>
@@ -10485,8 +11384,8 @@
           </a:p>
           <a:p>
             <a:pPr marL="342900" indent="-342900">
-              <a:buFont typeface="Arial" panose="020B0604020202020204" pitchFamily="34" charset="0"/>
-              <a:buChar char="•"/>
+              <a:buFont typeface="Wingdings" pitchFamily="2" charset="2"/>
+              <a:buChar char="Ø"/>
             </a:pPr>
             <a:r>
               <a:rPr lang="en-GB" dirty="0"/>
@@ -10495,8 +11394,8 @@
           </a:p>
           <a:p>
             <a:pPr marL="342900" lvl="0" indent="-342900">
-              <a:buFont typeface="Arial" panose="020B0604020202020204" pitchFamily="34" charset="0"/>
-              <a:buChar char="•"/>
+              <a:buFont typeface="Wingdings" pitchFamily="2" charset="2"/>
+              <a:buChar char="Ø"/>
             </a:pPr>
             <a:r>
               <a:rPr lang="en-GB" dirty="0" err="1"/>
@@ -10524,7 +11423,7 @@
           <p:nvPr/>
         </p:nvPicPr>
         <p:blipFill>
-          <a:blip r:embed="rId2"/>
+          <a:blip r:embed="rId3"/>
           <a:stretch>
             <a:fillRect/>
           </a:stretch>
@@ -10539,6 +11438,48 @@
           </a:prstGeom>
         </p:spPr>
       </p:pic>
+      <p:cxnSp>
+        <p:nvCxnSpPr>
+          <p:cNvPr id="4" name="Straight Connector 3">
+            <a:extLst>
+              <a:ext uri="{FF2B5EF4-FFF2-40B4-BE49-F238E27FC236}">
+                <a16:creationId xmlns:a16="http://schemas.microsoft.com/office/drawing/2014/main" id="{AFEC90AF-8BCA-8995-C74C-DD5A0A6F3C42}"/>
+              </a:ext>
+            </a:extLst>
+          </p:cNvPr>
+          <p:cNvCxnSpPr/>
+          <p:nvPr/>
+        </p:nvCxnSpPr>
+        <p:spPr>
+          <a:xfrm flipV="1">
+            <a:off x="3998181" y="3312660"/>
+            <a:ext cx="0" cy="2651760"/>
+          </a:xfrm>
+          <a:prstGeom prst="line">
+            <a:avLst/>
+          </a:prstGeom>
+          <a:ln w="28575">
+            <a:solidFill>
+              <a:srgbClr val="C00000"/>
+            </a:solidFill>
+            <a:prstDash val="sysDash"/>
+          </a:ln>
+        </p:spPr>
+        <p:style>
+          <a:lnRef idx="1">
+            <a:schemeClr val="accent1"/>
+          </a:lnRef>
+          <a:fillRef idx="0">
+            <a:schemeClr val="accent1"/>
+          </a:fillRef>
+          <a:effectRef idx="0">
+            <a:schemeClr val="accent1"/>
+          </a:effectRef>
+          <a:fontRef idx="minor">
+            <a:schemeClr val="tx1"/>
+          </a:fontRef>
+        </p:style>
+      </p:cxnSp>
     </p:spTree>
     <p:extLst>
       <p:ext uri="{BB962C8B-B14F-4D97-AF65-F5344CB8AC3E}">
@@ -10549,10 +11490,236 @@
   <p:clrMapOvr>
     <a:masterClrMapping/>
   </p:clrMapOvr>
+  <p:timing>
+    <p:tnLst>
+      <p:par>
+        <p:cTn id="1" dur="indefinite" restart="never" nodeType="tmRoot">
+          <p:childTnLst>
+            <p:seq concurrent="1" nextAc="seek">
+              <p:cTn id="2" dur="indefinite" nodeType="mainSeq">
+                <p:childTnLst>
+                  <p:par>
+                    <p:cTn id="3" fill="hold">
+                      <p:stCondLst>
+                        <p:cond delay="indefinite"/>
+                      </p:stCondLst>
+                      <p:childTnLst>
+                        <p:par>
+                          <p:cTn id="4" fill="hold">
+                            <p:stCondLst>
+                              <p:cond delay="0"/>
+                            </p:stCondLst>
+                            <p:childTnLst>
+                              <p:par>
+                                <p:cTn id="5" presetID="1" presetClass="entr" presetSubtype="0" fill="hold" nodeType="clickEffect">
+                                  <p:stCondLst>
+                                    <p:cond delay="0"/>
+                                  </p:stCondLst>
+                                  <p:childTnLst>
+                                    <p:set>
+                                      <p:cBhvr>
+                                        <p:cTn id="6" dur="1" fill="hold">
+                                          <p:stCondLst>
+                                            <p:cond delay="0"/>
+                                          </p:stCondLst>
+                                        </p:cTn>
+                                        <p:tgtEl>
+                                          <p:spTgt spid="5">
+                                            <p:txEl>
+                                              <p:pRg st="0" end="0"/>
+                                            </p:txEl>
+                                          </p:spTgt>
+                                        </p:tgtEl>
+                                        <p:attrNameLst>
+                                          <p:attrName>style.visibility</p:attrName>
+                                        </p:attrNameLst>
+                                      </p:cBhvr>
+                                      <p:to>
+                                        <p:strVal val="visible"/>
+                                      </p:to>
+                                    </p:set>
+                                  </p:childTnLst>
+                                </p:cTn>
+                              </p:par>
+                            </p:childTnLst>
+                          </p:cTn>
+                        </p:par>
+                      </p:childTnLst>
+                    </p:cTn>
+                  </p:par>
+                  <p:par>
+                    <p:cTn id="7" fill="hold">
+                      <p:stCondLst>
+                        <p:cond delay="indefinite"/>
+                      </p:stCondLst>
+                      <p:childTnLst>
+                        <p:par>
+                          <p:cTn id="8" fill="hold">
+                            <p:stCondLst>
+                              <p:cond delay="0"/>
+                            </p:stCondLst>
+                            <p:childTnLst>
+                              <p:par>
+                                <p:cTn id="9" presetID="1" presetClass="entr" presetSubtype="0" fill="hold" nodeType="clickEffect">
+                                  <p:stCondLst>
+                                    <p:cond delay="0"/>
+                                  </p:stCondLst>
+                                  <p:childTnLst>
+                                    <p:set>
+                                      <p:cBhvr>
+                                        <p:cTn id="10" dur="1" fill="hold">
+                                          <p:stCondLst>
+                                            <p:cond delay="0"/>
+                                          </p:stCondLst>
+                                        </p:cTn>
+                                        <p:tgtEl>
+                                          <p:spTgt spid="5">
+                                            <p:txEl>
+                                              <p:pRg st="1" end="1"/>
+                                            </p:txEl>
+                                          </p:spTgt>
+                                        </p:tgtEl>
+                                        <p:attrNameLst>
+                                          <p:attrName>style.visibility</p:attrName>
+                                        </p:attrNameLst>
+                                      </p:cBhvr>
+                                      <p:to>
+                                        <p:strVal val="visible"/>
+                                      </p:to>
+                                    </p:set>
+                                  </p:childTnLst>
+                                </p:cTn>
+                              </p:par>
+                            </p:childTnLst>
+                          </p:cTn>
+                        </p:par>
+                      </p:childTnLst>
+                    </p:cTn>
+                  </p:par>
+                  <p:par>
+                    <p:cTn id="11" fill="hold">
+                      <p:stCondLst>
+                        <p:cond delay="indefinite"/>
+                      </p:stCondLst>
+                      <p:childTnLst>
+                        <p:par>
+                          <p:cTn id="12" fill="hold">
+                            <p:stCondLst>
+                              <p:cond delay="0"/>
+                            </p:stCondLst>
+                            <p:childTnLst>
+                              <p:par>
+                                <p:cTn id="13" presetID="1" presetClass="entr" presetSubtype="0" fill="hold" nodeType="clickEffect">
+                                  <p:stCondLst>
+                                    <p:cond delay="0"/>
+                                  </p:stCondLst>
+                                  <p:childTnLst>
+                                    <p:set>
+                                      <p:cBhvr>
+                                        <p:cTn id="14" dur="1" fill="hold">
+                                          <p:stCondLst>
+                                            <p:cond delay="0"/>
+                                          </p:stCondLst>
+                                        </p:cTn>
+                                        <p:tgtEl>
+                                          <p:spTgt spid="5">
+                                            <p:txEl>
+                                              <p:pRg st="2" end="2"/>
+                                            </p:txEl>
+                                          </p:spTgt>
+                                        </p:tgtEl>
+                                        <p:attrNameLst>
+                                          <p:attrName>style.visibility</p:attrName>
+                                        </p:attrNameLst>
+                                      </p:cBhvr>
+                                      <p:to>
+                                        <p:strVal val="visible"/>
+                                      </p:to>
+                                    </p:set>
+                                  </p:childTnLst>
+                                </p:cTn>
+                              </p:par>
+                            </p:childTnLst>
+                          </p:cTn>
+                        </p:par>
+                      </p:childTnLst>
+                    </p:cTn>
+                  </p:par>
+                  <p:par>
+                    <p:cTn id="15" fill="hold">
+                      <p:stCondLst>
+                        <p:cond delay="indefinite"/>
+                      </p:stCondLst>
+                      <p:childTnLst>
+                        <p:par>
+                          <p:cTn id="16" fill="hold">
+                            <p:stCondLst>
+                              <p:cond delay="0"/>
+                            </p:stCondLst>
+                            <p:childTnLst>
+                              <p:par>
+                                <p:cTn id="17" presetID="1" presetClass="entr" presetSubtype="0" fill="hold" nodeType="clickEffect">
+                                  <p:stCondLst>
+                                    <p:cond delay="0"/>
+                                  </p:stCondLst>
+                                  <p:childTnLst>
+                                    <p:set>
+                                      <p:cBhvr>
+                                        <p:cTn id="18" dur="1" fill="hold">
+                                          <p:stCondLst>
+                                            <p:cond delay="0"/>
+                                          </p:stCondLst>
+                                        </p:cTn>
+                                        <p:tgtEl>
+                                          <p:spTgt spid="5">
+                                            <p:txEl>
+                                              <p:pRg st="3" end="3"/>
+                                            </p:txEl>
+                                          </p:spTgt>
+                                        </p:tgtEl>
+                                        <p:attrNameLst>
+                                          <p:attrName>style.visibility</p:attrName>
+                                        </p:attrNameLst>
+                                      </p:cBhvr>
+                                      <p:to>
+                                        <p:strVal val="visible"/>
+                                      </p:to>
+                                    </p:set>
+                                  </p:childTnLst>
+                                </p:cTn>
+                              </p:par>
+                            </p:childTnLst>
+                          </p:cTn>
+                        </p:par>
+                      </p:childTnLst>
+                    </p:cTn>
+                  </p:par>
+                </p:childTnLst>
+              </p:cTn>
+              <p:prevCondLst>
+                <p:cond evt="onPrev" delay="0">
+                  <p:tgtEl>
+                    <p:sldTgt/>
+                  </p:tgtEl>
+                </p:cond>
+              </p:prevCondLst>
+              <p:nextCondLst>
+                <p:cond evt="onNext" delay="0">
+                  <p:tgtEl>
+                    <p:sldTgt/>
+                  </p:tgtEl>
+                </p:cond>
+              </p:nextCondLst>
+            </p:seq>
+          </p:childTnLst>
+        </p:cTn>
+      </p:par>
+    </p:tnLst>
+  </p:timing>
 </p:sld>
 </file>
 
-<file path=ppt/slides/slide16.xml><?xml version="1.0" encoding="utf-8"?>
+<file path=ppt/slides/slide18.xml><?xml version="1.0" encoding="utf-8"?>
 <p:sld xmlns:a="http://schemas.openxmlformats.org/drawingml/2006/main" xmlns:r="http://schemas.openxmlformats.org/officeDocument/2006/relationships" xmlns:p="http://schemas.openxmlformats.org/presentationml/2006/main">
   <p:cSld>
     <p:spTree>
@@ -10623,7 +11790,7 @@
             <a:fld id="{45C00377-489B-40EC-B059-26BDDD2E89B9}" type="slidenum">
               <a:rPr lang="en-US" smtClean="0"/>
               <a:pPr/>
-              <a:t>16</a:t>
+              <a:t>18</a:t>
             </a:fld>
             <a:endParaRPr lang="en-US" dirty="0"/>
           </a:p>
@@ -10715,10 +11882,85 @@
   <p:clrMapOvr>
     <a:masterClrMapping/>
   </p:clrMapOvr>
+  <p:timing>
+    <p:tnLst>
+      <p:par>
+        <p:cTn id="1" dur="indefinite" restart="never" nodeType="tmRoot">
+          <p:childTnLst>
+            <p:seq concurrent="1" nextAc="seek">
+              <p:cTn id="2" dur="indefinite" nodeType="mainSeq">
+                <p:childTnLst>
+                  <p:par>
+                    <p:cTn id="3" fill="hold">
+                      <p:stCondLst>
+                        <p:cond delay="indefinite"/>
+                      </p:stCondLst>
+                      <p:childTnLst>
+                        <p:par>
+                          <p:cTn id="4" fill="hold">
+                            <p:stCondLst>
+                              <p:cond delay="0"/>
+                            </p:stCondLst>
+                            <p:childTnLst>
+                              <p:par>
+                                <p:cTn id="5" presetID="1" presetClass="entr" presetSubtype="0" fill="hold" nodeType="clickEffect">
+                                  <p:stCondLst>
+                                    <p:cond delay="0"/>
+                                  </p:stCondLst>
+                                  <p:childTnLst>
+                                    <p:set>
+                                      <p:cBhvr>
+                                        <p:cTn id="6" dur="1" fill="hold">
+                                          <p:stCondLst>
+                                            <p:cond delay="0"/>
+                                          </p:stCondLst>
+                                        </p:cTn>
+                                        <p:tgtEl>
+                                          <p:spTgt spid="2050"/>
+                                        </p:tgtEl>
+                                        <p:attrNameLst>
+                                          <p:attrName>style.visibility</p:attrName>
+                                        </p:attrNameLst>
+                                      </p:cBhvr>
+                                      <p:to>
+                                        <p:strVal val="visible"/>
+                                      </p:to>
+                                    </p:set>
+                                  </p:childTnLst>
+                                </p:cTn>
+                              </p:par>
+                            </p:childTnLst>
+                          </p:cTn>
+                        </p:par>
+                      </p:childTnLst>
+                    </p:cTn>
+                  </p:par>
+                </p:childTnLst>
+              </p:cTn>
+              <p:prevCondLst>
+                <p:cond evt="onPrev" delay="0">
+                  <p:tgtEl>
+                    <p:sldTgt/>
+                  </p:tgtEl>
+                </p:cond>
+              </p:prevCondLst>
+              <p:nextCondLst>
+                <p:cond evt="onNext" delay="0">
+                  <p:tgtEl>
+                    <p:sldTgt/>
+                  </p:tgtEl>
+                </p:cond>
+              </p:nextCondLst>
+            </p:seq>
+          </p:childTnLst>
+        </p:cTn>
+      </p:par>
+    </p:tnLst>
+  </p:timing>
 </p:sld>
 </file>
 
-<file path=ppt/slides/slide17.xml><?xml version="1.0" encoding="utf-8"?>
+<file path=ppt/slides/slide19.xml><?xml version="1.0" encoding="utf-8"?>
 <p:sld xmlns:a="http://schemas.openxmlformats.org/drawingml/2006/main" xmlns:r="http://schemas.openxmlformats.org/officeDocument/2006/relationships" xmlns:p="http://schemas.openxmlformats.org/presentationml/2006/main">
   <p:cSld>
     <p:spTree>
@@ -10798,7 +12040,7 @@
             <a:fld id="{45C00377-489B-40EC-B059-26BDDD2E89B9}" type="slidenum">
               <a:rPr lang="en-US" smtClean="0"/>
               <a:pPr/>
-              <a:t>17</a:t>
+              <a:t>19</a:t>
             </a:fld>
             <a:endParaRPr lang="en-US" dirty="0"/>
           </a:p>
@@ -11214,7 +12456,139 @@
 </p:sld>
 </file>
 
-<file path=ppt/slides/slide18.xml><?xml version="1.0" encoding="utf-8"?>
+<file path=ppt/slides/slide2.xml><?xml version="1.0" encoding="utf-8"?>
+<p:sld xmlns:a="http://schemas.openxmlformats.org/drawingml/2006/main" xmlns:r="http://schemas.openxmlformats.org/officeDocument/2006/relationships" xmlns:p="http://schemas.openxmlformats.org/presentationml/2006/main">
+  <p:cSld>
+    <p:spTree>
+      <p:nvGrpSpPr>
+        <p:cNvPr id="1" name=""/>
+        <p:cNvGrpSpPr/>
+        <p:nvPr/>
+      </p:nvGrpSpPr>
+      <p:grpSpPr>
+        <a:xfrm>
+          <a:off x="0" y="0"/>
+          <a:ext cx="0" cy="0"/>
+          <a:chOff x="0" y="0"/>
+          <a:chExt cx="0" cy="0"/>
+        </a:xfrm>
+      </p:grpSpPr>
+      <p:sp>
+        <p:nvSpPr>
+          <p:cNvPr id="2" name="Title 1">
+            <a:extLst>
+              <a:ext uri="{FF2B5EF4-FFF2-40B4-BE49-F238E27FC236}">
+                <a16:creationId xmlns:a16="http://schemas.microsoft.com/office/drawing/2014/main" id="{65C35797-23DF-9D42-7847-7CC25685B1CE}"/>
+              </a:ext>
+            </a:extLst>
+          </p:cNvPr>
+          <p:cNvSpPr>
+            <a:spLocks noGrp="1"/>
+          </p:cNvSpPr>
+          <p:nvPr>
+            <p:ph type="title"/>
+          </p:nvPr>
+        </p:nvSpPr>
+        <p:spPr/>
+        <p:txBody>
+          <a:bodyPr/>
+          <a:lstStyle/>
+          <a:p>
+            <a:r>
+              <a:rPr lang="en-US" dirty="0"/>
+              <a:t>Quiz 4</a:t>
+            </a:r>
+          </a:p>
+        </p:txBody>
+      </p:sp>
+      <p:sp>
+        <p:nvSpPr>
+          <p:cNvPr id="3" name="Content Placeholder 2">
+            <a:extLst>
+              <a:ext uri="{FF2B5EF4-FFF2-40B4-BE49-F238E27FC236}">
+                <a16:creationId xmlns:a16="http://schemas.microsoft.com/office/drawing/2014/main" id="{27B8D407-4275-C9BA-8824-F28338D99073}"/>
+              </a:ext>
+            </a:extLst>
+          </p:cNvPr>
+          <p:cNvSpPr>
+            <a:spLocks noGrp="1"/>
+          </p:cNvSpPr>
+          <p:nvPr>
+            <p:ph idx="1"/>
+          </p:nvPr>
+        </p:nvSpPr>
+        <p:spPr/>
+        <p:txBody>
+          <a:bodyPr/>
+          <a:lstStyle/>
+          <a:p>
+            <a:pPr marL="0" indent="0">
+              <a:buNone/>
+            </a:pPr>
+            <a:r>
+              <a:rPr lang="en-US" dirty="0"/>
+              <a:t>Why does “garbage in, garbage out” matter in sports analytics?</a:t>
+            </a:r>
+          </a:p>
+          <a:p>
+            <a:pPr>
+              <a:buFont typeface="Wingdings" panose="05000000000000000000" pitchFamily="2" charset="2"/>
+              <a:buChar char="q"/>
+            </a:pPr>
+            <a:r>
+              <a:rPr lang="en-US" sz="2400" dirty="0"/>
+              <a:t>Statistical models automatically remove measurement errors</a:t>
+            </a:r>
+          </a:p>
+          <a:p>
+            <a:pPr>
+              <a:buFont typeface="Wingdings" panose="05000000000000000000" pitchFamily="2" charset="2"/>
+              <a:buChar char="q"/>
+            </a:pPr>
+            <a:r>
+              <a:rPr lang="en-US" sz="2400" dirty="0"/>
+              <a:t>Large datasets do not require quality checks</a:t>
+            </a:r>
+          </a:p>
+          <a:p>
+            <a:pPr>
+              <a:buFont typeface="Wingdings" panose="05000000000000000000" pitchFamily="2" charset="2"/>
+              <a:buChar char="q"/>
+            </a:pPr>
+            <a:r>
+              <a:rPr lang="en-US" sz="2400" dirty="0"/>
+              <a:t>Sophisticated analyses cannot fully compensate for flawed input data</a:t>
+            </a:r>
+          </a:p>
+          <a:p>
+            <a:pPr>
+              <a:buFont typeface="Wingdings" panose="05000000000000000000" pitchFamily="2" charset="2"/>
+              <a:buChar char="q"/>
+            </a:pPr>
+            <a:r>
+              <a:rPr lang="en-US" sz="2400" dirty="0"/>
+              <a:t>Only manually entered data contain errors</a:t>
+            </a:r>
+          </a:p>
+          <a:p>
+            <a:endParaRPr lang="en-US" dirty="0"/>
+          </a:p>
+        </p:txBody>
+      </p:sp>
+    </p:spTree>
+    <p:extLst>
+      <p:ext uri="{BB962C8B-B14F-4D97-AF65-F5344CB8AC3E}">
+        <p14:creationId xmlns:p14="http://schemas.microsoft.com/office/powerpoint/2010/main" val="3822656530"/>
+      </p:ext>
+    </p:extLst>
+  </p:cSld>
+  <p:clrMapOvr>
+    <a:masterClrMapping/>
+  </p:clrMapOvr>
+</p:sld>
+</file>
+
+<file path=ppt/slides/slide20.xml><?xml version="1.0" encoding="utf-8"?>
 <p:sld xmlns:a="http://schemas.openxmlformats.org/drawingml/2006/main" xmlns:r="http://schemas.openxmlformats.org/officeDocument/2006/relationships" xmlns:p="http://schemas.openxmlformats.org/presentationml/2006/main">
   <p:cSld>
     <p:spTree>
@@ -11319,10 +12693,239 @@
   <p:clrMapOvr>
     <a:masterClrMapping/>
   </p:clrMapOvr>
+  <p:timing>
+    <p:tnLst>
+      <p:par>
+        <p:cTn id="1" dur="indefinite" restart="never" nodeType="tmRoot">
+          <p:childTnLst>
+            <p:seq concurrent="1" nextAc="seek">
+              <p:cTn id="2" dur="indefinite" nodeType="mainSeq">
+                <p:childTnLst>
+                  <p:par>
+                    <p:cTn id="3" fill="hold">
+                      <p:stCondLst>
+                        <p:cond delay="indefinite"/>
+                      </p:stCondLst>
+                      <p:childTnLst>
+                        <p:par>
+                          <p:cTn id="4" fill="hold">
+                            <p:stCondLst>
+                              <p:cond delay="0"/>
+                            </p:stCondLst>
+                            <p:childTnLst>
+                              <p:par>
+                                <p:cTn id="5" presetID="1" presetClass="entr" presetSubtype="0" fill="hold" grpId="0" nodeType="clickEffect">
+                                  <p:stCondLst>
+                                    <p:cond delay="0"/>
+                                  </p:stCondLst>
+                                  <p:childTnLst>
+                                    <p:set>
+                                      <p:cBhvr>
+                                        <p:cTn id="6" dur="1" fill="hold">
+                                          <p:stCondLst>
+                                            <p:cond delay="0"/>
+                                          </p:stCondLst>
+                                        </p:cTn>
+                                        <p:tgtEl>
+                                          <p:spTgt spid="3">
+                                            <p:txEl>
+                                              <p:pRg st="0" end="0"/>
+                                            </p:txEl>
+                                          </p:spTgt>
+                                        </p:tgtEl>
+                                        <p:attrNameLst>
+                                          <p:attrName>style.visibility</p:attrName>
+                                        </p:attrNameLst>
+                                      </p:cBhvr>
+                                      <p:to>
+                                        <p:strVal val="visible"/>
+                                      </p:to>
+                                    </p:set>
+                                  </p:childTnLst>
+                                </p:cTn>
+                              </p:par>
+                            </p:childTnLst>
+                          </p:cTn>
+                        </p:par>
+                      </p:childTnLst>
+                    </p:cTn>
+                  </p:par>
+                  <p:par>
+                    <p:cTn id="7" fill="hold">
+                      <p:stCondLst>
+                        <p:cond delay="indefinite"/>
+                      </p:stCondLst>
+                      <p:childTnLst>
+                        <p:par>
+                          <p:cTn id="8" fill="hold">
+                            <p:stCondLst>
+                              <p:cond delay="0"/>
+                            </p:stCondLst>
+                            <p:childTnLst>
+                              <p:par>
+                                <p:cTn id="9" presetID="1" presetClass="entr" presetSubtype="0" fill="hold" grpId="0" nodeType="clickEffect">
+                                  <p:stCondLst>
+                                    <p:cond delay="0"/>
+                                  </p:stCondLst>
+                                  <p:childTnLst>
+                                    <p:set>
+                                      <p:cBhvr>
+                                        <p:cTn id="10" dur="1" fill="hold">
+                                          <p:stCondLst>
+                                            <p:cond delay="0"/>
+                                          </p:stCondLst>
+                                        </p:cTn>
+                                        <p:tgtEl>
+                                          <p:spTgt spid="3">
+                                            <p:txEl>
+                                              <p:pRg st="1" end="1"/>
+                                            </p:txEl>
+                                          </p:spTgt>
+                                        </p:tgtEl>
+                                        <p:attrNameLst>
+                                          <p:attrName>style.visibility</p:attrName>
+                                        </p:attrNameLst>
+                                      </p:cBhvr>
+                                      <p:to>
+                                        <p:strVal val="visible"/>
+                                      </p:to>
+                                    </p:set>
+                                  </p:childTnLst>
+                                </p:cTn>
+                              </p:par>
+                            </p:childTnLst>
+                          </p:cTn>
+                        </p:par>
+                      </p:childTnLst>
+                    </p:cTn>
+                  </p:par>
+                  <p:par>
+                    <p:cTn id="11" fill="hold">
+                      <p:stCondLst>
+                        <p:cond delay="indefinite"/>
+                      </p:stCondLst>
+                      <p:childTnLst>
+                        <p:par>
+                          <p:cTn id="12" fill="hold">
+                            <p:stCondLst>
+                              <p:cond delay="0"/>
+                            </p:stCondLst>
+                            <p:childTnLst>
+                              <p:par>
+                                <p:cTn id="13" presetID="1" presetClass="entr" presetSubtype="0" fill="hold" grpId="0" nodeType="clickEffect">
+                                  <p:stCondLst>
+                                    <p:cond delay="0"/>
+                                  </p:stCondLst>
+                                  <p:childTnLst>
+                                    <p:set>
+                                      <p:cBhvr>
+                                        <p:cTn id="14" dur="1" fill="hold">
+                                          <p:stCondLst>
+                                            <p:cond delay="0"/>
+                                          </p:stCondLst>
+                                        </p:cTn>
+                                        <p:tgtEl>
+                                          <p:spTgt spid="3">
+                                            <p:txEl>
+                                              <p:pRg st="2" end="2"/>
+                                            </p:txEl>
+                                          </p:spTgt>
+                                        </p:tgtEl>
+                                        <p:attrNameLst>
+                                          <p:attrName>style.visibility</p:attrName>
+                                        </p:attrNameLst>
+                                      </p:cBhvr>
+                                      <p:to>
+                                        <p:strVal val="visible"/>
+                                      </p:to>
+                                    </p:set>
+                                  </p:childTnLst>
+                                </p:cTn>
+                              </p:par>
+                            </p:childTnLst>
+                          </p:cTn>
+                        </p:par>
+                      </p:childTnLst>
+                    </p:cTn>
+                  </p:par>
+                  <p:par>
+                    <p:cTn id="15" fill="hold">
+                      <p:stCondLst>
+                        <p:cond delay="indefinite"/>
+                      </p:stCondLst>
+                      <p:childTnLst>
+                        <p:par>
+                          <p:cTn id="16" fill="hold">
+                            <p:stCondLst>
+                              <p:cond delay="0"/>
+                            </p:stCondLst>
+                            <p:childTnLst>
+                              <p:par>
+                                <p:cTn id="17" presetID="1" presetClass="entr" presetSubtype="0" fill="hold" grpId="0" nodeType="clickEffect">
+                                  <p:stCondLst>
+                                    <p:cond delay="0"/>
+                                  </p:stCondLst>
+                                  <p:childTnLst>
+                                    <p:set>
+                                      <p:cBhvr>
+                                        <p:cTn id="18" dur="1" fill="hold">
+                                          <p:stCondLst>
+                                            <p:cond delay="0"/>
+                                          </p:stCondLst>
+                                        </p:cTn>
+                                        <p:tgtEl>
+                                          <p:spTgt spid="3">
+                                            <p:txEl>
+                                              <p:pRg st="3" end="3"/>
+                                            </p:txEl>
+                                          </p:spTgt>
+                                        </p:tgtEl>
+                                        <p:attrNameLst>
+                                          <p:attrName>style.visibility</p:attrName>
+                                        </p:attrNameLst>
+                                      </p:cBhvr>
+                                      <p:to>
+                                        <p:strVal val="visible"/>
+                                      </p:to>
+                                    </p:set>
+                                  </p:childTnLst>
+                                </p:cTn>
+                              </p:par>
+                            </p:childTnLst>
+                          </p:cTn>
+                        </p:par>
+                      </p:childTnLst>
+                    </p:cTn>
+                  </p:par>
+                </p:childTnLst>
+              </p:cTn>
+              <p:prevCondLst>
+                <p:cond evt="onPrev" delay="0">
+                  <p:tgtEl>
+                    <p:sldTgt/>
+                  </p:tgtEl>
+                </p:cond>
+              </p:prevCondLst>
+              <p:nextCondLst>
+                <p:cond evt="onNext" delay="0">
+                  <p:tgtEl>
+                    <p:sldTgt/>
+                  </p:tgtEl>
+                </p:cond>
+              </p:nextCondLst>
+            </p:seq>
+          </p:childTnLst>
+        </p:cTn>
+      </p:par>
+    </p:tnLst>
+    <p:bldLst>
+      <p:bldP spid="3" grpId="0" build="p"/>
+    </p:bldLst>
+  </p:timing>
 </p:sld>
 </file>
 
-<file path=ppt/slides/slide19.xml><?xml version="1.0" encoding="utf-8"?>
+<file path=ppt/slides/slide21.xml><?xml version="1.0" encoding="utf-8"?>
 <p:sld xmlns:a="http://schemas.openxmlformats.org/drawingml/2006/main" xmlns:r="http://schemas.openxmlformats.org/officeDocument/2006/relationships" xmlns:p="http://schemas.openxmlformats.org/presentationml/2006/main">
   <p:cSld>
     <p:spTree>
@@ -11412,139 +13015,7 @@
 </p:sld>
 </file>
 
-<file path=ppt/slides/slide2.xml><?xml version="1.0" encoding="utf-8"?>
-<p:sld xmlns:a="http://schemas.openxmlformats.org/drawingml/2006/main" xmlns:r="http://schemas.openxmlformats.org/officeDocument/2006/relationships" xmlns:p="http://schemas.openxmlformats.org/presentationml/2006/main">
-  <p:cSld>
-    <p:spTree>
-      <p:nvGrpSpPr>
-        <p:cNvPr id="1" name=""/>
-        <p:cNvGrpSpPr/>
-        <p:nvPr/>
-      </p:nvGrpSpPr>
-      <p:grpSpPr>
-        <a:xfrm>
-          <a:off x="0" y="0"/>
-          <a:ext cx="0" cy="0"/>
-          <a:chOff x="0" y="0"/>
-          <a:chExt cx="0" cy="0"/>
-        </a:xfrm>
-      </p:grpSpPr>
-      <p:sp>
-        <p:nvSpPr>
-          <p:cNvPr id="2" name="Title 1">
-            <a:extLst>
-              <a:ext uri="{FF2B5EF4-FFF2-40B4-BE49-F238E27FC236}">
-                <a16:creationId xmlns:a16="http://schemas.microsoft.com/office/drawing/2014/main" id="{65C35797-23DF-9D42-7847-7CC25685B1CE}"/>
-              </a:ext>
-            </a:extLst>
-          </p:cNvPr>
-          <p:cNvSpPr>
-            <a:spLocks noGrp="1"/>
-          </p:cNvSpPr>
-          <p:nvPr>
-            <p:ph type="title"/>
-          </p:nvPr>
-        </p:nvSpPr>
-        <p:spPr/>
-        <p:txBody>
-          <a:bodyPr/>
-          <a:lstStyle/>
-          <a:p>
-            <a:r>
-              <a:rPr lang="en-US" dirty="0"/>
-              <a:t>Quiz 4</a:t>
-            </a:r>
-          </a:p>
-        </p:txBody>
-      </p:sp>
-      <p:sp>
-        <p:nvSpPr>
-          <p:cNvPr id="3" name="Content Placeholder 2">
-            <a:extLst>
-              <a:ext uri="{FF2B5EF4-FFF2-40B4-BE49-F238E27FC236}">
-                <a16:creationId xmlns:a16="http://schemas.microsoft.com/office/drawing/2014/main" id="{27B8D407-4275-C9BA-8824-F28338D99073}"/>
-              </a:ext>
-            </a:extLst>
-          </p:cNvPr>
-          <p:cNvSpPr>
-            <a:spLocks noGrp="1"/>
-          </p:cNvSpPr>
-          <p:nvPr>
-            <p:ph idx="1"/>
-          </p:nvPr>
-        </p:nvSpPr>
-        <p:spPr/>
-        <p:txBody>
-          <a:bodyPr/>
-          <a:lstStyle/>
-          <a:p>
-            <a:pPr marL="0" indent="0">
-              <a:buNone/>
-            </a:pPr>
-            <a:r>
-              <a:rPr lang="en-US" dirty="0"/>
-              <a:t>Why does “garbage in, garbage out” matter in sports analytics?</a:t>
-            </a:r>
-          </a:p>
-          <a:p>
-            <a:pPr>
-              <a:buFont typeface="Wingdings" panose="05000000000000000000" pitchFamily="2" charset="2"/>
-              <a:buChar char="q"/>
-            </a:pPr>
-            <a:r>
-              <a:rPr lang="en-US" sz="2400" dirty="0"/>
-              <a:t>Statistical models automatically remove measurement errors</a:t>
-            </a:r>
-          </a:p>
-          <a:p>
-            <a:pPr>
-              <a:buFont typeface="Wingdings" panose="05000000000000000000" pitchFamily="2" charset="2"/>
-              <a:buChar char="q"/>
-            </a:pPr>
-            <a:r>
-              <a:rPr lang="en-US" sz="2400" dirty="0"/>
-              <a:t>Large datasets do not require quality checks</a:t>
-            </a:r>
-          </a:p>
-          <a:p>
-            <a:pPr>
-              <a:buFont typeface="Wingdings" panose="05000000000000000000" pitchFamily="2" charset="2"/>
-              <a:buChar char="q"/>
-            </a:pPr>
-            <a:r>
-              <a:rPr lang="en-US" sz="2400" dirty="0"/>
-              <a:t>Sophisticated analyses cannot fully compensate for flawed input data</a:t>
-            </a:r>
-          </a:p>
-          <a:p>
-            <a:pPr>
-              <a:buFont typeface="Wingdings" panose="05000000000000000000" pitchFamily="2" charset="2"/>
-              <a:buChar char="q"/>
-            </a:pPr>
-            <a:r>
-              <a:rPr lang="en-US" sz="2400" dirty="0"/>
-              <a:t>Only manually entered data contain errors</a:t>
-            </a:r>
-          </a:p>
-          <a:p>
-            <a:endParaRPr lang="en-US" dirty="0"/>
-          </a:p>
-        </p:txBody>
-      </p:sp>
-    </p:spTree>
-    <p:extLst>
-      <p:ext uri="{BB962C8B-B14F-4D97-AF65-F5344CB8AC3E}">
-        <p14:creationId xmlns:p14="http://schemas.microsoft.com/office/powerpoint/2010/main" val="3822656530"/>
-      </p:ext>
-    </p:extLst>
-  </p:cSld>
-  <p:clrMapOvr>
-    <a:masterClrMapping/>
-  </p:clrMapOvr>
-</p:sld>
-</file>
-
-<file path=ppt/slides/slide20.xml><?xml version="1.0" encoding="utf-8"?>
+<file path=ppt/slides/slide22.xml><?xml version="1.0" encoding="utf-8"?>
 <p:sld xmlns:a="http://schemas.openxmlformats.org/drawingml/2006/main" xmlns:r="http://schemas.openxmlformats.org/officeDocument/2006/relationships" xmlns:p="http://schemas.openxmlformats.org/presentationml/2006/main">
   <p:cSld>
     <p:spTree>
@@ -11702,7 +13173,7 @@
 </p:sld>
 </file>
 
-<file path=ppt/slides/slide21.xml><?xml version="1.0" encoding="utf-8"?>
+<file path=ppt/slides/slide23.xml><?xml version="1.0" encoding="utf-8"?>
 <p:sld xmlns:a="http://schemas.openxmlformats.org/drawingml/2006/main" xmlns:r="http://schemas.openxmlformats.org/officeDocument/2006/relationships" xmlns:p="http://schemas.openxmlformats.org/presentationml/2006/main">
   <p:cSld>
     <p:spTree>
@@ -11793,7 +13264,7 @@
 </p:sld>
 </file>
 
-<file path=ppt/slides/slide22.xml><?xml version="1.0" encoding="utf-8"?>
+<file path=ppt/slides/slide24.xml><?xml version="1.0" encoding="utf-8"?>
 <p:sld xmlns:a="http://schemas.openxmlformats.org/drawingml/2006/main" xmlns:r="http://schemas.openxmlformats.org/officeDocument/2006/relationships" xmlns:p="http://schemas.openxmlformats.org/presentationml/2006/main">
   <p:cSld>
     <p:spTree>
@@ -12095,10 +13566,180 @@
   <p:clrMapOvr>
     <a:masterClrMapping/>
   </p:clrMapOvr>
+  <p:timing>
+    <p:tnLst>
+      <p:par>
+        <p:cTn id="1" dur="indefinite" restart="never" nodeType="tmRoot">
+          <p:childTnLst>
+            <p:seq concurrent="1" nextAc="seek">
+              <p:cTn id="2" dur="indefinite" nodeType="mainSeq">
+                <p:childTnLst>
+                  <p:par>
+                    <p:cTn id="3" fill="hold">
+                      <p:stCondLst>
+                        <p:cond delay="indefinite"/>
+                      </p:stCondLst>
+                      <p:childTnLst>
+                        <p:par>
+                          <p:cTn id="4" fill="hold">
+                            <p:stCondLst>
+                              <p:cond delay="0"/>
+                            </p:stCondLst>
+                            <p:childTnLst>
+                              <p:par>
+                                <p:cTn id="5" presetID="1" presetClass="entr" presetSubtype="0" fill="hold" grpId="0" nodeType="clickEffect">
+                                  <p:stCondLst>
+                                    <p:cond delay="0"/>
+                                  </p:stCondLst>
+                                  <p:childTnLst>
+                                    <p:set>
+                                      <p:cBhvr>
+                                        <p:cTn id="6" dur="1" fill="hold">
+                                          <p:stCondLst>
+                                            <p:cond delay="0"/>
+                                          </p:stCondLst>
+                                        </p:cTn>
+                                        <p:tgtEl>
+                                          <p:spTgt spid="5"/>
+                                        </p:tgtEl>
+                                        <p:attrNameLst>
+                                          <p:attrName>style.visibility</p:attrName>
+                                        </p:attrNameLst>
+                                      </p:cBhvr>
+                                      <p:to>
+                                        <p:strVal val="visible"/>
+                                      </p:to>
+                                    </p:set>
+                                  </p:childTnLst>
+                                </p:cTn>
+                              </p:par>
+                            </p:childTnLst>
+                          </p:cTn>
+                        </p:par>
+                      </p:childTnLst>
+                    </p:cTn>
+                  </p:par>
+                  <p:par>
+                    <p:cTn id="7" fill="hold">
+                      <p:stCondLst>
+                        <p:cond delay="indefinite"/>
+                      </p:stCondLst>
+                      <p:childTnLst>
+                        <p:par>
+                          <p:cTn id="8" fill="hold">
+                            <p:stCondLst>
+                              <p:cond delay="0"/>
+                            </p:stCondLst>
+                            <p:childTnLst>
+                              <p:par>
+                                <p:cTn id="9" presetID="1" presetClass="entr" presetSubtype="0" fill="hold" grpId="0" nodeType="clickEffect">
+                                  <p:stCondLst>
+                                    <p:cond delay="0"/>
+                                  </p:stCondLst>
+                                  <p:childTnLst>
+                                    <p:set>
+                                      <p:cBhvr>
+                                        <p:cTn id="10" dur="1" fill="hold">
+                                          <p:stCondLst>
+                                            <p:cond delay="0"/>
+                                          </p:stCondLst>
+                                        </p:cTn>
+                                        <p:tgtEl>
+                                          <p:spTgt spid="6"/>
+                                        </p:tgtEl>
+                                        <p:attrNameLst>
+                                          <p:attrName>style.visibility</p:attrName>
+                                        </p:attrNameLst>
+                                      </p:cBhvr>
+                                      <p:to>
+                                        <p:strVal val="visible"/>
+                                      </p:to>
+                                    </p:set>
+                                  </p:childTnLst>
+                                </p:cTn>
+                              </p:par>
+                            </p:childTnLst>
+                          </p:cTn>
+                        </p:par>
+                      </p:childTnLst>
+                    </p:cTn>
+                  </p:par>
+                  <p:par>
+                    <p:cTn id="11" fill="hold">
+                      <p:stCondLst>
+                        <p:cond delay="indefinite"/>
+                      </p:stCondLst>
+                      <p:childTnLst>
+                        <p:par>
+                          <p:cTn id="12" fill="hold">
+                            <p:stCondLst>
+                              <p:cond delay="0"/>
+                            </p:stCondLst>
+                            <p:childTnLst>
+                              <p:par>
+                                <p:cTn id="13" presetID="1" presetClass="entr" presetSubtype="0" fill="hold" grpId="0" nodeType="clickEffect">
+                                  <p:stCondLst>
+                                    <p:cond delay="0"/>
+                                  </p:stCondLst>
+                                  <p:childTnLst>
+                                    <p:set>
+                                      <p:cBhvr>
+                                        <p:cTn id="14" dur="1" fill="hold">
+                                          <p:stCondLst>
+                                            <p:cond delay="0"/>
+                                          </p:stCondLst>
+                                        </p:cTn>
+                                        <p:tgtEl>
+                                          <p:spTgt spid="7"/>
+                                        </p:tgtEl>
+                                        <p:attrNameLst>
+                                          <p:attrName>style.visibility</p:attrName>
+                                        </p:attrNameLst>
+                                      </p:cBhvr>
+                                      <p:to>
+                                        <p:strVal val="visible"/>
+                                      </p:to>
+                                    </p:set>
+                                  </p:childTnLst>
+                                </p:cTn>
+                              </p:par>
+                            </p:childTnLst>
+                          </p:cTn>
+                        </p:par>
+                      </p:childTnLst>
+                    </p:cTn>
+                  </p:par>
+                </p:childTnLst>
+              </p:cTn>
+              <p:prevCondLst>
+                <p:cond evt="onPrev" delay="0">
+                  <p:tgtEl>
+                    <p:sldTgt/>
+                  </p:tgtEl>
+                </p:cond>
+              </p:prevCondLst>
+              <p:nextCondLst>
+                <p:cond evt="onNext" delay="0">
+                  <p:tgtEl>
+                    <p:sldTgt/>
+                  </p:tgtEl>
+                </p:cond>
+              </p:nextCondLst>
+            </p:seq>
+          </p:childTnLst>
+        </p:cTn>
+      </p:par>
+    </p:tnLst>
+    <p:bldLst>
+      <p:bldP spid="5" grpId="0" animBg="1"/>
+      <p:bldP spid="6" grpId="0" animBg="1"/>
+      <p:bldP spid="7" grpId="0" animBg="1"/>
+    </p:bldLst>
+  </p:timing>
 </p:sld>
 </file>
 
-<file path=ppt/slides/slide23.xml><?xml version="1.0" encoding="utf-8"?>
+<file path=ppt/slides/slide25.xml><?xml version="1.0" encoding="utf-8"?>
 <p:sld xmlns:a="http://schemas.openxmlformats.org/drawingml/2006/main" xmlns:r="http://schemas.openxmlformats.org/officeDocument/2006/relationships" xmlns:p="http://schemas.openxmlformats.org/presentationml/2006/main">
   <p:cSld>
     <p:spTree>
@@ -12188,7 +13829,7 @@
 </p:sld>
 </file>
 
-<file path=ppt/slides/slide24.xml><?xml version="1.0" encoding="utf-8"?>
+<file path=ppt/slides/slide26.xml><?xml version="1.0" encoding="utf-8"?>
 <p:sld xmlns:a="http://schemas.openxmlformats.org/drawingml/2006/main" xmlns:r="http://schemas.openxmlformats.org/officeDocument/2006/relationships" xmlns:p="http://schemas.openxmlformats.org/presentationml/2006/main">
   <p:cSld>
     <p:spTree>
@@ -12525,10 +14166,85 @@
   <p:clrMapOvr>
     <a:masterClrMapping/>
   </p:clrMapOvr>
+  <p:timing>
+    <p:tnLst>
+      <p:par>
+        <p:cTn id="1" dur="indefinite" restart="never" nodeType="tmRoot">
+          <p:childTnLst>
+            <p:seq concurrent="1" nextAc="seek">
+              <p:cTn id="2" dur="indefinite" nodeType="mainSeq">
+                <p:childTnLst>
+                  <p:par>
+                    <p:cTn id="3" fill="hold">
+                      <p:stCondLst>
+                        <p:cond delay="indefinite"/>
+                      </p:stCondLst>
+                      <p:childTnLst>
+                        <p:par>
+                          <p:cTn id="4" fill="hold">
+                            <p:stCondLst>
+                              <p:cond delay="0"/>
+                            </p:stCondLst>
+                            <p:childTnLst>
+                              <p:par>
+                                <p:cTn id="5" presetID="1" presetClass="entr" presetSubtype="0" fill="hold" nodeType="clickEffect">
+                                  <p:stCondLst>
+                                    <p:cond delay="0"/>
+                                  </p:stCondLst>
+                                  <p:childTnLst>
+                                    <p:set>
+                                      <p:cBhvr>
+                                        <p:cTn id="6" dur="1" fill="hold">
+                                          <p:stCondLst>
+                                            <p:cond delay="0"/>
+                                          </p:stCondLst>
+                                        </p:cTn>
+                                        <p:tgtEl>
+                                          <p:spTgt spid="4"/>
+                                        </p:tgtEl>
+                                        <p:attrNameLst>
+                                          <p:attrName>style.visibility</p:attrName>
+                                        </p:attrNameLst>
+                                      </p:cBhvr>
+                                      <p:to>
+                                        <p:strVal val="visible"/>
+                                      </p:to>
+                                    </p:set>
+                                  </p:childTnLst>
+                                </p:cTn>
+                              </p:par>
+                            </p:childTnLst>
+                          </p:cTn>
+                        </p:par>
+                      </p:childTnLst>
+                    </p:cTn>
+                  </p:par>
+                </p:childTnLst>
+              </p:cTn>
+              <p:prevCondLst>
+                <p:cond evt="onPrev" delay="0">
+                  <p:tgtEl>
+                    <p:sldTgt/>
+                  </p:tgtEl>
+                </p:cond>
+              </p:prevCondLst>
+              <p:nextCondLst>
+                <p:cond evt="onNext" delay="0">
+                  <p:tgtEl>
+                    <p:sldTgt/>
+                  </p:tgtEl>
+                </p:cond>
+              </p:nextCondLst>
+            </p:seq>
+          </p:childTnLst>
+        </p:cTn>
+      </p:par>
+    </p:tnLst>
+  </p:timing>
 </p:sld>
 </file>
 
-<file path=ppt/slides/slide25.xml><?xml version="1.0" encoding="utf-8"?>
+<file path=ppt/slides/slide27.xml><?xml version="1.0" encoding="utf-8"?>
 <p:sld xmlns:a="http://schemas.openxmlformats.org/drawingml/2006/main" xmlns:r="http://schemas.openxmlformats.org/officeDocument/2006/relationships" xmlns:p="http://schemas.openxmlformats.org/presentationml/2006/main">
   <p:cSld>
     <p:spTree>
@@ -12637,7 +14353,7 @@
             <a:fld id="{45C00377-489B-40EC-B059-26BDDD2E89B9}" type="slidenum">
               <a:rPr lang="en-US" smtClean="0"/>
               <a:pPr/>
-              <a:t>25</a:t>
+              <a:t>27</a:t>
             </a:fld>
             <a:endParaRPr lang="en-US" dirty="0"/>
           </a:p>
@@ -12733,7 +14449,7 @@
 </p:sld>
 </file>
 
-<file path=ppt/slides/slide26.xml><?xml version="1.0" encoding="utf-8"?>
+<file path=ppt/slides/slide28.xml><?xml version="1.0" encoding="utf-8"?>
 <p:sld xmlns:a="http://schemas.openxmlformats.org/drawingml/2006/main" xmlns:r="http://schemas.openxmlformats.org/officeDocument/2006/relationships" xmlns:p="http://schemas.openxmlformats.org/presentationml/2006/main">
   <p:cSld>
     <p:spTree>
@@ -12805,12 +14521,6 @@
           <a:bodyPr/>
           <a:lstStyle/>
           <a:p>
-            <a:r>
-              <a:rPr lang="en-US" dirty="0"/>
-              <a:t>Pre-attentive attributes</a:t>
-            </a:r>
-          </a:p>
-          <a:p>
             <a:pPr lvl="1"/>
             <a:r>
               <a:rPr lang="en-US" dirty="0"/>
@@ -12857,7 +14567,7 @@
             <a:fld id="{45C00377-489B-40EC-B059-26BDDD2E89B9}" type="slidenum">
               <a:rPr lang="en-US" smtClean="0"/>
               <a:pPr/>
-              <a:t>26</a:t>
+              <a:t>28</a:t>
             </a:fld>
             <a:endParaRPr lang="en-US" dirty="0"/>
           </a:p>
@@ -12865,10 +14575,10 @@
       </p:sp>
       <p:pic>
         <p:nvPicPr>
-          <p:cNvPr id="5" name="Picture 4">
+          <p:cNvPr id="6" name="Picture 5">
             <a:extLst>
               <a:ext uri="{FF2B5EF4-FFF2-40B4-BE49-F238E27FC236}">
-                <a16:creationId xmlns:a16="http://schemas.microsoft.com/office/drawing/2014/main" id="{56F8C240-20B6-3F06-3813-697702E10E51}"/>
+                <a16:creationId xmlns:a16="http://schemas.microsoft.com/office/drawing/2014/main" id="{D5A2B212-B3C8-6332-5167-DDF1C4F29191}"/>
               </a:ext>
             </a:extLst>
           </p:cNvPr>
@@ -12885,8 +14595,8 @@
         </p:blipFill>
         <p:spPr>
           <a:xfrm>
-            <a:off x="1296307" y="1922798"/>
-            <a:ext cx="2600476" cy="4095750"/>
+            <a:off x="838200" y="1279758"/>
+            <a:ext cx="3235036" cy="5095183"/>
           </a:xfrm>
           <a:prstGeom prst="rect">
             <a:avLst/>
@@ -12903,10 +14613,190 @@
   <p:clrMapOvr>
     <a:masterClrMapping/>
   </p:clrMapOvr>
+  <p:timing>
+    <p:tnLst>
+      <p:par>
+        <p:cTn id="1" dur="indefinite" restart="never" nodeType="tmRoot">
+          <p:childTnLst>
+            <p:seq concurrent="1" nextAc="seek">
+              <p:cTn id="2" dur="indefinite" nodeType="mainSeq">
+                <p:childTnLst>
+                  <p:par>
+                    <p:cTn id="3" fill="hold">
+                      <p:stCondLst>
+                        <p:cond delay="indefinite"/>
+                      </p:stCondLst>
+                      <p:childTnLst>
+                        <p:par>
+                          <p:cTn id="4" fill="hold">
+                            <p:stCondLst>
+                              <p:cond delay="0"/>
+                            </p:stCondLst>
+                            <p:childTnLst>
+                              <p:par>
+                                <p:cTn id="5" presetID="1" presetClass="entr" presetSubtype="0" fill="hold" grpId="0" nodeType="clickEffect">
+                                  <p:stCondLst>
+                                    <p:cond delay="0"/>
+                                  </p:stCondLst>
+                                  <p:childTnLst>
+                                    <p:set>
+                                      <p:cBhvr>
+                                        <p:cTn id="6" dur="1" fill="hold">
+                                          <p:stCondLst>
+                                            <p:cond delay="0"/>
+                                          </p:stCondLst>
+                                        </p:cTn>
+                                        <p:tgtEl>
+                                          <p:spTgt spid="3">
+                                            <p:txEl>
+                                              <p:pRg st="0" end="0"/>
+                                            </p:txEl>
+                                          </p:spTgt>
+                                        </p:tgtEl>
+                                        <p:attrNameLst>
+                                          <p:attrName>style.visibility</p:attrName>
+                                        </p:attrNameLst>
+                                      </p:cBhvr>
+                                      <p:to>
+                                        <p:strVal val="visible"/>
+                                      </p:to>
+                                    </p:set>
+                                  </p:childTnLst>
+                                </p:cTn>
+                              </p:par>
+                            </p:childTnLst>
+                          </p:cTn>
+                        </p:par>
+                      </p:childTnLst>
+                    </p:cTn>
+                  </p:par>
+                  <p:par>
+                    <p:cTn id="7" fill="hold">
+                      <p:stCondLst>
+                        <p:cond delay="indefinite"/>
+                      </p:stCondLst>
+                      <p:childTnLst>
+                        <p:par>
+                          <p:cTn id="8" fill="hold">
+                            <p:stCondLst>
+                              <p:cond delay="0"/>
+                            </p:stCondLst>
+                            <p:childTnLst>
+                              <p:par>
+                                <p:cTn id="9" presetID="1" presetClass="entr" presetSubtype="0" fill="hold" grpId="0" nodeType="clickEffect">
+                                  <p:stCondLst>
+                                    <p:cond delay="0"/>
+                                  </p:stCondLst>
+                                  <p:childTnLst>
+                                    <p:set>
+                                      <p:cBhvr>
+                                        <p:cTn id="10" dur="1" fill="hold">
+                                          <p:stCondLst>
+                                            <p:cond delay="0"/>
+                                          </p:stCondLst>
+                                        </p:cTn>
+                                        <p:tgtEl>
+                                          <p:spTgt spid="3">
+                                            <p:txEl>
+                                              <p:pRg st="1" end="1"/>
+                                            </p:txEl>
+                                          </p:spTgt>
+                                        </p:tgtEl>
+                                        <p:attrNameLst>
+                                          <p:attrName>style.visibility</p:attrName>
+                                        </p:attrNameLst>
+                                      </p:cBhvr>
+                                      <p:to>
+                                        <p:strVal val="visible"/>
+                                      </p:to>
+                                    </p:set>
+                                  </p:childTnLst>
+                                </p:cTn>
+                              </p:par>
+                            </p:childTnLst>
+                          </p:cTn>
+                        </p:par>
+                      </p:childTnLst>
+                    </p:cTn>
+                  </p:par>
+                  <p:par>
+                    <p:cTn id="11" fill="hold">
+                      <p:stCondLst>
+                        <p:cond delay="indefinite"/>
+                      </p:stCondLst>
+                      <p:childTnLst>
+                        <p:par>
+                          <p:cTn id="12" fill="hold">
+                            <p:stCondLst>
+                              <p:cond delay="0"/>
+                            </p:stCondLst>
+                            <p:childTnLst>
+                              <p:par>
+                                <p:cTn id="13" presetID="1" presetClass="entr" presetSubtype="0" fill="hold" grpId="0" nodeType="clickEffect">
+                                  <p:stCondLst>
+                                    <p:cond delay="0"/>
+                                  </p:stCondLst>
+                                  <p:childTnLst>
+                                    <p:set>
+                                      <p:cBhvr>
+                                        <p:cTn id="14" dur="1" fill="hold">
+                                          <p:stCondLst>
+                                            <p:cond delay="0"/>
+                                          </p:stCondLst>
+                                        </p:cTn>
+                                        <p:tgtEl>
+                                          <p:spTgt spid="3">
+                                            <p:txEl>
+                                              <p:pRg st="2" end="2"/>
+                                            </p:txEl>
+                                          </p:spTgt>
+                                        </p:tgtEl>
+                                        <p:attrNameLst>
+                                          <p:attrName>style.visibility</p:attrName>
+                                        </p:attrNameLst>
+                                      </p:cBhvr>
+                                      <p:to>
+                                        <p:strVal val="visible"/>
+                                      </p:to>
+                                    </p:set>
+                                  </p:childTnLst>
+                                </p:cTn>
+                              </p:par>
+                            </p:childTnLst>
+                          </p:cTn>
+                        </p:par>
+                      </p:childTnLst>
+                    </p:cTn>
+                  </p:par>
+                </p:childTnLst>
+              </p:cTn>
+              <p:prevCondLst>
+                <p:cond evt="onPrev" delay="0">
+                  <p:tgtEl>
+                    <p:sldTgt/>
+                  </p:tgtEl>
+                </p:cond>
+              </p:prevCondLst>
+              <p:nextCondLst>
+                <p:cond evt="onNext" delay="0">
+                  <p:tgtEl>
+                    <p:sldTgt/>
+                  </p:tgtEl>
+                </p:cond>
+              </p:nextCondLst>
+            </p:seq>
+          </p:childTnLst>
+        </p:cTn>
+      </p:par>
+    </p:tnLst>
+    <p:bldLst>
+      <p:bldP spid="3" grpId="0" uiExpand="1" build="p"/>
+    </p:bldLst>
+  </p:timing>
 </p:sld>
 </file>
 
-<file path=ppt/slides/slide27.xml><?xml version="1.0" encoding="utf-8"?>
+<file path=ppt/slides/slide29.xml><?xml version="1.0" encoding="utf-8"?>
 <p:sld xmlns:a="http://schemas.openxmlformats.org/drawingml/2006/main" xmlns:r="http://schemas.openxmlformats.org/officeDocument/2006/relationships" xmlns:p="http://schemas.openxmlformats.org/presentationml/2006/main">
   <p:cSld>
     <p:spTree>
@@ -12996,7 +14886,170 @@
 </p:sld>
 </file>
 
-<file path=ppt/slides/slide28.xml><?xml version="1.0" encoding="utf-8"?>
+<file path=ppt/slides/slide3.xml><?xml version="1.0" encoding="utf-8"?>
+<p:sld xmlns:a="http://schemas.openxmlformats.org/drawingml/2006/main" xmlns:r="http://schemas.openxmlformats.org/officeDocument/2006/relationships" xmlns:p="http://schemas.openxmlformats.org/presentationml/2006/main">
+  <p:cSld>
+    <p:spTree>
+      <p:nvGrpSpPr>
+        <p:cNvPr id="1" name="">
+          <a:extLst>
+            <a:ext uri="{FF2B5EF4-FFF2-40B4-BE49-F238E27FC236}">
+              <a16:creationId xmlns:a16="http://schemas.microsoft.com/office/drawing/2014/main" id="{798E1359-825E-906C-0E77-45A70F16D99D}"/>
+            </a:ext>
+          </a:extLst>
+        </p:cNvPr>
+        <p:cNvGrpSpPr/>
+        <p:nvPr/>
+      </p:nvGrpSpPr>
+      <p:grpSpPr>
+        <a:xfrm>
+          <a:off x="0" y="0"/>
+          <a:ext cx="0" cy="0"/>
+          <a:chOff x="0" y="0"/>
+          <a:chExt cx="0" cy="0"/>
+        </a:xfrm>
+      </p:grpSpPr>
+      <p:sp>
+        <p:nvSpPr>
+          <p:cNvPr id="2" name="Title 1">
+            <a:extLst>
+              <a:ext uri="{FF2B5EF4-FFF2-40B4-BE49-F238E27FC236}">
+                <a16:creationId xmlns:a16="http://schemas.microsoft.com/office/drawing/2014/main" id="{17DE8F48-ACD5-B492-ADC4-B196EBA3008E}"/>
+              </a:ext>
+            </a:extLst>
+          </p:cNvPr>
+          <p:cNvSpPr>
+            <a:spLocks noGrp="1"/>
+          </p:cNvSpPr>
+          <p:nvPr>
+            <p:ph type="title"/>
+          </p:nvPr>
+        </p:nvSpPr>
+        <p:spPr/>
+        <p:txBody>
+          <a:bodyPr/>
+          <a:lstStyle/>
+          <a:p>
+            <a:r>
+              <a:rPr lang="en-US" dirty="0"/>
+              <a:t>Quiz 4</a:t>
+            </a:r>
+          </a:p>
+        </p:txBody>
+      </p:sp>
+      <p:sp>
+        <p:nvSpPr>
+          <p:cNvPr id="3" name="Content Placeholder 2">
+            <a:extLst>
+              <a:ext uri="{FF2B5EF4-FFF2-40B4-BE49-F238E27FC236}">
+                <a16:creationId xmlns:a16="http://schemas.microsoft.com/office/drawing/2014/main" id="{B2D8F21C-F0CE-8E6D-7D53-6D815822BDC0}"/>
+              </a:ext>
+            </a:extLst>
+          </p:cNvPr>
+          <p:cNvSpPr>
+            <a:spLocks noGrp="1"/>
+          </p:cNvSpPr>
+          <p:nvPr>
+            <p:ph idx="1"/>
+          </p:nvPr>
+        </p:nvSpPr>
+        <p:spPr/>
+        <p:txBody>
+          <a:bodyPr/>
+          <a:lstStyle/>
+          <a:p>
+            <a:pPr marL="0" indent="0">
+              <a:buNone/>
+            </a:pPr>
+            <a:r>
+              <a:rPr lang="en-US" dirty="0"/>
+              <a:t>Why does “garbage in, garbage out” matter in sports analytics?</a:t>
+            </a:r>
+          </a:p>
+          <a:p>
+            <a:pPr>
+              <a:buFont typeface="Wingdings" panose="05000000000000000000" pitchFamily="2" charset="2"/>
+              <a:buChar char="q"/>
+            </a:pPr>
+            <a:r>
+              <a:rPr lang="en-US" sz="2400" dirty="0">
+                <a:solidFill>
+                  <a:schemeClr val="tx1">
+                    <a:lumMod val="75000"/>
+                    <a:lumOff val="25000"/>
+                  </a:schemeClr>
+                </a:solidFill>
+              </a:rPr>
+              <a:t>Statistical models automatically remove measurement errors</a:t>
+            </a:r>
+          </a:p>
+          <a:p>
+            <a:pPr>
+              <a:buFont typeface="Wingdings" panose="05000000000000000000" pitchFamily="2" charset="2"/>
+              <a:buChar char="q"/>
+            </a:pPr>
+            <a:r>
+              <a:rPr lang="en-US" sz="2400" dirty="0">
+                <a:solidFill>
+                  <a:schemeClr val="tx1">
+                    <a:lumMod val="75000"/>
+                    <a:lumOff val="25000"/>
+                  </a:schemeClr>
+                </a:solidFill>
+              </a:rPr>
+              <a:t>Large datasets do not require quality checks</a:t>
+            </a:r>
+          </a:p>
+          <a:p>
+            <a:pPr>
+              <a:buFont typeface="Wingdings" panose="05000000000000000000" pitchFamily="2" charset="2"/>
+              <a:buChar char="q"/>
+            </a:pPr>
+            <a:r>
+              <a:rPr lang="en-US" sz="2400" dirty="0">
+                <a:solidFill>
+                  <a:schemeClr val="accent6"/>
+                </a:solidFill>
+              </a:rPr>
+              <a:t>Sophisticated analyses cannot fully compensate for flawed input data</a:t>
+            </a:r>
+          </a:p>
+          <a:p>
+            <a:pPr>
+              <a:buFont typeface="Wingdings" panose="05000000000000000000" pitchFamily="2" charset="2"/>
+              <a:buChar char="q"/>
+            </a:pPr>
+            <a:r>
+              <a:rPr lang="en-US" sz="2400" dirty="0">
+                <a:solidFill>
+                  <a:schemeClr val="tx1">
+                    <a:lumMod val="75000"/>
+                    <a:lumOff val="25000"/>
+                  </a:schemeClr>
+                </a:solidFill>
+              </a:rPr>
+              <a:t>Only manually entered data contain errors</a:t>
+            </a:r>
+          </a:p>
+          <a:p>
+            <a:endParaRPr lang="en-US" dirty="0"/>
+          </a:p>
+        </p:txBody>
+      </p:sp>
+    </p:spTree>
+    <p:extLst>
+      <p:ext uri="{BB962C8B-B14F-4D97-AF65-F5344CB8AC3E}">
+        <p14:creationId xmlns:p14="http://schemas.microsoft.com/office/powerpoint/2010/main" val="4212069637"/>
+      </p:ext>
+    </p:extLst>
+  </p:cSld>
+  <p:clrMapOvr>
+    <a:masterClrMapping/>
+  </p:clrMapOvr>
+</p:sld>
+</file>
+
+<file path=ppt/slides/slide30.xml><?xml version="1.0" encoding="utf-8"?>
 <p:sld xmlns:a="http://schemas.openxmlformats.org/drawingml/2006/main" xmlns:r="http://schemas.openxmlformats.org/officeDocument/2006/relationships" xmlns:p="http://schemas.openxmlformats.org/presentationml/2006/main">
   <p:cSld>
     <p:spTree>
@@ -13102,7 +15155,7 @@
             <a:fld id="{45C00377-489B-40EC-B059-26BDDD2E89B9}" type="slidenum">
               <a:rPr lang="en-US" smtClean="0"/>
               <a:pPr/>
-              <a:t>28</a:t>
+              <a:t>30</a:t>
             </a:fld>
             <a:endParaRPr lang="en-US" dirty="0"/>
           </a:p>
@@ -13354,7 +15407,7 @@
 </p:sld>
 </file>
 
-<file path=ppt/slides/slide29.xml><?xml version="1.0" encoding="utf-8"?>
+<file path=ppt/slides/slide31.xml><?xml version="1.0" encoding="utf-8"?>
 <p:sld xmlns:a="http://schemas.openxmlformats.org/drawingml/2006/main" xmlns:r="http://schemas.openxmlformats.org/officeDocument/2006/relationships" xmlns:p="http://schemas.openxmlformats.org/presentationml/2006/main">
   <p:cSld>
     <p:spTree>
@@ -13474,7 +15527,7 @@
             <a:fld id="{45C00377-489B-40EC-B059-26BDDD2E89B9}" type="slidenum">
               <a:rPr lang="en-US" smtClean="0"/>
               <a:pPr/>
-              <a:t>29</a:t>
+              <a:t>31</a:t>
             </a:fld>
             <a:endParaRPr lang="en-US" dirty="0"/>
           </a:p>
@@ -13562,7 +15615,7 @@
         </p:blipFill>
         <p:spPr>
           <a:xfrm>
-            <a:off x="8398153" y="4959504"/>
+            <a:off x="8190153" y="4959504"/>
             <a:ext cx="1143160" cy="1133633"/>
           </a:xfrm>
           <a:prstGeom prst="rect">
@@ -13580,164 +15633,239 @@
   <p:clrMapOvr>
     <a:masterClrMapping/>
   </p:clrMapOvr>
+  <p:timing>
+    <p:tnLst>
+      <p:par>
+        <p:cTn id="1" dur="indefinite" restart="never" nodeType="tmRoot">
+          <p:childTnLst>
+            <p:seq concurrent="1" nextAc="seek">
+              <p:cTn id="2" dur="indefinite" nodeType="mainSeq">
+                <p:childTnLst>
+                  <p:par>
+                    <p:cTn id="3" fill="hold">
+                      <p:stCondLst>
+                        <p:cond delay="indefinite"/>
+                      </p:stCondLst>
+                      <p:childTnLst>
+                        <p:par>
+                          <p:cTn id="4" fill="hold">
+                            <p:stCondLst>
+                              <p:cond delay="0"/>
+                            </p:stCondLst>
+                            <p:childTnLst>
+                              <p:par>
+                                <p:cTn id="5" presetID="1" presetClass="entr" presetSubtype="0" fill="hold" grpId="0" nodeType="clickEffect">
+                                  <p:stCondLst>
+                                    <p:cond delay="0"/>
+                                  </p:stCondLst>
+                                  <p:childTnLst>
+                                    <p:set>
+                                      <p:cBhvr>
+                                        <p:cTn id="6" dur="1" fill="hold">
+                                          <p:stCondLst>
+                                            <p:cond delay="0"/>
+                                          </p:stCondLst>
+                                        </p:cTn>
+                                        <p:tgtEl>
+                                          <p:spTgt spid="3">
+                                            <p:txEl>
+                                              <p:pRg st="0" end="0"/>
+                                            </p:txEl>
+                                          </p:spTgt>
+                                        </p:tgtEl>
+                                        <p:attrNameLst>
+                                          <p:attrName>style.visibility</p:attrName>
+                                        </p:attrNameLst>
+                                      </p:cBhvr>
+                                      <p:to>
+                                        <p:strVal val="visible"/>
+                                      </p:to>
+                                    </p:set>
+                                  </p:childTnLst>
+                                </p:cTn>
+                              </p:par>
+                            </p:childTnLst>
+                          </p:cTn>
+                        </p:par>
+                      </p:childTnLst>
+                    </p:cTn>
+                  </p:par>
+                  <p:par>
+                    <p:cTn id="7" fill="hold">
+                      <p:stCondLst>
+                        <p:cond delay="indefinite"/>
+                      </p:stCondLst>
+                      <p:childTnLst>
+                        <p:par>
+                          <p:cTn id="8" fill="hold">
+                            <p:stCondLst>
+                              <p:cond delay="0"/>
+                            </p:stCondLst>
+                            <p:childTnLst>
+                              <p:par>
+                                <p:cTn id="9" presetID="1" presetClass="entr" presetSubtype="0" fill="hold" grpId="0" nodeType="clickEffect">
+                                  <p:stCondLst>
+                                    <p:cond delay="0"/>
+                                  </p:stCondLst>
+                                  <p:childTnLst>
+                                    <p:set>
+                                      <p:cBhvr>
+                                        <p:cTn id="10" dur="1" fill="hold">
+                                          <p:stCondLst>
+                                            <p:cond delay="0"/>
+                                          </p:stCondLst>
+                                        </p:cTn>
+                                        <p:tgtEl>
+                                          <p:spTgt spid="3">
+                                            <p:txEl>
+                                              <p:pRg st="1" end="1"/>
+                                            </p:txEl>
+                                          </p:spTgt>
+                                        </p:tgtEl>
+                                        <p:attrNameLst>
+                                          <p:attrName>style.visibility</p:attrName>
+                                        </p:attrNameLst>
+                                      </p:cBhvr>
+                                      <p:to>
+                                        <p:strVal val="visible"/>
+                                      </p:to>
+                                    </p:set>
+                                  </p:childTnLst>
+                                </p:cTn>
+                              </p:par>
+                            </p:childTnLst>
+                          </p:cTn>
+                        </p:par>
+                      </p:childTnLst>
+                    </p:cTn>
+                  </p:par>
+                  <p:par>
+                    <p:cTn id="11" fill="hold">
+                      <p:stCondLst>
+                        <p:cond delay="indefinite"/>
+                      </p:stCondLst>
+                      <p:childTnLst>
+                        <p:par>
+                          <p:cTn id="12" fill="hold">
+                            <p:stCondLst>
+                              <p:cond delay="0"/>
+                            </p:stCondLst>
+                            <p:childTnLst>
+                              <p:par>
+                                <p:cTn id="13" presetID="1" presetClass="entr" presetSubtype="0" fill="hold" grpId="0" nodeType="clickEffect">
+                                  <p:stCondLst>
+                                    <p:cond delay="0"/>
+                                  </p:stCondLst>
+                                  <p:childTnLst>
+                                    <p:set>
+                                      <p:cBhvr>
+                                        <p:cTn id="14" dur="1" fill="hold">
+                                          <p:stCondLst>
+                                            <p:cond delay="0"/>
+                                          </p:stCondLst>
+                                        </p:cTn>
+                                        <p:tgtEl>
+                                          <p:spTgt spid="3">
+                                            <p:txEl>
+                                              <p:pRg st="2" end="2"/>
+                                            </p:txEl>
+                                          </p:spTgt>
+                                        </p:tgtEl>
+                                        <p:attrNameLst>
+                                          <p:attrName>style.visibility</p:attrName>
+                                        </p:attrNameLst>
+                                      </p:cBhvr>
+                                      <p:to>
+                                        <p:strVal val="visible"/>
+                                      </p:to>
+                                    </p:set>
+                                  </p:childTnLst>
+                                </p:cTn>
+                              </p:par>
+                            </p:childTnLst>
+                          </p:cTn>
+                        </p:par>
+                      </p:childTnLst>
+                    </p:cTn>
+                  </p:par>
+                  <p:par>
+                    <p:cTn id="15" fill="hold">
+                      <p:stCondLst>
+                        <p:cond delay="indefinite"/>
+                      </p:stCondLst>
+                      <p:childTnLst>
+                        <p:par>
+                          <p:cTn id="16" fill="hold">
+                            <p:stCondLst>
+                              <p:cond delay="0"/>
+                            </p:stCondLst>
+                            <p:childTnLst>
+                              <p:par>
+                                <p:cTn id="17" presetID="1" presetClass="entr" presetSubtype="0" fill="hold" grpId="0" nodeType="clickEffect">
+                                  <p:stCondLst>
+                                    <p:cond delay="0"/>
+                                  </p:stCondLst>
+                                  <p:childTnLst>
+                                    <p:set>
+                                      <p:cBhvr>
+                                        <p:cTn id="18" dur="1" fill="hold">
+                                          <p:stCondLst>
+                                            <p:cond delay="0"/>
+                                          </p:stCondLst>
+                                        </p:cTn>
+                                        <p:tgtEl>
+                                          <p:spTgt spid="3">
+                                            <p:txEl>
+                                              <p:pRg st="3" end="3"/>
+                                            </p:txEl>
+                                          </p:spTgt>
+                                        </p:tgtEl>
+                                        <p:attrNameLst>
+                                          <p:attrName>style.visibility</p:attrName>
+                                        </p:attrNameLst>
+                                      </p:cBhvr>
+                                      <p:to>
+                                        <p:strVal val="visible"/>
+                                      </p:to>
+                                    </p:set>
+                                  </p:childTnLst>
+                                </p:cTn>
+                              </p:par>
+                            </p:childTnLst>
+                          </p:cTn>
+                        </p:par>
+                      </p:childTnLst>
+                    </p:cTn>
+                  </p:par>
+                </p:childTnLst>
+              </p:cTn>
+              <p:prevCondLst>
+                <p:cond evt="onPrev" delay="0">
+                  <p:tgtEl>
+                    <p:sldTgt/>
+                  </p:tgtEl>
+                </p:cond>
+              </p:prevCondLst>
+              <p:nextCondLst>
+                <p:cond evt="onNext" delay="0">
+                  <p:tgtEl>
+                    <p:sldTgt/>
+                  </p:tgtEl>
+                </p:cond>
+              </p:nextCondLst>
+            </p:seq>
+          </p:childTnLst>
+        </p:cTn>
+      </p:par>
+    </p:tnLst>
+    <p:bldLst>
+      <p:bldP spid="3" grpId="0" build="p"/>
+    </p:bldLst>
+  </p:timing>
 </p:sld>
 </file>
 
-<file path=ppt/slides/slide3.xml><?xml version="1.0" encoding="utf-8"?>
-<p:sld xmlns:a="http://schemas.openxmlformats.org/drawingml/2006/main" xmlns:r="http://schemas.openxmlformats.org/officeDocument/2006/relationships" xmlns:p="http://schemas.openxmlformats.org/presentationml/2006/main">
-  <p:cSld>
-    <p:spTree>
-      <p:nvGrpSpPr>
-        <p:cNvPr id="1" name="">
-          <a:extLst>
-            <a:ext uri="{FF2B5EF4-FFF2-40B4-BE49-F238E27FC236}">
-              <a16:creationId xmlns:a16="http://schemas.microsoft.com/office/drawing/2014/main" id="{798E1359-825E-906C-0E77-45A70F16D99D}"/>
-            </a:ext>
-          </a:extLst>
-        </p:cNvPr>
-        <p:cNvGrpSpPr/>
-        <p:nvPr/>
-      </p:nvGrpSpPr>
-      <p:grpSpPr>
-        <a:xfrm>
-          <a:off x="0" y="0"/>
-          <a:ext cx="0" cy="0"/>
-          <a:chOff x="0" y="0"/>
-          <a:chExt cx="0" cy="0"/>
-        </a:xfrm>
-      </p:grpSpPr>
-      <p:sp>
-        <p:nvSpPr>
-          <p:cNvPr id="2" name="Title 1">
-            <a:extLst>
-              <a:ext uri="{FF2B5EF4-FFF2-40B4-BE49-F238E27FC236}">
-                <a16:creationId xmlns:a16="http://schemas.microsoft.com/office/drawing/2014/main" id="{17DE8F48-ACD5-B492-ADC4-B196EBA3008E}"/>
-              </a:ext>
-            </a:extLst>
-          </p:cNvPr>
-          <p:cNvSpPr>
-            <a:spLocks noGrp="1"/>
-          </p:cNvSpPr>
-          <p:nvPr>
-            <p:ph type="title"/>
-          </p:nvPr>
-        </p:nvSpPr>
-        <p:spPr/>
-        <p:txBody>
-          <a:bodyPr/>
-          <a:lstStyle/>
-          <a:p>
-            <a:r>
-              <a:rPr lang="en-US" dirty="0"/>
-              <a:t>Quiz 4</a:t>
-            </a:r>
-          </a:p>
-        </p:txBody>
-      </p:sp>
-      <p:sp>
-        <p:nvSpPr>
-          <p:cNvPr id="3" name="Content Placeholder 2">
-            <a:extLst>
-              <a:ext uri="{FF2B5EF4-FFF2-40B4-BE49-F238E27FC236}">
-                <a16:creationId xmlns:a16="http://schemas.microsoft.com/office/drawing/2014/main" id="{B2D8F21C-F0CE-8E6D-7D53-6D815822BDC0}"/>
-              </a:ext>
-            </a:extLst>
-          </p:cNvPr>
-          <p:cNvSpPr>
-            <a:spLocks noGrp="1"/>
-          </p:cNvSpPr>
-          <p:nvPr>
-            <p:ph idx="1"/>
-          </p:nvPr>
-        </p:nvSpPr>
-        <p:spPr/>
-        <p:txBody>
-          <a:bodyPr/>
-          <a:lstStyle/>
-          <a:p>
-            <a:pPr marL="0" indent="0">
-              <a:buNone/>
-            </a:pPr>
-            <a:r>
-              <a:rPr lang="en-US" dirty="0"/>
-              <a:t>Why does “garbage in, garbage out” matter in sports analytics?</a:t>
-            </a:r>
-          </a:p>
-          <a:p>
-            <a:pPr>
-              <a:buFont typeface="Wingdings" panose="05000000000000000000" pitchFamily="2" charset="2"/>
-              <a:buChar char="q"/>
-            </a:pPr>
-            <a:r>
-              <a:rPr lang="en-US" sz="2400" dirty="0">
-                <a:solidFill>
-                  <a:srgbClr val="FF0000"/>
-                </a:solidFill>
-              </a:rPr>
-              <a:t>Statistical models automatically remove measurement errors</a:t>
-            </a:r>
-          </a:p>
-          <a:p>
-            <a:pPr>
-              <a:buFont typeface="Wingdings" panose="05000000000000000000" pitchFamily="2" charset="2"/>
-              <a:buChar char="q"/>
-            </a:pPr>
-            <a:r>
-              <a:rPr lang="en-US" sz="2400" dirty="0">
-                <a:solidFill>
-                  <a:srgbClr val="FF0000"/>
-                </a:solidFill>
-              </a:rPr>
-              <a:t>Large datasets do not require quality checks</a:t>
-            </a:r>
-          </a:p>
-          <a:p>
-            <a:pPr>
-              <a:buFont typeface="Wingdings" panose="05000000000000000000" pitchFamily="2" charset="2"/>
-              <a:buChar char="q"/>
-            </a:pPr>
-            <a:r>
-              <a:rPr lang="en-US" sz="2400" dirty="0">
-                <a:solidFill>
-                  <a:schemeClr val="accent3"/>
-                </a:solidFill>
-              </a:rPr>
-              <a:t>Sophisticated analyses cannot fully compensate for flawed input data</a:t>
-            </a:r>
-          </a:p>
-          <a:p>
-            <a:pPr>
-              <a:buFont typeface="Wingdings" panose="05000000000000000000" pitchFamily="2" charset="2"/>
-              <a:buChar char="q"/>
-            </a:pPr>
-            <a:r>
-              <a:rPr lang="en-US" sz="2400" dirty="0">
-                <a:solidFill>
-                  <a:srgbClr val="FF0000"/>
-                </a:solidFill>
-              </a:rPr>
-              <a:t>Only manually entered data contain errors</a:t>
-            </a:r>
-          </a:p>
-          <a:p>
-            <a:endParaRPr lang="en-US" dirty="0"/>
-          </a:p>
-        </p:txBody>
-      </p:sp>
-    </p:spTree>
-    <p:extLst>
-      <p:ext uri="{BB962C8B-B14F-4D97-AF65-F5344CB8AC3E}">
-        <p14:creationId xmlns:p14="http://schemas.microsoft.com/office/powerpoint/2010/main" val="4212069637"/>
-      </p:ext>
-    </p:extLst>
-  </p:cSld>
-  <p:clrMapOvr>
-    <a:masterClrMapping/>
-  </p:clrMapOvr>
-</p:sld>
-</file>
-
-<file path=ppt/slides/slide30.xml><?xml version="1.0" encoding="utf-8"?>
+<file path=ppt/slides/slide32.xml><?xml version="1.0" encoding="utf-8"?>
 <p:sld xmlns:a="http://schemas.openxmlformats.org/drawingml/2006/main" xmlns:r="http://schemas.openxmlformats.org/officeDocument/2006/relationships" xmlns:p="http://schemas.openxmlformats.org/presentationml/2006/main">
   <p:cSld>
     <p:spTree>
@@ -13855,7 +15983,7 @@
             <a:fld id="{45C00377-489B-40EC-B059-26BDDD2E89B9}" type="slidenum">
               <a:rPr lang="en-US" smtClean="0"/>
               <a:pPr/>
-              <a:t>30</a:t>
+              <a:t>32</a:t>
             </a:fld>
             <a:endParaRPr lang="en-US" dirty="0"/>
           </a:p>
@@ -13932,10 +16060,239 @@
   <p:clrMapOvr>
     <a:masterClrMapping/>
   </p:clrMapOvr>
+  <p:timing>
+    <p:tnLst>
+      <p:par>
+        <p:cTn id="1" dur="indefinite" restart="never" nodeType="tmRoot">
+          <p:childTnLst>
+            <p:seq concurrent="1" nextAc="seek">
+              <p:cTn id="2" dur="indefinite" nodeType="mainSeq">
+                <p:childTnLst>
+                  <p:par>
+                    <p:cTn id="3" fill="hold">
+                      <p:stCondLst>
+                        <p:cond delay="indefinite"/>
+                      </p:stCondLst>
+                      <p:childTnLst>
+                        <p:par>
+                          <p:cTn id="4" fill="hold">
+                            <p:stCondLst>
+                              <p:cond delay="0"/>
+                            </p:stCondLst>
+                            <p:childTnLst>
+                              <p:par>
+                                <p:cTn id="5" presetID="1" presetClass="entr" presetSubtype="0" fill="hold" grpId="0" nodeType="clickEffect">
+                                  <p:stCondLst>
+                                    <p:cond delay="0"/>
+                                  </p:stCondLst>
+                                  <p:childTnLst>
+                                    <p:set>
+                                      <p:cBhvr>
+                                        <p:cTn id="6" dur="1" fill="hold">
+                                          <p:stCondLst>
+                                            <p:cond delay="0"/>
+                                          </p:stCondLst>
+                                        </p:cTn>
+                                        <p:tgtEl>
+                                          <p:spTgt spid="3">
+                                            <p:txEl>
+                                              <p:pRg st="0" end="0"/>
+                                            </p:txEl>
+                                          </p:spTgt>
+                                        </p:tgtEl>
+                                        <p:attrNameLst>
+                                          <p:attrName>style.visibility</p:attrName>
+                                        </p:attrNameLst>
+                                      </p:cBhvr>
+                                      <p:to>
+                                        <p:strVal val="visible"/>
+                                      </p:to>
+                                    </p:set>
+                                  </p:childTnLst>
+                                </p:cTn>
+                              </p:par>
+                            </p:childTnLst>
+                          </p:cTn>
+                        </p:par>
+                      </p:childTnLst>
+                    </p:cTn>
+                  </p:par>
+                  <p:par>
+                    <p:cTn id="7" fill="hold">
+                      <p:stCondLst>
+                        <p:cond delay="indefinite"/>
+                      </p:stCondLst>
+                      <p:childTnLst>
+                        <p:par>
+                          <p:cTn id="8" fill="hold">
+                            <p:stCondLst>
+                              <p:cond delay="0"/>
+                            </p:stCondLst>
+                            <p:childTnLst>
+                              <p:par>
+                                <p:cTn id="9" presetID="1" presetClass="entr" presetSubtype="0" fill="hold" grpId="0" nodeType="clickEffect">
+                                  <p:stCondLst>
+                                    <p:cond delay="0"/>
+                                  </p:stCondLst>
+                                  <p:childTnLst>
+                                    <p:set>
+                                      <p:cBhvr>
+                                        <p:cTn id="10" dur="1" fill="hold">
+                                          <p:stCondLst>
+                                            <p:cond delay="0"/>
+                                          </p:stCondLst>
+                                        </p:cTn>
+                                        <p:tgtEl>
+                                          <p:spTgt spid="3">
+                                            <p:txEl>
+                                              <p:pRg st="1" end="1"/>
+                                            </p:txEl>
+                                          </p:spTgt>
+                                        </p:tgtEl>
+                                        <p:attrNameLst>
+                                          <p:attrName>style.visibility</p:attrName>
+                                        </p:attrNameLst>
+                                      </p:cBhvr>
+                                      <p:to>
+                                        <p:strVal val="visible"/>
+                                      </p:to>
+                                    </p:set>
+                                  </p:childTnLst>
+                                </p:cTn>
+                              </p:par>
+                            </p:childTnLst>
+                          </p:cTn>
+                        </p:par>
+                      </p:childTnLst>
+                    </p:cTn>
+                  </p:par>
+                  <p:par>
+                    <p:cTn id="11" fill="hold">
+                      <p:stCondLst>
+                        <p:cond delay="indefinite"/>
+                      </p:stCondLst>
+                      <p:childTnLst>
+                        <p:par>
+                          <p:cTn id="12" fill="hold">
+                            <p:stCondLst>
+                              <p:cond delay="0"/>
+                            </p:stCondLst>
+                            <p:childTnLst>
+                              <p:par>
+                                <p:cTn id="13" presetID="1" presetClass="entr" presetSubtype="0" fill="hold" grpId="0" nodeType="clickEffect">
+                                  <p:stCondLst>
+                                    <p:cond delay="0"/>
+                                  </p:stCondLst>
+                                  <p:childTnLst>
+                                    <p:set>
+                                      <p:cBhvr>
+                                        <p:cTn id="14" dur="1" fill="hold">
+                                          <p:stCondLst>
+                                            <p:cond delay="0"/>
+                                          </p:stCondLst>
+                                        </p:cTn>
+                                        <p:tgtEl>
+                                          <p:spTgt spid="3">
+                                            <p:txEl>
+                                              <p:pRg st="2" end="2"/>
+                                            </p:txEl>
+                                          </p:spTgt>
+                                        </p:tgtEl>
+                                        <p:attrNameLst>
+                                          <p:attrName>style.visibility</p:attrName>
+                                        </p:attrNameLst>
+                                      </p:cBhvr>
+                                      <p:to>
+                                        <p:strVal val="visible"/>
+                                      </p:to>
+                                    </p:set>
+                                  </p:childTnLst>
+                                </p:cTn>
+                              </p:par>
+                            </p:childTnLst>
+                          </p:cTn>
+                        </p:par>
+                      </p:childTnLst>
+                    </p:cTn>
+                  </p:par>
+                  <p:par>
+                    <p:cTn id="15" fill="hold">
+                      <p:stCondLst>
+                        <p:cond delay="indefinite"/>
+                      </p:stCondLst>
+                      <p:childTnLst>
+                        <p:par>
+                          <p:cTn id="16" fill="hold">
+                            <p:stCondLst>
+                              <p:cond delay="0"/>
+                            </p:stCondLst>
+                            <p:childTnLst>
+                              <p:par>
+                                <p:cTn id="17" presetID="1" presetClass="entr" presetSubtype="0" fill="hold" grpId="0" nodeType="clickEffect">
+                                  <p:stCondLst>
+                                    <p:cond delay="0"/>
+                                  </p:stCondLst>
+                                  <p:childTnLst>
+                                    <p:set>
+                                      <p:cBhvr>
+                                        <p:cTn id="18" dur="1" fill="hold">
+                                          <p:stCondLst>
+                                            <p:cond delay="0"/>
+                                          </p:stCondLst>
+                                        </p:cTn>
+                                        <p:tgtEl>
+                                          <p:spTgt spid="3">
+                                            <p:txEl>
+                                              <p:pRg st="3" end="3"/>
+                                            </p:txEl>
+                                          </p:spTgt>
+                                        </p:tgtEl>
+                                        <p:attrNameLst>
+                                          <p:attrName>style.visibility</p:attrName>
+                                        </p:attrNameLst>
+                                      </p:cBhvr>
+                                      <p:to>
+                                        <p:strVal val="visible"/>
+                                      </p:to>
+                                    </p:set>
+                                  </p:childTnLst>
+                                </p:cTn>
+                              </p:par>
+                            </p:childTnLst>
+                          </p:cTn>
+                        </p:par>
+                      </p:childTnLst>
+                    </p:cTn>
+                  </p:par>
+                </p:childTnLst>
+              </p:cTn>
+              <p:prevCondLst>
+                <p:cond evt="onPrev" delay="0">
+                  <p:tgtEl>
+                    <p:sldTgt/>
+                  </p:tgtEl>
+                </p:cond>
+              </p:prevCondLst>
+              <p:nextCondLst>
+                <p:cond evt="onNext" delay="0">
+                  <p:tgtEl>
+                    <p:sldTgt/>
+                  </p:tgtEl>
+                </p:cond>
+              </p:nextCondLst>
+            </p:seq>
+          </p:childTnLst>
+        </p:cTn>
+      </p:par>
+    </p:tnLst>
+    <p:bldLst>
+      <p:bldP spid="3" grpId="0" build="p"/>
+    </p:bldLst>
+  </p:timing>
 </p:sld>
 </file>
 
-<file path=ppt/slides/slide31.xml><?xml version="1.0" encoding="utf-8"?>
+<file path=ppt/slides/slide33.xml><?xml version="1.0" encoding="utf-8"?>
 <p:sld xmlns:a="http://schemas.openxmlformats.org/drawingml/2006/main" xmlns:r="http://schemas.openxmlformats.org/officeDocument/2006/relationships" xmlns:p="http://schemas.openxmlformats.org/presentationml/2006/main">
   <p:cSld>
     <p:spTree>
@@ -14051,7 +16408,7 @@
             <a:fld id="{45C00377-489B-40EC-B059-26BDDD2E89B9}" type="slidenum">
               <a:rPr lang="en-US" smtClean="0"/>
               <a:pPr/>
-              <a:t>31</a:t>
+              <a:t>33</a:t>
             </a:fld>
             <a:endParaRPr lang="en-US" dirty="0"/>
           </a:p>
@@ -14127,10 +16484,505 @@
   <p:clrMapOvr>
     <a:masterClrMapping/>
   </p:clrMapOvr>
+  <p:timing>
+    <p:tnLst>
+      <p:par>
+        <p:cTn id="1" dur="indefinite" restart="never" nodeType="tmRoot">
+          <p:childTnLst>
+            <p:seq concurrent="1" nextAc="seek">
+              <p:cTn id="2" dur="indefinite" nodeType="mainSeq">
+                <p:childTnLst>
+                  <p:par>
+                    <p:cTn id="3" fill="hold">
+                      <p:stCondLst>
+                        <p:cond delay="indefinite"/>
+                      </p:stCondLst>
+                      <p:childTnLst>
+                        <p:par>
+                          <p:cTn id="4" fill="hold">
+                            <p:stCondLst>
+                              <p:cond delay="0"/>
+                            </p:stCondLst>
+                            <p:childTnLst>
+                              <p:par>
+                                <p:cTn id="5" presetID="1" presetClass="entr" presetSubtype="0" fill="hold" grpId="0" nodeType="clickEffect">
+                                  <p:stCondLst>
+                                    <p:cond delay="0"/>
+                                  </p:stCondLst>
+                                  <p:childTnLst>
+                                    <p:set>
+                                      <p:cBhvr>
+                                        <p:cTn id="6" dur="1" fill="hold">
+                                          <p:stCondLst>
+                                            <p:cond delay="0"/>
+                                          </p:stCondLst>
+                                        </p:cTn>
+                                        <p:tgtEl>
+                                          <p:spTgt spid="3">
+                                            <p:txEl>
+                                              <p:pRg st="0" end="0"/>
+                                            </p:txEl>
+                                          </p:spTgt>
+                                        </p:tgtEl>
+                                        <p:attrNameLst>
+                                          <p:attrName>style.visibility</p:attrName>
+                                        </p:attrNameLst>
+                                      </p:cBhvr>
+                                      <p:to>
+                                        <p:strVal val="visible"/>
+                                      </p:to>
+                                    </p:set>
+                                  </p:childTnLst>
+                                </p:cTn>
+                              </p:par>
+                            </p:childTnLst>
+                          </p:cTn>
+                        </p:par>
+                      </p:childTnLst>
+                    </p:cTn>
+                  </p:par>
+                  <p:par>
+                    <p:cTn id="7" fill="hold">
+                      <p:stCondLst>
+                        <p:cond delay="indefinite"/>
+                      </p:stCondLst>
+                      <p:childTnLst>
+                        <p:par>
+                          <p:cTn id="8" fill="hold">
+                            <p:stCondLst>
+                              <p:cond delay="0"/>
+                            </p:stCondLst>
+                            <p:childTnLst>
+                              <p:par>
+                                <p:cTn id="9" presetID="1" presetClass="entr" presetSubtype="0" fill="hold" grpId="0" nodeType="clickEffect">
+                                  <p:stCondLst>
+                                    <p:cond delay="0"/>
+                                  </p:stCondLst>
+                                  <p:childTnLst>
+                                    <p:set>
+                                      <p:cBhvr>
+                                        <p:cTn id="10" dur="1" fill="hold">
+                                          <p:stCondLst>
+                                            <p:cond delay="0"/>
+                                          </p:stCondLst>
+                                        </p:cTn>
+                                        <p:tgtEl>
+                                          <p:spTgt spid="3">
+                                            <p:txEl>
+                                              <p:pRg st="1" end="1"/>
+                                            </p:txEl>
+                                          </p:spTgt>
+                                        </p:tgtEl>
+                                        <p:attrNameLst>
+                                          <p:attrName>style.visibility</p:attrName>
+                                        </p:attrNameLst>
+                                      </p:cBhvr>
+                                      <p:to>
+                                        <p:strVal val="visible"/>
+                                      </p:to>
+                                    </p:set>
+                                  </p:childTnLst>
+                                </p:cTn>
+                              </p:par>
+                            </p:childTnLst>
+                          </p:cTn>
+                        </p:par>
+                      </p:childTnLst>
+                    </p:cTn>
+                  </p:par>
+                  <p:par>
+                    <p:cTn id="11" fill="hold">
+                      <p:stCondLst>
+                        <p:cond delay="indefinite"/>
+                      </p:stCondLst>
+                      <p:childTnLst>
+                        <p:par>
+                          <p:cTn id="12" fill="hold">
+                            <p:stCondLst>
+                              <p:cond delay="0"/>
+                            </p:stCondLst>
+                            <p:childTnLst>
+                              <p:par>
+                                <p:cTn id="13" presetID="1" presetClass="entr" presetSubtype="0" fill="hold" grpId="0" nodeType="clickEffect">
+                                  <p:stCondLst>
+                                    <p:cond delay="0"/>
+                                  </p:stCondLst>
+                                  <p:childTnLst>
+                                    <p:set>
+                                      <p:cBhvr>
+                                        <p:cTn id="14" dur="1" fill="hold">
+                                          <p:stCondLst>
+                                            <p:cond delay="0"/>
+                                          </p:stCondLst>
+                                        </p:cTn>
+                                        <p:tgtEl>
+                                          <p:spTgt spid="3">
+                                            <p:txEl>
+                                              <p:pRg st="2" end="2"/>
+                                            </p:txEl>
+                                          </p:spTgt>
+                                        </p:tgtEl>
+                                        <p:attrNameLst>
+                                          <p:attrName>style.visibility</p:attrName>
+                                        </p:attrNameLst>
+                                      </p:cBhvr>
+                                      <p:to>
+                                        <p:strVal val="visible"/>
+                                      </p:to>
+                                    </p:set>
+                                  </p:childTnLst>
+                                </p:cTn>
+                              </p:par>
+                            </p:childTnLst>
+                          </p:cTn>
+                        </p:par>
+                      </p:childTnLst>
+                    </p:cTn>
+                  </p:par>
+                </p:childTnLst>
+              </p:cTn>
+              <p:prevCondLst>
+                <p:cond evt="onPrev" delay="0">
+                  <p:tgtEl>
+                    <p:sldTgt/>
+                  </p:tgtEl>
+                </p:cond>
+              </p:prevCondLst>
+              <p:nextCondLst>
+                <p:cond evt="onNext" delay="0">
+                  <p:tgtEl>
+                    <p:sldTgt/>
+                  </p:tgtEl>
+                </p:cond>
+              </p:nextCondLst>
+            </p:seq>
+          </p:childTnLst>
+        </p:cTn>
+      </p:par>
+    </p:tnLst>
+    <p:bldLst>
+      <p:bldP spid="3" grpId="0" build="p"/>
+    </p:bldLst>
+  </p:timing>
 </p:sld>
 </file>
 
-<file path=ppt/slides/slide32.xml><?xml version="1.0" encoding="utf-8"?>
+<file path=ppt/slides/slide34.xml><?xml version="1.0" encoding="utf-8"?>
+<p:sld xmlns:a="http://schemas.openxmlformats.org/drawingml/2006/main" xmlns:r="http://schemas.openxmlformats.org/officeDocument/2006/relationships" xmlns:p="http://schemas.openxmlformats.org/presentationml/2006/main">
+  <p:cSld>
+    <p:spTree>
+      <p:nvGrpSpPr>
+        <p:cNvPr id="1" name=""/>
+        <p:cNvGrpSpPr/>
+        <p:nvPr/>
+      </p:nvGrpSpPr>
+      <p:grpSpPr>
+        <a:xfrm>
+          <a:off x="0" y="0"/>
+          <a:ext cx="0" cy="0"/>
+          <a:chOff x="0" y="0"/>
+          <a:chExt cx="0" cy="0"/>
+        </a:xfrm>
+      </p:grpSpPr>
+      <p:sp>
+        <p:nvSpPr>
+          <p:cNvPr id="2" name="Title 1">
+            <a:extLst>
+              <a:ext uri="{FF2B5EF4-FFF2-40B4-BE49-F238E27FC236}">
+                <a16:creationId xmlns:a16="http://schemas.microsoft.com/office/drawing/2014/main" id="{4A2080A0-119A-029C-E094-BDC0A5823392}"/>
+              </a:ext>
+            </a:extLst>
+          </p:cNvPr>
+          <p:cNvSpPr>
+            <a:spLocks noGrp="1"/>
+          </p:cNvSpPr>
+          <p:nvPr>
+            <p:ph type="title"/>
+          </p:nvPr>
+        </p:nvSpPr>
+        <p:spPr/>
+        <p:txBody>
+          <a:bodyPr>
+            <a:normAutofit/>
+          </a:bodyPr>
+          <a:lstStyle/>
+          <a:p>
+            <a:r>
+              <a:rPr lang="en-US" dirty="0"/>
+              <a:t>Time series</a:t>
+            </a:r>
+          </a:p>
+        </p:txBody>
+      </p:sp>
+      <p:sp>
+        <p:nvSpPr>
+          <p:cNvPr id="3" name="Content Placeholder 2">
+            <a:extLst>
+              <a:ext uri="{FF2B5EF4-FFF2-40B4-BE49-F238E27FC236}">
+                <a16:creationId xmlns:a16="http://schemas.microsoft.com/office/drawing/2014/main" id="{FDD91642-91F6-BA8F-B509-CEBCDF5AD953}"/>
+              </a:ext>
+            </a:extLst>
+          </p:cNvPr>
+          <p:cNvSpPr>
+            <a:spLocks noGrp="1"/>
+          </p:cNvSpPr>
+          <p:nvPr>
+            <p:ph idx="1"/>
+          </p:nvPr>
+        </p:nvSpPr>
+        <p:spPr/>
+        <p:txBody>
+          <a:bodyPr/>
+          <a:lstStyle/>
+          <a:p>
+            <a:r>
+              <a:rPr lang="en-US" dirty="0"/>
+              <a:t>Line charts: Performance over season, in-game momentum</a:t>
+            </a:r>
+          </a:p>
+          <a:p>
+            <a:r>
+              <a:rPr lang="en-US" dirty="0"/>
+              <a:t>Area charts: Cumulative stats over time</a:t>
+            </a:r>
+          </a:p>
+        </p:txBody>
+      </p:sp>
+      <p:sp>
+        <p:nvSpPr>
+          <p:cNvPr id="4" name="Slide Number Placeholder 3">
+            <a:extLst>
+              <a:ext uri="{FF2B5EF4-FFF2-40B4-BE49-F238E27FC236}">
+                <a16:creationId xmlns:a16="http://schemas.microsoft.com/office/drawing/2014/main" id="{9ABB9AAD-2CD6-09AE-9FF8-BD548FEC7802}"/>
+              </a:ext>
+            </a:extLst>
+          </p:cNvPr>
+          <p:cNvSpPr>
+            <a:spLocks noGrp="1"/>
+          </p:cNvSpPr>
+          <p:nvPr>
+            <p:ph type="sldNum" sz="quarter" idx="12"/>
+          </p:nvPr>
+        </p:nvSpPr>
+        <p:spPr/>
+        <p:txBody>
+          <a:bodyPr/>
+          <a:lstStyle/>
+          <a:p>
+            <a:fld id="{45C00377-489B-40EC-B059-26BDDD2E89B9}" type="slidenum">
+              <a:rPr lang="en-US" smtClean="0"/>
+              <a:pPr/>
+              <a:t>34</a:t>
+            </a:fld>
+            <a:endParaRPr lang="en-US" dirty="0"/>
+          </a:p>
+        </p:txBody>
+      </p:sp>
+      <p:pic>
+        <p:nvPicPr>
+          <p:cNvPr id="10" name="Picture 9">
+            <a:extLst>
+              <a:ext uri="{FF2B5EF4-FFF2-40B4-BE49-F238E27FC236}">
+                <a16:creationId xmlns:a16="http://schemas.microsoft.com/office/drawing/2014/main" id="{D1BF2DCB-CE0F-C097-09B5-DEE49F006A22}"/>
+              </a:ext>
+            </a:extLst>
+          </p:cNvPr>
+          <p:cNvPicPr>
+            <a:picLocks noChangeAspect="1"/>
+          </p:cNvPicPr>
+          <p:nvPr/>
+        </p:nvPicPr>
+        <p:blipFill>
+          <a:blip r:embed="rId2"/>
+          <a:stretch>
+            <a:fillRect/>
+          </a:stretch>
+        </p:blipFill>
+        <p:spPr>
+          <a:xfrm>
+            <a:off x="6482294" y="4590750"/>
+            <a:ext cx="2416458" cy="1310128"/>
+          </a:xfrm>
+          <a:prstGeom prst="rect">
+            <a:avLst/>
+          </a:prstGeom>
+        </p:spPr>
+      </p:pic>
+      <p:pic>
+        <p:nvPicPr>
+          <p:cNvPr id="12" name="Picture 11">
+            <a:extLst>
+              <a:ext uri="{FF2B5EF4-FFF2-40B4-BE49-F238E27FC236}">
+                <a16:creationId xmlns:a16="http://schemas.microsoft.com/office/drawing/2014/main" id="{DD78A14F-66FC-9220-D2E9-295543ED9EA4}"/>
+              </a:ext>
+            </a:extLst>
+          </p:cNvPr>
+          <p:cNvPicPr>
+            <a:picLocks noChangeAspect="1"/>
+          </p:cNvPicPr>
+          <p:nvPr/>
+        </p:nvPicPr>
+        <p:blipFill>
+          <a:blip r:embed="rId3"/>
+          <a:stretch>
+            <a:fillRect/>
+          </a:stretch>
+        </p:blipFill>
+        <p:spPr>
+          <a:xfrm>
+            <a:off x="2771503" y="4692649"/>
+            <a:ext cx="2416458" cy="1208229"/>
+          </a:xfrm>
+          <a:prstGeom prst="rect">
+            <a:avLst/>
+          </a:prstGeom>
+        </p:spPr>
+      </p:pic>
+    </p:spTree>
+    <p:extLst>
+      <p:ext uri="{BB962C8B-B14F-4D97-AF65-F5344CB8AC3E}">
+        <p14:creationId xmlns:p14="http://schemas.microsoft.com/office/powerpoint/2010/main" val="945909743"/>
+      </p:ext>
+    </p:extLst>
+  </p:cSld>
+  <p:clrMapOvr>
+    <a:masterClrMapping/>
+  </p:clrMapOvr>
+  <p:timing>
+    <p:tnLst>
+      <p:par>
+        <p:cTn id="1" dur="indefinite" restart="never" nodeType="tmRoot">
+          <p:childTnLst>
+            <p:seq concurrent="1" nextAc="seek">
+              <p:cTn id="2" dur="indefinite" nodeType="mainSeq">
+                <p:childTnLst>
+                  <p:par>
+                    <p:cTn id="3" fill="hold">
+                      <p:stCondLst>
+                        <p:cond delay="indefinite"/>
+                      </p:stCondLst>
+                      <p:childTnLst>
+                        <p:par>
+                          <p:cTn id="4" fill="hold">
+                            <p:stCondLst>
+                              <p:cond delay="0"/>
+                            </p:stCondLst>
+                            <p:childTnLst>
+                              <p:par>
+                                <p:cTn id="5" presetID="1" presetClass="entr" presetSubtype="0" fill="hold" grpId="0" nodeType="clickEffect">
+                                  <p:stCondLst>
+                                    <p:cond delay="0"/>
+                                  </p:stCondLst>
+                                  <p:childTnLst>
+                                    <p:set>
+                                      <p:cBhvr>
+                                        <p:cTn id="6" dur="1" fill="hold">
+                                          <p:stCondLst>
+                                            <p:cond delay="0"/>
+                                          </p:stCondLst>
+                                        </p:cTn>
+                                        <p:tgtEl>
+                                          <p:spTgt spid="3">
+                                            <p:txEl>
+                                              <p:pRg st="0" end="0"/>
+                                            </p:txEl>
+                                          </p:spTgt>
+                                        </p:tgtEl>
+                                        <p:attrNameLst>
+                                          <p:attrName>style.visibility</p:attrName>
+                                        </p:attrNameLst>
+                                      </p:cBhvr>
+                                      <p:to>
+                                        <p:strVal val="visible"/>
+                                      </p:to>
+                                    </p:set>
+                                  </p:childTnLst>
+                                </p:cTn>
+                              </p:par>
+                            </p:childTnLst>
+                          </p:cTn>
+                        </p:par>
+                      </p:childTnLst>
+                    </p:cTn>
+                  </p:par>
+                  <p:par>
+                    <p:cTn id="7" fill="hold">
+                      <p:stCondLst>
+                        <p:cond delay="indefinite"/>
+                      </p:stCondLst>
+                      <p:childTnLst>
+                        <p:par>
+                          <p:cTn id="8" fill="hold">
+                            <p:stCondLst>
+                              <p:cond delay="0"/>
+                            </p:stCondLst>
+                            <p:childTnLst>
+                              <p:par>
+                                <p:cTn id="9" presetID="1" presetClass="entr" presetSubtype="0" fill="hold" grpId="0" nodeType="clickEffect">
+                                  <p:stCondLst>
+                                    <p:cond delay="0"/>
+                                  </p:stCondLst>
+                                  <p:childTnLst>
+                                    <p:set>
+                                      <p:cBhvr>
+                                        <p:cTn id="10" dur="1" fill="hold">
+                                          <p:stCondLst>
+                                            <p:cond delay="0"/>
+                                          </p:stCondLst>
+                                        </p:cTn>
+                                        <p:tgtEl>
+                                          <p:spTgt spid="3">
+                                            <p:txEl>
+                                              <p:pRg st="1" end="1"/>
+                                            </p:txEl>
+                                          </p:spTgt>
+                                        </p:tgtEl>
+                                        <p:attrNameLst>
+                                          <p:attrName>style.visibility</p:attrName>
+                                        </p:attrNameLst>
+                                      </p:cBhvr>
+                                      <p:to>
+                                        <p:strVal val="visible"/>
+                                      </p:to>
+                                    </p:set>
+                                  </p:childTnLst>
+                                </p:cTn>
+                              </p:par>
+                            </p:childTnLst>
+                          </p:cTn>
+                        </p:par>
+                      </p:childTnLst>
+                    </p:cTn>
+                  </p:par>
+                </p:childTnLst>
+              </p:cTn>
+              <p:prevCondLst>
+                <p:cond evt="onPrev" delay="0">
+                  <p:tgtEl>
+                    <p:sldTgt/>
+                  </p:tgtEl>
+                </p:cond>
+              </p:prevCondLst>
+              <p:nextCondLst>
+                <p:cond evt="onNext" delay="0">
+                  <p:tgtEl>
+                    <p:sldTgt/>
+                  </p:tgtEl>
+                </p:cond>
+              </p:nextCondLst>
+            </p:seq>
+          </p:childTnLst>
+        </p:cTn>
+      </p:par>
+    </p:tnLst>
+    <p:bldLst>
+      <p:bldP spid="3" grpId="0" build="p"/>
+    </p:bldLst>
+  </p:timing>
+</p:sld>
+</file>
+
+<file path=ppt/slides/slide35.xml><?xml version="1.0" encoding="utf-8"?>
 <p:sld xmlns:a="http://schemas.openxmlformats.org/drawingml/2006/main" xmlns:r="http://schemas.openxmlformats.org/officeDocument/2006/relationships" xmlns:p="http://schemas.openxmlformats.org/presentationml/2006/main">
   <p:cSld>
     <p:spTree>
@@ -14241,7 +17093,7 @@
             <a:fld id="{45C00377-489B-40EC-B059-26BDDD2E89B9}" type="slidenum">
               <a:rPr lang="en-US" smtClean="0"/>
               <a:pPr/>
-              <a:t>32</a:t>
+              <a:t>35</a:t>
             </a:fld>
             <a:endParaRPr lang="en-US" dirty="0"/>
           </a:p>
@@ -14317,194 +17169,190 @@
   <p:clrMapOvr>
     <a:masterClrMapping/>
   </p:clrMapOvr>
+  <p:timing>
+    <p:tnLst>
+      <p:par>
+        <p:cTn id="1" dur="indefinite" restart="never" nodeType="tmRoot">
+          <p:childTnLst>
+            <p:seq concurrent="1" nextAc="seek">
+              <p:cTn id="2" dur="indefinite" nodeType="mainSeq">
+                <p:childTnLst>
+                  <p:par>
+                    <p:cTn id="3" fill="hold">
+                      <p:stCondLst>
+                        <p:cond delay="indefinite"/>
+                      </p:stCondLst>
+                      <p:childTnLst>
+                        <p:par>
+                          <p:cTn id="4" fill="hold">
+                            <p:stCondLst>
+                              <p:cond delay="0"/>
+                            </p:stCondLst>
+                            <p:childTnLst>
+                              <p:par>
+                                <p:cTn id="5" presetID="1" presetClass="entr" presetSubtype="0" fill="hold" grpId="0" nodeType="clickEffect">
+                                  <p:stCondLst>
+                                    <p:cond delay="0"/>
+                                  </p:stCondLst>
+                                  <p:childTnLst>
+                                    <p:set>
+                                      <p:cBhvr>
+                                        <p:cTn id="6" dur="1" fill="hold">
+                                          <p:stCondLst>
+                                            <p:cond delay="0"/>
+                                          </p:stCondLst>
+                                        </p:cTn>
+                                        <p:tgtEl>
+                                          <p:spTgt spid="3">
+                                            <p:txEl>
+                                              <p:pRg st="0" end="0"/>
+                                            </p:txEl>
+                                          </p:spTgt>
+                                        </p:tgtEl>
+                                        <p:attrNameLst>
+                                          <p:attrName>style.visibility</p:attrName>
+                                        </p:attrNameLst>
+                                      </p:cBhvr>
+                                      <p:to>
+                                        <p:strVal val="visible"/>
+                                      </p:to>
+                                    </p:set>
+                                  </p:childTnLst>
+                                </p:cTn>
+                              </p:par>
+                            </p:childTnLst>
+                          </p:cTn>
+                        </p:par>
+                      </p:childTnLst>
+                    </p:cTn>
+                  </p:par>
+                  <p:par>
+                    <p:cTn id="7" fill="hold">
+                      <p:stCondLst>
+                        <p:cond delay="indefinite"/>
+                      </p:stCondLst>
+                      <p:childTnLst>
+                        <p:par>
+                          <p:cTn id="8" fill="hold">
+                            <p:stCondLst>
+                              <p:cond delay="0"/>
+                            </p:stCondLst>
+                            <p:childTnLst>
+                              <p:par>
+                                <p:cTn id="9" presetID="1" presetClass="entr" presetSubtype="0" fill="hold" grpId="0" nodeType="clickEffect">
+                                  <p:stCondLst>
+                                    <p:cond delay="0"/>
+                                  </p:stCondLst>
+                                  <p:childTnLst>
+                                    <p:set>
+                                      <p:cBhvr>
+                                        <p:cTn id="10" dur="1" fill="hold">
+                                          <p:stCondLst>
+                                            <p:cond delay="0"/>
+                                          </p:stCondLst>
+                                        </p:cTn>
+                                        <p:tgtEl>
+                                          <p:spTgt spid="3">
+                                            <p:txEl>
+                                              <p:pRg st="1" end="1"/>
+                                            </p:txEl>
+                                          </p:spTgt>
+                                        </p:tgtEl>
+                                        <p:attrNameLst>
+                                          <p:attrName>style.visibility</p:attrName>
+                                        </p:attrNameLst>
+                                      </p:cBhvr>
+                                      <p:to>
+                                        <p:strVal val="visible"/>
+                                      </p:to>
+                                    </p:set>
+                                  </p:childTnLst>
+                                </p:cTn>
+                              </p:par>
+                            </p:childTnLst>
+                          </p:cTn>
+                        </p:par>
+                      </p:childTnLst>
+                    </p:cTn>
+                  </p:par>
+                  <p:par>
+                    <p:cTn id="11" fill="hold">
+                      <p:stCondLst>
+                        <p:cond delay="indefinite"/>
+                      </p:stCondLst>
+                      <p:childTnLst>
+                        <p:par>
+                          <p:cTn id="12" fill="hold">
+                            <p:stCondLst>
+                              <p:cond delay="0"/>
+                            </p:stCondLst>
+                            <p:childTnLst>
+                              <p:par>
+                                <p:cTn id="13" presetID="1" presetClass="entr" presetSubtype="0" fill="hold" grpId="0" nodeType="clickEffect">
+                                  <p:stCondLst>
+                                    <p:cond delay="0"/>
+                                  </p:stCondLst>
+                                  <p:childTnLst>
+                                    <p:set>
+                                      <p:cBhvr>
+                                        <p:cTn id="14" dur="1" fill="hold">
+                                          <p:stCondLst>
+                                            <p:cond delay="0"/>
+                                          </p:stCondLst>
+                                        </p:cTn>
+                                        <p:tgtEl>
+                                          <p:spTgt spid="3">
+                                            <p:txEl>
+                                              <p:pRg st="2" end="2"/>
+                                            </p:txEl>
+                                          </p:spTgt>
+                                        </p:tgtEl>
+                                        <p:attrNameLst>
+                                          <p:attrName>style.visibility</p:attrName>
+                                        </p:attrNameLst>
+                                      </p:cBhvr>
+                                      <p:to>
+                                        <p:strVal val="visible"/>
+                                      </p:to>
+                                    </p:set>
+                                  </p:childTnLst>
+                                </p:cTn>
+                              </p:par>
+                            </p:childTnLst>
+                          </p:cTn>
+                        </p:par>
+                      </p:childTnLst>
+                    </p:cTn>
+                  </p:par>
+                </p:childTnLst>
+              </p:cTn>
+              <p:prevCondLst>
+                <p:cond evt="onPrev" delay="0">
+                  <p:tgtEl>
+                    <p:sldTgt/>
+                  </p:tgtEl>
+                </p:cond>
+              </p:prevCondLst>
+              <p:nextCondLst>
+                <p:cond evt="onNext" delay="0">
+                  <p:tgtEl>
+                    <p:sldTgt/>
+                  </p:tgtEl>
+                </p:cond>
+              </p:nextCondLst>
+            </p:seq>
+          </p:childTnLst>
+        </p:cTn>
+      </p:par>
+    </p:tnLst>
+    <p:bldLst>
+      <p:bldP spid="3" grpId="0" build="p"/>
+    </p:bldLst>
+  </p:timing>
 </p:sld>
 </file>
 
-<file path=ppt/slides/slide33.xml><?xml version="1.0" encoding="utf-8"?>
-<p:sld xmlns:a="http://schemas.openxmlformats.org/drawingml/2006/main" xmlns:r="http://schemas.openxmlformats.org/officeDocument/2006/relationships" xmlns:p="http://schemas.openxmlformats.org/presentationml/2006/main">
-  <p:cSld>
-    <p:spTree>
-      <p:nvGrpSpPr>
-        <p:cNvPr id="1" name=""/>
-        <p:cNvGrpSpPr/>
-        <p:nvPr/>
-      </p:nvGrpSpPr>
-      <p:grpSpPr>
-        <a:xfrm>
-          <a:off x="0" y="0"/>
-          <a:ext cx="0" cy="0"/>
-          <a:chOff x="0" y="0"/>
-          <a:chExt cx="0" cy="0"/>
-        </a:xfrm>
-      </p:grpSpPr>
-      <p:sp>
-        <p:nvSpPr>
-          <p:cNvPr id="2" name="Title 1">
-            <a:extLst>
-              <a:ext uri="{FF2B5EF4-FFF2-40B4-BE49-F238E27FC236}">
-                <a16:creationId xmlns:a16="http://schemas.microsoft.com/office/drawing/2014/main" id="{4A2080A0-119A-029C-E094-BDC0A5823392}"/>
-              </a:ext>
-            </a:extLst>
-          </p:cNvPr>
-          <p:cNvSpPr>
-            <a:spLocks noGrp="1"/>
-          </p:cNvSpPr>
-          <p:nvPr>
-            <p:ph type="title"/>
-          </p:nvPr>
-        </p:nvSpPr>
-        <p:spPr/>
-        <p:txBody>
-          <a:bodyPr>
-            <a:normAutofit/>
-          </a:bodyPr>
-          <a:lstStyle/>
-          <a:p>
-            <a:r>
-              <a:rPr lang="en-US" dirty="0"/>
-              <a:t>Time series</a:t>
-            </a:r>
-          </a:p>
-        </p:txBody>
-      </p:sp>
-      <p:sp>
-        <p:nvSpPr>
-          <p:cNvPr id="3" name="Content Placeholder 2">
-            <a:extLst>
-              <a:ext uri="{FF2B5EF4-FFF2-40B4-BE49-F238E27FC236}">
-                <a16:creationId xmlns:a16="http://schemas.microsoft.com/office/drawing/2014/main" id="{FDD91642-91F6-BA8F-B509-CEBCDF5AD953}"/>
-              </a:ext>
-            </a:extLst>
-          </p:cNvPr>
-          <p:cNvSpPr>
-            <a:spLocks noGrp="1"/>
-          </p:cNvSpPr>
-          <p:nvPr>
-            <p:ph idx="1"/>
-          </p:nvPr>
-        </p:nvSpPr>
-        <p:spPr/>
-        <p:txBody>
-          <a:bodyPr/>
-          <a:lstStyle/>
-          <a:p>
-            <a:r>
-              <a:rPr lang="en-US" dirty="0"/>
-              <a:t>Line charts: Performance over season, in-game momentum</a:t>
-            </a:r>
-          </a:p>
-          <a:p>
-            <a:r>
-              <a:rPr lang="en-US" dirty="0"/>
-              <a:t>Area charts: Cumulative stats over time</a:t>
-            </a:r>
-          </a:p>
-        </p:txBody>
-      </p:sp>
-      <p:sp>
-        <p:nvSpPr>
-          <p:cNvPr id="4" name="Slide Number Placeholder 3">
-            <a:extLst>
-              <a:ext uri="{FF2B5EF4-FFF2-40B4-BE49-F238E27FC236}">
-                <a16:creationId xmlns:a16="http://schemas.microsoft.com/office/drawing/2014/main" id="{9ABB9AAD-2CD6-09AE-9FF8-BD548FEC7802}"/>
-              </a:ext>
-            </a:extLst>
-          </p:cNvPr>
-          <p:cNvSpPr>
-            <a:spLocks noGrp="1"/>
-          </p:cNvSpPr>
-          <p:nvPr>
-            <p:ph type="sldNum" sz="quarter" idx="12"/>
-          </p:nvPr>
-        </p:nvSpPr>
-        <p:spPr/>
-        <p:txBody>
-          <a:bodyPr/>
-          <a:lstStyle/>
-          <a:p>
-            <a:fld id="{45C00377-489B-40EC-B059-26BDDD2E89B9}" type="slidenum">
-              <a:rPr lang="en-US" smtClean="0"/>
-              <a:pPr/>
-              <a:t>33</a:t>
-            </a:fld>
-            <a:endParaRPr lang="en-US" dirty="0"/>
-          </a:p>
-        </p:txBody>
-      </p:sp>
-      <p:pic>
-        <p:nvPicPr>
-          <p:cNvPr id="10" name="Picture 9">
-            <a:extLst>
-              <a:ext uri="{FF2B5EF4-FFF2-40B4-BE49-F238E27FC236}">
-                <a16:creationId xmlns:a16="http://schemas.microsoft.com/office/drawing/2014/main" id="{D1BF2DCB-CE0F-C097-09B5-DEE49F006A22}"/>
-              </a:ext>
-            </a:extLst>
-          </p:cNvPr>
-          <p:cNvPicPr>
-            <a:picLocks noChangeAspect="1"/>
-          </p:cNvPicPr>
-          <p:nvPr/>
-        </p:nvPicPr>
-        <p:blipFill>
-          <a:blip r:embed="rId2"/>
-          <a:stretch>
-            <a:fillRect/>
-          </a:stretch>
-        </p:blipFill>
-        <p:spPr>
-          <a:xfrm>
-            <a:off x="6482294" y="4590750"/>
-            <a:ext cx="2416458" cy="1310128"/>
-          </a:xfrm>
-          <a:prstGeom prst="rect">
-            <a:avLst/>
-          </a:prstGeom>
-        </p:spPr>
-      </p:pic>
-      <p:pic>
-        <p:nvPicPr>
-          <p:cNvPr id="12" name="Picture 11">
-            <a:extLst>
-              <a:ext uri="{FF2B5EF4-FFF2-40B4-BE49-F238E27FC236}">
-                <a16:creationId xmlns:a16="http://schemas.microsoft.com/office/drawing/2014/main" id="{DD78A14F-66FC-9220-D2E9-295543ED9EA4}"/>
-              </a:ext>
-            </a:extLst>
-          </p:cNvPr>
-          <p:cNvPicPr>
-            <a:picLocks noChangeAspect="1"/>
-          </p:cNvPicPr>
-          <p:nvPr/>
-        </p:nvPicPr>
-        <p:blipFill>
-          <a:blip r:embed="rId3"/>
-          <a:stretch>
-            <a:fillRect/>
-          </a:stretch>
-        </p:blipFill>
-        <p:spPr>
-          <a:xfrm>
-            <a:off x="2771503" y="4692649"/>
-            <a:ext cx="2416458" cy="1208229"/>
-          </a:xfrm>
-          <a:prstGeom prst="rect">
-            <a:avLst/>
-          </a:prstGeom>
-        </p:spPr>
-      </p:pic>
-    </p:spTree>
-    <p:extLst>
-      <p:ext uri="{BB962C8B-B14F-4D97-AF65-F5344CB8AC3E}">
-        <p14:creationId xmlns:p14="http://schemas.microsoft.com/office/powerpoint/2010/main" val="945909743"/>
-      </p:ext>
-    </p:extLst>
-  </p:cSld>
-  <p:clrMapOvr>
-    <a:masterClrMapping/>
-  </p:clrMapOvr>
-</p:sld>
-</file>
-
-<file path=ppt/slides/slide34.xml><?xml version="1.0" encoding="utf-8"?>
+<file path=ppt/slides/slide36.xml><?xml version="1.0" encoding="utf-8"?>
 <p:sld xmlns:a="http://schemas.openxmlformats.org/drawingml/2006/main" xmlns:r="http://schemas.openxmlformats.org/officeDocument/2006/relationships" xmlns:p="http://schemas.openxmlformats.org/presentationml/2006/main">
   <p:cSld>
     <p:spTree>
@@ -14615,7 +17463,7 @@
             <a:fld id="{45C00377-489B-40EC-B059-26BDDD2E89B9}" type="slidenum">
               <a:rPr lang="en-US" smtClean="0"/>
               <a:pPr/>
-              <a:t>34</a:t>
+              <a:t>36</a:t>
             </a:fld>
             <a:endParaRPr lang="en-US" dirty="0"/>
           </a:p>
@@ -14755,10 +17603,190 @@
   <p:clrMapOvr>
     <a:masterClrMapping/>
   </p:clrMapOvr>
+  <p:timing>
+    <p:tnLst>
+      <p:par>
+        <p:cTn id="1" dur="indefinite" restart="never" nodeType="tmRoot">
+          <p:childTnLst>
+            <p:seq concurrent="1" nextAc="seek">
+              <p:cTn id="2" dur="indefinite" nodeType="mainSeq">
+                <p:childTnLst>
+                  <p:par>
+                    <p:cTn id="3" fill="hold">
+                      <p:stCondLst>
+                        <p:cond delay="indefinite"/>
+                      </p:stCondLst>
+                      <p:childTnLst>
+                        <p:par>
+                          <p:cTn id="4" fill="hold">
+                            <p:stCondLst>
+                              <p:cond delay="0"/>
+                            </p:stCondLst>
+                            <p:childTnLst>
+                              <p:par>
+                                <p:cTn id="5" presetID="1" presetClass="entr" presetSubtype="0" fill="hold" grpId="0" nodeType="clickEffect">
+                                  <p:stCondLst>
+                                    <p:cond delay="0"/>
+                                  </p:stCondLst>
+                                  <p:childTnLst>
+                                    <p:set>
+                                      <p:cBhvr>
+                                        <p:cTn id="6" dur="1" fill="hold">
+                                          <p:stCondLst>
+                                            <p:cond delay="0"/>
+                                          </p:stCondLst>
+                                        </p:cTn>
+                                        <p:tgtEl>
+                                          <p:spTgt spid="3">
+                                            <p:txEl>
+                                              <p:pRg st="0" end="0"/>
+                                            </p:txEl>
+                                          </p:spTgt>
+                                        </p:tgtEl>
+                                        <p:attrNameLst>
+                                          <p:attrName>style.visibility</p:attrName>
+                                        </p:attrNameLst>
+                                      </p:cBhvr>
+                                      <p:to>
+                                        <p:strVal val="visible"/>
+                                      </p:to>
+                                    </p:set>
+                                  </p:childTnLst>
+                                </p:cTn>
+                              </p:par>
+                            </p:childTnLst>
+                          </p:cTn>
+                        </p:par>
+                      </p:childTnLst>
+                    </p:cTn>
+                  </p:par>
+                  <p:par>
+                    <p:cTn id="7" fill="hold">
+                      <p:stCondLst>
+                        <p:cond delay="indefinite"/>
+                      </p:stCondLst>
+                      <p:childTnLst>
+                        <p:par>
+                          <p:cTn id="8" fill="hold">
+                            <p:stCondLst>
+                              <p:cond delay="0"/>
+                            </p:stCondLst>
+                            <p:childTnLst>
+                              <p:par>
+                                <p:cTn id="9" presetID="1" presetClass="entr" presetSubtype="0" fill="hold" grpId="0" nodeType="clickEffect">
+                                  <p:stCondLst>
+                                    <p:cond delay="0"/>
+                                  </p:stCondLst>
+                                  <p:childTnLst>
+                                    <p:set>
+                                      <p:cBhvr>
+                                        <p:cTn id="10" dur="1" fill="hold">
+                                          <p:stCondLst>
+                                            <p:cond delay="0"/>
+                                          </p:stCondLst>
+                                        </p:cTn>
+                                        <p:tgtEl>
+                                          <p:spTgt spid="3">
+                                            <p:txEl>
+                                              <p:pRg st="1" end="1"/>
+                                            </p:txEl>
+                                          </p:spTgt>
+                                        </p:tgtEl>
+                                        <p:attrNameLst>
+                                          <p:attrName>style.visibility</p:attrName>
+                                        </p:attrNameLst>
+                                      </p:cBhvr>
+                                      <p:to>
+                                        <p:strVal val="visible"/>
+                                      </p:to>
+                                    </p:set>
+                                  </p:childTnLst>
+                                </p:cTn>
+                              </p:par>
+                            </p:childTnLst>
+                          </p:cTn>
+                        </p:par>
+                      </p:childTnLst>
+                    </p:cTn>
+                  </p:par>
+                  <p:par>
+                    <p:cTn id="11" fill="hold">
+                      <p:stCondLst>
+                        <p:cond delay="indefinite"/>
+                      </p:stCondLst>
+                      <p:childTnLst>
+                        <p:par>
+                          <p:cTn id="12" fill="hold">
+                            <p:stCondLst>
+                              <p:cond delay="0"/>
+                            </p:stCondLst>
+                            <p:childTnLst>
+                              <p:par>
+                                <p:cTn id="13" presetID="1" presetClass="entr" presetSubtype="0" fill="hold" grpId="0" nodeType="clickEffect">
+                                  <p:stCondLst>
+                                    <p:cond delay="0"/>
+                                  </p:stCondLst>
+                                  <p:childTnLst>
+                                    <p:set>
+                                      <p:cBhvr>
+                                        <p:cTn id="14" dur="1" fill="hold">
+                                          <p:stCondLst>
+                                            <p:cond delay="0"/>
+                                          </p:stCondLst>
+                                        </p:cTn>
+                                        <p:tgtEl>
+                                          <p:spTgt spid="3">
+                                            <p:txEl>
+                                              <p:pRg st="2" end="2"/>
+                                            </p:txEl>
+                                          </p:spTgt>
+                                        </p:tgtEl>
+                                        <p:attrNameLst>
+                                          <p:attrName>style.visibility</p:attrName>
+                                        </p:attrNameLst>
+                                      </p:cBhvr>
+                                      <p:to>
+                                        <p:strVal val="visible"/>
+                                      </p:to>
+                                    </p:set>
+                                  </p:childTnLst>
+                                </p:cTn>
+                              </p:par>
+                            </p:childTnLst>
+                          </p:cTn>
+                        </p:par>
+                      </p:childTnLst>
+                    </p:cTn>
+                  </p:par>
+                </p:childTnLst>
+              </p:cTn>
+              <p:prevCondLst>
+                <p:cond evt="onPrev" delay="0">
+                  <p:tgtEl>
+                    <p:sldTgt/>
+                  </p:tgtEl>
+                </p:cond>
+              </p:prevCondLst>
+              <p:nextCondLst>
+                <p:cond evt="onNext" delay="0">
+                  <p:tgtEl>
+                    <p:sldTgt/>
+                  </p:tgtEl>
+                </p:cond>
+              </p:nextCondLst>
+            </p:seq>
+          </p:childTnLst>
+        </p:cTn>
+      </p:par>
+    </p:tnLst>
+    <p:bldLst>
+      <p:bldP spid="3" grpId="0" build="p"/>
+    </p:bldLst>
+  </p:timing>
 </p:sld>
 </file>
 
-<file path=ppt/slides/slide35.xml><?xml version="1.0" encoding="utf-8"?>
+<file path=ppt/slides/slide37.xml><?xml version="1.0" encoding="utf-8"?>
 <p:sld xmlns:a="http://schemas.openxmlformats.org/drawingml/2006/main" xmlns:r="http://schemas.openxmlformats.org/officeDocument/2006/relationships" xmlns:p="http://schemas.openxmlformats.org/presentationml/2006/main">
   <p:cSld>
     <p:spTree>
@@ -14858,7 +17886,7 @@
             <a:fld id="{45C00377-489B-40EC-B059-26BDDD2E89B9}" type="slidenum">
               <a:rPr lang="en-US" smtClean="0"/>
               <a:pPr/>
-              <a:t>35</a:t>
+              <a:t>37</a:t>
             </a:fld>
             <a:endParaRPr lang="en-US" dirty="0"/>
           </a:p>
@@ -14907,7 +17935,7 @@
 </p:sld>
 </file>
 
-<file path=ppt/slides/slide36.xml><?xml version="1.0" encoding="utf-8"?>
+<file path=ppt/slides/slide38.xml><?xml version="1.0" encoding="utf-8"?>
 <p:sld xmlns:a="http://schemas.openxmlformats.org/drawingml/2006/main" xmlns:r="http://schemas.openxmlformats.org/officeDocument/2006/relationships" xmlns:p="http://schemas.openxmlformats.org/presentationml/2006/main">
   <p:cSld>
     <p:spTree>
@@ -15110,7 +18138,7 @@
 </p:sld>
 </file>
 
-<file path=ppt/slides/slide37.xml><?xml version="1.0" encoding="utf-8"?>
+<file path=ppt/slides/slide39.xml><?xml version="1.0" encoding="utf-8"?>
 <p:sld xmlns:a="http://schemas.openxmlformats.org/drawingml/2006/main" xmlns:r="http://schemas.openxmlformats.org/officeDocument/2006/relationships" xmlns:p="http://schemas.openxmlformats.org/presentationml/2006/main" show="0">
   <p:cSld>
     <p:spTree>
@@ -15605,6 +18633,466 @@
           <p:cNvPr id="2" name="Title 1">
             <a:extLst>
               <a:ext uri="{FF2B5EF4-FFF2-40B4-BE49-F238E27FC236}">
+                <a16:creationId xmlns:a16="http://schemas.microsoft.com/office/drawing/2014/main" id="{5732D8DF-C9D9-4E7D-F5B2-899CEAB5160C}"/>
+              </a:ext>
+            </a:extLst>
+          </p:cNvPr>
+          <p:cNvSpPr>
+            <a:spLocks noGrp="1"/>
+          </p:cNvSpPr>
+          <p:nvPr>
+            <p:ph type="title"/>
+          </p:nvPr>
+        </p:nvSpPr>
+        <p:spPr/>
+        <p:txBody>
+          <a:bodyPr/>
+          <a:lstStyle/>
+          <a:p>
+            <a:r>
+              <a:rPr lang="en-US" dirty="0"/>
+              <a:t>Sports data visualization</a:t>
+            </a:r>
+          </a:p>
+        </p:txBody>
+      </p:sp>
+      <p:sp>
+        <p:nvSpPr>
+          <p:cNvPr id="3" name="Content Placeholder 2">
+            <a:extLst>
+              <a:ext uri="{FF2B5EF4-FFF2-40B4-BE49-F238E27FC236}">
+                <a16:creationId xmlns:a16="http://schemas.microsoft.com/office/drawing/2014/main" id="{696E327D-7612-5D0B-B249-D6E47DC423E9}"/>
+              </a:ext>
+            </a:extLst>
+          </p:cNvPr>
+          <p:cNvSpPr>
+            <a:spLocks noGrp="1"/>
+          </p:cNvSpPr>
+          <p:nvPr>
+            <p:ph idx="1"/>
+          </p:nvPr>
+        </p:nvSpPr>
+        <p:spPr/>
+        <p:txBody>
+          <a:bodyPr>
+            <a:normAutofit/>
+          </a:bodyPr>
+          <a:lstStyle/>
+          <a:p>
+            <a:r>
+              <a:rPr lang="en-GB" dirty="0"/>
+              <a:t>Think of a sports visualization you remember seeing. </a:t>
+            </a:r>
+          </a:p>
+          <a:p>
+            <a:pPr lvl="1"/>
+            <a:r>
+              <a:rPr lang="en-GB" dirty="0"/>
+              <a:t>A graphic during a broadcast </a:t>
+            </a:r>
+          </a:p>
+          <a:p>
+            <a:pPr lvl="1"/>
+            <a:r>
+              <a:rPr lang="en-GB" dirty="0"/>
+              <a:t>A chart on social media </a:t>
+            </a:r>
+          </a:p>
+          <a:p>
+            <a:pPr lvl="1"/>
+            <a:r>
+              <a:rPr lang="en-GB" dirty="0"/>
+              <a:t>A wearable or fitness-app visualization </a:t>
+            </a:r>
+          </a:p>
+          <a:p>
+            <a:endParaRPr lang="en-GB" dirty="0"/>
+          </a:p>
+          <a:p>
+            <a:r>
+              <a:rPr lang="en-GB" dirty="0"/>
+              <a:t>In groups, discuss:</a:t>
+            </a:r>
+          </a:p>
+          <a:p>
+            <a:pPr lvl="1"/>
+            <a:r>
+              <a:rPr lang="en-GB" dirty="0"/>
+              <a:t>Where did you see it? </a:t>
+            </a:r>
+          </a:p>
+          <a:p>
+            <a:pPr lvl="1"/>
+            <a:r>
+              <a:rPr lang="en-GB" dirty="0"/>
+              <a:t>What information did it communicate? </a:t>
+            </a:r>
+          </a:p>
+          <a:p>
+            <a:pPr lvl="1"/>
+            <a:r>
+              <a:rPr lang="en-GB" dirty="0"/>
+              <a:t>What specifically caught your attention? </a:t>
+            </a:r>
+          </a:p>
+          <a:p>
+            <a:pPr lvl="1"/>
+            <a:endParaRPr lang="en-US" dirty="0"/>
+          </a:p>
+        </p:txBody>
+      </p:sp>
+    </p:spTree>
+    <p:extLst>
+      <p:ext uri="{BB962C8B-B14F-4D97-AF65-F5344CB8AC3E}">
+        <p14:creationId xmlns:p14="http://schemas.microsoft.com/office/powerpoint/2010/main" val="3606385134"/>
+      </p:ext>
+    </p:extLst>
+  </p:cSld>
+  <p:clrMapOvr>
+    <a:masterClrMapping/>
+  </p:clrMapOvr>
+  <p:timing>
+    <p:tnLst>
+      <p:par>
+        <p:cTn id="1" dur="indefinite" restart="never" nodeType="tmRoot">
+          <p:childTnLst>
+            <p:seq concurrent="1" nextAc="seek">
+              <p:cTn id="2" dur="indefinite" nodeType="mainSeq">
+                <p:childTnLst>
+                  <p:par>
+                    <p:cTn id="3" fill="hold">
+                      <p:stCondLst>
+                        <p:cond delay="indefinite"/>
+                      </p:stCondLst>
+                      <p:childTnLst>
+                        <p:par>
+                          <p:cTn id="4" fill="hold">
+                            <p:stCondLst>
+                              <p:cond delay="0"/>
+                            </p:stCondLst>
+                            <p:childTnLst>
+                              <p:par>
+                                <p:cTn id="5" presetID="1" presetClass="entr" presetSubtype="0" fill="hold" grpId="0" nodeType="clickEffect">
+                                  <p:stCondLst>
+                                    <p:cond delay="0"/>
+                                  </p:stCondLst>
+                                  <p:childTnLst>
+                                    <p:set>
+                                      <p:cBhvr>
+                                        <p:cTn id="6" dur="1" fill="hold">
+                                          <p:stCondLst>
+                                            <p:cond delay="0"/>
+                                          </p:stCondLst>
+                                        </p:cTn>
+                                        <p:tgtEl>
+                                          <p:spTgt spid="3">
+                                            <p:txEl>
+                                              <p:pRg st="0" end="0"/>
+                                            </p:txEl>
+                                          </p:spTgt>
+                                        </p:tgtEl>
+                                        <p:attrNameLst>
+                                          <p:attrName>style.visibility</p:attrName>
+                                        </p:attrNameLst>
+                                      </p:cBhvr>
+                                      <p:to>
+                                        <p:strVal val="visible"/>
+                                      </p:to>
+                                    </p:set>
+                                  </p:childTnLst>
+                                </p:cTn>
+                              </p:par>
+                              <p:par>
+                                <p:cTn id="7" presetID="1" presetClass="entr" presetSubtype="0" fill="hold" grpId="0" nodeType="withEffect">
+                                  <p:stCondLst>
+                                    <p:cond delay="0"/>
+                                  </p:stCondLst>
+                                  <p:childTnLst>
+                                    <p:set>
+                                      <p:cBhvr>
+                                        <p:cTn id="8" dur="1" fill="hold">
+                                          <p:stCondLst>
+                                            <p:cond delay="0"/>
+                                          </p:stCondLst>
+                                        </p:cTn>
+                                        <p:tgtEl>
+                                          <p:spTgt spid="3">
+                                            <p:txEl>
+                                              <p:pRg st="1" end="1"/>
+                                            </p:txEl>
+                                          </p:spTgt>
+                                        </p:tgtEl>
+                                        <p:attrNameLst>
+                                          <p:attrName>style.visibility</p:attrName>
+                                        </p:attrNameLst>
+                                      </p:cBhvr>
+                                      <p:to>
+                                        <p:strVal val="visible"/>
+                                      </p:to>
+                                    </p:set>
+                                  </p:childTnLst>
+                                </p:cTn>
+                              </p:par>
+                              <p:par>
+                                <p:cTn id="9" presetID="1" presetClass="entr" presetSubtype="0" fill="hold" grpId="0" nodeType="withEffect">
+                                  <p:stCondLst>
+                                    <p:cond delay="0"/>
+                                  </p:stCondLst>
+                                  <p:childTnLst>
+                                    <p:set>
+                                      <p:cBhvr>
+                                        <p:cTn id="10" dur="1" fill="hold">
+                                          <p:stCondLst>
+                                            <p:cond delay="0"/>
+                                          </p:stCondLst>
+                                        </p:cTn>
+                                        <p:tgtEl>
+                                          <p:spTgt spid="3">
+                                            <p:txEl>
+                                              <p:pRg st="2" end="2"/>
+                                            </p:txEl>
+                                          </p:spTgt>
+                                        </p:tgtEl>
+                                        <p:attrNameLst>
+                                          <p:attrName>style.visibility</p:attrName>
+                                        </p:attrNameLst>
+                                      </p:cBhvr>
+                                      <p:to>
+                                        <p:strVal val="visible"/>
+                                      </p:to>
+                                    </p:set>
+                                  </p:childTnLst>
+                                </p:cTn>
+                              </p:par>
+                              <p:par>
+                                <p:cTn id="11" presetID="1" presetClass="entr" presetSubtype="0" fill="hold" grpId="0" nodeType="withEffect">
+                                  <p:stCondLst>
+                                    <p:cond delay="0"/>
+                                  </p:stCondLst>
+                                  <p:childTnLst>
+                                    <p:set>
+                                      <p:cBhvr>
+                                        <p:cTn id="12" dur="1" fill="hold">
+                                          <p:stCondLst>
+                                            <p:cond delay="0"/>
+                                          </p:stCondLst>
+                                        </p:cTn>
+                                        <p:tgtEl>
+                                          <p:spTgt spid="3">
+                                            <p:txEl>
+                                              <p:pRg st="3" end="3"/>
+                                            </p:txEl>
+                                          </p:spTgt>
+                                        </p:tgtEl>
+                                        <p:attrNameLst>
+                                          <p:attrName>style.visibility</p:attrName>
+                                        </p:attrNameLst>
+                                      </p:cBhvr>
+                                      <p:to>
+                                        <p:strVal val="visible"/>
+                                      </p:to>
+                                    </p:set>
+                                  </p:childTnLst>
+                                </p:cTn>
+                              </p:par>
+                            </p:childTnLst>
+                          </p:cTn>
+                        </p:par>
+                      </p:childTnLst>
+                    </p:cTn>
+                  </p:par>
+                  <p:par>
+                    <p:cTn id="13" fill="hold">
+                      <p:stCondLst>
+                        <p:cond delay="indefinite"/>
+                      </p:stCondLst>
+                      <p:childTnLst>
+                        <p:par>
+                          <p:cTn id="14" fill="hold">
+                            <p:stCondLst>
+                              <p:cond delay="0"/>
+                            </p:stCondLst>
+                            <p:childTnLst>
+                              <p:par>
+                                <p:cTn id="15" presetID="1" presetClass="entr" presetSubtype="0" fill="hold" grpId="0" nodeType="clickEffect">
+                                  <p:stCondLst>
+                                    <p:cond delay="0"/>
+                                  </p:stCondLst>
+                                  <p:childTnLst>
+                                    <p:set>
+                                      <p:cBhvr>
+                                        <p:cTn id="16" dur="1" fill="hold">
+                                          <p:stCondLst>
+                                            <p:cond delay="0"/>
+                                          </p:stCondLst>
+                                        </p:cTn>
+                                        <p:tgtEl>
+                                          <p:spTgt spid="3">
+                                            <p:txEl>
+                                              <p:pRg st="5" end="5"/>
+                                            </p:txEl>
+                                          </p:spTgt>
+                                        </p:tgtEl>
+                                        <p:attrNameLst>
+                                          <p:attrName>style.visibility</p:attrName>
+                                        </p:attrNameLst>
+                                      </p:cBhvr>
+                                      <p:to>
+                                        <p:strVal val="visible"/>
+                                      </p:to>
+                                    </p:set>
+                                  </p:childTnLst>
+                                </p:cTn>
+                              </p:par>
+                              <p:par>
+                                <p:cTn id="17" presetID="1" presetClass="entr" presetSubtype="0" fill="hold" grpId="0" nodeType="withEffect">
+                                  <p:stCondLst>
+                                    <p:cond delay="0"/>
+                                  </p:stCondLst>
+                                  <p:childTnLst>
+                                    <p:set>
+                                      <p:cBhvr>
+                                        <p:cTn id="18" dur="1" fill="hold">
+                                          <p:stCondLst>
+                                            <p:cond delay="0"/>
+                                          </p:stCondLst>
+                                        </p:cTn>
+                                        <p:tgtEl>
+                                          <p:spTgt spid="3">
+                                            <p:txEl>
+                                              <p:pRg st="6" end="6"/>
+                                            </p:txEl>
+                                          </p:spTgt>
+                                        </p:tgtEl>
+                                        <p:attrNameLst>
+                                          <p:attrName>style.visibility</p:attrName>
+                                        </p:attrNameLst>
+                                      </p:cBhvr>
+                                      <p:to>
+                                        <p:strVal val="visible"/>
+                                      </p:to>
+                                    </p:set>
+                                  </p:childTnLst>
+                                </p:cTn>
+                              </p:par>
+                              <p:par>
+                                <p:cTn id="19" presetID="1" presetClass="entr" presetSubtype="0" fill="hold" grpId="0" nodeType="withEffect">
+                                  <p:stCondLst>
+                                    <p:cond delay="0"/>
+                                  </p:stCondLst>
+                                  <p:childTnLst>
+                                    <p:set>
+                                      <p:cBhvr>
+                                        <p:cTn id="20" dur="1" fill="hold">
+                                          <p:stCondLst>
+                                            <p:cond delay="0"/>
+                                          </p:stCondLst>
+                                        </p:cTn>
+                                        <p:tgtEl>
+                                          <p:spTgt spid="3">
+                                            <p:txEl>
+                                              <p:pRg st="7" end="7"/>
+                                            </p:txEl>
+                                          </p:spTgt>
+                                        </p:tgtEl>
+                                        <p:attrNameLst>
+                                          <p:attrName>style.visibility</p:attrName>
+                                        </p:attrNameLst>
+                                      </p:cBhvr>
+                                      <p:to>
+                                        <p:strVal val="visible"/>
+                                      </p:to>
+                                    </p:set>
+                                  </p:childTnLst>
+                                </p:cTn>
+                              </p:par>
+                              <p:par>
+                                <p:cTn id="21" presetID="1" presetClass="entr" presetSubtype="0" fill="hold" grpId="0" nodeType="withEffect">
+                                  <p:stCondLst>
+                                    <p:cond delay="0"/>
+                                  </p:stCondLst>
+                                  <p:childTnLst>
+                                    <p:set>
+                                      <p:cBhvr>
+                                        <p:cTn id="22" dur="1" fill="hold">
+                                          <p:stCondLst>
+                                            <p:cond delay="0"/>
+                                          </p:stCondLst>
+                                        </p:cTn>
+                                        <p:tgtEl>
+                                          <p:spTgt spid="3">
+                                            <p:txEl>
+                                              <p:pRg st="8" end="8"/>
+                                            </p:txEl>
+                                          </p:spTgt>
+                                        </p:tgtEl>
+                                        <p:attrNameLst>
+                                          <p:attrName>style.visibility</p:attrName>
+                                        </p:attrNameLst>
+                                      </p:cBhvr>
+                                      <p:to>
+                                        <p:strVal val="visible"/>
+                                      </p:to>
+                                    </p:set>
+                                  </p:childTnLst>
+                                </p:cTn>
+                              </p:par>
+                            </p:childTnLst>
+                          </p:cTn>
+                        </p:par>
+                      </p:childTnLst>
+                    </p:cTn>
+                  </p:par>
+                </p:childTnLst>
+              </p:cTn>
+              <p:prevCondLst>
+                <p:cond evt="onPrev" delay="0">
+                  <p:tgtEl>
+                    <p:sldTgt/>
+                  </p:tgtEl>
+                </p:cond>
+              </p:prevCondLst>
+              <p:nextCondLst>
+                <p:cond evt="onNext" delay="0">
+                  <p:tgtEl>
+                    <p:sldTgt/>
+                  </p:tgtEl>
+                </p:cond>
+              </p:nextCondLst>
+            </p:seq>
+          </p:childTnLst>
+        </p:cTn>
+      </p:par>
+    </p:tnLst>
+    <p:bldLst>
+      <p:bldP spid="3" grpId="0" build="p"/>
+    </p:bldLst>
+  </p:timing>
+</p:sld>
+</file>
+
+<file path=ppt/slides/slide5.xml><?xml version="1.0" encoding="utf-8"?>
+<p:sld xmlns:a="http://schemas.openxmlformats.org/drawingml/2006/main" xmlns:r="http://schemas.openxmlformats.org/officeDocument/2006/relationships" xmlns:p="http://schemas.openxmlformats.org/presentationml/2006/main">
+  <p:cSld>
+    <p:spTree>
+      <p:nvGrpSpPr>
+        <p:cNvPr id="1" name=""/>
+        <p:cNvGrpSpPr/>
+        <p:nvPr/>
+      </p:nvGrpSpPr>
+      <p:grpSpPr>
+        <a:xfrm>
+          <a:off x="0" y="0"/>
+          <a:ext cx="0" cy="0"/>
+          <a:chOff x="0" y="0"/>
+          <a:chExt cx="0" cy="0"/>
+        </a:xfrm>
+      </p:grpSpPr>
+      <p:sp>
+        <p:nvSpPr>
+          <p:cNvPr id="2" name="Title 1">
+            <a:extLst>
+              <a:ext uri="{FF2B5EF4-FFF2-40B4-BE49-F238E27FC236}">
                 <a16:creationId xmlns:a16="http://schemas.microsoft.com/office/drawing/2014/main" id="{0D423A51-81C3-C6F5-2019-D433E0EFBE9C}"/>
               </a:ext>
             </a:extLst>
@@ -15667,7 +19155,7 @@
 </p:sld>
 </file>
 
-<file path=ppt/slides/slide5.xml><?xml version="1.0" encoding="utf-8"?>
+<file path=ppt/slides/slide6.xml><?xml version="1.0" encoding="utf-8"?>
 <p:sld xmlns:a="http://schemas.openxmlformats.org/drawingml/2006/main" xmlns:r="http://schemas.openxmlformats.org/officeDocument/2006/relationships" xmlns:p="http://schemas.openxmlformats.org/presentationml/2006/main">
   <p:cSld>
     <p:spTree>
@@ -15784,7 +19272,7 @@
             <a:fld id="{45C00377-489B-40EC-B059-26BDDD2E89B9}" type="slidenum">
               <a:rPr lang="en-US" smtClean="0"/>
               <a:pPr/>
-              <a:t>5</a:t>
+              <a:t>6</a:t>
             </a:fld>
             <a:endParaRPr lang="en-US" dirty="0"/>
           </a:p>
@@ -15803,7 +19291,7 @@
 </p:sld>
 </file>
 
-<file path=ppt/slides/slide6.xml><?xml version="1.0" encoding="utf-8"?>
+<file path=ppt/slides/slide7.xml><?xml version="1.0" encoding="utf-8"?>
 <p:sld xmlns:a="http://schemas.openxmlformats.org/drawingml/2006/main" xmlns:r="http://schemas.openxmlformats.org/officeDocument/2006/relationships" xmlns:p="http://schemas.openxmlformats.org/presentationml/2006/main">
   <p:cSld>
     <p:spTree>
@@ -15873,7 +19361,7 @@
             <a:fld id="{45C00377-489B-40EC-B059-26BDDD2E89B9}" type="slidenum">
               <a:rPr lang="en-US" smtClean="0"/>
               <a:pPr/>
-              <a:t>6</a:t>
+              <a:t>7</a:t>
             </a:fld>
             <a:endParaRPr lang="en-US" dirty="0"/>
           </a:p>
@@ -19948,7 +23436,7 @@
 </p:sld>
 </file>
 
-<file path=ppt/slides/slide7.xml><?xml version="1.0" encoding="utf-8"?>
+<file path=ppt/slides/slide8.xml><?xml version="1.0" encoding="utf-8"?>
 <p:sld xmlns:a="http://schemas.openxmlformats.org/drawingml/2006/main" xmlns:r="http://schemas.openxmlformats.org/officeDocument/2006/relationships" xmlns:p="http://schemas.openxmlformats.org/presentationml/2006/main">
   <p:cSld>
     <p:spTree>
@@ -20024,7 +23512,7 @@
             <a:fld id="{45C00377-489B-40EC-B059-26BDDD2E89B9}" type="slidenum">
               <a:rPr lang="en-US" smtClean="0"/>
               <a:pPr/>
-              <a:t>7</a:t>
+              <a:t>8</a:t>
             </a:fld>
             <a:endParaRPr lang="en-US" dirty="0"/>
           </a:p>
@@ -20073,7 +23561,7 @@
 </p:sld>
 </file>
 
-<file path=ppt/slides/slide8.xml><?xml version="1.0" encoding="utf-8"?>
+<file path=ppt/slides/slide9.xml><?xml version="1.0" encoding="utf-8"?>
 <p:sld xmlns:a="http://schemas.openxmlformats.org/drawingml/2006/main" xmlns:r="http://schemas.openxmlformats.org/officeDocument/2006/relationships" xmlns:p="http://schemas.openxmlformats.org/presentationml/2006/main">
   <p:cSld>
     <p:spTree>
@@ -20149,7 +23637,7 @@
             <a:fld id="{45C00377-489B-40EC-B059-26BDDD2E89B9}" type="slidenum">
               <a:rPr lang="en-US" smtClean="0"/>
               <a:pPr/>
-              <a:t>8</a:t>
+              <a:t>9</a:t>
             </a:fld>
             <a:endParaRPr lang="en-US" dirty="0"/>
           </a:p>
@@ -20189,133 +23677,6 @@
     <p:extLst>
       <p:ext uri="{BB962C8B-B14F-4D97-AF65-F5344CB8AC3E}">
         <p14:creationId xmlns:p14="http://schemas.microsoft.com/office/powerpoint/2010/main" val="2728894213"/>
-      </p:ext>
-    </p:extLst>
-  </p:cSld>
-  <p:clrMapOvr>
-    <a:masterClrMapping/>
-  </p:clrMapOvr>
-</p:sld>
-</file>
-
-<file path=ppt/slides/slide9.xml><?xml version="1.0" encoding="utf-8"?>
-<p:sld xmlns:a="http://schemas.openxmlformats.org/drawingml/2006/main" xmlns:r="http://schemas.openxmlformats.org/officeDocument/2006/relationships" xmlns:p="http://schemas.openxmlformats.org/presentationml/2006/main">
-  <p:cSld>
-    <p:spTree>
-      <p:nvGrpSpPr>
-        <p:cNvPr id="1" name="">
-          <a:extLst>
-            <a:ext uri="{FF2B5EF4-FFF2-40B4-BE49-F238E27FC236}">
-              <a16:creationId xmlns:a16="http://schemas.microsoft.com/office/drawing/2014/main" id="{8A004D83-43AE-8A70-7AB1-4981C0033EED}"/>
-            </a:ext>
-          </a:extLst>
-        </p:cNvPr>
-        <p:cNvGrpSpPr/>
-        <p:nvPr/>
-      </p:nvGrpSpPr>
-      <p:grpSpPr>
-        <a:xfrm>
-          <a:off x="0" y="0"/>
-          <a:ext cx="0" cy="0"/>
-          <a:chOff x="0" y="0"/>
-          <a:chExt cx="0" cy="0"/>
-        </a:xfrm>
-      </p:grpSpPr>
-      <p:sp>
-        <p:nvSpPr>
-          <p:cNvPr id="2" name="Title 1">
-            <a:extLst>
-              <a:ext uri="{FF2B5EF4-FFF2-40B4-BE49-F238E27FC236}">
-                <a16:creationId xmlns:a16="http://schemas.microsoft.com/office/drawing/2014/main" id="{5AC369D3-5EB4-695B-FE4E-1FD62462DFE7}"/>
-              </a:ext>
-            </a:extLst>
-          </p:cNvPr>
-          <p:cNvSpPr>
-            <a:spLocks noGrp="1"/>
-          </p:cNvSpPr>
-          <p:nvPr>
-            <p:ph type="title"/>
-          </p:nvPr>
-        </p:nvSpPr>
-        <p:spPr/>
-        <p:txBody>
-          <a:bodyPr/>
-          <a:lstStyle/>
-          <a:p>
-            <a:r>
-              <a:rPr lang="en-GB" dirty="0"/>
-              <a:t>Visual representation of values</a:t>
-            </a:r>
-            <a:endParaRPr lang="en-US" dirty="0"/>
-          </a:p>
-        </p:txBody>
-      </p:sp>
-      <p:sp>
-        <p:nvSpPr>
-          <p:cNvPr id="4" name="Slide Number Placeholder 3">
-            <a:extLst>
-              <a:ext uri="{FF2B5EF4-FFF2-40B4-BE49-F238E27FC236}">
-                <a16:creationId xmlns:a16="http://schemas.microsoft.com/office/drawing/2014/main" id="{32670A0F-282D-98B9-95C5-5B1C40F3FAC5}"/>
-              </a:ext>
-            </a:extLst>
-          </p:cNvPr>
-          <p:cNvSpPr>
-            <a:spLocks noGrp="1"/>
-          </p:cNvSpPr>
-          <p:nvPr>
-            <p:ph type="sldNum" sz="quarter" idx="12"/>
-          </p:nvPr>
-        </p:nvSpPr>
-        <p:spPr/>
-        <p:txBody>
-          <a:bodyPr/>
-          <a:lstStyle/>
-          <a:p>
-            <a:fld id="{45C00377-489B-40EC-B059-26BDDD2E89B9}" type="slidenum">
-              <a:rPr lang="en-US" smtClean="0"/>
-              <a:pPr/>
-              <a:t>9</a:t>
-            </a:fld>
-            <a:endParaRPr lang="en-US" dirty="0"/>
-          </a:p>
-        </p:txBody>
-      </p:sp>
-      <p:pic>
-        <p:nvPicPr>
-          <p:cNvPr id="6" name="Content Placeholder 5">
-            <a:extLst>
-              <a:ext uri="{FF2B5EF4-FFF2-40B4-BE49-F238E27FC236}">
-                <a16:creationId xmlns:a16="http://schemas.microsoft.com/office/drawing/2014/main" id="{18066627-6F26-2DD0-1358-0F2D745E7CFE}"/>
-              </a:ext>
-            </a:extLst>
-          </p:cNvPr>
-          <p:cNvPicPr>
-            <a:picLocks noGrp="1" noChangeAspect="1"/>
-          </p:cNvPicPr>
-          <p:nvPr>
-            <p:ph idx="1"/>
-          </p:nvPr>
-        </p:nvPicPr>
-        <p:blipFill>
-          <a:blip r:embed="rId2"/>
-          <a:stretch>
-            <a:fillRect/>
-          </a:stretch>
-        </p:blipFill>
-        <p:spPr>
-          <a:xfrm>
-            <a:off x="3171685" y="1789378"/>
-            <a:ext cx="5848630" cy="4254500"/>
-          </a:xfrm>
-          <a:prstGeom prst="rect">
-            <a:avLst/>
-          </a:prstGeom>
-        </p:spPr>
-      </p:pic>
-    </p:spTree>
-    <p:extLst>
-      <p:ext uri="{BB962C8B-B14F-4D97-AF65-F5344CB8AC3E}">
-        <p14:creationId xmlns:p14="http://schemas.microsoft.com/office/powerpoint/2010/main" val="1087993033"/>
       </p:ext>
     </p:extLst>
   </p:cSld>
